--- a/2025/LEC/08 работа с индустриальными ВР.pptx
+++ b/2025/LEC/08 работа с индустриальными ВР.pptx
@@ -4,9 +4,22 @@
   <p:sldMasterIdLst>
     <p:sldMasterId id="2147483648" r:id="rId1"/>
   </p:sldMasterIdLst>
+  <p:notesMasterIdLst>
+    <p:notesMasterId r:id="rId14"/>
+  </p:notesMasterIdLst>
   <p:sldIdLst>
     <p:sldId id="256" r:id="rId2"/>
     <p:sldId id="257" r:id="rId3"/>
+    <p:sldId id="258" r:id="rId4"/>
+    <p:sldId id="259" r:id="rId5"/>
+    <p:sldId id="260" r:id="rId6"/>
+    <p:sldId id="263" r:id="rId7"/>
+    <p:sldId id="261" r:id="rId8"/>
+    <p:sldId id="266" r:id="rId9"/>
+    <p:sldId id="262" r:id="rId10"/>
+    <p:sldId id="264" r:id="rId11"/>
+    <p:sldId id="267" r:id="rId12"/>
+    <p:sldId id="265" r:id="rId13"/>
   </p:sldIdLst>
   <p:sldSz cx="12192000" cy="6858000"/>
   <p:notesSz cx="6858000" cy="9144000"/>
@@ -105,7 +118,984 @@
       </a:defRPr>
     </a:lvl9pPr>
   </p:defaultTextStyle>
+  <p:extLst>
+    <p:ext uri="{EFAFB233-063F-42B5-8137-9DF3F51BA10A}">
+      <p15:sldGuideLst xmlns:p15="http://schemas.microsoft.com/office/powerpoint/2012/main"/>
+    </p:ext>
+  </p:extLst>
 </p:presentation>
+</file>
+
+<file path=ppt/notesMasters/notesMaster1.xml><?xml version="1.0" encoding="utf-8"?>
+<p:notesMaster xmlns:a="http://schemas.openxmlformats.org/drawingml/2006/main" xmlns:r="http://schemas.openxmlformats.org/officeDocument/2006/relationships" xmlns:p="http://schemas.openxmlformats.org/presentationml/2006/main">
+  <p:cSld>
+    <p:bg>
+      <p:bgRef idx="1001">
+        <a:schemeClr val="bg1"/>
+      </p:bgRef>
+    </p:bg>
+    <p:spTree>
+      <p:nvGrpSpPr>
+        <p:cNvPr id="1" name=""/>
+        <p:cNvGrpSpPr/>
+        <p:nvPr/>
+      </p:nvGrpSpPr>
+      <p:grpSpPr>
+        <a:xfrm>
+          <a:off x="0" y="0"/>
+          <a:ext cx="0" cy="0"/>
+          <a:chOff x="0" y="0"/>
+          <a:chExt cx="0" cy="0"/>
+        </a:xfrm>
+      </p:grpSpPr>
+      <p:sp>
+        <p:nvSpPr>
+          <p:cNvPr id="2" name="Верхний колонтитул 1"/>
+          <p:cNvSpPr>
+            <a:spLocks noGrp="1"/>
+          </p:cNvSpPr>
+          <p:nvPr>
+            <p:ph type="hdr" sz="quarter"/>
+          </p:nvPr>
+        </p:nvSpPr>
+        <p:spPr>
+          <a:xfrm>
+            <a:off x="0" y="0"/>
+            <a:ext cx="2971800" cy="458788"/>
+          </a:xfrm>
+          <a:prstGeom prst="rect">
+            <a:avLst/>
+          </a:prstGeom>
+        </p:spPr>
+        <p:txBody>
+          <a:bodyPr vert="horz" lIns="91440" tIns="45720" rIns="91440" bIns="45720" rtlCol="0"/>
+          <a:lstStyle>
+            <a:lvl1pPr algn="l">
+              <a:defRPr sz="1200"/>
+            </a:lvl1pPr>
+          </a:lstStyle>
+          <a:p>
+            <a:endParaRPr lang="ru-RU"/>
+          </a:p>
+        </p:txBody>
+      </p:sp>
+      <p:sp>
+        <p:nvSpPr>
+          <p:cNvPr id="3" name="Дата 2"/>
+          <p:cNvSpPr>
+            <a:spLocks noGrp="1"/>
+          </p:cNvSpPr>
+          <p:nvPr>
+            <p:ph type="dt" idx="1"/>
+          </p:nvPr>
+        </p:nvSpPr>
+        <p:spPr>
+          <a:xfrm>
+            <a:off x="3884613" y="0"/>
+            <a:ext cx="2971800" cy="458788"/>
+          </a:xfrm>
+          <a:prstGeom prst="rect">
+            <a:avLst/>
+          </a:prstGeom>
+        </p:spPr>
+        <p:txBody>
+          <a:bodyPr vert="horz" lIns="91440" tIns="45720" rIns="91440" bIns="45720" rtlCol="0"/>
+          <a:lstStyle>
+            <a:lvl1pPr algn="r">
+              <a:defRPr sz="1200"/>
+            </a:lvl1pPr>
+          </a:lstStyle>
+          <a:p>
+            <a:fld id="{4D261137-3209-437C-83DC-F965E582BD8E}" type="datetimeFigureOut">
+              <a:rPr lang="ru-RU" smtClean="0"/>
+              <a:t>29.08.2025</a:t>
+            </a:fld>
+            <a:endParaRPr lang="ru-RU"/>
+          </a:p>
+        </p:txBody>
+      </p:sp>
+      <p:sp>
+        <p:nvSpPr>
+          <p:cNvPr id="4" name="Образ слайда 3"/>
+          <p:cNvSpPr>
+            <a:spLocks noGrp="1" noRot="1" noChangeAspect="1"/>
+          </p:cNvSpPr>
+          <p:nvPr>
+            <p:ph type="sldImg" idx="2"/>
+          </p:nvPr>
+        </p:nvSpPr>
+        <p:spPr>
+          <a:xfrm>
+            <a:off x="685800" y="1143000"/>
+            <a:ext cx="5486400" cy="3086100"/>
+          </a:xfrm>
+          <a:prstGeom prst="rect">
+            <a:avLst/>
+          </a:prstGeom>
+          <a:noFill/>
+          <a:ln w="12700">
+            <a:solidFill>
+              <a:prstClr val="black"/>
+            </a:solidFill>
+          </a:ln>
+        </p:spPr>
+        <p:txBody>
+          <a:bodyPr vert="horz" lIns="91440" tIns="45720" rIns="91440" bIns="45720" rtlCol="0" anchor="ctr"/>
+          <a:lstStyle/>
+          <a:p>
+            <a:endParaRPr lang="ru-RU"/>
+          </a:p>
+        </p:txBody>
+      </p:sp>
+      <p:sp>
+        <p:nvSpPr>
+          <p:cNvPr id="5" name="Заметки 4"/>
+          <p:cNvSpPr>
+            <a:spLocks noGrp="1"/>
+          </p:cNvSpPr>
+          <p:nvPr>
+            <p:ph type="body" sz="quarter" idx="3"/>
+          </p:nvPr>
+        </p:nvSpPr>
+        <p:spPr>
+          <a:xfrm>
+            <a:off x="685800" y="4400550"/>
+            <a:ext cx="5486400" cy="3600450"/>
+          </a:xfrm>
+          <a:prstGeom prst="rect">
+            <a:avLst/>
+          </a:prstGeom>
+        </p:spPr>
+        <p:txBody>
+          <a:bodyPr vert="horz" lIns="91440" tIns="45720" rIns="91440" bIns="45720" rtlCol="0"/>
+          <a:lstStyle/>
+          <a:p>
+            <a:pPr lvl="0"/>
+            <a:r>
+              <a:rPr lang="ru-RU" smtClean="0"/>
+              <a:t>Образец текста</a:t>
+            </a:r>
+          </a:p>
+          <a:p>
+            <a:pPr lvl="1"/>
+            <a:r>
+              <a:rPr lang="ru-RU" smtClean="0"/>
+              <a:t>Второй уровень</a:t>
+            </a:r>
+          </a:p>
+          <a:p>
+            <a:pPr lvl="2"/>
+            <a:r>
+              <a:rPr lang="ru-RU" smtClean="0"/>
+              <a:t>Третий уровень</a:t>
+            </a:r>
+          </a:p>
+          <a:p>
+            <a:pPr lvl="3"/>
+            <a:r>
+              <a:rPr lang="ru-RU" smtClean="0"/>
+              <a:t>Четвертый уровень</a:t>
+            </a:r>
+          </a:p>
+          <a:p>
+            <a:pPr lvl="4"/>
+            <a:r>
+              <a:rPr lang="ru-RU" smtClean="0"/>
+              <a:t>Пятый уровень</a:t>
+            </a:r>
+            <a:endParaRPr lang="ru-RU"/>
+          </a:p>
+        </p:txBody>
+      </p:sp>
+      <p:sp>
+        <p:nvSpPr>
+          <p:cNvPr id="6" name="Нижний колонтитул 5"/>
+          <p:cNvSpPr>
+            <a:spLocks noGrp="1"/>
+          </p:cNvSpPr>
+          <p:nvPr>
+            <p:ph type="ftr" sz="quarter" idx="4"/>
+          </p:nvPr>
+        </p:nvSpPr>
+        <p:spPr>
+          <a:xfrm>
+            <a:off x="0" y="8685213"/>
+            <a:ext cx="2971800" cy="458787"/>
+          </a:xfrm>
+          <a:prstGeom prst="rect">
+            <a:avLst/>
+          </a:prstGeom>
+        </p:spPr>
+        <p:txBody>
+          <a:bodyPr vert="horz" lIns="91440" tIns="45720" rIns="91440" bIns="45720" rtlCol="0" anchor="b"/>
+          <a:lstStyle>
+            <a:lvl1pPr algn="l">
+              <a:defRPr sz="1200"/>
+            </a:lvl1pPr>
+          </a:lstStyle>
+          <a:p>
+            <a:endParaRPr lang="ru-RU"/>
+          </a:p>
+        </p:txBody>
+      </p:sp>
+      <p:sp>
+        <p:nvSpPr>
+          <p:cNvPr id="7" name="Номер слайда 6"/>
+          <p:cNvSpPr>
+            <a:spLocks noGrp="1"/>
+          </p:cNvSpPr>
+          <p:nvPr>
+            <p:ph type="sldNum" sz="quarter" idx="5"/>
+          </p:nvPr>
+        </p:nvSpPr>
+        <p:spPr>
+          <a:xfrm>
+            <a:off x="3884613" y="8685213"/>
+            <a:ext cx="2971800" cy="458787"/>
+          </a:xfrm>
+          <a:prstGeom prst="rect">
+            <a:avLst/>
+          </a:prstGeom>
+        </p:spPr>
+        <p:txBody>
+          <a:bodyPr vert="horz" lIns="91440" tIns="45720" rIns="91440" bIns="45720" rtlCol="0" anchor="b"/>
+          <a:lstStyle>
+            <a:lvl1pPr algn="r">
+              <a:defRPr sz="1200"/>
+            </a:lvl1pPr>
+          </a:lstStyle>
+          <a:p>
+            <a:fld id="{3FA3954E-70F5-4A80-9064-71FC5C1DFC45}" type="slidenum">
+              <a:rPr lang="ru-RU" smtClean="0"/>
+              <a:t>‹#›</a:t>
+            </a:fld>
+            <a:endParaRPr lang="ru-RU"/>
+          </a:p>
+        </p:txBody>
+      </p:sp>
+    </p:spTree>
+    <p:extLst>
+      <p:ext uri="{BB962C8B-B14F-4D97-AF65-F5344CB8AC3E}">
+        <p14:creationId xmlns:p14="http://schemas.microsoft.com/office/powerpoint/2010/main" val="645645694"/>
+      </p:ext>
+    </p:extLst>
+  </p:cSld>
+  <p:clrMap bg1="lt1" tx1="dk1" bg2="lt2" tx2="dk2" accent1="accent1" accent2="accent2" accent3="accent3" accent4="accent4" accent5="accent5" accent6="accent6" hlink="hlink" folHlink="folHlink"/>
+  <p:notesStyle>
+    <a:lvl1pPr marL="0" algn="l" defTabSz="914400" rtl="0" eaLnBrk="1" latinLnBrk="0" hangingPunct="1">
+      <a:defRPr sz="1200" kern="1200">
+        <a:solidFill>
+          <a:schemeClr val="tx1"/>
+        </a:solidFill>
+        <a:latin typeface="+mn-lt"/>
+        <a:ea typeface="+mn-ea"/>
+        <a:cs typeface="+mn-cs"/>
+      </a:defRPr>
+    </a:lvl1pPr>
+    <a:lvl2pPr marL="457200" algn="l" defTabSz="914400" rtl="0" eaLnBrk="1" latinLnBrk="0" hangingPunct="1">
+      <a:defRPr sz="1200" kern="1200">
+        <a:solidFill>
+          <a:schemeClr val="tx1"/>
+        </a:solidFill>
+        <a:latin typeface="+mn-lt"/>
+        <a:ea typeface="+mn-ea"/>
+        <a:cs typeface="+mn-cs"/>
+      </a:defRPr>
+    </a:lvl2pPr>
+    <a:lvl3pPr marL="914400" algn="l" defTabSz="914400" rtl="0" eaLnBrk="1" latinLnBrk="0" hangingPunct="1">
+      <a:defRPr sz="1200" kern="1200">
+        <a:solidFill>
+          <a:schemeClr val="tx1"/>
+        </a:solidFill>
+        <a:latin typeface="+mn-lt"/>
+        <a:ea typeface="+mn-ea"/>
+        <a:cs typeface="+mn-cs"/>
+      </a:defRPr>
+    </a:lvl3pPr>
+    <a:lvl4pPr marL="1371600" algn="l" defTabSz="914400" rtl="0" eaLnBrk="1" latinLnBrk="0" hangingPunct="1">
+      <a:defRPr sz="1200" kern="1200">
+        <a:solidFill>
+          <a:schemeClr val="tx1"/>
+        </a:solidFill>
+        <a:latin typeface="+mn-lt"/>
+        <a:ea typeface="+mn-ea"/>
+        <a:cs typeface="+mn-cs"/>
+      </a:defRPr>
+    </a:lvl4pPr>
+    <a:lvl5pPr marL="1828800" algn="l" defTabSz="914400" rtl="0" eaLnBrk="1" latinLnBrk="0" hangingPunct="1">
+      <a:defRPr sz="1200" kern="1200">
+        <a:solidFill>
+          <a:schemeClr val="tx1"/>
+        </a:solidFill>
+        <a:latin typeface="+mn-lt"/>
+        <a:ea typeface="+mn-ea"/>
+        <a:cs typeface="+mn-cs"/>
+      </a:defRPr>
+    </a:lvl5pPr>
+    <a:lvl6pPr marL="2286000" algn="l" defTabSz="914400" rtl="0" eaLnBrk="1" latinLnBrk="0" hangingPunct="1">
+      <a:defRPr sz="1200" kern="1200">
+        <a:solidFill>
+          <a:schemeClr val="tx1"/>
+        </a:solidFill>
+        <a:latin typeface="+mn-lt"/>
+        <a:ea typeface="+mn-ea"/>
+        <a:cs typeface="+mn-cs"/>
+      </a:defRPr>
+    </a:lvl6pPr>
+    <a:lvl7pPr marL="2743200" algn="l" defTabSz="914400" rtl="0" eaLnBrk="1" latinLnBrk="0" hangingPunct="1">
+      <a:defRPr sz="1200" kern="1200">
+        <a:solidFill>
+          <a:schemeClr val="tx1"/>
+        </a:solidFill>
+        <a:latin typeface="+mn-lt"/>
+        <a:ea typeface="+mn-ea"/>
+        <a:cs typeface="+mn-cs"/>
+      </a:defRPr>
+    </a:lvl7pPr>
+    <a:lvl8pPr marL="3200400" algn="l" defTabSz="914400" rtl="0" eaLnBrk="1" latinLnBrk="0" hangingPunct="1">
+      <a:defRPr sz="1200" kern="1200">
+        <a:solidFill>
+          <a:schemeClr val="tx1"/>
+        </a:solidFill>
+        <a:latin typeface="+mn-lt"/>
+        <a:ea typeface="+mn-ea"/>
+        <a:cs typeface="+mn-cs"/>
+      </a:defRPr>
+    </a:lvl8pPr>
+    <a:lvl9pPr marL="3657600" algn="l" defTabSz="914400" rtl="0" eaLnBrk="1" latinLnBrk="0" hangingPunct="1">
+      <a:defRPr sz="1200" kern="1200">
+        <a:solidFill>
+          <a:schemeClr val="tx1"/>
+        </a:solidFill>
+        <a:latin typeface="+mn-lt"/>
+        <a:ea typeface="+mn-ea"/>
+        <a:cs typeface="+mn-cs"/>
+      </a:defRPr>
+    </a:lvl9pPr>
+  </p:notesStyle>
+</p:notesMaster>
+</file>
+
+<file path=ppt/notesSlides/notesSlide1.xml><?xml version="1.0" encoding="utf-8"?>
+<p:notes xmlns:a="http://schemas.openxmlformats.org/drawingml/2006/main" xmlns:r="http://schemas.openxmlformats.org/officeDocument/2006/relationships" xmlns:p="http://schemas.openxmlformats.org/presentationml/2006/main">
+  <p:cSld>
+    <p:spTree>
+      <p:nvGrpSpPr>
+        <p:cNvPr id="1" name=""/>
+        <p:cNvGrpSpPr/>
+        <p:nvPr/>
+      </p:nvGrpSpPr>
+      <p:grpSpPr>
+        <a:xfrm>
+          <a:off x="0" y="0"/>
+          <a:ext cx="0" cy="0"/>
+          <a:chOff x="0" y="0"/>
+          <a:chExt cx="0" cy="0"/>
+        </a:xfrm>
+      </p:grpSpPr>
+      <p:sp>
+        <p:nvSpPr>
+          <p:cNvPr id="2" name="Образ слайда 1"/>
+          <p:cNvSpPr>
+            <a:spLocks noGrp="1" noRot="1" noChangeAspect="1"/>
+          </p:cNvSpPr>
+          <p:nvPr>
+            <p:ph type="sldImg"/>
+          </p:nvPr>
+        </p:nvSpPr>
+        <p:spPr/>
+      </p:sp>
+      <p:sp>
+        <p:nvSpPr>
+          <p:cNvPr id="3" name="Заметки 2"/>
+          <p:cNvSpPr>
+            <a:spLocks noGrp="1"/>
+          </p:cNvSpPr>
+          <p:nvPr>
+            <p:ph type="body" idx="1"/>
+          </p:nvPr>
+        </p:nvSpPr>
+        <p:spPr/>
+        <p:txBody>
+          <a:bodyPr/>
+          <a:lstStyle/>
+          <a:p>
+            <a:r>
+              <a:rPr lang="ru-RU" dirty="0" smtClean="0"/>
+              <a:t>для лекции 14 из курса по анализу временных рядов для магистров изучающих статистику и имеющему следующее </a:t>
+            </a:r>
+            <a:r>
+              <a:rPr lang="ru-RU" dirty="0" err="1" smtClean="0"/>
+              <a:t>содержение</a:t>
+            </a:r>
+            <a:endParaRPr lang="ru-RU" dirty="0" smtClean="0"/>
+          </a:p>
+          <a:p>
+            <a:r>
+              <a:rPr lang="ru-RU" dirty="0" smtClean="0"/>
+              <a:t>из лекционных презентаций по следующим темам</a:t>
+            </a:r>
+          </a:p>
+          <a:p>
+            <a:r>
+              <a:rPr lang="ru-RU" dirty="0" smtClean="0"/>
+              <a:t>1.1. Введение в предмет анализ временных рядов</a:t>
+            </a:r>
+          </a:p>
+          <a:p>
+            <a:r>
+              <a:rPr lang="ru-RU" dirty="0" smtClean="0"/>
+              <a:t>1.2. Модели ВР и постановка задач предсказания значений ВР</a:t>
+            </a:r>
+          </a:p>
+          <a:p>
+            <a:r>
+              <a:rPr lang="ru-RU" dirty="0" smtClean="0"/>
+              <a:t>1.3. Статистические свойства ВР</a:t>
+            </a:r>
+          </a:p>
+          <a:p>
+            <a:r>
+              <a:rPr lang="ru-RU" dirty="0" smtClean="0"/>
+              <a:t>1.4. Разложение ВР и наивные методы предсказания</a:t>
+            </a:r>
+          </a:p>
+          <a:p>
+            <a:r>
+              <a:rPr lang="ru-RU" dirty="0" smtClean="0"/>
+              <a:t>1.5. Методы на основе экспоненциального сглаживания</a:t>
+            </a:r>
+          </a:p>
+          <a:p>
+            <a:r>
+              <a:rPr lang="ru-RU" dirty="0" smtClean="0"/>
+              <a:t>1.6. Методы авторегрессии-скользящего среднего.</a:t>
+            </a:r>
+          </a:p>
+          <a:p>
+            <a:r>
+              <a:rPr lang="ru-RU" dirty="0" smtClean="0"/>
+              <a:t>1.7. Оценка качества предсказания ВР (метрики)</a:t>
+            </a:r>
+          </a:p>
+          <a:p>
+            <a:r>
+              <a:rPr lang="ru-RU" dirty="0" smtClean="0"/>
+              <a:t>1.8. Анализ невязок предсказаний ВР (остаточная часть)</a:t>
+            </a:r>
+          </a:p>
+          <a:p>
+            <a:r>
+              <a:rPr lang="ru-RU" dirty="0" smtClean="0"/>
+              <a:t>1.9. Оценка надежности предсказаний ВР</a:t>
+            </a:r>
+          </a:p>
+          <a:p>
+            <a:r>
+              <a:rPr lang="ru-RU" dirty="0" smtClean="0"/>
+              <a:t>1.10. Методы предсказания ВР с использованием машинного обучения.</a:t>
+            </a:r>
+          </a:p>
+          <a:p>
+            <a:r>
+              <a:rPr lang="ru-RU" dirty="0" smtClean="0"/>
+              <a:t>1.11. Методы работы с многомерными ВР</a:t>
+            </a:r>
+          </a:p>
+          <a:p>
+            <a:r>
+              <a:rPr lang="ru-RU" dirty="0" smtClean="0"/>
+              <a:t>1.12. Обнаружение аномалий Во ВР</a:t>
+            </a:r>
+          </a:p>
+          <a:p>
+            <a:r>
+              <a:rPr lang="ru-RU" dirty="0" smtClean="0"/>
+              <a:t>1.13. Глубокое обучение нейронных сетей в приложениях анализа ВР</a:t>
+            </a:r>
+          </a:p>
+          <a:p>
+            <a:r>
+              <a:rPr lang="ru-RU" dirty="0" smtClean="0"/>
+              <a:t>1.14. Особенности работы с индустриальными ВР</a:t>
+            </a:r>
+          </a:p>
+          <a:p>
+            <a:r>
+              <a:rPr lang="ru-RU" dirty="0" smtClean="0"/>
+              <a:t>1.15. Задача классификации ВР (доп. Раздел)</a:t>
+            </a:r>
+          </a:p>
+          <a:p>
+            <a:r>
+              <a:rPr lang="ru-RU" dirty="0" smtClean="0"/>
+              <a:t>1.16. Задачи непараметрического анализа </a:t>
+            </a:r>
+            <a:r>
+              <a:rPr lang="ru-RU" dirty="0" err="1" smtClean="0"/>
+              <a:t>слжных</a:t>
+            </a:r>
+            <a:r>
+              <a:rPr lang="ru-RU" dirty="0" smtClean="0"/>
+              <a:t> ВР (доп. Раздел).</a:t>
+            </a:r>
+          </a:p>
+          <a:p>
+            <a:endParaRPr lang="ru-RU" dirty="0" smtClean="0"/>
+          </a:p>
+          <a:p>
+            <a:r>
+              <a:rPr lang="ru-RU" dirty="0" smtClean="0"/>
+              <a:t>добавь следующие </a:t>
+            </a:r>
+            <a:r>
+              <a:rPr lang="ru-RU" dirty="0" err="1" smtClean="0"/>
+              <a:t>подтемы</a:t>
+            </a:r>
+            <a:r>
+              <a:rPr lang="ru-RU" dirty="0" smtClean="0"/>
+              <a:t>:</a:t>
+            </a:r>
+          </a:p>
+          <a:p>
+            <a:r>
+              <a:rPr lang="ru-RU" dirty="0" smtClean="0"/>
+              <a:t>Проблема "холодного старта". </a:t>
+            </a:r>
+          </a:p>
+          <a:p>
+            <a:r>
+              <a:rPr lang="ru-RU" dirty="0" smtClean="0"/>
+              <a:t>Проблема EDA – как отбирать признаки, снимать общие зависимости</a:t>
+            </a:r>
+          </a:p>
+          <a:p>
+            <a:r>
+              <a:rPr lang="ru-RU" dirty="0" smtClean="0"/>
+              <a:t>Проблема больших данных – как работать с 100-нями наборов данных</a:t>
+            </a:r>
+          </a:p>
+          <a:p>
+            <a:r>
+              <a:rPr lang="ru-RU" dirty="0" err="1" smtClean="0"/>
+              <a:t>АвтоМЛ</a:t>
+            </a:r>
+            <a:r>
+              <a:rPr lang="ru-RU" dirty="0" smtClean="0"/>
+              <a:t> – как автоматизировать мониторинг</a:t>
+            </a:r>
+          </a:p>
+          <a:p>
+            <a:r>
+              <a:rPr lang="ru-RU" dirty="0" smtClean="0"/>
+              <a:t>Настройка </a:t>
+            </a:r>
+            <a:r>
+              <a:rPr lang="ru-RU" dirty="0" err="1" smtClean="0"/>
+              <a:t>пайплайна</a:t>
+            </a:r>
+            <a:r>
+              <a:rPr lang="ru-RU" dirty="0" smtClean="0"/>
+              <a:t> предсказания ВР в поде</a:t>
+            </a:r>
+          </a:p>
+          <a:p>
+            <a:r>
+              <a:rPr lang="ru-RU" dirty="0" smtClean="0"/>
+              <a:t>мониторинг моделей</a:t>
+            </a:r>
+          </a:p>
+          <a:p>
+            <a:r>
+              <a:rPr lang="ru-RU" dirty="0" smtClean="0"/>
+              <a:t>Сложные данные: пространственно-временны ряды (поля)</a:t>
+            </a:r>
+          </a:p>
+          <a:p>
+            <a:r>
+              <a:rPr lang="ru-RU" dirty="0" smtClean="0"/>
+              <a:t>Иерархические, групповые и другие типы ВР</a:t>
+            </a:r>
+          </a:p>
+          <a:p>
+            <a:r>
+              <a:rPr lang="ru-RU" dirty="0" err="1" smtClean="0"/>
+              <a:t>TRiSM</a:t>
+            </a:r>
+            <a:r>
+              <a:rPr lang="ru-RU" dirty="0" smtClean="0"/>
+              <a:t> </a:t>
+            </a:r>
+            <a:r>
+              <a:rPr lang="ru-RU" dirty="0" err="1" smtClean="0"/>
+              <a:t>of</a:t>
+            </a:r>
+            <a:r>
+              <a:rPr lang="ru-RU" dirty="0" smtClean="0"/>
+              <a:t> </a:t>
+            </a:r>
+            <a:r>
+              <a:rPr lang="ru-RU" dirty="0" err="1" smtClean="0"/>
+              <a:t>Time</a:t>
+            </a:r>
+            <a:r>
+              <a:rPr lang="ru-RU" dirty="0" smtClean="0"/>
+              <a:t> </a:t>
+            </a:r>
+            <a:r>
+              <a:rPr lang="ru-RU" dirty="0" err="1" smtClean="0"/>
+              <a:t>Series</a:t>
+            </a:r>
+            <a:r>
+              <a:rPr lang="ru-RU" dirty="0" smtClean="0"/>
+              <a:t> </a:t>
+            </a:r>
+            <a:r>
+              <a:rPr lang="ru-RU" dirty="0" err="1" smtClean="0"/>
+              <a:t>Forecasting</a:t>
+            </a:r>
+            <a:endParaRPr lang="ru-RU" dirty="0" smtClean="0"/>
+          </a:p>
+          <a:p>
+            <a:endParaRPr lang="ru-RU" dirty="0" smtClean="0"/>
+          </a:p>
+          <a:p>
+            <a:r>
+              <a:rPr lang="ru-RU" dirty="0" smtClean="0"/>
+              <a:t>в результате я хочу чтобы студенты поняли как работать с реальными задачами, которые они могут встретить в индустрии. в ответе должны быть интуиция и </a:t>
+            </a:r>
+            <a:r>
+              <a:rPr lang="ru-RU" dirty="0" err="1" smtClean="0"/>
+              <a:t>слонжые</a:t>
+            </a:r>
+            <a:r>
+              <a:rPr lang="ru-RU" dirty="0" smtClean="0"/>
+              <a:t> неочевидные </a:t>
+            </a:r>
+            <a:r>
+              <a:rPr lang="ru-RU" dirty="0" err="1" smtClean="0"/>
+              <a:t>инсайты</a:t>
+            </a:r>
+            <a:r>
+              <a:rPr lang="ru-RU" dirty="0" smtClean="0"/>
+              <a:t>. текст должен быть в строгом стиле изложения. можно делать выкладки формул. можно давать интуицию и примеры. нужно давать </a:t>
+            </a:r>
+            <a:r>
+              <a:rPr lang="ru-RU" dirty="0" err="1" smtClean="0"/>
+              <a:t>определния</a:t>
+            </a:r>
+            <a:r>
+              <a:rPr lang="ru-RU" dirty="0" smtClean="0"/>
+              <a:t> и ссылки на литературу 2022-2025 годов.</a:t>
+            </a:r>
+          </a:p>
+          <a:p>
+            <a:pPr marL="0" marR="0" indent="0" algn="l" defTabSz="914400" rtl="0" eaLnBrk="1" fontAlgn="auto" latinLnBrk="0" hangingPunct="1">
+              <a:lnSpc>
+                <a:spcPct val="100000"/>
+              </a:lnSpc>
+              <a:spcBef>
+                <a:spcPts val="0"/>
+              </a:spcBef>
+              <a:spcAft>
+                <a:spcPts val="0"/>
+              </a:spcAft>
+              <a:buClrTx/>
+              <a:buSzTx/>
+              <a:buFontTx/>
+              <a:buNone/>
+              <a:tabLst/>
+              <a:defRPr/>
+            </a:pPr>
+            <a:r>
+              <a:rPr lang="ru-RU" dirty="0" smtClean="0"/>
+              <a:t>Цель - </a:t>
+            </a:r>
+            <a:r>
+              <a:rPr lang="ru-RU" sz="1200" b="0" i="0" kern="1200" dirty="0" smtClean="0">
+                <a:solidFill>
+                  <a:schemeClr val="tx1"/>
+                </a:solidFill>
+                <a:effectLst/>
+                <a:latin typeface="+mn-lt"/>
+                <a:ea typeface="+mn-ea"/>
+                <a:cs typeface="+mn-cs"/>
+              </a:rPr>
+              <a:t>формирование системного понимания промышленного прогнозирования временных рядов в задачах финансового сектора и индустрии (напр.</a:t>
+            </a:r>
+            <a:r>
+              <a:rPr lang="ru-RU" sz="1200" b="0" i="0" kern="1200" baseline="0" dirty="0" smtClean="0">
+                <a:solidFill>
+                  <a:schemeClr val="tx1"/>
+                </a:solidFill>
+                <a:effectLst/>
+                <a:latin typeface="+mn-lt"/>
+                <a:ea typeface="+mn-ea"/>
+                <a:cs typeface="+mn-cs"/>
+              </a:rPr>
+              <a:t> системы отопления ЦОД – показания датчиков , задача прогноз </a:t>
+            </a:r>
+            <a:r>
+              <a:rPr lang="ru-RU" sz="1200" b="0" i="0" kern="1200" baseline="0" dirty="0" err="1" smtClean="0">
+                <a:solidFill>
+                  <a:schemeClr val="tx1"/>
+                </a:solidFill>
+                <a:effectLst/>
+                <a:latin typeface="+mn-lt"/>
+                <a:ea typeface="+mn-ea"/>
+                <a:cs typeface="+mn-cs"/>
+              </a:rPr>
+              <a:t>энергоэффективности</a:t>
+            </a:r>
+            <a:r>
+              <a:rPr lang="ru-RU" sz="1200" b="0" i="0" kern="1200" baseline="0" dirty="0" smtClean="0">
+                <a:solidFill>
+                  <a:schemeClr val="tx1"/>
+                </a:solidFill>
+                <a:effectLst/>
+                <a:latin typeface="+mn-lt"/>
+                <a:ea typeface="+mn-ea"/>
+                <a:cs typeface="+mn-cs"/>
+              </a:rPr>
+              <a:t>). Тут нужно и отобрать нужные признаки и снять общие зависимости (напр. температура воздуха) и </a:t>
+            </a:r>
+            <a:r>
+              <a:rPr lang="ru-RU" sz="1200" b="0" i="0" kern="1200" baseline="0" dirty="0" err="1" smtClean="0">
+                <a:solidFill>
+                  <a:schemeClr val="tx1"/>
+                </a:solidFill>
+                <a:effectLst/>
+                <a:latin typeface="+mn-lt"/>
+                <a:ea typeface="+mn-ea"/>
+                <a:cs typeface="+mn-cs"/>
+              </a:rPr>
+              <a:t>можнт</a:t>
+            </a:r>
+            <a:r>
+              <a:rPr lang="ru-RU" sz="1200" b="0" i="0" kern="1200" baseline="0" dirty="0" smtClean="0">
+                <a:solidFill>
+                  <a:schemeClr val="tx1"/>
+                </a:solidFill>
+                <a:effectLst/>
+                <a:latin typeface="+mn-lt"/>
+                <a:ea typeface="+mn-ea"/>
+                <a:cs typeface="+mn-cs"/>
+              </a:rPr>
+              <a:t> быть учесть что в </a:t>
+            </a:r>
+            <a:r>
+              <a:rPr lang="ru-RU" sz="1200" b="0" i="0" kern="1200" baseline="0" dirty="0" err="1" smtClean="0">
+                <a:solidFill>
+                  <a:schemeClr val="tx1"/>
+                </a:solidFill>
+                <a:effectLst/>
+                <a:latin typeface="+mn-lt"/>
+                <a:ea typeface="+mn-ea"/>
+                <a:cs typeface="+mn-cs"/>
+              </a:rPr>
+              <a:t>цод</a:t>
+            </a:r>
+            <a:r>
+              <a:rPr lang="ru-RU" sz="1200" b="0" i="0" kern="1200" baseline="0" dirty="0" smtClean="0">
+                <a:solidFill>
+                  <a:schemeClr val="tx1"/>
+                </a:solidFill>
+                <a:effectLst/>
+                <a:latin typeface="+mn-lt"/>
+                <a:ea typeface="+mn-ea"/>
+                <a:cs typeface="+mn-cs"/>
+              </a:rPr>
+              <a:t> есть зоны охлаждения и отопления – то есть нужно </a:t>
+            </a:r>
+            <a:r>
+              <a:rPr lang="ru-RU" sz="1200" b="0" i="0" kern="1200" baseline="0" dirty="0" err="1" smtClean="0">
+                <a:solidFill>
+                  <a:schemeClr val="tx1"/>
+                </a:solidFill>
+                <a:effectLst/>
+                <a:latin typeface="+mn-lt"/>
+                <a:ea typeface="+mn-ea"/>
+                <a:cs typeface="+mn-cs"/>
+              </a:rPr>
+              <a:t>пространнственно</a:t>
+            </a:r>
+            <a:r>
+              <a:rPr lang="ru-RU" sz="1200" b="0" i="0" kern="1200" baseline="0" dirty="0" smtClean="0">
+                <a:solidFill>
+                  <a:schemeClr val="tx1"/>
+                </a:solidFill>
+                <a:effectLst/>
+                <a:latin typeface="+mn-lt"/>
+                <a:ea typeface="+mn-ea"/>
+                <a:cs typeface="+mn-cs"/>
+              </a:rPr>
+              <a:t>- временные ряды анализировать. </a:t>
+            </a:r>
+            <a:br>
+              <a:rPr lang="ru-RU" sz="1200" b="0" i="0" kern="1200" baseline="0" dirty="0" smtClean="0">
+                <a:solidFill>
+                  <a:schemeClr val="tx1"/>
+                </a:solidFill>
+                <a:effectLst/>
+                <a:latin typeface="+mn-lt"/>
+                <a:ea typeface="+mn-ea"/>
+                <a:cs typeface="+mn-cs"/>
+              </a:rPr>
+            </a:br>
+            <a:r>
+              <a:rPr lang="ru-RU" sz="1200" b="0" i="0" kern="1200" dirty="0" smtClean="0">
+                <a:solidFill>
+                  <a:schemeClr val="tx1"/>
+                </a:solidFill>
+                <a:effectLst/>
+                <a:latin typeface="+mn-lt"/>
+                <a:ea typeface="+mn-ea"/>
+                <a:cs typeface="+mn-cs"/>
+              </a:rPr>
+              <a:t>Контекст аудитории -это магистранты по прикладной статистике, но</a:t>
+            </a:r>
+            <a:r>
+              <a:rPr lang="ru-RU" sz="1200" b="0" i="0" kern="1200" baseline="0" dirty="0" smtClean="0">
+                <a:solidFill>
+                  <a:schemeClr val="tx1"/>
+                </a:solidFill>
+                <a:effectLst/>
+                <a:latin typeface="+mn-lt"/>
+                <a:ea typeface="+mn-ea"/>
+                <a:cs typeface="+mn-cs"/>
+              </a:rPr>
+              <a:t> будут работать и аналитиками и </a:t>
+            </a:r>
+            <a:r>
+              <a:rPr lang="ru-RU" sz="1200" b="0" i="0" kern="1200" dirty="0" smtClean="0">
+                <a:solidFill>
+                  <a:schemeClr val="tx1"/>
+                </a:solidFill>
+                <a:effectLst/>
+                <a:latin typeface="+mn-lt"/>
+                <a:ea typeface="+mn-ea"/>
+                <a:cs typeface="+mn-cs"/>
+              </a:rPr>
+              <a:t>инженеры, поэтому нужен баланс между теорией и практикой.</a:t>
+            </a:r>
+          </a:p>
+          <a:p>
+            <a:pPr marL="0" marR="0" indent="0" algn="l" defTabSz="914400" rtl="0" eaLnBrk="1" fontAlgn="auto" latinLnBrk="0" hangingPunct="1">
+              <a:lnSpc>
+                <a:spcPct val="100000"/>
+              </a:lnSpc>
+              <a:spcBef>
+                <a:spcPts val="0"/>
+              </a:spcBef>
+              <a:spcAft>
+                <a:spcPts val="0"/>
+              </a:spcAft>
+              <a:buClrTx/>
+              <a:buSzTx/>
+              <a:buFontTx/>
+              <a:buNone/>
+              <a:tabLst/>
+              <a:defRPr/>
+            </a:pPr>
+            <a:r>
+              <a:rPr lang="ru-RU" sz="1200" b="0" i="0" kern="1200" dirty="0" smtClean="0">
+                <a:solidFill>
+                  <a:schemeClr val="tx1"/>
+                </a:solidFill>
+                <a:effectLst/>
+                <a:latin typeface="+mn-lt"/>
+                <a:ea typeface="+mn-ea"/>
+                <a:cs typeface="+mn-cs"/>
+              </a:rPr>
+              <a:t>Акцент на неочевидные </a:t>
+            </a:r>
+            <a:r>
+              <a:rPr lang="ru-RU" sz="1200" b="0" i="0" kern="1200" dirty="0" err="1" smtClean="0">
+                <a:solidFill>
+                  <a:schemeClr val="tx1"/>
+                </a:solidFill>
+                <a:effectLst/>
+                <a:latin typeface="+mn-lt"/>
+                <a:ea typeface="+mn-ea"/>
+                <a:cs typeface="+mn-cs"/>
+              </a:rPr>
+              <a:t>инсайты</a:t>
+            </a:r>
+            <a:r>
+              <a:rPr lang="ru-RU" sz="1200" b="0" i="0" kern="1200" dirty="0" smtClean="0">
+                <a:solidFill>
+                  <a:schemeClr val="tx1"/>
+                </a:solidFill>
+                <a:effectLst/>
+                <a:latin typeface="+mn-lt"/>
+                <a:ea typeface="+mn-ea"/>
+                <a:cs typeface="+mn-cs"/>
+              </a:rPr>
+              <a:t> — требование не просто пересказать методы, а объяснить, почему они работают (или не работают) в промышленности.</a:t>
+            </a:r>
+          </a:p>
+          <a:p>
+            <a:endParaRPr lang="ru-RU" dirty="0" smtClean="0"/>
+          </a:p>
+          <a:p>
+            <a:r>
+              <a:rPr lang="ru-RU" dirty="0" smtClean="0"/>
+              <a:t>допиши </a:t>
+            </a:r>
+            <a:r>
+              <a:rPr lang="ru-RU" dirty="0" err="1" smtClean="0"/>
+              <a:t>промпт</a:t>
+            </a:r>
+            <a:r>
+              <a:rPr lang="ru-RU" dirty="0" smtClean="0"/>
+              <a:t> чтобы он лучше </a:t>
+            </a:r>
+            <a:r>
+              <a:rPr lang="ru-RU" dirty="0" err="1" smtClean="0"/>
+              <a:t>соотвествовал</a:t>
+            </a:r>
+            <a:r>
+              <a:rPr lang="ru-RU" dirty="0" smtClean="0"/>
+              <a:t> цели, уточни что еще не хватает в запросе.</a:t>
+            </a:r>
+            <a:endParaRPr lang="ru-RU" dirty="0"/>
+          </a:p>
+        </p:txBody>
+      </p:sp>
+      <p:sp>
+        <p:nvSpPr>
+          <p:cNvPr id="4" name="Номер слайда 3"/>
+          <p:cNvSpPr>
+            <a:spLocks noGrp="1"/>
+          </p:cNvSpPr>
+          <p:nvPr>
+            <p:ph type="sldNum" sz="quarter" idx="10"/>
+          </p:nvPr>
+        </p:nvSpPr>
+        <p:spPr/>
+        <p:txBody>
+          <a:bodyPr/>
+          <a:lstStyle/>
+          <a:p>
+            <a:fld id="{3FA3954E-70F5-4A80-9064-71FC5C1DFC45}" type="slidenum">
+              <a:rPr lang="ru-RU" smtClean="0"/>
+              <a:t>12</a:t>
+            </a:fld>
+            <a:endParaRPr lang="ru-RU"/>
+          </a:p>
+        </p:txBody>
+      </p:sp>
+    </p:spTree>
+    <p:extLst>
+      <p:ext uri="{BB962C8B-B14F-4D97-AF65-F5344CB8AC3E}">
+        <p14:creationId xmlns:p14="http://schemas.microsoft.com/office/powerpoint/2010/main" val="3579511813"/>
+      </p:ext>
+    </p:extLst>
+  </p:cSld>
+  <p:clrMapOvr>
+    <a:masterClrMapping/>
+  </p:clrMapOvr>
+</p:notes>
 </file>
 
 <file path=ppt/slideLayouts/slideLayout1.xml><?xml version="1.0" encoding="utf-8"?>
@@ -255,7 +1245,7 @@
           <a:p>
             <a:fld id="{11392AF9-DBCE-5A47-95E7-A99A7754377C}" type="datetimeFigureOut">
               <a:rPr lang="ru-RU" smtClean="0"/>
-              <a:t>24.08.2025</a:t>
+              <a:t>29.08.2025</a:t>
             </a:fld>
             <a:endParaRPr lang="ru-RU"/>
           </a:p>
@@ -453,7 +1443,7 @@
           <a:p>
             <a:fld id="{11392AF9-DBCE-5A47-95E7-A99A7754377C}" type="datetimeFigureOut">
               <a:rPr lang="ru-RU" smtClean="0"/>
-              <a:t>24.08.2025</a:t>
+              <a:t>29.08.2025</a:t>
             </a:fld>
             <a:endParaRPr lang="ru-RU"/>
           </a:p>
@@ -661,7 +1651,7 @@
           <a:p>
             <a:fld id="{11392AF9-DBCE-5A47-95E7-A99A7754377C}" type="datetimeFigureOut">
               <a:rPr lang="ru-RU" smtClean="0"/>
-              <a:t>24.08.2025</a:t>
+              <a:t>29.08.2025</a:t>
             </a:fld>
             <a:endParaRPr lang="ru-RU"/>
           </a:p>
@@ -859,7 +1849,7 @@
           <a:p>
             <a:fld id="{11392AF9-DBCE-5A47-95E7-A99A7754377C}" type="datetimeFigureOut">
               <a:rPr lang="ru-RU" smtClean="0"/>
-              <a:t>24.08.2025</a:t>
+              <a:t>29.08.2025</a:t>
             </a:fld>
             <a:endParaRPr lang="ru-RU"/>
           </a:p>
@@ -1134,7 +2124,7 @@
           <a:p>
             <a:fld id="{11392AF9-DBCE-5A47-95E7-A99A7754377C}" type="datetimeFigureOut">
               <a:rPr lang="ru-RU" smtClean="0"/>
-              <a:t>24.08.2025</a:t>
+              <a:t>29.08.2025</a:t>
             </a:fld>
             <a:endParaRPr lang="ru-RU"/>
           </a:p>
@@ -1399,7 +2389,7 @@
           <a:p>
             <a:fld id="{11392AF9-DBCE-5A47-95E7-A99A7754377C}" type="datetimeFigureOut">
               <a:rPr lang="ru-RU" smtClean="0"/>
-              <a:t>24.08.2025</a:t>
+              <a:t>29.08.2025</a:t>
             </a:fld>
             <a:endParaRPr lang="ru-RU"/>
           </a:p>
@@ -1811,7 +2801,7 @@
           <a:p>
             <a:fld id="{11392AF9-DBCE-5A47-95E7-A99A7754377C}" type="datetimeFigureOut">
               <a:rPr lang="ru-RU" smtClean="0"/>
-              <a:t>24.08.2025</a:t>
+              <a:t>29.08.2025</a:t>
             </a:fld>
             <a:endParaRPr lang="ru-RU"/>
           </a:p>
@@ -1952,7 +2942,7 @@
           <a:p>
             <a:fld id="{11392AF9-DBCE-5A47-95E7-A99A7754377C}" type="datetimeFigureOut">
               <a:rPr lang="ru-RU" smtClean="0"/>
-              <a:t>24.08.2025</a:t>
+              <a:t>29.08.2025</a:t>
             </a:fld>
             <a:endParaRPr lang="ru-RU"/>
           </a:p>
@@ -2065,7 +3055,7 @@
           <a:p>
             <a:fld id="{11392AF9-DBCE-5A47-95E7-A99A7754377C}" type="datetimeFigureOut">
               <a:rPr lang="ru-RU" smtClean="0"/>
-              <a:t>24.08.2025</a:t>
+              <a:t>29.08.2025</a:t>
             </a:fld>
             <a:endParaRPr lang="ru-RU"/>
           </a:p>
@@ -2376,7 +3366,7 @@
           <a:p>
             <a:fld id="{11392AF9-DBCE-5A47-95E7-A99A7754377C}" type="datetimeFigureOut">
               <a:rPr lang="ru-RU" smtClean="0"/>
-              <a:t>24.08.2025</a:t>
+              <a:t>29.08.2025</a:t>
             </a:fld>
             <a:endParaRPr lang="ru-RU"/>
           </a:p>
@@ -2664,7 +3654,7 @@
           <a:p>
             <a:fld id="{11392AF9-DBCE-5A47-95E7-A99A7754377C}" type="datetimeFigureOut">
               <a:rPr lang="ru-RU" smtClean="0"/>
-              <a:t>24.08.2025</a:t>
+              <a:t>29.08.2025</a:t>
             </a:fld>
             <a:endParaRPr lang="ru-RU"/>
           </a:p>
@@ -2905,7 +3895,7 @@
           <a:p>
             <a:fld id="{11392AF9-DBCE-5A47-95E7-A99A7754377C}" type="datetimeFigureOut">
               <a:rPr lang="ru-RU" smtClean="0"/>
-              <a:t>24.08.2025</a:t>
+              <a:t>29.08.2025</a:t>
             </a:fld>
             <a:endParaRPr lang="ru-RU"/>
           </a:p>
@@ -3382,6 +4372,258 @@
   <p:clrMapOvr>
     <a:masterClrMapping/>
   </p:clrMapOvr>
+  <p:timing>
+    <p:tnLst>
+      <p:par>
+        <p:cTn id="1" dur="indefinite" restart="never" nodeType="tmRoot"/>
+      </p:par>
+    </p:tnLst>
+  </p:timing>
+</p:sld>
+</file>
+
+<file path=ppt/slides/slide10.xml><?xml version="1.0" encoding="utf-8"?>
+<p:sld xmlns:a="http://schemas.openxmlformats.org/drawingml/2006/main" xmlns:r="http://schemas.openxmlformats.org/officeDocument/2006/relationships" xmlns:p="http://schemas.openxmlformats.org/presentationml/2006/main">
+  <p:cSld>
+    <p:spTree>
+      <p:nvGrpSpPr>
+        <p:cNvPr id="1" name=""/>
+        <p:cNvGrpSpPr/>
+        <p:nvPr/>
+      </p:nvGrpSpPr>
+      <p:grpSpPr>
+        <a:xfrm>
+          <a:off x="0" y="0"/>
+          <a:ext cx="0" cy="0"/>
+          <a:chOff x="0" y="0"/>
+          <a:chExt cx="0" cy="0"/>
+        </a:xfrm>
+      </p:grpSpPr>
+      <p:sp>
+        <p:nvSpPr>
+          <p:cNvPr id="2" name="Заголовок 1"/>
+          <p:cNvSpPr>
+            <a:spLocks noGrp="1"/>
+          </p:cNvSpPr>
+          <p:nvPr>
+            <p:ph type="title"/>
+          </p:nvPr>
+        </p:nvSpPr>
+        <p:spPr/>
+        <p:txBody>
+          <a:bodyPr/>
+          <a:lstStyle/>
+          <a:p>
+            <a:endParaRPr lang="ru-RU"/>
+          </a:p>
+        </p:txBody>
+      </p:sp>
+      <p:sp>
+        <p:nvSpPr>
+          <p:cNvPr id="3" name="Объект 2"/>
+          <p:cNvSpPr>
+            <a:spLocks noGrp="1"/>
+          </p:cNvSpPr>
+          <p:nvPr>
+            <p:ph idx="1"/>
+          </p:nvPr>
+        </p:nvSpPr>
+        <p:spPr/>
+        <p:txBody>
+          <a:bodyPr/>
+          <a:lstStyle/>
+          <a:p>
+            <a:r>
+              <a:rPr lang="en-US" dirty="0" err="1" smtClean="0"/>
+              <a:t>TRiSM</a:t>
+            </a:r>
+            <a:r>
+              <a:rPr lang="en-US" dirty="0" smtClean="0"/>
+              <a:t> of Time Series Forecasting</a:t>
+            </a:r>
+            <a:endParaRPr lang="ru-RU" dirty="0"/>
+          </a:p>
+        </p:txBody>
+      </p:sp>
+    </p:spTree>
+    <p:extLst>
+      <p:ext uri="{BB962C8B-B14F-4D97-AF65-F5344CB8AC3E}">
+        <p14:creationId xmlns:p14="http://schemas.microsoft.com/office/powerpoint/2010/main" val="3554626226"/>
+      </p:ext>
+    </p:extLst>
+  </p:cSld>
+  <p:clrMapOvr>
+    <a:masterClrMapping/>
+  </p:clrMapOvr>
+  <p:timing>
+    <p:tnLst>
+      <p:par>
+        <p:cTn id="1" dur="indefinite" restart="never" nodeType="tmRoot"/>
+      </p:par>
+    </p:tnLst>
+  </p:timing>
+</p:sld>
+</file>
+
+<file path=ppt/slides/slide11.xml><?xml version="1.0" encoding="utf-8"?>
+<p:sld xmlns:a="http://schemas.openxmlformats.org/drawingml/2006/main" xmlns:r="http://schemas.openxmlformats.org/officeDocument/2006/relationships" xmlns:p="http://schemas.openxmlformats.org/presentationml/2006/main">
+  <p:cSld>
+    <p:spTree>
+      <p:nvGrpSpPr>
+        <p:cNvPr id="1" name=""/>
+        <p:cNvGrpSpPr/>
+        <p:nvPr/>
+      </p:nvGrpSpPr>
+      <p:grpSpPr>
+        <a:xfrm>
+          <a:off x="0" y="0"/>
+          <a:ext cx="0" cy="0"/>
+          <a:chOff x="0" y="0"/>
+          <a:chExt cx="0" cy="0"/>
+        </a:xfrm>
+      </p:grpSpPr>
+      <p:sp>
+        <p:nvSpPr>
+          <p:cNvPr id="2" name="Заголовок 1"/>
+          <p:cNvSpPr>
+            <a:spLocks noGrp="1"/>
+          </p:cNvSpPr>
+          <p:nvPr>
+            <p:ph type="title"/>
+          </p:nvPr>
+        </p:nvSpPr>
+        <p:spPr/>
+        <p:txBody>
+          <a:bodyPr/>
+          <a:lstStyle/>
+          <a:p>
+            <a:endParaRPr lang="ru-RU"/>
+          </a:p>
+        </p:txBody>
+      </p:sp>
+      <p:sp>
+        <p:nvSpPr>
+          <p:cNvPr id="3" name="Объект 2"/>
+          <p:cNvSpPr>
+            <a:spLocks noGrp="1"/>
+          </p:cNvSpPr>
+          <p:nvPr>
+            <p:ph idx="1"/>
+          </p:nvPr>
+        </p:nvSpPr>
+        <p:spPr/>
+        <p:txBody>
+          <a:bodyPr/>
+          <a:lstStyle/>
+          <a:p>
+            <a:r>
+              <a:rPr lang="ru-RU" dirty="0" smtClean="0"/>
+              <a:t>Синтетические данные, </a:t>
+            </a:r>
+            <a:r>
+              <a:rPr lang="en-US" dirty="0" smtClean="0"/>
+              <a:t>zero-shot, </a:t>
+            </a:r>
+            <a:r>
+              <a:rPr lang="ru-RU" dirty="0" smtClean="0"/>
+              <a:t>цифровые двойники</a:t>
+            </a:r>
+            <a:endParaRPr lang="ru-RU" dirty="0"/>
+          </a:p>
+        </p:txBody>
+      </p:sp>
+    </p:spTree>
+    <p:extLst>
+      <p:ext uri="{BB962C8B-B14F-4D97-AF65-F5344CB8AC3E}">
+        <p14:creationId xmlns:p14="http://schemas.microsoft.com/office/powerpoint/2010/main" val="1913143049"/>
+      </p:ext>
+    </p:extLst>
+  </p:cSld>
+  <p:clrMapOvr>
+    <a:masterClrMapping/>
+  </p:clrMapOvr>
+  <p:timing>
+    <p:tnLst>
+      <p:par>
+        <p:cTn id="1" dur="indefinite" restart="never" nodeType="tmRoot"/>
+      </p:par>
+    </p:tnLst>
+  </p:timing>
+</p:sld>
+</file>
+
+<file path=ppt/slides/slide12.xml><?xml version="1.0" encoding="utf-8"?>
+<p:sld xmlns:a="http://schemas.openxmlformats.org/drawingml/2006/main" xmlns:r="http://schemas.openxmlformats.org/officeDocument/2006/relationships" xmlns:p="http://schemas.openxmlformats.org/presentationml/2006/main">
+  <p:cSld>
+    <p:spTree>
+      <p:nvGrpSpPr>
+        <p:cNvPr id="1" name=""/>
+        <p:cNvGrpSpPr/>
+        <p:nvPr/>
+      </p:nvGrpSpPr>
+      <p:grpSpPr>
+        <a:xfrm>
+          <a:off x="0" y="0"/>
+          <a:ext cx="0" cy="0"/>
+          <a:chOff x="0" y="0"/>
+          <a:chExt cx="0" cy="0"/>
+        </a:xfrm>
+      </p:grpSpPr>
+      <p:sp>
+        <p:nvSpPr>
+          <p:cNvPr id="2" name="Заголовок 1"/>
+          <p:cNvSpPr>
+            <a:spLocks noGrp="1"/>
+          </p:cNvSpPr>
+          <p:nvPr>
+            <p:ph type="title"/>
+          </p:nvPr>
+        </p:nvSpPr>
+        <p:spPr/>
+        <p:txBody>
+          <a:bodyPr/>
+          <a:lstStyle/>
+          <a:p>
+            <a:endParaRPr lang="ru-RU"/>
+          </a:p>
+        </p:txBody>
+      </p:sp>
+      <p:sp>
+        <p:nvSpPr>
+          <p:cNvPr id="3" name="Объект 2"/>
+          <p:cNvSpPr>
+            <a:spLocks noGrp="1"/>
+          </p:cNvSpPr>
+          <p:nvPr>
+            <p:ph idx="1"/>
+          </p:nvPr>
+        </p:nvSpPr>
+        <p:spPr/>
+        <p:txBody>
+          <a:bodyPr/>
+          <a:lstStyle/>
+          <a:p>
+            <a:endParaRPr lang="ru-RU"/>
+          </a:p>
+        </p:txBody>
+      </p:sp>
+    </p:spTree>
+    <p:extLst>
+      <p:ext uri="{BB962C8B-B14F-4D97-AF65-F5344CB8AC3E}">
+        <p14:creationId xmlns:p14="http://schemas.microsoft.com/office/powerpoint/2010/main" val="2980591628"/>
+      </p:ext>
+    </p:extLst>
+  </p:cSld>
+  <p:clrMapOvr>
+    <a:masterClrMapping/>
+  </p:clrMapOvr>
+  <p:timing>
+    <p:tnLst>
+      <p:par>
+        <p:cTn id="1" dur="indefinite" restart="never" nodeType="tmRoot"/>
+      </p:par>
+    </p:tnLst>
+  </p:timing>
 </p:sld>
 </file>
 
@@ -3453,16 +4695,12 @@
               <a:t>Проблема "холодного </a:t>
             </a:r>
             <a:r>
-              <a:rPr lang="ru-RU" dirty="0" err="1"/>
-              <a:t>старга</a:t>
+              <a:rPr lang="ru-RU" dirty="0" smtClean="0"/>
+              <a:t>старта</a:t>
             </a:r>
             <a:r>
               <a:rPr lang="ru-RU" dirty="0"/>
-              <a:t>". </a:t>
-            </a:r>
-            <a:r>
-              <a:rPr lang="ru-RU"/>
-              <a:t>Как делать прогноз для нового объекта (нового магазина, нового пациента), по которому есть всего 10 точек данных?</a:t>
+              <a:t>". Как делать прогноз для нового объекта (нового магазина, нового пациента), по которому есть всего 10 точек данных?</a:t>
             </a:r>
           </a:p>
         </p:txBody>
@@ -3477,6 +4715,1368 @@
   <p:clrMapOvr>
     <a:masterClrMapping/>
   </p:clrMapOvr>
+  <p:timing>
+    <p:tnLst>
+      <p:par>
+        <p:cTn id="1" dur="indefinite" restart="never" nodeType="tmRoot"/>
+      </p:par>
+    </p:tnLst>
+  </p:timing>
+</p:sld>
+</file>
+
+<file path=ppt/slides/slide3.xml><?xml version="1.0" encoding="utf-8"?>
+<p:sld xmlns:a="http://schemas.openxmlformats.org/drawingml/2006/main" xmlns:r="http://schemas.openxmlformats.org/officeDocument/2006/relationships" xmlns:p="http://schemas.openxmlformats.org/presentationml/2006/main">
+  <p:cSld>
+    <p:spTree>
+      <p:nvGrpSpPr>
+        <p:cNvPr id="1" name=""/>
+        <p:cNvGrpSpPr/>
+        <p:nvPr/>
+      </p:nvGrpSpPr>
+      <p:grpSpPr>
+        <a:xfrm>
+          <a:off x="0" y="0"/>
+          <a:ext cx="0" cy="0"/>
+          <a:chOff x="0" y="0"/>
+          <a:chExt cx="0" cy="0"/>
+        </a:xfrm>
+      </p:grpSpPr>
+      <p:sp>
+        <p:nvSpPr>
+          <p:cNvPr id="2" name="Заголовок 1"/>
+          <p:cNvSpPr>
+            <a:spLocks noGrp="1"/>
+          </p:cNvSpPr>
+          <p:nvPr>
+            <p:ph type="title"/>
+          </p:nvPr>
+        </p:nvSpPr>
+        <p:spPr/>
+        <p:txBody>
+          <a:bodyPr/>
+          <a:lstStyle/>
+          <a:p>
+            <a:endParaRPr lang="ru-RU"/>
+          </a:p>
+        </p:txBody>
+      </p:sp>
+      <p:sp>
+        <p:nvSpPr>
+          <p:cNvPr id="3" name="Объект 2"/>
+          <p:cNvSpPr>
+            <a:spLocks noGrp="1"/>
+          </p:cNvSpPr>
+          <p:nvPr>
+            <p:ph idx="1"/>
+          </p:nvPr>
+        </p:nvSpPr>
+        <p:spPr>
+          <a:xfrm>
+            <a:off x="838200" y="1825625"/>
+            <a:ext cx="10737028" cy="4351338"/>
+          </a:xfrm>
+        </p:spPr>
+        <p:txBody>
+          <a:bodyPr/>
+          <a:lstStyle/>
+          <a:p>
+            <a:r>
+              <a:rPr lang="ru-RU" dirty="0" smtClean="0"/>
+              <a:t>Проблема </a:t>
+            </a:r>
+            <a:r>
+              <a:rPr lang="en-US" dirty="0" smtClean="0"/>
+              <a:t>EDA</a:t>
+            </a:r>
+            <a:r>
+              <a:rPr lang="ru-RU" dirty="0" smtClean="0"/>
+              <a:t> – как отбирать признаки, снимать общие зависимости</a:t>
+            </a:r>
+            <a:endParaRPr lang="ru-RU" dirty="0"/>
+          </a:p>
+        </p:txBody>
+      </p:sp>
+    </p:spTree>
+    <p:extLst>
+      <p:ext uri="{BB962C8B-B14F-4D97-AF65-F5344CB8AC3E}">
+        <p14:creationId xmlns:p14="http://schemas.microsoft.com/office/powerpoint/2010/main" val="2427968780"/>
+      </p:ext>
+    </p:extLst>
+  </p:cSld>
+  <p:clrMapOvr>
+    <a:masterClrMapping/>
+  </p:clrMapOvr>
+  <p:timing>
+    <p:tnLst>
+      <p:par>
+        <p:cTn id="1" dur="indefinite" restart="never" nodeType="tmRoot"/>
+      </p:par>
+    </p:tnLst>
+  </p:timing>
+</p:sld>
+</file>
+
+<file path=ppt/slides/slide4.xml><?xml version="1.0" encoding="utf-8"?>
+<p:sld xmlns:a="http://schemas.openxmlformats.org/drawingml/2006/main" xmlns:r="http://schemas.openxmlformats.org/officeDocument/2006/relationships" xmlns:p="http://schemas.openxmlformats.org/presentationml/2006/main">
+  <p:cSld>
+    <p:spTree>
+      <p:nvGrpSpPr>
+        <p:cNvPr id="1" name=""/>
+        <p:cNvGrpSpPr/>
+        <p:nvPr/>
+      </p:nvGrpSpPr>
+      <p:grpSpPr>
+        <a:xfrm>
+          <a:off x="0" y="0"/>
+          <a:ext cx="0" cy="0"/>
+          <a:chOff x="0" y="0"/>
+          <a:chExt cx="0" cy="0"/>
+        </a:xfrm>
+      </p:grpSpPr>
+      <p:sp>
+        <p:nvSpPr>
+          <p:cNvPr id="2" name="Заголовок 1"/>
+          <p:cNvSpPr>
+            <a:spLocks noGrp="1"/>
+          </p:cNvSpPr>
+          <p:nvPr>
+            <p:ph type="title"/>
+          </p:nvPr>
+        </p:nvSpPr>
+        <p:spPr/>
+        <p:txBody>
+          <a:bodyPr/>
+          <a:lstStyle/>
+          <a:p>
+            <a:endParaRPr lang="ru-RU"/>
+          </a:p>
+        </p:txBody>
+      </p:sp>
+      <p:sp>
+        <p:nvSpPr>
+          <p:cNvPr id="3" name="Объект 2"/>
+          <p:cNvSpPr>
+            <a:spLocks noGrp="1"/>
+          </p:cNvSpPr>
+          <p:nvPr>
+            <p:ph idx="1"/>
+          </p:nvPr>
+        </p:nvSpPr>
+        <p:spPr/>
+        <p:txBody>
+          <a:bodyPr/>
+          <a:lstStyle/>
+          <a:p>
+            <a:r>
+              <a:rPr lang="ru-RU" dirty="0" smtClean="0"/>
+              <a:t>Проблема больших данных – как работать с 100-нями наборов данных</a:t>
+            </a:r>
+            <a:endParaRPr lang="ru-RU" dirty="0"/>
+          </a:p>
+        </p:txBody>
+      </p:sp>
+    </p:spTree>
+    <p:extLst>
+      <p:ext uri="{BB962C8B-B14F-4D97-AF65-F5344CB8AC3E}">
+        <p14:creationId xmlns:p14="http://schemas.microsoft.com/office/powerpoint/2010/main" val="2533757798"/>
+      </p:ext>
+    </p:extLst>
+  </p:cSld>
+  <p:clrMapOvr>
+    <a:masterClrMapping/>
+  </p:clrMapOvr>
+  <p:timing>
+    <p:tnLst>
+      <p:par>
+        <p:cTn id="1" dur="indefinite" restart="never" nodeType="tmRoot"/>
+      </p:par>
+    </p:tnLst>
+  </p:timing>
+</p:sld>
+</file>
+
+<file path=ppt/slides/slide5.xml><?xml version="1.0" encoding="utf-8"?>
+<p:sld xmlns:a="http://schemas.openxmlformats.org/drawingml/2006/main" xmlns:r="http://schemas.openxmlformats.org/officeDocument/2006/relationships" xmlns:p="http://schemas.openxmlformats.org/presentationml/2006/main">
+  <p:cSld>
+    <p:spTree>
+      <p:nvGrpSpPr>
+        <p:cNvPr id="1" name=""/>
+        <p:cNvGrpSpPr/>
+        <p:nvPr/>
+      </p:nvGrpSpPr>
+      <p:grpSpPr>
+        <a:xfrm>
+          <a:off x="0" y="0"/>
+          <a:ext cx="0" cy="0"/>
+          <a:chOff x="0" y="0"/>
+          <a:chExt cx="0" cy="0"/>
+        </a:xfrm>
+      </p:grpSpPr>
+      <p:sp>
+        <p:nvSpPr>
+          <p:cNvPr id="2" name="Заголовок 1"/>
+          <p:cNvSpPr>
+            <a:spLocks noGrp="1"/>
+          </p:cNvSpPr>
+          <p:nvPr>
+            <p:ph type="title"/>
+          </p:nvPr>
+        </p:nvSpPr>
+        <p:spPr/>
+        <p:txBody>
+          <a:bodyPr/>
+          <a:lstStyle/>
+          <a:p>
+            <a:endParaRPr lang="ru-RU"/>
+          </a:p>
+        </p:txBody>
+      </p:sp>
+      <p:sp>
+        <p:nvSpPr>
+          <p:cNvPr id="3" name="Объект 2"/>
+          <p:cNvSpPr>
+            <a:spLocks noGrp="1"/>
+          </p:cNvSpPr>
+          <p:nvPr>
+            <p:ph idx="1"/>
+          </p:nvPr>
+        </p:nvSpPr>
+        <p:spPr/>
+        <p:txBody>
+          <a:bodyPr/>
+          <a:lstStyle/>
+          <a:p>
+            <a:r>
+              <a:rPr lang="ru-RU" dirty="0" err="1" smtClean="0"/>
+              <a:t>АвтоМЛ</a:t>
+            </a:r>
+            <a:r>
+              <a:rPr lang="ru-RU" dirty="0" smtClean="0"/>
+              <a:t> – как автоматизировать мониторинг</a:t>
+            </a:r>
+            <a:endParaRPr lang="ru-RU" dirty="0"/>
+          </a:p>
+        </p:txBody>
+      </p:sp>
+    </p:spTree>
+    <p:extLst>
+      <p:ext uri="{BB962C8B-B14F-4D97-AF65-F5344CB8AC3E}">
+        <p14:creationId xmlns:p14="http://schemas.microsoft.com/office/powerpoint/2010/main" val="700151694"/>
+      </p:ext>
+    </p:extLst>
+  </p:cSld>
+  <p:clrMapOvr>
+    <a:masterClrMapping/>
+  </p:clrMapOvr>
+  <p:timing>
+    <p:tnLst>
+      <p:par>
+        <p:cTn id="1" dur="indefinite" restart="never" nodeType="tmRoot"/>
+      </p:par>
+    </p:tnLst>
+  </p:timing>
+</p:sld>
+</file>
+
+<file path=ppt/slides/slide6.xml><?xml version="1.0" encoding="utf-8"?>
+<p:sld xmlns:a="http://schemas.openxmlformats.org/drawingml/2006/main" xmlns:r="http://schemas.openxmlformats.org/officeDocument/2006/relationships" xmlns:p="http://schemas.openxmlformats.org/presentationml/2006/main">
+  <p:cSld>
+    <p:spTree>
+      <p:nvGrpSpPr>
+        <p:cNvPr id="1" name=""/>
+        <p:cNvGrpSpPr/>
+        <p:nvPr/>
+      </p:nvGrpSpPr>
+      <p:grpSpPr>
+        <a:xfrm>
+          <a:off x="0" y="0"/>
+          <a:ext cx="0" cy="0"/>
+          <a:chOff x="0" y="0"/>
+          <a:chExt cx="0" cy="0"/>
+        </a:xfrm>
+      </p:grpSpPr>
+      <p:sp>
+        <p:nvSpPr>
+          <p:cNvPr id="2" name="Заголовок 1"/>
+          <p:cNvSpPr>
+            <a:spLocks noGrp="1"/>
+          </p:cNvSpPr>
+          <p:nvPr>
+            <p:ph type="title"/>
+          </p:nvPr>
+        </p:nvSpPr>
+        <p:spPr/>
+        <p:txBody>
+          <a:bodyPr/>
+          <a:lstStyle/>
+          <a:p>
+            <a:endParaRPr lang="ru-RU"/>
+          </a:p>
+        </p:txBody>
+      </p:sp>
+      <p:sp>
+        <p:nvSpPr>
+          <p:cNvPr id="3" name="Объект 2"/>
+          <p:cNvSpPr>
+            <a:spLocks noGrp="1"/>
+          </p:cNvSpPr>
+          <p:nvPr>
+            <p:ph idx="1"/>
+          </p:nvPr>
+        </p:nvSpPr>
+        <p:spPr>
+          <a:xfrm>
+            <a:off x="666078" y="1836382"/>
+            <a:ext cx="10515600" cy="4351338"/>
+          </a:xfrm>
+        </p:spPr>
+        <p:txBody>
+          <a:bodyPr/>
+          <a:lstStyle/>
+          <a:p>
+            <a:r>
+              <a:rPr lang="ru-RU" dirty="0" smtClean="0"/>
+              <a:t>Настройка </a:t>
+            </a:r>
+            <a:r>
+              <a:rPr lang="ru-RU" dirty="0" err="1" smtClean="0"/>
+              <a:t>пайплайна</a:t>
+            </a:r>
+            <a:r>
+              <a:rPr lang="ru-RU" dirty="0" smtClean="0"/>
+              <a:t> предсказания ВР</a:t>
+            </a:r>
+            <a:endParaRPr lang="ru-RU" dirty="0"/>
+          </a:p>
+        </p:txBody>
+      </p:sp>
+    </p:spTree>
+    <p:extLst>
+      <p:ext uri="{BB962C8B-B14F-4D97-AF65-F5344CB8AC3E}">
+        <p14:creationId xmlns:p14="http://schemas.microsoft.com/office/powerpoint/2010/main" val="1584594910"/>
+      </p:ext>
+    </p:extLst>
+  </p:cSld>
+  <p:clrMapOvr>
+    <a:masterClrMapping/>
+  </p:clrMapOvr>
+  <p:timing>
+    <p:tnLst>
+      <p:par>
+        <p:cTn id="1" dur="indefinite" restart="never" nodeType="tmRoot"/>
+      </p:par>
+    </p:tnLst>
+  </p:timing>
+</p:sld>
+</file>
+
+<file path=ppt/slides/slide7.xml><?xml version="1.0" encoding="utf-8"?>
+<p:sld xmlns:a="http://schemas.openxmlformats.org/drawingml/2006/main" xmlns:r="http://schemas.openxmlformats.org/officeDocument/2006/relationships" xmlns:p="http://schemas.openxmlformats.org/presentationml/2006/main">
+  <p:cSld>
+    <p:spTree>
+      <p:nvGrpSpPr>
+        <p:cNvPr id="1" name=""/>
+        <p:cNvGrpSpPr/>
+        <p:nvPr/>
+      </p:nvGrpSpPr>
+      <p:grpSpPr>
+        <a:xfrm>
+          <a:off x="0" y="0"/>
+          <a:ext cx="0" cy="0"/>
+          <a:chOff x="0" y="0"/>
+          <a:chExt cx="0" cy="0"/>
+        </a:xfrm>
+      </p:grpSpPr>
+      <p:sp>
+        <p:nvSpPr>
+          <p:cNvPr id="2" name="Заголовок 1"/>
+          <p:cNvSpPr>
+            <a:spLocks noGrp="1"/>
+          </p:cNvSpPr>
+          <p:nvPr>
+            <p:ph type="title"/>
+          </p:nvPr>
+        </p:nvSpPr>
+        <p:spPr/>
+        <p:txBody>
+          <a:bodyPr/>
+          <a:lstStyle/>
+          <a:p>
+            <a:endParaRPr lang="ru-RU"/>
+          </a:p>
+        </p:txBody>
+      </p:sp>
+      <p:sp>
+        <p:nvSpPr>
+          <p:cNvPr id="3" name="Объект 2"/>
+          <p:cNvSpPr>
+            <a:spLocks noGrp="1"/>
+          </p:cNvSpPr>
+          <p:nvPr>
+            <p:ph idx="1"/>
+          </p:nvPr>
+        </p:nvSpPr>
+        <p:spPr/>
+        <p:txBody>
+          <a:bodyPr/>
+          <a:lstStyle/>
+          <a:p>
+            <a:r>
+              <a:rPr lang="ru-RU" dirty="0" smtClean="0"/>
+              <a:t>Сложные данные: пространственно-временны ряды (поля)</a:t>
+            </a:r>
+            <a:endParaRPr lang="ru-RU" dirty="0"/>
+          </a:p>
+        </p:txBody>
+      </p:sp>
+    </p:spTree>
+    <p:extLst>
+      <p:ext uri="{BB962C8B-B14F-4D97-AF65-F5344CB8AC3E}">
+        <p14:creationId xmlns:p14="http://schemas.microsoft.com/office/powerpoint/2010/main" val="3304283703"/>
+      </p:ext>
+    </p:extLst>
+  </p:cSld>
+  <p:clrMapOvr>
+    <a:masterClrMapping/>
+  </p:clrMapOvr>
+  <p:timing>
+    <p:tnLst>
+      <p:par>
+        <p:cTn id="1" dur="indefinite" restart="never" nodeType="tmRoot"/>
+      </p:par>
+    </p:tnLst>
+  </p:timing>
+</p:sld>
+</file>
+
+<file path=ppt/slides/slide8.xml><?xml version="1.0" encoding="utf-8"?>
+<p:sld xmlns:a="http://schemas.openxmlformats.org/drawingml/2006/main" xmlns:r="http://schemas.openxmlformats.org/officeDocument/2006/relationships" xmlns:p="http://schemas.openxmlformats.org/presentationml/2006/main">
+  <p:cSld>
+    <p:spTree>
+      <p:nvGrpSpPr>
+        <p:cNvPr id="1" name=""/>
+        <p:cNvGrpSpPr/>
+        <p:nvPr/>
+      </p:nvGrpSpPr>
+      <p:grpSpPr>
+        <a:xfrm>
+          <a:off x="0" y="0"/>
+          <a:ext cx="0" cy="0"/>
+          <a:chOff x="0" y="0"/>
+          <a:chExt cx="0" cy="0"/>
+        </a:xfrm>
+      </p:grpSpPr>
+      <p:sp>
+        <p:nvSpPr>
+          <p:cNvPr id="2" name="Заголовок 1"/>
+          <p:cNvSpPr>
+            <a:spLocks noGrp="1"/>
+          </p:cNvSpPr>
+          <p:nvPr>
+            <p:ph type="title"/>
+          </p:nvPr>
+        </p:nvSpPr>
+        <p:spPr>
+          <a:xfrm>
+            <a:off x="236668" y="365125"/>
+            <a:ext cx="11117132" cy="549275"/>
+          </a:xfrm>
+        </p:spPr>
+        <p:txBody>
+          <a:bodyPr>
+            <a:normAutofit fontScale="90000"/>
+          </a:bodyPr>
+          <a:lstStyle/>
+          <a:p>
+            <a:pPr algn="ctr"/>
+            <a:r>
+              <a:rPr lang="ru-RU" dirty="0" smtClean="0">
+                <a:latin typeface="Arial" panose="020B0604020202020204" pitchFamily="34" charset="0"/>
+                <a:cs typeface="Arial" panose="020B0604020202020204" pitchFamily="34" charset="0"/>
+              </a:rPr>
+              <a:t>Вопросы мониторинга моделей</a:t>
+            </a:r>
+            <a:endParaRPr lang="ru-RU" dirty="0">
+              <a:latin typeface="Arial" panose="020B0604020202020204" pitchFamily="34" charset="0"/>
+              <a:cs typeface="Arial" panose="020B0604020202020204" pitchFamily="34" charset="0"/>
+            </a:endParaRPr>
+          </a:p>
+        </p:txBody>
+      </p:sp>
+      <p:graphicFrame>
+        <p:nvGraphicFramePr>
+          <p:cNvPr id="6" name="Объект 5"/>
+          <p:cNvGraphicFramePr>
+            <a:graphicFrameLocks noGrp="1"/>
+          </p:cNvGraphicFramePr>
+          <p:nvPr>
+            <p:ph idx="1"/>
+            <p:extLst>
+              <p:ext uri="{D42A27DB-BD31-4B8C-83A1-F6EECF244321}">
+                <p14:modId xmlns:p14="http://schemas.microsoft.com/office/powerpoint/2010/main" val="367887244"/>
+              </p:ext>
+            </p:extLst>
+          </p:nvPr>
+        </p:nvGraphicFramePr>
+        <p:xfrm>
+          <a:off x="128962" y="914400"/>
+          <a:ext cx="11898088" cy="4924584"/>
+        </p:xfrm>
+        <a:graphic>
+          <a:graphicData uri="http://schemas.openxmlformats.org/drawingml/2006/table">
+            <a:tbl>
+              <a:tblPr>
+                <a:tableStyleId>{5940675A-B579-460E-94D1-54222C63F5DA}</a:tableStyleId>
+              </a:tblPr>
+              <a:tblGrid>
+                <a:gridCol w="2969240">
+                  <a:extLst>
+                    <a:ext uri="{9D8B030D-6E8A-4147-A177-3AD203B41FA5}">
+                      <a16:colId xmlns:a16="http://schemas.microsoft.com/office/drawing/2014/main" val="1935975110"/>
+                    </a:ext>
+                  </a:extLst>
+                </a:gridCol>
+                <a:gridCol w="5970494">
+                  <a:extLst>
+                    <a:ext uri="{9D8B030D-6E8A-4147-A177-3AD203B41FA5}">
+                      <a16:colId xmlns:a16="http://schemas.microsoft.com/office/drawing/2014/main" val="2622498994"/>
+                    </a:ext>
+                  </a:extLst>
+                </a:gridCol>
+                <a:gridCol w="2958354">
+                  <a:extLst>
+                    <a:ext uri="{9D8B030D-6E8A-4147-A177-3AD203B41FA5}">
+                      <a16:colId xmlns:a16="http://schemas.microsoft.com/office/drawing/2014/main" val="3563236697"/>
+                    </a:ext>
+                  </a:extLst>
+                </a:gridCol>
+              </a:tblGrid>
+              <a:tr h="116034">
+                <a:tc>
+                  <a:txBody>
+                    <a:bodyPr/>
+                    <a:lstStyle/>
+                    <a:p>
+                      <a:pPr algn="ctr" fontAlgn="b"/>
+                      <a:r>
+                        <a:rPr lang="ru-RU" sz="2000" u="none" strike="noStrike" dirty="0" smtClean="0">
+                          <a:effectLst/>
+                          <a:latin typeface="Arial" panose="020B0604020202020204" pitchFamily="34" charset="0"/>
+                          <a:cs typeface="Arial" panose="020B0604020202020204" pitchFamily="34" charset="0"/>
+                        </a:rPr>
+                        <a:t>Элемент</a:t>
+                      </a:r>
+                      <a:endParaRPr lang="ru-RU" sz="2000" b="0" i="0" u="none" strike="noStrike" dirty="0">
+                        <a:solidFill>
+                          <a:srgbClr val="000000"/>
+                        </a:solidFill>
+                        <a:effectLst/>
+                        <a:latin typeface="Arial" panose="020B0604020202020204" pitchFamily="34" charset="0"/>
+                        <a:cs typeface="Arial" panose="020B0604020202020204" pitchFamily="34" charset="0"/>
+                      </a:endParaRPr>
+                    </a:p>
+                  </a:txBody>
+                  <a:tcPr marL="7964" marR="7964" marT="7964" marB="0" anchor="b"/>
+                </a:tc>
+                <a:tc>
+                  <a:txBody>
+                    <a:bodyPr/>
+                    <a:lstStyle/>
+                    <a:p>
+                      <a:pPr algn="ctr" fontAlgn="b"/>
+                      <a:r>
+                        <a:rPr lang="ru-RU" sz="2000" u="none" strike="noStrike">
+                          <a:effectLst/>
+                          <a:latin typeface="Arial" panose="020B0604020202020204" pitchFamily="34" charset="0"/>
+                          <a:cs typeface="Arial" panose="020B0604020202020204" pitchFamily="34" charset="0"/>
+                        </a:rPr>
+                        <a:t>Почему важен</a:t>
+                      </a:r>
+                      <a:endParaRPr lang="ru-RU" sz="2000" b="0" i="0" u="none" strike="noStrike">
+                        <a:solidFill>
+                          <a:srgbClr val="000000"/>
+                        </a:solidFill>
+                        <a:effectLst/>
+                        <a:latin typeface="Arial" panose="020B0604020202020204" pitchFamily="34" charset="0"/>
+                        <a:cs typeface="Arial" panose="020B0604020202020204" pitchFamily="34" charset="0"/>
+                      </a:endParaRPr>
+                    </a:p>
+                  </a:txBody>
+                  <a:tcPr marL="7964" marR="7964" marT="7964" marB="0" anchor="b"/>
+                </a:tc>
+                <a:tc>
+                  <a:txBody>
+                    <a:bodyPr/>
+                    <a:lstStyle/>
+                    <a:p>
+                      <a:pPr algn="ctr" fontAlgn="b"/>
+                      <a:r>
+                        <a:rPr lang="ru-RU" sz="2000" u="none" strike="noStrike" dirty="0" smtClean="0">
+                          <a:effectLst/>
+                          <a:latin typeface="Arial" panose="020B0604020202020204" pitchFamily="34" charset="0"/>
+                          <a:cs typeface="Arial" panose="020B0604020202020204" pitchFamily="34" charset="0"/>
+                        </a:rPr>
+                        <a:t>Методы</a:t>
+                      </a:r>
+                      <a:r>
+                        <a:rPr lang="ru-RU" sz="2000" u="none" strike="noStrike" baseline="0" dirty="0" smtClean="0">
+                          <a:effectLst/>
+                          <a:latin typeface="Arial" panose="020B0604020202020204" pitchFamily="34" charset="0"/>
+                          <a:cs typeface="Arial" panose="020B0604020202020204" pitchFamily="34" charset="0"/>
+                        </a:rPr>
+                        <a:t> анализа</a:t>
+                      </a:r>
+                      <a:endParaRPr lang="ru-RU" sz="2000" b="0" i="0" u="none" strike="noStrike" dirty="0">
+                        <a:solidFill>
+                          <a:srgbClr val="000000"/>
+                        </a:solidFill>
+                        <a:effectLst/>
+                        <a:latin typeface="Arial" panose="020B0604020202020204" pitchFamily="34" charset="0"/>
+                        <a:cs typeface="Arial" panose="020B0604020202020204" pitchFamily="34" charset="0"/>
+                      </a:endParaRPr>
+                    </a:p>
+                  </a:txBody>
+                  <a:tcPr marL="7964" marR="7964" marT="7964" marB="0" anchor="b"/>
+                </a:tc>
+                <a:extLst>
+                  <a:ext uri="{0D108BD9-81ED-4DB2-BD59-A6C34878D82A}">
+                    <a16:rowId xmlns:a16="http://schemas.microsoft.com/office/drawing/2014/main" val="1453931446"/>
+                  </a:ext>
+                </a:extLst>
+              </a:tr>
+              <a:tr h="455271">
+                <a:tc>
+                  <a:txBody>
+                    <a:bodyPr/>
+                    <a:lstStyle/>
+                    <a:p>
+                      <a:pPr algn="ctr" fontAlgn="b"/>
+                      <a:r>
+                        <a:rPr lang="en-US" sz="2000" u="none" strike="noStrike" dirty="0" err="1">
+                          <a:effectLst/>
+                          <a:latin typeface="Arial" panose="020B0604020202020204" pitchFamily="34" charset="0"/>
+                          <a:cs typeface="Arial" panose="020B0604020202020204" pitchFamily="34" charset="0"/>
+                        </a:rPr>
+                        <a:t>Explainability</a:t>
+                      </a:r>
+                      <a:r>
+                        <a:rPr lang="en-US" sz="2000" u="none" strike="noStrike" dirty="0">
+                          <a:effectLst/>
+                          <a:latin typeface="Arial" panose="020B0604020202020204" pitchFamily="34" charset="0"/>
+                          <a:cs typeface="Arial" panose="020B0604020202020204" pitchFamily="34" charset="0"/>
+                        </a:rPr>
+                        <a:t> </a:t>
+                      </a:r>
+                      <a:r>
+                        <a:rPr lang="ru-RU" sz="2000" u="none" strike="noStrike" dirty="0">
+                          <a:effectLst/>
+                          <a:latin typeface="Arial" panose="020B0604020202020204" pitchFamily="34" charset="0"/>
+                          <a:cs typeface="Arial" panose="020B0604020202020204" pitchFamily="34" charset="0"/>
+                        </a:rPr>
+                        <a:t>и интерпретируемость</a:t>
+                      </a:r>
+                      <a:endParaRPr lang="ru-RU" sz="2000" b="0" i="0" u="none" strike="noStrike" dirty="0">
+                        <a:solidFill>
+                          <a:srgbClr val="000000"/>
+                        </a:solidFill>
+                        <a:effectLst/>
+                        <a:latin typeface="Arial" panose="020B0604020202020204" pitchFamily="34" charset="0"/>
+                        <a:cs typeface="Arial" panose="020B0604020202020204" pitchFamily="34" charset="0"/>
+                      </a:endParaRPr>
+                    </a:p>
+                  </a:txBody>
+                  <a:tcPr marL="7964" marR="7964" marT="7964" marB="0" anchor="b"/>
+                </a:tc>
+                <a:tc>
+                  <a:txBody>
+                    <a:bodyPr/>
+                    <a:lstStyle/>
+                    <a:p>
+                      <a:pPr algn="ctr" fontAlgn="b"/>
+                      <a:r>
+                        <a:rPr lang="ru-RU" sz="2000" u="none" strike="noStrike">
+                          <a:effectLst/>
+                          <a:latin typeface="Arial" panose="020B0604020202020204" pitchFamily="34" charset="0"/>
+                          <a:cs typeface="Arial" panose="020B0604020202020204" pitchFamily="34" charset="0"/>
+                        </a:rPr>
+                        <a:t>В индустрии модели должны быть понятны бизнесу. Особенно для регулируемых отраслей (финансы, здравоохранение).</a:t>
+                      </a:r>
+                      <a:endParaRPr lang="ru-RU" sz="2000" b="0" i="0" u="none" strike="noStrike">
+                        <a:solidFill>
+                          <a:srgbClr val="000000"/>
+                        </a:solidFill>
+                        <a:effectLst/>
+                        <a:latin typeface="Arial" panose="020B0604020202020204" pitchFamily="34" charset="0"/>
+                        <a:cs typeface="Arial" panose="020B0604020202020204" pitchFamily="34" charset="0"/>
+                      </a:endParaRPr>
+                    </a:p>
+                  </a:txBody>
+                  <a:tcPr marL="7964" marR="7964" marT="7964" marB="0" anchor="b"/>
+                </a:tc>
+                <a:tc>
+                  <a:txBody>
+                    <a:bodyPr/>
+                    <a:lstStyle/>
+                    <a:p>
+                      <a:pPr algn="ctr" fontAlgn="b"/>
+                      <a:r>
+                        <a:rPr lang="en-US" sz="2000" u="none" strike="noStrike" dirty="0" smtClean="0">
+                          <a:effectLst/>
+                          <a:latin typeface="Arial" panose="020B0604020202020204" pitchFamily="34" charset="0"/>
+                          <a:cs typeface="Arial" panose="020B0604020202020204" pitchFamily="34" charset="0"/>
+                        </a:rPr>
+                        <a:t>SHAP</a:t>
+                      </a:r>
+                      <a:r>
+                        <a:rPr lang="ru-RU" sz="2000" u="none" strike="noStrike" dirty="0" smtClean="0">
+                          <a:effectLst/>
+                          <a:latin typeface="Arial" panose="020B0604020202020204" pitchFamily="34" charset="0"/>
+                          <a:cs typeface="Arial" panose="020B0604020202020204" pitchFamily="34" charset="0"/>
+                        </a:rPr>
+                        <a:t>,</a:t>
+                      </a:r>
+                      <a:r>
+                        <a:rPr lang="ru-RU" sz="2000" u="none" strike="noStrike" baseline="0" dirty="0" smtClean="0">
+                          <a:effectLst/>
+                          <a:latin typeface="Arial" panose="020B0604020202020204" pitchFamily="34" charset="0"/>
+                          <a:cs typeface="Arial" panose="020B0604020202020204" pitchFamily="34" charset="0"/>
+                        </a:rPr>
+                        <a:t> </a:t>
+                      </a:r>
+                      <a:r>
+                        <a:rPr lang="en-US" sz="2000" u="none" strike="noStrike" baseline="0" dirty="0" smtClean="0">
+                          <a:effectLst/>
+                          <a:latin typeface="Arial" panose="020B0604020202020204" pitchFamily="34" charset="0"/>
+                          <a:cs typeface="Arial" panose="020B0604020202020204" pitchFamily="34" charset="0"/>
+                        </a:rPr>
+                        <a:t>LIME, </a:t>
+                      </a:r>
+                      <a:r>
+                        <a:rPr lang="en-US" sz="2000" u="none" strike="noStrike" baseline="0" dirty="0" err="1" smtClean="0">
+                          <a:effectLst/>
+                          <a:latin typeface="Arial" panose="020B0604020202020204" pitchFamily="34" charset="0"/>
+                          <a:cs typeface="Arial" panose="020B0604020202020204" pitchFamily="34" charset="0"/>
+                        </a:rPr>
+                        <a:t>att.weights</a:t>
+                      </a:r>
+                      <a:r>
+                        <a:rPr lang="ru-RU" sz="2000" u="none" strike="noStrike" baseline="0" dirty="0" smtClean="0">
+                          <a:effectLst/>
+                          <a:latin typeface="Arial" panose="020B0604020202020204" pitchFamily="34" charset="0"/>
+                          <a:cs typeface="Arial" panose="020B0604020202020204" pitchFamily="34" charset="0"/>
+                        </a:rPr>
+                        <a:t> и другие</a:t>
+                      </a:r>
+                      <a:endParaRPr lang="en-US" sz="2000" b="0" i="0" u="none" strike="noStrike" dirty="0">
+                        <a:solidFill>
+                          <a:srgbClr val="000000"/>
+                        </a:solidFill>
+                        <a:effectLst/>
+                        <a:latin typeface="Arial" panose="020B0604020202020204" pitchFamily="34" charset="0"/>
+                        <a:cs typeface="Arial" panose="020B0604020202020204" pitchFamily="34" charset="0"/>
+                      </a:endParaRPr>
+                    </a:p>
+                  </a:txBody>
+                  <a:tcPr marL="7964" marR="7964" marT="7964" marB="0" anchor="b"/>
+                </a:tc>
+                <a:extLst>
+                  <a:ext uri="{0D108BD9-81ED-4DB2-BD59-A6C34878D82A}">
+                    <a16:rowId xmlns:a16="http://schemas.microsoft.com/office/drawing/2014/main" val="1984908693"/>
+                  </a:ext>
+                </a:extLst>
+              </a:tr>
+              <a:tr h="342192">
+                <a:tc>
+                  <a:txBody>
+                    <a:bodyPr/>
+                    <a:lstStyle/>
+                    <a:p>
+                      <a:pPr algn="ctr" fontAlgn="b"/>
+                      <a:r>
+                        <a:rPr lang="en-US" sz="2000" u="none" strike="noStrike" dirty="0">
+                          <a:effectLst/>
+                          <a:latin typeface="Arial" panose="020B0604020202020204" pitchFamily="34" charset="0"/>
+                          <a:cs typeface="Arial" panose="020B0604020202020204" pitchFamily="34" charset="0"/>
+                        </a:rPr>
+                        <a:t>Cost-sensitive forecasting</a:t>
+                      </a:r>
+                      <a:endParaRPr lang="en-US" sz="2000" b="0" i="0" u="none" strike="noStrike" dirty="0">
+                        <a:solidFill>
+                          <a:srgbClr val="000000"/>
+                        </a:solidFill>
+                        <a:effectLst/>
+                        <a:latin typeface="Arial" panose="020B0604020202020204" pitchFamily="34" charset="0"/>
+                        <a:cs typeface="Arial" panose="020B0604020202020204" pitchFamily="34" charset="0"/>
+                      </a:endParaRPr>
+                    </a:p>
+                  </a:txBody>
+                  <a:tcPr marL="7964" marR="7964" marT="7964" marB="0" anchor="b"/>
+                </a:tc>
+                <a:tc>
+                  <a:txBody>
+                    <a:bodyPr/>
+                    <a:lstStyle/>
+                    <a:p>
+                      <a:pPr algn="ctr" fontAlgn="b"/>
+                      <a:r>
+                        <a:rPr lang="ru-RU" sz="2000" u="none" strike="noStrike" dirty="0">
+                          <a:effectLst/>
+                          <a:latin typeface="Arial" panose="020B0604020202020204" pitchFamily="34" charset="0"/>
+                          <a:cs typeface="Arial" panose="020B0604020202020204" pitchFamily="34" charset="0"/>
+                        </a:rPr>
+                        <a:t>Не все ошибки одинаково дороги. Например, недооценка спроса в ритейле дороже переоценки.</a:t>
+                      </a:r>
+                      <a:endParaRPr lang="ru-RU" sz="2000" b="0" i="0" u="none" strike="noStrike" dirty="0">
+                        <a:solidFill>
+                          <a:srgbClr val="000000"/>
+                        </a:solidFill>
+                        <a:effectLst/>
+                        <a:latin typeface="Arial" panose="020B0604020202020204" pitchFamily="34" charset="0"/>
+                        <a:cs typeface="Arial" panose="020B0604020202020204" pitchFamily="34" charset="0"/>
+                      </a:endParaRPr>
+                    </a:p>
+                  </a:txBody>
+                  <a:tcPr marL="7964" marR="7964" marT="7964" marB="0" anchor="b"/>
+                </a:tc>
+                <a:tc>
+                  <a:txBody>
+                    <a:bodyPr/>
+                    <a:lstStyle/>
+                    <a:p>
+                      <a:pPr algn="ctr" fontAlgn="b"/>
+                      <a:r>
+                        <a:rPr lang="ru-RU" sz="2000" u="none" strike="noStrike" dirty="0">
+                          <a:effectLst/>
+                          <a:latin typeface="Arial" panose="020B0604020202020204" pitchFamily="34" charset="0"/>
+                          <a:cs typeface="Arial" panose="020B0604020202020204" pitchFamily="34" charset="0"/>
+                        </a:rPr>
+                        <a:t>Включить в метрики: </a:t>
+                      </a:r>
+                      <a:r>
+                        <a:rPr lang="ru-RU" sz="2000" u="none" strike="noStrike" dirty="0" smtClean="0">
+                          <a:effectLst/>
+                          <a:latin typeface="Arial" panose="020B0604020202020204" pitchFamily="34" charset="0"/>
+                          <a:cs typeface="Arial" panose="020B0604020202020204" pitchFamily="34" charset="0"/>
+                        </a:rPr>
+                        <a:t>асимметричные </a:t>
+                      </a:r>
+                      <a:r>
+                        <a:rPr lang="ru-RU" sz="2000" u="none" strike="noStrike" dirty="0" err="1">
+                          <a:effectLst/>
+                          <a:latin typeface="Arial" panose="020B0604020202020204" pitchFamily="34" charset="0"/>
+                          <a:cs typeface="Arial" panose="020B0604020202020204" pitchFamily="34" charset="0"/>
+                        </a:rPr>
+                        <a:t>лоссы</a:t>
+                      </a:r>
+                      <a:r>
+                        <a:rPr lang="ru-RU" sz="2000" u="none" strike="noStrike" dirty="0">
+                          <a:effectLst/>
+                          <a:latin typeface="Arial" panose="020B0604020202020204" pitchFamily="34" charset="0"/>
+                          <a:cs typeface="Arial" panose="020B0604020202020204" pitchFamily="34" charset="0"/>
+                        </a:rPr>
+                        <a:t> </a:t>
+                      </a:r>
+                      <a:r>
+                        <a:rPr lang="en-US" sz="2000" u="none" strike="noStrike" dirty="0" smtClean="0">
+                          <a:effectLst/>
+                          <a:latin typeface="Arial" panose="020B0604020202020204" pitchFamily="34" charset="0"/>
+                          <a:cs typeface="Arial" panose="020B0604020202020204" pitchFamily="34" charset="0"/>
+                        </a:rPr>
+                        <a:t> pinball loss,</a:t>
+                      </a:r>
+                      <a:r>
+                        <a:rPr lang="ru-RU" sz="2000" u="none" strike="noStrike" baseline="0" dirty="0" smtClean="0">
+                          <a:effectLst/>
+                          <a:latin typeface="Arial" panose="020B0604020202020204" pitchFamily="34" charset="0"/>
+                          <a:cs typeface="Arial" panose="020B0604020202020204" pitchFamily="34" charset="0"/>
+                        </a:rPr>
+                        <a:t> и </a:t>
+                      </a:r>
+                      <a:r>
+                        <a:rPr lang="ru-RU" sz="2000" u="none" strike="noStrike" baseline="0" dirty="0" err="1" smtClean="0">
+                          <a:effectLst/>
+                          <a:latin typeface="Arial" panose="020B0604020202020204" pitchFamily="34" charset="0"/>
+                          <a:cs typeface="Arial" panose="020B0604020202020204" pitchFamily="34" charset="0"/>
+                        </a:rPr>
+                        <a:t>тд</a:t>
+                      </a:r>
+                      <a:endParaRPr lang="ru-RU" sz="2000" b="0" i="0" u="none" strike="noStrike" dirty="0">
+                        <a:solidFill>
+                          <a:srgbClr val="000000"/>
+                        </a:solidFill>
+                        <a:effectLst/>
+                        <a:latin typeface="Arial" panose="020B0604020202020204" pitchFamily="34" charset="0"/>
+                        <a:cs typeface="Arial" panose="020B0604020202020204" pitchFamily="34" charset="0"/>
+                      </a:endParaRPr>
+                    </a:p>
+                  </a:txBody>
+                  <a:tcPr marL="7964" marR="7964" marT="7964" marB="0" anchor="b"/>
+                </a:tc>
+                <a:extLst>
+                  <a:ext uri="{0D108BD9-81ED-4DB2-BD59-A6C34878D82A}">
+                    <a16:rowId xmlns:a16="http://schemas.microsoft.com/office/drawing/2014/main" val="3628180001"/>
+                  </a:ext>
+                </a:extLst>
+              </a:tr>
+              <a:tr h="455271">
+                <a:tc>
+                  <a:txBody>
+                    <a:bodyPr/>
+                    <a:lstStyle/>
+                    <a:p>
+                      <a:pPr algn="ctr" fontAlgn="b"/>
+                      <a:r>
+                        <a:rPr lang="ru-RU" sz="2000" u="none" strike="noStrike" dirty="0">
+                          <a:effectLst/>
+                          <a:latin typeface="Arial" panose="020B0604020202020204" pitchFamily="34" charset="0"/>
+                          <a:cs typeface="Arial" panose="020B0604020202020204" pitchFamily="34" charset="0"/>
+                        </a:rPr>
+                        <a:t>Интерактивная </a:t>
+                      </a:r>
+                      <a:r>
+                        <a:rPr lang="ru-RU" sz="2000" u="none" strike="noStrike" dirty="0" err="1">
+                          <a:effectLst/>
+                          <a:latin typeface="Arial" panose="020B0604020202020204" pitchFamily="34" charset="0"/>
+                          <a:cs typeface="Arial" panose="020B0604020202020204" pitchFamily="34" charset="0"/>
+                        </a:rPr>
+                        <a:t>валидация</a:t>
+                      </a:r>
+                      <a:r>
+                        <a:rPr lang="ru-RU" sz="2000" u="none" strike="noStrike" dirty="0">
+                          <a:effectLst/>
+                          <a:latin typeface="Arial" panose="020B0604020202020204" pitchFamily="34" charset="0"/>
+                          <a:cs typeface="Arial" panose="020B0604020202020204" pitchFamily="34" charset="0"/>
+                        </a:rPr>
+                        <a:t> и A/B-тестирование моделей</a:t>
+                      </a:r>
+                      <a:endParaRPr lang="ru-RU" sz="2000" b="0" i="0" u="none" strike="noStrike" dirty="0">
+                        <a:solidFill>
+                          <a:srgbClr val="000000"/>
+                        </a:solidFill>
+                        <a:effectLst/>
+                        <a:latin typeface="Arial" panose="020B0604020202020204" pitchFamily="34" charset="0"/>
+                        <a:cs typeface="Arial" panose="020B0604020202020204" pitchFamily="34" charset="0"/>
+                      </a:endParaRPr>
+                    </a:p>
+                  </a:txBody>
+                  <a:tcPr marL="7964" marR="7964" marT="7964" marB="0" anchor="b"/>
+                </a:tc>
+                <a:tc>
+                  <a:txBody>
+                    <a:bodyPr/>
+                    <a:lstStyle/>
+                    <a:p>
+                      <a:pPr algn="ctr" fontAlgn="b"/>
+                      <a:r>
+                        <a:rPr lang="ru-RU" sz="2000" u="none" strike="noStrike" dirty="0">
+                          <a:effectLst/>
+                          <a:latin typeface="Arial" panose="020B0604020202020204" pitchFamily="34" charset="0"/>
+                          <a:cs typeface="Arial" panose="020B0604020202020204" pitchFamily="34" charset="0"/>
+                        </a:rPr>
+                        <a:t>В </a:t>
+                      </a:r>
+                      <a:r>
+                        <a:rPr lang="ru-RU" sz="2000" u="none" strike="noStrike" dirty="0" err="1">
+                          <a:effectLst/>
+                          <a:latin typeface="Arial" panose="020B0604020202020204" pitchFamily="34" charset="0"/>
+                          <a:cs typeface="Arial" panose="020B0604020202020204" pitchFamily="34" charset="0"/>
+                        </a:rPr>
+                        <a:t>production</a:t>
+                      </a:r>
+                      <a:r>
+                        <a:rPr lang="ru-RU" sz="2000" u="none" strike="noStrike" dirty="0">
+                          <a:effectLst/>
+                          <a:latin typeface="Arial" panose="020B0604020202020204" pitchFamily="34" charset="0"/>
+                          <a:cs typeface="Arial" panose="020B0604020202020204" pitchFamily="34" charset="0"/>
+                        </a:rPr>
+                        <a:t> нельзя полагаться только на RMSE. Нужно тестирование на реальных решениях.</a:t>
+                      </a:r>
+                      <a:endParaRPr lang="ru-RU" sz="2000" b="0" i="0" u="none" strike="noStrike" dirty="0">
+                        <a:solidFill>
+                          <a:srgbClr val="000000"/>
+                        </a:solidFill>
+                        <a:effectLst/>
+                        <a:latin typeface="Arial" panose="020B0604020202020204" pitchFamily="34" charset="0"/>
+                        <a:cs typeface="Arial" panose="020B0604020202020204" pitchFamily="34" charset="0"/>
+                      </a:endParaRPr>
+                    </a:p>
+                  </a:txBody>
+                  <a:tcPr marL="7964" marR="7964" marT="7964" marB="0" anchor="b"/>
+                </a:tc>
+                <a:tc>
+                  <a:txBody>
+                    <a:bodyPr/>
+                    <a:lstStyle/>
+                    <a:p>
+                      <a:pPr algn="ctr" fontAlgn="b"/>
+                      <a:r>
+                        <a:rPr lang="ru-RU" sz="2000" u="none" strike="noStrike" dirty="0">
+                          <a:effectLst/>
+                          <a:latin typeface="Arial" panose="020B0604020202020204" pitchFamily="34" charset="0"/>
+                          <a:cs typeface="Arial" panose="020B0604020202020204" pitchFamily="34" charset="0"/>
+                        </a:rPr>
+                        <a:t>Добавить: </a:t>
+                      </a:r>
+                      <a:r>
+                        <a:rPr lang="en-US" sz="2000" u="none" strike="noStrike" dirty="0" smtClean="0">
+                          <a:effectLst/>
+                          <a:latin typeface="Arial" panose="020B0604020202020204" pitchFamily="34" charset="0"/>
+                          <a:cs typeface="Arial" panose="020B0604020202020204" pitchFamily="34" charset="0"/>
+                        </a:rPr>
+                        <a:t>A/B-</a:t>
+                      </a:r>
+                      <a:r>
+                        <a:rPr lang="ru-RU" sz="2000" u="none" strike="noStrike" dirty="0" smtClean="0">
+                          <a:effectLst/>
+                          <a:latin typeface="Arial" panose="020B0604020202020204" pitchFamily="34" charset="0"/>
+                          <a:cs typeface="Arial" panose="020B0604020202020204" pitchFamily="34" charset="0"/>
+                        </a:rPr>
+                        <a:t>тесты, скрытые тесты и </a:t>
+                      </a:r>
+                      <a:r>
+                        <a:rPr lang="ru-RU" sz="2000" u="none" strike="noStrike" dirty="0" err="1" smtClean="0">
+                          <a:effectLst/>
+                          <a:latin typeface="Arial" panose="020B0604020202020204" pitchFamily="34" charset="0"/>
+                          <a:cs typeface="Arial" panose="020B0604020202020204" pitchFamily="34" charset="0"/>
+                        </a:rPr>
+                        <a:t>тд</a:t>
+                      </a:r>
+                      <a:endParaRPr lang="ru-RU" sz="2000" b="0" i="0" u="none" strike="noStrike" dirty="0">
+                        <a:solidFill>
+                          <a:srgbClr val="000000"/>
+                        </a:solidFill>
+                        <a:effectLst/>
+                        <a:latin typeface="Arial" panose="020B0604020202020204" pitchFamily="34" charset="0"/>
+                        <a:cs typeface="Arial" panose="020B0604020202020204" pitchFamily="34" charset="0"/>
+                      </a:endParaRPr>
+                    </a:p>
+                  </a:txBody>
+                  <a:tcPr marL="7964" marR="7964" marT="7964" marB="0" anchor="b"/>
+                </a:tc>
+                <a:extLst>
+                  <a:ext uri="{0D108BD9-81ED-4DB2-BD59-A6C34878D82A}">
+                    <a16:rowId xmlns:a16="http://schemas.microsoft.com/office/drawing/2014/main" val="2713287584"/>
+                  </a:ext>
+                </a:extLst>
+              </a:tr>
+              <a:tr h="455271">
+                <a:tc>
+                  <a:txBody>
+                    <a:bodyPr/>
+                    <a:lstStyle/>
+                    <a:p>
+                      <a:pPr algn="ctr" fontAlgn="b"/>
+                      <a:r>
+                        <a:rPr lang="ru-RU" sz="2000" u="none" strike="noStrike" dirty="0">
+                          <a:effectLst/>
+                          <a:latin typeface="Arial" panose="020B0604020202020204" pitchFamily="34" charset="0"/>
+                          <a:cs typeface="Arial" panose="020B0604020202020204" pitchFamily="34" charset="0"/>
+                        </a:rPr>
+                        <a:t>Работа с разреженными и нерегулярными временными рядами</a:t>
+                      </a:r>
+                      <a:endParaRPr lang="ru-RU" sz="2000" b="0" i="0" u="none" strike="noStrike" dirty="0">
+                        <a:solidFill>
+                          <a:srgbClr val="000000"/>
+                        </a:solidFill>
+                        <a:effectLst/>
+                        <a:latin typeface="Arial" panose="020B0604020202020204" pitchFamily="34" charset="0"/>
+                        <a:cs typeface="Arial" panose="020B0604020202020204" pitchFamily="34" charset="0"/>
+                      </a:endParaRPr>
+                    </a:p>
+                  </a:txBody>
+                  <a:tcPr marL="7964" marR="7964" marT="7964" marB="0" anchor="b"/>
+                </a:tc>
+                <a:tc>
+                  <a:txBody>
+                    <a:bodyPr/>
+                    <a:lstStyle/>
+                    <a:p>
+                      <a:pPr algn="ctr" fontAlgn="b"/>
+                      <a:r>
+                        <a:rPr lang="ru-RU" sz="2000" u="none" strike="noStrike" dirty="0">
+                          <a:effectLst/>
+                          <a:latin typeface="Arial" panose="020B0604020202020204" pitchFamily="34" charset="0"/>
+                          <a:cs typeface="Arial" panose="020B0604020202020204" pitchFamily="34" charset="0"/>
+                        </a:rPr>
+                        <a:t>Например, датчики с пропусками, события с переменной частотой.</a:t>
+                      </a:r>
+                      <a:endParaRPr lang="ru-RU" sz="2000" b="0" i="0" u="none" strike="noStrike" dirty="0">
+                        <a:solidFill>
+                          <a:srgbClr val="000000"/>
+                        </a:solidFill>
+                        <a:effectLst/>
+                        <a:latin typeface="Arial" panose="020B0604020202020204" pitchFamily="34" charset="0"/>
+                        <a:cs typeface="Arial" panose="020B0604020202020204" pitchFamily="34" charset="0"/>
+                      </a:endParaRPr>
+                    </a:p>
+                  </a:txBody>
+                  <a:tcPr marL="7964" marR="7964" marT="7964" marB="0" anchor="b"/>
+                </a:tc>
+                <a:tc>
+                  <a:txBody>
+                    <a:bodyPr/>
+                    <a:lstStyle/>
+                    <a:p>
+                      <a:pPr algn="ctr" fontAlgn="b"/>
+                      <a:r>
+                        <a:rPr lang="ru-RU" sz="2000" u="none" strike="noStrike" dirty="0" smtClean="0">
+                          <a:effectLst/>
+                          <a:latin typeface="Arial" panose="020B0604020202020204" pitchFamily="34" charset="0"/>
+                          <a:cs typeface="Arial" panose="020B0604020202020204" pitchFamily="34" charset="0"/>
+                        </a:rPr>
+                        <a:t>Методы интерполяции,</a:t>
+                      </a:r>
+                      <a:r>
+                        <a:rPr lang="ru-RU" sz="2000" u="none" strike="noStrike" baseline="0" dirty="0" smtClean="0">
+                          <a:effectLst/>
+                          <a:latin typeface="Arial" panose="020B0604020202020204" pitchFamily="34" charset="0"/>
+                          <a:cs typeface="Arial" panose="020B0604020202020204" pitchFamily="34" charset="0"/>
+                        </a:rPr>
+                        <a:t> заполнение пропусков, поиск выбросов</a:t>
+                      </a:r>
+                      <a:endParaRPr lang="en-US" sz="2000" b="0" i="0" u="none" strike="noStrike" dirty="0">
+                        <a:solidFill>
+                          <a:srgbClr val="000000"/>
+                        </a:solidFill>
+                        <a:effectLst/>
+                        <a:latin typeface="Arial" panose="020B0604020202020204" pitchFamily="34" charset="0"/>
+                        <a:cs typeface="Arial" panose="020B0604020202020204" pitchFamily="34" charset="0"/>
+                      </a:endParaRPr>
+                    </a:p>
+                  </a:txBody>
+                  <a:tcPr marL="7964" marR="7964" marT="7964" marB="0" anchor="b"/>
+                </a:tc>
+                <a:extLst>
+                  <a:ext uri="{0D108BD9-81ED-4DB2-BD59-A6C34878D82A}">
+                    <a16:rowId xmlns:a16="http://schemas.microsoft.com/office/drawing/2014/main" val="1152925224"/>
+                  </a:ext>
+                </a:extLst>
+              </a:tr>
+              <a:tr h="568350">
+                <a:tc>
+                  <a:txBody>
+                    <a:bodyPr/>
+                    <a:lstStyle/>
+                    <a:p>
+                      <a:pPr algn="ctr" fontAlgn="b"/>
+                      <a:r>
+                        <a:rPr lang="ru-RU" sz="2000" u="none" strike="noStrike">
+                          <a:effectLst/>
+                          <a:latin typeface="Arial" panose="020B0604020202020204" pitchFamily="34" charset="0"/>
+                          <a:cs typeface="Arial" panose="020B0604020202020204" pitchFamily="34" charset="0"/>
+                        </a:rPr>
+                        <a:t>Культурные и организационные аспекты</a:t>
+                      </a:r>
+                      <a:endParaRPr lang="ru-RU" sz="2000" b="0" i="0" u="none" strike="noStrike">
+                        <a:solidFill>
+                          <a:srgbClr val="000000"/>
+                        </a:solidFill>
+                        <a:effectLst/>
+                        <a:latin typeface="Arial" panose="020B0604020202020204" pitchFamily="34" charset="0"/>
+                        <a:cs typeface="Arial" panose="020B0604020202020204" pitchFamily="34" charset="0"/>
+                      </a:endParaRPr>
+                    </a:p>
+                  </a:txBody>
+                  <a:tcPr marL="7964" marR="7964" marT="7964" marB="0" anchor="b"/>
+                </a:tc>
+                <a:tc>
+                  <a:txBody>
+                    <a:bodyPr/>
+                    <a:lstStyle/>
+                    <a:p>
+                      <a:pPr algn="ctr" fontAlgn="b"/>
+                      <a:r>
+                        <a:rPr lang="ru-RU" sz="2000" u="none" strike="noStrike" dirty="0">
+                          <a:effectLst/>
+                          <a:latin typeface="Arial" panose="020B0604020202020204" pitchFamily="34" charset="0"/>
+                          <a:cs typeface="Arial" panose="020B0604020202020204" pitchFamily="34" charset="0"/>
+                        </a:rPr>
+                        <a:t>Даже лучшая модель провалится, если бизнес её не принимает.</a:t>
+                      </a:r>
+                      <a:endParaRPr lang="ru-RU" sz="2000" b="0" i="0" u="none" strike="noStrike" dirty="0">
+                        <a:solidFill>
+                          <a:srgbClr val="000000"/>
+                        </a:solidFill>
+                        <a:effectLst/>
+                        <a:latin typeface="Arial" panose="020B0604020202020204" pitchFamily="34" charset="0"/>
+                        <a:cs typeface="Arial" panose="020B0604020202020204" pitchFamily="34" charset="0"/>
+                      </a:endParaRPr>
+                    </a:p>
+                  </a:txBody>
+                  <a:tcPr marL="7964" marR="7964" marT="7964" marB="0" anchor="b"/>
+                </a:tc>
+                <a:tc>
+                  <a:txBody>
+                    <a:bodyPr/>
+                    <a:lstStyle/>
+                    <a:p>
+                      <a:pPr algn="ctr" fontAlgn="b"/>
+                      <a:r>
+                        <a:rPr lang="en-US" sz="2000" u="none" strike="noStrike" dirty="0" smtClean="0">
+                          <a:effectLst/>
+                          <a:latin typeface="Arial" panose="020B0604020202020204" pitchFamily="34" charset="0"/>
+                          <a:cs typeface="Arial" panose="020B0604020202020204" pitchFamily="34" charset="0"/>
+                        </a:rPr>
+                        <a:t>collaboration </a:t>
+                      </a:r>
+                      <a:r>
+                        <a:rPr lang="en-US" sz="2000" u="none" strike="noStrike" dirty="0">
+                          <a:effectLst/>
+                          <a:latin typeface="Arial" panose="020B0604020202020204" pitchFamily="34" charset="0"/>
+                          <a:cs typeface="Arial" panose="020B0604020202020204" pitchFamily="34" charset="0"/>
+                        </a:rPr>
+                        <a:t>between data scientists and domain experts</a:t>
+                      </a:r>
+                      <a:endParaRPr lang="en-US" sz="2000" b="0" i="0" u="none" strike="noStrike" dirty="0">
+                        <a:solidFill>
+                          <a:srgbClr val="000000"/>
+                        </a:solidFill>
+                        <a:effectLst/>
+                        <a:latin typeface="Arial" panose="020B0604020202020204" pitchFamily="34" charset="0"/>
+                        <a:cs typeface="Arial" panose="020B0604020202020204" pitchFamily="34" charset="0"/>
+                      </a:endParaRPr>
+                    </a:p>
+                  </a:txBody>
+                  <a:tcPr marL="7964" marR="7964" marT="7964" marB="0" anchor="b"/>
+                </a:tc>
+                <a:extLst>
+                  <a:ext uri="{0D108BD9-81ED-4DB2-BD59-A6C34878D82A}">
+                    <a16:rowId xmlns:a16="http://schemas.microsoft.com/office/drawing/2014/main" val="1004849099"/>
+                  </a:ext>
+                </a:extLst>
+              </a:tr>
+            </a:tbl>
+          </a:graphicData>
+        </a:graphic>
+      </p:graphicFrame>
+      <p:sp>
+        <p:nvSpPr>
+          <p:cNvPr id="7" name="Прямоугольник 6"/>
+          <p:cNvSpPr/>
+          <p:nvPr/>
+        </p:nvSpPr>
+        <p:spPr>
+          <a:xfrm>
+            <a:off x="128962" y="6336830"/>
+            <a:ext cx="3412024" cy="369332"/>
+          </a:xfrm>
+          <a:prstGeom prst="rect">
+            <a:avLst/>
+          </a:prstGeom>
+        </p:spPr>
+        <p:txBody>
+          <a:bodyPr wrap="none">
+            <a:spAutoFit/>
+          </a:bodyPr>
+          <a:lstStyle/>
+          <a:p>
+            <a:r>
+              <a:rPr lang="ru-RU" dirty="0">
+                <a:latin typeface="Arial" panose="020B0604020202020204" pitchFamily="34" charset="0"/>
+                <a:cs typeface="Arial" panose="020B0604020202020204" pitchFamily="34" charset="0"/>
+              </a:rPr>
+              <a:t>https://arxiv.org/pdf/2407.15909</a:t>
+            </a:r>
+          </a:p>
+        </p:txBody>
+      </p:sp>
+    </p:spTree>
+    <p:extLst>
+      <p:ext uri="{BB962C8B-B14F-4D97-AF65-F5344CB8AC3E}">
+        <p14:creationId xmlns:p14="http://schemas.microsoft.com/office/powerpoint/2010/main" val="3665195301"/>
+      </p:ext>
+    </p:extLst>
+  </p:cSld>
+  <p:clrMapOvr>
+    <a:masterClrMapping/>
+  </p:clrMapOvr>
+  <p:timing>
+    <p:tnLst>
+      <p:par>
+        <p:cTn id="1" dur="indefinite" restart="never" nodeType="tmRoot"/>
+      </p:par>
+    </p:tnLst>
+  </p:timing>
+</p:sld>
+</file>
+
+<file path=ppt/slides/slide9.xml><?xml version="1.0" encoding="utf-8"?>
+<p:sld xmlns:a="http://schemas.openxmlformats.org/drawingml/2006/main" xmlns:r="http://schemas.openxmlformats.org/officeDocument/2006/relationships" xmlns:p="http://schemas.openxmlformats.org/presentationml/2006/main">
+  <p:cSld>
+    <p:spTree>
+      <p:nvGrpSpPr>
+        <p:cNvPr id="1" name=""/>
+        <p:cNvGrpSpPr/>
+        <p:nvPr/>
+      </p:nvGrpSpPr>
+      <p:grpSpPr>
+        <a:xfrm>
+          <a:off x="0" y="0"/>
+          <a:ext cx="0" cy="0"/>
+          <a:chOff x="0" y="0"/>
+          <a:chExt cx="0" cy="0"/>
+        </a:xfrm>
+      </p:grpSpPr>
+      <p:sp>
+        <p:nvSpPr>
+          <p:cNvPr id="2" name="Заголовок 1"/>
+          <p:cNvSpPr>
+            <a:spLocks noGrp="1"/>
+          </p:cNvSpPr>
+          <p:nvPr>
+            <p:ph type="title"/>
+          </p:nvPr>
+        </p:nvSpPr>
+        <p:spPr/>
+        <p:txBody>
+          <a:bodyPr/>
+          <a:lstStyle/>
+          <a:p>
+            <a:endParaRPr lang="ru-RU"/>
+          </a:p>
+        </p:txBody>
+      </p:sp>
+      <p:sp>
+        <p:nvSpPr>
+          <p:cNvPr id="3" name="Объект 2"/>
+          <p:cNvSpPr>
+            <a:spLocks noGrp="1"/>
+          </p:cNvSpPr>
+          <p:nvPr>
+            <p:ph idx="1"/>
+          </p:nvPr>
+        </p:nvSpPr>
+        <p:spPr/>
+        <p:txBody>
+          <a:bodyPr/>
+          <a:lstStyle/>
+          <a:p>
+            <a:r>
+              <a:rPr lang="ru-RU" dirty="0" smtClean="0"/>
+              <a:t>Иерархические, групповые и другие типы ВР</a:t>
+            </a:r>
+            <a:endParaRPr lang="ru-RU" dirty="0"/>
+          </a:p>
+        </p:txBody>
+      </p:sp>
+    </p:spTree>
+    <p:extLst>
+      <p:ext uri="{BB962C8B-B14F-4D97-AF65-F5344CB8AC3E}">
+        <p14:creationId xmlns:p14="http://schemas.microsoft.com/office/powerpoint/2010/main" val="1590225426"/>
+      </p:ext>
+    </p:extLst>
+  </p:cSld>
+  <p:clrMapOvr>
+    <a:masterClrMapping/>
+  </p:clrMapOvr>
+  <p:timing>
+    <p:tnLst>
+      <p:par>
+        <p:cTn id="1" dur="indefinite" restart="never" nodeType="tmRoot"/>
+      </p:par>
+    </p:tnLst>
+  </p:timing>
 </p:sld>
 </file>
 
@@ -3793,4 +6393,265 @@
     </a:ext>
   </a:extLst>
 </a:theme>
+</file>
+
+<file path=ppt/theme/theme2.xml><?xml version="1.0" encoding="utf-8"?>
+<a:theme xmlns:a="http://schemas.openxmlformats.org/drawingml/2006/main" name="Тема Office">
+  <a:themeElements>
+    <a:clrScheme name="Стандартная">
+      <a:dk1>
+        <a:sysClr val="windowText" lastClr="000000"/>
+      </a:dk1>
+      <a:lt1>
+        <a:sysClr val="window" lastClr="FFFFFF"/>
+      </a:lt1>
+      <a:dk2>
+        <a:srgbClr val="44546A"/>
+      </a:dk2>
+      <a:lt2>
+        <a:srgbClr val="E7E6E6"/>
+      </a:lt2>
+      <a:accent1>
+        <a:srgbClr val="5B9BD5"/>
+      </a:accent1>
+      <a:accent2>
+        <a:srgbClr val="ED7D31"/>
+      </a:accent2>
+      <a:accent3>
+        <a:srgbClr val="A5A5A5"/>
+      </a:accent3>
+      <a:accent4>
+        <a:srgbClr val="FFC000"/>
+      </a:accent4>
+      <a:accent5>
+        <a:srgbClr val="4472C4"/>
+      </a:accent5>
+      <a:accent6>
+        <a:srgbClr val="70AD47"/>
+      </a:accent6>
+      <a:hlink>
+        <a:srgbClr val="0563C1"/>
+      </a:hlink>
+      <a:folHlink>
+        <a:srgbClr val="954F72"/>
+      </a:folHlink>
+    </a:clrScheme>
+    <a:fontScheme name="Стандартная">
+      <a:majorFont>
+        <a:latin typeface="Calibri Light" panose="020F0302020204030204"/>
+        <a:ea typeface=""/>
+        <a:cs typeface=""/>
+        <a:font script="Jpan" typeface="游ゴシック Light"/>
+        <a:font script="Hang" typeface="맑은 고딕"/>
+        <a:font script="Hans" typeface="等线 Light"/>
+        <a:font script="Hant" typeface="新細明體"/>
+        <a:font script="Arab" typeface="Times New Roman"/>
+        <a:font script="Hebr" typeface="Times New Roman"/>
+        <a:font script="Thai" typeface="Angsana New"/>
+        <a:font script="Ethi" typeface="Nyala"/>
+        <a:font script="Beng" typeface="Vrinda"/>
+        <a:font script="Gujr" typeface="Shruti"/>
+        <a:font script="Khmr" typeface="MoolBoran"/>
+        <a:font script="Knda" typeface="Tunga"/>
+        <a:font script="Guru" typeface="Raavi"/>
+        <a:font script="Cans" typeface="Euphemia"/>
+        <a:font script="Cher" typeface="Plantagenet Cherokee"/>
+        <a:font script="Yiii" typeface="Microsoft Yi Baiti"/>
+        <a:font script="Tibt" typeface="Microsoft Himalaya"/>
+        <a:font script="Thaa" typeface="MV Boli"/>
+        <a:font script="Deva" typeface="Mangal"/>
+        <a:font script="Telu" typeface="Gautami"/>
+        <a:font script="Taml" typeface="Latha"/>
+        <a:font script="Syrc" typeface="Estrangelo Edessa"/>
+        <a:font script="Orya" typeface="Kalinga"/>
+        <a:font script="Mlym" typeface="Kartika"/>
+        <a:font script="Laoo" typeface="DokChampa"/>
+        <a:font script="Sinh" typeface="Iskoola Pota"/>
+        <a:font script="Mong" typeface="Mongolian Baiti"/>
+        <a:font script="Viet" typeface="Times New Roman"/>
+        <a:font script="Uigh" typeface="Microsoft Uighur"/>
+        <a:font script="Geor" typeface="Sylfaen"/>
+      </a:majorFont>
+      <a:minorFont>
+        <a:latin typeface="Calibri" panose="020F0502020204030204"/>
+        <a:ea typeface=""/>
+        <a:cs typeface=""/>
+        <a:font script="Jpan" typeface="游ゴシック"/>
+        <a:font script="Hang" typeface="맑은 고딕"/>
+        <a:font script="Hans" typeface="等线"/>
+        <a:font script="Hant" typeface="新細明體"/>
+        <a:font script="Arab" typeface="Arial"/>
+        <a:font script="Hebr" typeface="Arial"/>
+        <a:font script="Thai" typeface="Cordia New"/>
+        <a:font script="Ethi" typeface="Nyala"/>
+        <a:font script="Beng" typeface="Vrinda"/>
+        <a:font script="Gujr" typeface="Shruti"/>
+        <a:font script="Khmr" typeface="DaunPenh"/>
+        <a:font script="Knda" typeface="Tunga"/>
+        <a:font script="Guru" typeface="Raavi"/>
+        <a:font script="Cans" typeface="Euphemia"/>
+        <a:font script="Cher" typeface="Plantagenet Cherokee"/>
+        <a:font script="Yiii" typeface="Microsoft Yi Baiti"/>
+        <a:font script="Tibt" typeface="Microsoft Himalaya"/>
+        <a:font script="Thaa" typeface="MV Boli"/>
+        <a:font script="Deva" typeface="Mangal"/>
+        <a:font script="Telu" typeface="Gautami"/>
+        <a:font script="Taml" typeface="Latha"/>
+        <a:font script="Syrc" typeface="Estrangelo Edessa"/>
+        <a:font script="Orya" typeface="Kalinga"/>
+        <a:font script="Mlym" typeface="Kartika"/>
+        <a:font script="Laoo" typeface="DokChampa"/>
+        <a:font script="Sinh" typeface="Iskoola Pota"/>
+        <a:font script="Mong" typeface="Mongolian Baiti"/>
+        <a:font script="Viet" typeface="Arial"/>
+        <a:font script="Uigh" typeface="Microsoft Uighur"/>
+        <a:font script="Geor" typeface="Sylfaen"/>
+      </a:minorFont>
+    </a:fontScheme>
+    <a:fmtScheme name="Стандартная">
+      <a:fillStyleLst>
+        <a:solidFill>
+          <a:schemeClr val="phClr"/>
+        </a:solidFill>
+        <a:gradFill rotWithShape="1">
+          <a:gsLst>
+            <a:gs pos="0">
+              <a:schemeClr val="phClr">
+                <a:lumMod val="110000"/>
+                <a:satMod val="105000"/>
+                <a:tint val="67000"/>
+              </a:schemeClr>
+            </a:gs>
+            <a:gs pos="50000">
+              <a:schemeClr val="phClr">
+                <a:lumMod val="105000"/>
+                <a:satMod val="103000"/>
+                <a:tint val="73000"/>
+              </a:schemeClr>
+            </a:gs>
+            <a:gs pos="100000">
+              <a:schemeClr val="phClr">
+                <a:lumMod val="105000"/>
+                <a:satMod val="109000"/>
+                <a:tint val="81000"/>
+              </a:schemeClr>
+            </a:gs>
+          </a:gsLst>
+          <a:lin ang="5400000" scaled="0"/>
+        </a:gradFill>
+        <a:gradFill rotWithShape="1">
+          <a:gsLst>
+            <a:gs pos="0">
+              <a:schemeClr val="phClr">
+                <a:satMod val="103000"/>
+                <a:lumMod val="102000"/>
+                <a:tint val="94000"/>
+              </a:schemeClr>
+            </a:gs>
+            <a:gs pos="50000">
+              <a:schemeClr val="phClr">
+                <a:satMod val="110000"/>
+                <a:lumMod val="100000"/>
+                <a:shade val="100000"/>
+              </a:schemeClr>
+            </a:gs>
+            <a:gs pos="100000">
+              <a:schemeClr val="phClr">
+                <a:lumMod val="99000"/>
+                <a:satMod val="120000"/>
+                <a:shade val="78000"/>
+              </a:schemeClr>
+            </a:gs>
+          </a:gsLst>
+          <a:lin ang="5400000" scaled="0"/>
+        </a:gradFill>
+      </a:fillStyleLst>
+      <a:lnStyleLst>
+        <a:ln w="6350" cap="flat" cmpd="sng" algn="ctr">
+          <a:solidFill>
+            <a:schemeClr val="phClr"/>
+          </a:solidFill>
+          <a:prstDash val="solid"/>
+          <a:miter lim="800000"/>
+        </a:ln>
+        <a:ln w="12700" cap="flat" cmpd="sng" algn="ctr">
+          <a:solidFill>
+            <a:schemeClr val="phClr"/>
+          </a:solidFill>
+          <a:prstDash val="solid"/>
+          <a:miter lim="800000"/>
+        </a:ln>
+        <a:ln w="19050" cap="flat" cmpd="sng" algn="ctr">
+          <a:solidFill>
+            <a:schemeClr val="phClr"/>
+          </a:solidFill>
+          <a:prstDash val="solid"/>
+          <a:miter lim="800000"/>
+        </a:ln>
+      </a:lnStyleLst>
+      <a:effectStyleLst>
+        <a:effectStyle>
+          <a:effectLst/>
+        </a:effectStyle>
+        <a:effectStyle>
+          <a:effectLst/>
+        </a:effectStyle>
+        <a:effectStyle>
+          <a:effectLst>
+            <a:outerShdw blurRad="57150" dist="19050" dir="5400000" algn="ctr" rotWithShape="0">
+              <a:srgbClr val="000000">
+                <a:alpha val="63000"/>
+              </a:srgbClr>
+            </a:outerShdw>
+          </a:effectLst>
+        </a:effectStyle>
+      </a:effectStyleLst>
+      <a:bgFillStyleLst>
+        <a:solidFill>
+          <a:schemeClr val="phClr"/>
+        </a:solidFill>
+        <a:solidFill>
+          <a:schemeClr val="phClr">
+            <a:tint val="95000"/>
+            <a:satMod val="170000"/>
+          </a:schemeClr>
+        </a:solidFill>
+        <a:gradFill rotWithShape="1">
+          <a:gsLst>
+            <a:gs pos="0">
+              <a:schemeClr val="phClr">
+                <a:tint val="93000"/>
+                <a:satMod val="150000"/>
+                <a:shade val="98000"/>
+                <a:lumMod val="102000"/>
+              </a:schemeClr>
+            </a:gs>
+            <a:gs pos="50000">
+              <a:schemeClr val="phClr">
+                <a:tint val="98000"/>
+                <a:satMod val="130000"/>
+                <a:shade val="90000"/>
+                <a:lumMod val="103000"/>
+              </a:schemeClr>
+            </a:gs>
+            <a:gs pos="100000">
+              <a:schemeClr val="phClr">
+                <a:shade val="63000"/>
+                <a:satMod val="120000"/>
+              </a:schemeClr>
+            </a:gs>
+          </a:gsLst>
+          <a:lin ang="5400000" scaled="0"/>
+        </a:gradFill>
+      </a:bgFillStyleLst>
+    </a:fmtScheme>
+  </a:themeElements>
+  <a:objectDefaults/>
+  <a:extraClrSchemeLst/>
+  <a:extLst>
+    <a:ext uri="{05A4C25C-085E-4340-85A3-A5531E510DB2}">
+      <thm15:themeFamily xmlns:thm15="http://schemas.microsoft.com/office/thememl/2012/main" name="Office Theme" id="{62F939B6-93AF-4DB8-9C6B-D6C7DFDC589F}" vid="{4A3C46E8-61CC-4603-A589-7422A47A8E4A}"/>
+    </a:ext>
+  </a:extLst>
+</a:theme>
 </file>
--- a/2025/LEC/08 работа с индустриальными ВР.pptx
+++ b/2025/LEC/08 работа с индустриальными ВР.pptx
@@ -208,7 +208,7 @@
           <a:p>
             <a:fld id="{4D261137-3209-437C-83DC-F965E582BD8E}" type="datetimeFigureOut">
               <a:rPr lang="ru-RU" smtClean="0"/>
-              <a:t>29.08.2025</a:t>
+              <a:t>31.08.2025</a:t>
             </a:fld>
             <a:endParaRPr lang="ru-RU"/>
           </a:p>
@@ -272,38 +272,37 @@
           <a:p>
             <a:pPr lvl="0"/>
             <a:r>
-              <a:rPr lang="ru-RU" smtClean="0"/>
+              <a:rPr lang="ru-RU"/>
               <a:t>Образец текста</a:t>
             </a:r>
           </a:p>
           <a:p>
             <a:pPr lvl="1"/>
             <a:r>
-              <a:rPr lang="ru-RU" smtClean="0"/>
+              <a:rPr lang="ru-RU"/>
               <a:t>Второй уровень</a:t>
             </a:r>
           </a:p>
           <a:p>
             <a:pPr lvl="2"/>
             <a:r>
-              <a:rPr lang="ru-RU" smtClean="0"/>
+              <a:rPr lang="ru-RU"/>
               <a:t>Третий уровень</a:t>
             </a:r>
           </a:p>
           <a:p>
             <a:pPr lvl="3"/>
             <a:r>
-              <a:rPr lang="ru-RU" smtClean="0"/>
+              <a:rPr lang="ru-RU"/>
               <a:t>Четвертый уровень</a:t>
             </a:r>
           </a:p>
           <a:p>
             <a:pPr lvl="4"/>
             <a:r>
-              <a:rPr lang="ru-RU" smtClean="0"/>
+              <a:rPr lang="ru-RU"/>
               <a:t>Пятый уровень</a:t>
             </a:r>
-            <a:endParaRPr lang="ru-RU"/>
           </a:p>
         </p:txBody>
       </p:sp>
@@ -520,272 +519,440 @@
           <a:bodyPr/>
           <a:lstStyle/>
           <a:p>
-            <a:r>
-              <a:rPr lang="ru-RU" dirty="0" smtClean="0"/>
+            <a:endParaRPr lang="ru-RU" dirty="0"/>
+          </a:p>
+        </p:txBody>
+      </p:sp>
+      <p:sp>
+        <p:nvSpPr>
+          <p:cNvPr id="4" name="Номер слайда 3"/>
+          <p:cNvSpPr>
+            <a:spLocks noGrp="1"/>
+          </p:cNvSpPr>
+          <p:nvPr>
+            <p:ph type="sldNum" sz="quarter" idx="5"/>
+          </p:nvPr>
+        </p:nvSpPr>
+        <p:spPr/>
+        <p:txBody>
+          <a:bodyPr/>
+          <a:lstStyle/>
+          <a:p>
+            <a:fld id="{3FA3954E-70F5-4A80-9064-71FC5C1DFC45}" type="slidenum">
+              <a:rPr lang="ru-RU" smtClean="0"/>
+              <a:t>2</a:t>
+            </a:fld>
+            <a:endParaRPr lang="ru-RU"/>
+          </a:p>
+        </p:txBody>
+      </p:sp>
+    </p:spTree>
+    <p:extLst>
+      <p:ext uri="{BB962C8B-B14F-4D97-AF65-F5344CB8AC3E}">
+        <p14:creationId xmlns:p14="http://schemas.microsoft.com/office/powerpoint/2010/main" val="4223903815"/>
+      </p:ext>
+    </p:extLst>
+  </p:cSld>
+  <p:clrMapOvr>
+    <a:masterClrMapping/>
+  </p:clrMapOvr>
+</p:notes>
+</file>
+
+<file path=ppt/notesSlides/notesSlide2.xml><?xml version="1.0" encoding="utf-8"?>
+<p:notes xmlns:a="http://schemas.openxmlformats.org/drawingml/2006/main" xmlns:r="http://schemas.openxmlformats.org/officeDocument/2006/relationships" xmlns:p="http://schemas.openxmlformats.org/presentationml/2006/main">
+  <p:cSld>
+    <p:spTree>
+      <p:nvGrpSpPr>
+        <p:cNvPr id="1" name=""/>
+        <p:cNvGrpSpPr/>
+        <p:nvPr/>
+      </p:nvGrpSpPr>
+      <p:grpSpPr>
+        <a:xfrm>
+          <a:off x="0" y="0"/>
+          <a:ext cx="0" cy="0"/>
+          <a:chOff x="0" y="0"/>
+          <a:chExt cx="0" cy="0"/>
+        </a:xfrm>
+      </p:grpSpPr>
+      <p:sp>
+        <p:nvSpPr>
+          <p:cNvPr id="2" name="Образ слайда 1"/>
+          <p:cNvSpPr>
+            <a:spLocks noGrp="1" noRot="1" noChangeAspect="1"/>
+          </p:cNvSpPr>
+          <p:nvPr>
+            <p:ph type="sldImg"/>
+          </p:nvPr>
+        </p:nvSpPr>
+        <p:spPr/>
+      </p:sp>
+      <p:sp>
+        <p:nvSpPr>
+          <p:cNvPr id="3" name="Заметки 2"/>
+          <p:cNvSpPr>
+            <a:spLocks noGrp="1"/>
+          </p:cNvSpPr>
+          <p:nvPr>
+            <p:ph type="body" idx="1"/>
+          </p:nvPr>
+        </p:nvSpPr>
+        <p:spPr/>
+        <p:txBody>
+          <a:bodyPr/>
+          <a:lstStyle/>
+          <a:p>
+            <a:endParaRPr lang="ru-RU" dirty="0"/>
+          </a:p>
+        </p:txBody>
+      </p:sp>
+      <p:sp>
+        <p:nvSpPr>
+          <p:cNvPr id="4" name="Номер слайда 3"/>
+          <p:cNvSpPr>
+            <a:spLocks noGrp="1"/>
+          </p:cNvSpPr>
+          <p:nvPr>
+            <p:ph type="sldNum" sz="quarter" idx="5"/>
+          </p:nvPr>
+        </p:nvSpPr>
+        <p:spPr/>
+        <p:txBody>
+          <a:bodyPr/>
+          <a:lstStyle/>
+          <a:p>
+            <a:fld id="{3FA3954E-70F5-4A80-9064-71FC5C1DFC45}" type="slidenum">
+              <a:rPr lang="ru-RU" smtClean="0"/>
+              <a:t>4</a:t>
+            </a:fld>
+            <a:endParaRPr lang="ru-RU"/>
+          </a:p>
+        </p:txBody>
+      </p:sp>
+    </p:spTree>
+    <p:extLst>
+      <p:ext uri="{BB962C8B-B14F-4D97-AF65-F5344CB8AC3E}">
+        <p14:creationId xmlns:p14="http://schemas.microsoft.com/office/powerpoint/2010/main" val="285969299"/>
+      </p:ext>
+    </p:extLst>
+  </p:cSld>
+  <p:clrMapOvr>
+    <a:masterClrMapping/>
+  </p:clrMapOvr>
+</p:notes>
+</file>
+
+<file path=ppt/notesSlides/notesSlide3.xml><?xml version="1.0" encoding="utf-8"?>
+<p:notes xmlns:a="http://schemas.openxmlformats.org/drawingml/2006/main" xmlns:r="http://schemas.openxmlformats.org/officeDocument/2006/relationships" xmlns:p="http://schemas.openxmlformats.org/presentationml/2006/main">
+  <p:cSld>
+    <p:spTree>
+      <p:nvGrpSpPr>
+        <p:cNvPr id="1" name=""/>
+        <p:cNvGrpSpPr/>
+        <p:nvPr/>
+      </p:nvGrpSpPr>
+      <p:grpSpPr>
+        <a:xfrm>
+          <a:off x="0" y="0"/>
+          <a:ext cx="0" cy="0"/>
+          <a:chOff x="0" y="0"/>
+          <a:chExt cx="0" cy="0"/>
+        </a:xfrm>
+      </p:grpSpPr>
+      <p:sp>
+        <p:nvSpPr>
+          <p:cNvPr id="2" name="Образ слайда 1"/>
+          <p:cNvSpPr>
+            <a:spLocks noGrp="1" noRot="1" noChangeAspect="1"/>
+          </p:cNvSpPr>
+          <p:nvPr>
+            <p:ph type="sldImg"/>
+          </p:nvPr>
+        </p:nvSpPr>
+        <p:spPr/>
+      </p:sp>
+      <p:sp>
+        <p:nvSpPr>
+          <p:cNvPr id="3" name="Заметки 2"/>
+          <p:cNvSpPr>
+            <a:spLocks noGrp="1"/>
+          </p:cNvSpPr>
+          <p:nvPr>
+            <p:ph type="body" idx="1"/>
+          </p:nvPr>
+        </p:nvSpPr>
+        <p:spPr/>
+        <p:txBody>
+          <a:bodyPr/>
+          <a:lstStyle/>
+          <a:p>
+            <a:r>
+              <a:rPr lang="ru-RU" dirty="0"/>
               <a:t>для лекции 14 из курса по анализу временных рядов для магистров изучающих статистику и имеющему следующее </a:t>
             </a:r>
             <a:r>
-              <a:rPr lang="ru-RU" dirty="0" err="1" smtClean="0"/>
+              <a:rPr lang="ru-RU" dirty="0" err="1"/>
               <a:t>содержение</a:t>
             </a:r>
-            <a:endParaRPr lang="ru-RU" dirty="0" smtClean="0"/>
-          </a:p>
-          <a:p>
-            <a:r>
-              <a:rPr lang="ru-RU" dirty="0" smtClean="0"/>
+            <a:endParaRPr lang="ru-RU" dirty="0"/>
+          </a:p>
+          <a:p>
+            <a:r>
+              <a:rPr lang="ru-RU" dirty="0"/>
               <a:t>из лекционных презентаций по следующим темам</a:t>
             </a:r>
           </a:p>
           <a:p>
             <a:r>
-              <a:rPr lang="ru-RU" dirty="0" smtClean="0"/>
+              <a:rPr lang="ru-RU" dirty="0"/>
               <a:t>1.1. Введение в предмет анализ временных рядов</a:t>
             </a:r>
           </a:p>
           <a:p>
             <a:r>
-              <a:rPr lang="ru-RU" dirty="0" smtClean="0"/>
+              <a:rPr lang="ru-RU" dirty="0"/>
               <a:t>1.2. Модели ВР и постановка задач предсказания значений ВР</a:t>
             </a:r>
           </a:p>
           <a:p>
             <a:r>
-              <a:rPr lang="ru-RU" dirty="0" smtClean="0"/>
+              <a:rPr lang="ru-RU" dirty="0"/>
               <a:t>1.3. Статистические свойства ВР</a:t>
             </a:r>
           </a:p>
           <a:p>
             <a:r>
-              <a:rPr lang="ru-RU" dirty="0" smtClean="0"/>
+              <a:rPr lang="ru-RU" dirty="0"/>
               <a:t>1.4. Разложение ВР и наивные методы предсказания</a:t>
             </a:r>
           </a:p>
           <a:p>
             <a:r>
-              <a:rPr lang="ru-RU" dirty="0" smtClean="0"/>
+              <a:rPr lang="ru-RU" dirty="0"/>
               <a:t>1.5. Методы на основе экспоненциального сглаживания</a:t>
             </a:r>
           </a:p>
           <a:p>
             <a:r>
-              <a:rPr lang="ru-RU" dirty="0" smtClean="0"/>
+              <a:rPr lang="ru-RU" dirty="0"/>
               <a:t>1.6. Методы авторегрессии-скользящего среднего.</a:t>
             </a:r>
           </a:p>
           <a:p>
             <a:r>
-              <a:rPr lang="ru-RU" dirty="0" smtClean="0"/>
+              <a:rPr lang="ru-RU" dirty="0"/>
               <a:t>1.7. Оценка качества предсказания ВР (метрики)</a:t>
             </a:r>
           </a:p>
           <a:p>
             <a:r>
-              <a:rPr lang="ru-RU" dirty="0" smtClean="0"/>
+              <a:rPr lang="ru-RU" dirty="0"/>
               <a:t>1.8. Анализ невязок предсказаний ВР (остаточная часть)</a:t>
             </a:r>
           </a:p>
           <a:p>
             <a:r>
-              <a:rPr lang="ru-RU" dirty="0" smtClean="0"/>
+              <a:rPr lang="ru-RU" dirty="0"/>
               <a:t>1.9. Оценка надежности предсказаний ВР</a:t>
             </a:r>
           </a:p>
           <a:p>
             <a:r>
-              <a:rPr lang="ru-RU" dirty="0" smtClean="0"/>
+              <a:rPr lang="ru-RU" dirty="0"/>
               <a:t>1.10. Методы предсказания ВР с использованием машинного обучения.</a:t>
             </a:r>
           </a:p>
           <a:p>
             <a:r>
-              <a:rPr lang="ru-RU" dirty="0" smtClean="0"/>
+              <a:rPr lang="ru-RU" dirty="0"/>
               <a:t>1.11. Методы работы с многомерными ВР</a:t>
             </a:r>
           </a:p>
           <a:p>
             <a:r>
-              <a:rPr lang="ru-RU" dirty="0" smtClean="0"/>
+              <a:rPr lang="ru-RU" dirty="0"/>
               <a:t>1.12. Обнаружение аномалий Во ВР</a:t>
             </a:r>
           </a:p>
           <a:p>
             <a:r>
-              <a:rPr lang="ru-RU" dirty="0" smtClean="0"/>
+              <a:rPr lang="ru-RU" dirty="0"/>
               <a:t>1.13. Глубокое обучение нейронных сетей в приложениях анализа ВР</a:t>
             </a:r>
           </a:p>
           <a:p>
             <a:r>
-              <a:rPr lang="ru-RU" dirty="0" smtClean="0"/>
+              <a:rPr lang="ru-RU" dirty="0"/>
               <a:t>1.14. Особенности работы с индустриальными ВР</a:t>
             </a:r>
           </a:p>
           <a:p>
             <a:r>
-              <a:rPr lang="ru-RU" dirty="0" smtClean="0"/>
+              <a:rPr lang="ru-RU" dirty="0"/>
               <a:t>1.15. Задача классификации ВР (доп. Раздел)</a:t>
             </a:r>
           </a:p>
           <a:p>
             <a:r>
-              <a:rPr lang="ru-RU" dirty="0" smtClean="0"/>
+              <a:rPr lang="ru-RU" dirty="0"/>
               <a:t>1.16. Задачи непараметрического анализа </a:t>
             </a:r>
             <a:r>
-              <a:rPr lang="ru-RU" dirty="0" err="1" smtClean="0"/>
+              <a:rPr lang="ru-RU" dirty="0" err="1"/>
               <a:t>слжных</a:t>
             </a:r>
             <a:r>
-              <a:rPr lang="ru-RU" dirty="0" smtClean="0"/>
+              <a:rPr lang="ru-RU" dirty="0"/>
               <a:t> ВР (доп. Раздел).</a:t>
             </a:r>
           </a:p>
           <a:p>
-            <a:endParaRPr lang="ru-RU" dirty="0" smtClean="0"/>
-          </a:p>
-          <a:p>
-            <a:r>
-              <a:rPr lang="ru-RU" dirty="0" smtClean="0"/>
+            <a:endParaRPr lang="ru-RU" dirty="0"/>
+          </a:p>
+          <a:p>
+            <a:r>
+              <a:rPr lang="ru-RU" dirty="0"/>
               <a:t>добавь следующие </a:t>
             </a:r>
             <a:r>
-              <a:rPr lang="ru-RU" dirty="0" err="1" smtClean="0"/>
+              <a:rPr lang="ru-RU" dirty="0" err="1"/>
               <a:t>подтемы</a:t>
             </a:r>
             <a:r>
-              <a:rPr lang="ru-RU" dirty="0" smtClean="0"/>
+              <a:rPr lang="ru-RU" dirty="0"/>
               <a:t>:</a:t>
             </a:r>
           </a:p>
           <a:p>
             <a:r>
-              <a:rPr lang="ru-RU" dirty="0" smtClean="0"/>
+              <a:rPr lang="ru-RU" dirty="0"/>
               <a:t>Проблема "холодного старта". </a:t>
             </a:r>
           </a:p>
           <a:p>
             <a:r>
-              <a:rPr lang="ru-RU" dirty="0" smtClean="0"/>
+              <a:rPr lang="ru-RU" dirty="0"/>
               <a:t>Проблема EDA – как отбирать признаки, снимать общие зависимости</a:t>
             </a:r>
           </a:p>
           <a:p>
             <a:r>
-              <a:rPr lang="ru-RU" dirty="0" smtClean="0"/>
+              <a:rPr lang="ru-RU" dirty="0"/>
               <a:t>Проблема больших данных – как работать с 100-нями наборов данных</a:t>
             </a:r>
           </a:p>
           <a:p>
             <a:r>
-              <a:rPr lang="ru-RU" dirty="0" err="1" smtClean="0"/>
+              <a:rPr lang="ru-RU" dirty="0" err="1"/>
               <a:t>АвтоМЛ</a:t>
             </a:r>
             <a:r>
-              <a:rPr lang="ru-RU" dirty="0" smtClean="0"/>
+              <a:rPr lang="ru-RU" dirty="0"/>
               <a:t> – как автоматизировать мониторинг</a:t>
             </a:r>
           </a:p>
           <a:p>
             <a:r>
-              <a:rPr lang="ru-RU" dirty="0" smtClean="0"/>
+              <a:rPr lang="ru-RU" dirty="0"/>
               <a:t>Настройка </a:t>
             </a:r>
             <a:r>
-              <a:rPr lang="ru-RU" dirty="0" err="1" smtClean="0"/>
+              <a:rPr lang="ru-RU" dirty="0" err="1"/>
               <a:t>пайплайна</a:t>
             </a:r>
             <a:r>
-              <a:rPr lang="ru-RU" dirty="0" smtClean="0"/>
+              <a:rPr lang="ru-RU" dirty="0"/>
               <a:t> предсказания ВР в поде</a:t>
             </a:r>
           </a:p>
           <a:p>
             <a:r>
-              <a:rPr lang="ru-RU" dirty="0" smtClean="0"/>
+              <a:rPr lang="ru-RU" dirty="0"/>
               <a:t>мониторинг моделей</a:t>
             </a:r>
           </a:p>
           <a:p>
             <a:r>
-              <a:rPr lang="ru-RU" dirty="0" smtClean="0"/>
+              <a:rPr lang="ru-RU" dirty="0"/>
               <a:t>Сложные данные: пространственно-временны ряды (поля)</a:t>
             </a:r>
           </a:p>
           <a:p>
             <a:r>
-              <a:rPr lang="ru-RU" dirty="0" smtClean="0"/>
+              <a:rPr lang="ru-RU" dirty="0"/>
               <a:t>Иерархические, групповые и другие типы ВР</a:t>
             </a:r>
           </a:p>
           <a:p>
             <a:r>
-              <a:rPr lang="ru-RU" dirty="0" err="1" smtClean="0"/>
+              <a:rPr lang="ru-RU" dirty="0" err="1"/>
               <a:t>TRiSM</a:t>
             </a:r>
             <a:r>
-              <a:rPr lang="ru-RU" dirty="0" smtClean="0"/>
+              <a:rPr lang="ru-RU" dirty="0"/>
               <a:t> </a:t>
             </a:r>
             <a:r>
-              <a:rPr lang="ru-RU" dirty="0" err="1" smtClean="0"/>
+              <a:rPr lang="ru-RU" dirty="0" err="1"/>
               <a:t>of</a:t>
             </a:r>
             <a:r>
-              <a:rPr lang="ru-RU" dirty="0" smtClean="0"/>
+              <a:rPr lang="ru-RU" dirty="0"/>
               <a:t> </a:t>
             </a:r>
             <a:r>
-              <a:rPr lang="ru-RU" dirty="0" err="1" smtClean="0"/>
+              <a:rPr lang="ru-RU" dirty="0" err="1"/>
               <a:t>Time</a:t>
             </a:r>
             <a:r>
-              <a:rPr lang="ru-RU" dirty="0" smtClean="0"/>
+              <a:rPr lang="ru-RU" dirty="0"/>
               <a:t> </a:t>
             </a:r>
             <a:r>
-              <a:rPr lang="ru-RU" dirty="0" err="1" smtClean="0"/>
+              <a:rPr lang="ru-RU" dirty="0" err="1"/>
               <a:t>Series</a:t>
             </a:r>
             <a:r>
-              <a:rPr lang="ru-RU" dirty="0" smtClean="0"/>
+              <a:rPr lang="ru-RU" dirty="0"/>
               <a:t> </a:t>
             </a:r>
             <a:r>
-              <a:rPr lang="ru-RU" dirty="0" err="1" smtClean="0"/>
+              <a:rPr lang="ru-RU" dirty="0" err="1"/>
               <a:t>Forecasting</a:t>
             </a:r>
-            <a:endParaRPr lang="ru-RU" dirty="0" smtClean="0"/>
-          </a:p>
-          <a:p>
-            <a:endParaRPr lang="ru-RU" dirty="0" smtClean="0"/>
-          </a:p>
-          <a:p>
-            <a:r>
-              <a:rPr lang="ru-RU" dirty="0" smtClean="0"/>
+            <a:endParaRPr lang="ru-RU" dirty="0"/>
+          </a:p>
+          <a:p>
+            <a:endParaRPr lang="ru-RU" dirty="0"/>
+          </a:p>
+          <a:p>
+            <a:r>
+              <a:rPr lang="ru-RU" dirty="0"/>
               <a:t>в результате я хочу чтобы студенты поняли как работать с реальными задачами, которые они могут встретить в индустрии. в ответе должны быть интуиция и </a:t>
             </a:r>
             <a:r>
-              <a:rPr lang="ru-RU" dirty="0" err="1" smtClean="0"/>
+              <a:rPr lang="ru-RU" dirty="0" err="1"/>
               <a:t>слонжые</a:t>
             </a:r>
             <a:r>
-              <a:rPr lang="ru-RU" dirty="0" smtClean="0"/>
+              <a:rPr lang="ru-RU" dirty="0"/>
               <a:t> неочевидные </a:t>
             </a:r>
             <a:r>
-              <a:rPr lang="ru-RU" dirty="0" err="1" smtClean="0"/>
+              <a:rPr lang="ru-RU" dirty="0" err="1"/>
               <a:t>инсайты</a:t>
             </a:r>
             <a:r>
-              <a:rPr lang="ru-RU" dirty="0" smtClean="0"/>
+              <a:rPr lang="ru-RU" dirty="0"/>
               <a:t>. текст должен быть в строгом стиле изложения. можно делать выкладки формул. можно давать интуицию и примеры. нужно давать </a:t>
             </a:r>
             <a:r>
-              <a:rPr lang="ru-RU" dirty="0" err="1" smtClean="0"/>
+              <a:rPr lang="ru-RU" dirty="0" err="1"/>
               <a:t>определния</a:t>
             </a:r>
             <a:r>
-              <a:rPr lang="ru-RU" dirty="0" smtClean="0"/>
+              <a:rPr lang="ru-RU" dirty="0"/>
               <a:t> и ссылки на литературу 2022-2025 годов.</a:t>
             </a:r>
           </a:p>
@@ -808,11 +975,11 @@
               <a:defRPr/>
             </a:pPr>
             <a:r>
-              <a:rPr lang="ru-RU" dirty="0" smtClean="0"/>
+              <a:rPr lang="ru-RU" dirty="0"/>
               <a:t>Цель - </a:t>
             </a:r>
             <a:r>
-              <a:rPr lang="ru-RU" sz="1200" b="0" i="0" kern="1200" dirty="0" smtClean="0">
+              <a:rPr lang="ru-RU" sz="1200" b="0" i="0" kern="1200" dirty="0">
                 <a:solidFill>
                   <a:schemeClr val="tx1"/>
                 </a:solidFill>
@@ -824,7 +991,7 @@
               <a:t>формирование системного понимания промышленного прогнозирования временных рядов в задачах финансового сектора и индустрии (напр.</a:t>
             </a:r>
             <a:r>
-              <a:rPr lang="ru-RU" sz="1200" b="0" i="0" kern="1200" baseline="0" dirty="0" smtClean="0">
+              <a:rPr lang="ru-RU" sz="1200" b="0" i="0" kern="1200" baseline="0" dirty="0">
                 <a:solidFill>
                   <a:schemeClr val="tx1"/>
                 </a:solidFill>
@@ -836,7 +1003,7 @@
               <a:t> системы отопления ЦОД – показания датчиков , задача прогноз </a:t>
             </a:r>
             <a:r>
-              <a:rPr lang="ru-RU" sz="1200" b="0" i="0" kern="1200" baseline="0" dirty="0" err="1" smtClean="0">
+              <a:rPr lang="ru-RU" sz="1200" b="0" i="0" kern="1200" baseline="0" dirty="0" err="1">
                 <a:solidFill>
                   <a:schemeClr val="tx1"/>
                 </a:solidFill>
@@ -848,7 +1015,7 @@
               <a:t>энергоэффективности</a:t>
             </a:r>
             <a:r>
-              <a:rPr lang="ru-RU" sz="1200" b="0" i="0" kern="1200" baseline="0" dirty="0" smtClean="0">
+              <a:rPr lang="ru-RU" sz="1200" b="0" i="0" kern="1200" baseline="0" dirty="0">
                 <a:solidFill>
                   <a:schemeClr val="tx1"/>
                 </a:solidFill>
@@ -860,7 +1027,7 @@
               <a:t>). Тут нужно и отобрать нужные признаки и снять общие зависимости (напр. температура воздуха) и </a:t>
             </a:r>
             <a:r>
-              <a:rPr lang="ru-RU" sz="1200" b="0" i="0" kern="1200" baseline="0" dirty="0" err="1" smtClean="0">
+              <a:rPr lang="ru-RU" sz="1200" b="0" i="0" kern="1200" baseline="0" dirty="0" err="1">
                 <a:solidFill>
                   <a:schemeClr val="tx1"/>
                 </a:solidFill>
@@ -872,7 +1039,7 @@
               <a:t>можнт</a:t>
             </a:r>
             <a:r>
-              <a:rPr lang="ru-RU" sz="1200" b="0" i="0" kern="1200" baseline="0" dirty="0" smtClean="0">
+              <a:rPr lang="ru-RU" sz="1200" b="0" i="0" kern="1200" baseline="0" dirty="0">
                 <a:solidFill>
                   <a:schemeClr val="tx1"/>
                 </a:solidFill>
@@ -884,7 +1051,7 @@
               <a:t> быть учесть что в </a:t>
             </a:r>
             <a:r>
-              <a:rPr lang="ru-RU" sz="1200" b="0" i="0" kern="1200" baseline="0" dirty="0" err="1" smtClean="0">
+              <a:rPr lang="ru-RU" sz="1200" b="0" i="0" kern="1200" baseline="0" dirty="0" err="1">
                 <a:solidFill>
                   <a:schemeClr val="tx1"/>
                 </a:solidFill>
@@ -896,7 +1063,7 @@
               <a:t>цод</a:t>
             </a:r>
             <a:r>
-              <a:rPr lang="ru-RU" sz="1200" b="0" i="0" kern="1200" baseline="0" dirty="0" smtClean="0">
+              <a:rPr lang="ru-RU" sz="1200" b="0" i="0" kern="1200" baseline="0" dirty="0">
                 <a:solidFill>
                   <a:schemeClr val="tx1"/>
                 </a:solidFill>
@@ -908,7 +1075,7 @@
               <a:t> есть зоны охлаждения и отопления – то есть нужно </a:t>
             </a:r>
             <a:r>
-              <a:rPr lang="ru-RU" sz="1200" b="0" i="0" kern="1200" baseline="0" dirty="0" err="1" smtClean="0">
+              <a:rPr lang="ru-RU" sz="1200" b="0" i="0" kern="1200" baseline="0" dirty="0" err="1">
                 <a:solidFill>
                   <a:schemeClr val="tx1"/>
                 </a:solidFill>
@@ -920,7 +1087,7 @@
               <a:t>пространнственно</a:t>
             </a:r>
             <a:r>
-              <a:rPr lang="ru-RU" sz="1200" b="0" i="0" kern="1200" baseline="0" dirty="0" smtClean="0">
+              <a:rPr lang="ru-RU" sz="1200" b="0" i="0" kern="1200" baseline="0" dirty="0">
                 <a:solidFill>
                   <a:schemeClr val="tx1"/>
                 </a:solidFill>
@@ -932,7 +1099,7 @@
               <a:t>- временные ряды анализировать. </a:t>
             </a:r>
             <a:br>
-              <a:rPr lang="ru-RU" sz="1200" b="0" i="0" kern="1200" baseline="0" dirty="0" smtClean="0">
+              <a:rPr lang="ru-RU" sz="1200" b="0" i="0" kern="1200" baseline="0" dirty="0">
                 <a:solidFill>
                   <a:schemeClr val="tx1"/>
                 </a:solidFill>
@@ -943,7 +1110,7 @@
               </a:rPr>
             </a:br>
             <a:r>
-              <a:rPr lang="ru-RU" sz="1200" b="0" i="0" kern="1200" dirty="0" smtClean="0">
+              <a:rPr lang="ru-RU" sz="1200" b="0" i="0" kern="1200" dirty="0">
                 <a:solidFill>
                   <a:schemeClr val="tx1"/>
                 </a:solidFill>
@@ -955,7 +1122,7 @@
               <a:t>Контекст аудитории -это магистранты по прикладной статистике, но</a:t>
             </a:r>
             <a:r>
-              <a:rPr lang="ru-RU" sz="1200" b="0" i="0" kern="1200" baseline="0" dirty="0" smtClean="0">
+              <a:rPr lang="ru-RU" sz="1200" b="0" i="0" kern="1200" baseline="0" dirty="0">
                 <a:solidFill>
                   <a:schemeClr val="tx1"/>
                 </a:solidFill>
@@ -967,7 +1134,7 @@
               <a:t> будут работать и аналитиками и </a:t>
             </a:r>
             <a:r>
-              <a:rPr lang="ru-RU" sz="1200" b="0" i="0" kern="1200" dirty="0" smtClean="0">
+              <a:rPr lang="ru-RU" sz="1200" b="0" i="0" kern="1200" dirty="0">
                 <a:solidFill>
                   <a:schemeClr val="tx1"/>
                 </a:solidFill>
@@ -998,7 +1165,7 @@
               <a:defRPr/>
             </a:pPr>
             <a:r>
-              <a:rPr lang="ru-RU" sz="1200" b="0" i="0" kern="1200" dirty="0" smtClean="0">
+              <a:rPr lang="ru-RU" sz="1200" b="0" i="0" kern="1200" dirty="0">
                 <a:solidFill>
                   <a:schemeClr val="tx1"/>
                 </a:solidFill>
@@ -1010,7 +1177,7 @@
               <a:t>Акцент на неочевидные </a:t>
             </a:r>
             <a:r>
-              <a:rPr lang="ru-RU" sz="1200" b="0" i="0" kern="1200" dirty="0" err="1" smtClean="0">
+              <a:rPr lang="ru-RU" sz="1200" b="0" i="0" kern="1200" dirty="0" err="1">
                 <a:solidFill>
                   <a:schemeClr val="tx1"/>
                 </a:solidFill>
@@ -1022,7 +1189,7 @@
               <a:t>инсайты</a:t>
             </a:r>
             <a:r>
-              <a:rPr lang="ru-RU" sz="1200" b="0" i="0" kern="1200" dirty="0" smtClean="0">
+              <a:rPr lang="ru-RU" sz="1200" b="0" i="0" kern="1200" dirty="0">
                 <a:solidFill>
                   <a:schemeClr val="tx1"/>
                 </a:solidFill>
@@ -1035,30 +1202,29 @@
             </a:r>
           </a:p>
           <a:p>
-            <a:endParaRPr lang="ru-RU" dirty="0" smtClean="0"/>
-          </a:p>
-          <a:p>
-            <a:r>
-              <a:rPr lang="ru-RU" dirty="0" smtClean="0"/>
+            <a:endParaRPr lang="ru-RU" dirty="0"/>
+          </a:p>
+          <a:p>
+            <a:r>
+              <a:rPr lang="ru-RU" dirty="0"/>
               <a:t>допиши </a:t>
             </a:r>
             <a:r>
-              <a:rPr lang="ru-RU" dirty="0" err="1" smtClean="0"/>
+              <a:rPr lang="ru-RU" dirty="0" err="1"/>
               <a:t>промпт</a:t>
             </a:r>
             <a:r>
-              <a:rPr lang="ru-RU" dirty="0" smtClean="0"/>
+              <a:rPr lang="ru-RU" dirty="0"/>
               <a:t> чтобы он лучше </a:t>
             </a:r>
             <a:r>
-              <a:rPr lang="ru-RU" dirty="0" err="1" smtClean="0"/>
+              <a:rPr lang="ru-RU" dirty="0" err="1"/>
               <a:t>соотвествовал</a:t>
             </a:r>
             <a:r>
-              <a:rPr lang="ru-RU" dirty="0" smtClean="0"/>
+              <a:rPr lang="ru-RU" dirty="0"/>
               <a:t> цели, уточни что еще не хватает в запросе.</a:t>
             </a:r>
-            <a:endParaRPr lang="ru-RU" dirty="0"/>
           </a:p>
         </p:txBody>
       </p:sp>
@@ -1245,7 +1411,7 @@
           <a:p>
             <a:fld id="{11392AF9-DBCE-5A47-95E7-A99A7754377C}" type="datetimeFigureOut">
               <a:rPr lang="ru-RU" smtClean="0"/>
-              <a:t>29.08.2025</a:t>
+              <a:t>31.08.2025</a:t>
             </a:fld>
             <a:endParaRPr lang="ru-RU"/>
           </a:p>
@@ -1443,7 +1609,7 @@
           <a:p>
             <a:fld id="{11392AF9-DBCE-5A47-95E7-A99A7754377C}" type="datetimeFigureOut">
               <a:rPr lang="ru-RU" smtClean="0"/>
-              <a:t>29.08.2025</a:t>
+              <a:t>31.08.2025</a:t>
             </a:fld>
             <a:endParaRPr lang="ru-RU"/>
           </a:p>
@@ -1651,7 +1817,7 @@
           <a:p>
             <a:fld id="{11392AF9-DBCE-5A47-95E7-A99A7754377C}" type="datetimeFigureOut">
               <a:rPr lang="ru-RU" smtClean="0"/>
-              <a:t>29.08.2025</a:t>
+              <a:t>31.08.2025</a:t>
             </a:fld>
             <a:endParaRPr lang="ru-RU"/>
           </a:p>
@@ -1849,7 +2015,7 @@
           <a:p>
             <a:fld id="{11392AF9-DBCE-5A47-95E7-A99A7754377C}" type="datetimeFigureOut">
               <a:rPr lang="ru-RU" smtClean="0"/>
-              <a:t>29.08.2025</a:t>
+              <a:t>31.08.2025</a:t>
             </a:fld>
             <a:endParaRPr lang="ru-RU"/>
           </a:p>
@@ -2124,7 +2290,7 @@
           <a:p>
             <a:fld id="{11392AF9-DBCE-5A47-95E7-A99A7754377C}" type="datetimeFigureOut">
               <a:rPr lang="ru-RU" smtClean="0"/>
-              <a:t>29.08.2025</a:t>
+              <a:t>31.08.2025</a:t>
             </a:fld>
             <a:endParaRPr lang="ru-RU"/>
           </a:p>
@@ -2389,7 +2555,7 @@
           <a:p>
             <a:fld id="{11392AF9-DBCE-5A47-95E7-A99A7754377C}" type="datetimeFigureOut">
               <a:rPr lang="ru-RU" smtClean="0"/>
-              <a:t>29.08.2025</a:t>
+              <a:t>31.08.2025</a:t>
             </a:fld>
             <a:endParaRPr lang="ru-RU"/>
           </a:p>
@@ -2801,7 +2967,7 @@
           <a:p>
             <a:fld id="{11392AF9-DBCE-5A47-95E7-A99A7754377C}" type="datetimeFigureOut">
               <a:rPr lang="ru-RU" smtClean="0"/>
-              <a:t>29.08.2025</a:t>
+              <a:t>31.08.2025</a:t>
             </a:fld>
             <a:endParaRPr lang="ru-RU"/>
           </a:p>
@@ -2942,7 +3108,7 @@
           <a:p>
             <a:fld id="{11392AF9-DBCE-5A47-95E7-A99A7754377C}" type="datetimeFigureOut">
               <a:rPr lang="ru-RU" smtClean="0"/>
-              <a:t>29.08.2025</a:t>
+              <a:t>31.08.2025</a:t>
             </a:fld>
             <a:endParaRPr lang="ru-RU"/>
           </a:p>
@@ -3055,7 +3221,7 @@
           <a:p>
             <a:fld id="{11392AF9-DBCE-5A47-95E7-A99A7754377C}" type="datetimeFigureOut">
               <a:rPr lang="ru-RU" smtClean="0"/>
-              <a:t>29.08.2025</a:t>
+              <a:t>31.08.2025</a:t>
             </a:fld>
             <a:endParaRPr lang="ru-RU"/>
           </a:p>
@@ -3366,7 +3532,7 @@
           <a:p>
             <a:fld id="{11392AF9-DBCE-5A47-95E7-A99A7754377C}" type="datetimeFigureOut">
               <a:rPr lang="ru-RU" smtClean="0"/>
-              <a:t>29.08.2025</a:t>
+              <a:t>31.08.2025</a:t>
             </a:fld>
             <a:endParaRPr lang="ru-RU"/>
           </a:p>
@@ -3654,7 +3820,7 @@
           <a:p>
             <a:fld id="{11392AF9-DBCE-5A47-95E7-A99A7754377C}" type="datetimeFigureOut">
               <a:rPr lang="ru-RU" smtClean="0"/>
-              <a:t>29.08.2025</a:t>
+              <a:t>31.08.2025</a:t>
             </a:fld>
             <a:endParaRPr lang="ru-RU"/>
           </a:p>
@@ -3895,7 +4061,7 @@
           <a:p>
             <a:fld id="{11392AF9-DBCE-5A47-95E7-A99A7754377C}" type="datetimeFigureOut">
               <a:rPr lang="ru-RU" smtClean="0"/>
-              <a:t>29.08.2025</a:t>
+              <a:t>31.08.2025</a:t>
             </a:fld>
             <a:endParaRPr lang="ru-RU"/>
           </a:p>
@@ -4372,13 +4538,6 @@
   <p:clrMapOvr>
     <a:masterClrMapping/>
   </p:clrMapOvr>
-  <p:timing>
-    <p:tnLst>
-      <p:par>
-        <p:cTn id="1" dur="indefinite" restart="never" nodeType="tmRoot"/>
-      </p:par>
-    </p:tnLst>
-  </p:timing>
 </p:sld>
 </file>
 
@@ -4434,11 +4593,11 @@
           <a:lstStyle/>
           <a:p>
             <a:r>
-              <a:rPr lang="en-US" dirty="0" err="1" smtClean="0"/>
+              <a:rPr lang="en-US" dirty="0" err="1"/>
               <a:t>TRiSM</a:t>
             </a:r>
             <a:r>
-              <a:rPr lang="en-US" dirty="0" smtClean="0"/>
+              <a:rPr lang="en-US" dirty="0"/>
               <a:t> of Time Series Forecasting</a:t>
             </a:r>
             <a:endParaRPr lang="ru-RU" dirty="0"/>
@@ -4455,13 +4614,6 @@
   <p:clrMapOvr>
     <a:masterClrMapping/>
   </p:clrMapOvr>
-  <p:timing>
-    <p:tnLst>
-      <p:par>
-        <p:cTn id="1" dur="indefinite" restart="never" nodeType="tmRoot"/>
-      </p:par>
-    </p:tnLst>
-  </p:timing>
 </p:sld>
 </file>
 
@@ -4517,18 +4669,17 @@
           <a:lstStyle/>
           <a:p>
             <a:r>
-              <a:rPr lang="ru-RU" dirty="0" smtClean="0"/>
+              <a:rPr lang="ru-RU" dirty="0"/>
               <a:t>Синтетические данные, </a:t>
             </a:r>
             <a:r>
-              <a:rPr lang="en-US" dirty="0" smtClean="0"/>
+              <a:rPr lang="en-US" dirty="0"/>
               <a:t>zero-shot, </a:t>
             </a:r>
             <a:r>
-              <a:rPr lang="ru-RU" dirty="0" smtClean="0"/>
+              <a:rPr lang="ru-RU" dirty="0"/>
               <a:t>цифровые двойники</a:t>
             </a:r>
-            <a:endParaRPr lang="ru-RU" dirty="0"/>
           </a:p>
         </p:txBody>
       </p:sp>
@@ -4542,13 +4693,6 @@
   <p:clrMapOvr>
     <a:masterClrMapping/>
   </p:clrMapOvr>
-  <p:timing>
-    <p:tnLst>
-      <p:par>
-        <p:cTn id="1" dur="indefinite" restart="never" nodeType="tmRoot"/>
-      </p:par>
-    </p:tnLst>
-  </p:timing>
 </p:sld>
 </file>
 
@@ -4617,13 +4761,6 @@
   <p:clrMapOvr>
     <a:masterClrMapping/>
   </p:clrMapOvr>
-  <p:timing>
-    <p:tnLst>
-      <p:par>
-        <p:cTn id="1" dur="indefinite" restart="never" nodeType="tmRoot"/>
-      </p:par>
-    </p:tnLst>
-  </p:timing>
 </p:sld>
 </file>
 
@@ -4660,12 +4797,23 @@
             <p:ph type="title"/>
           </p:nvPr>
         </p:nvSpPr>
-        <p:spPr/>
+        <p:spPr>
+          <a:xfrm>
+            <a:off x="838200" y="365125"/>
+            <a:ext cx="10515600" cy="670461"/>
+          </a:xfrm>
+        </p:spPr>
         <p:txBody>
-          <a:bodyPr/>
+          <a:bodyPr>
+            <a:normAutofit fontScale="90000"/>
+          </a:bodyPr>
           <a:lstStyle/>
           <a:p>
-            <a:endParaRPr lang="ru-RU"/>
+            <a:pPr algn="ctr"/>
+            <a:r>
+              <a:rPr lang="ru-RU" dirty="0"/>
+              <a:t>Проблема "холодного старта"</a:t>
+            </a:r>
           </a:p>
         </p:txBody>
       </p:sp>
@@ -4685,23 +4833,275 @@
             <p:ph idx="1"/>
           </p:nvPr>
         </p:nvSpPr>
-        <p:spPr/>
+        <p:spPr>
+          <a:xfrm>
+            <a:off x="231353" y="1189822"/>
+            <a:ext cx="11809165" cy="5303053"/>
+          </a:xfrm>
+        </p:spPr>
         <p:txBody>
-          <a:bodyPr/>
+          <a:bodyPr>
+            <a:normAutofit/>
+          </a:bodyPr>
           <a:lstStyle/>
           <a:p>
-            <a:r>
-              <a:rPr lang="ru-RU" dirty="0"/>
-              <a:t>Проблема "холодного </a:t>
-            </a:r>
-            <a:r>
-              <a:rPr lang="ru-RU" dirty="0" smtClean="0"/>
-              <a:t>старта</a:t>
-            </a:r>
-            <a:r>
-              <a:rPr lang="ru-RU" dirty="0"/>
-              <a:t>". Как делать прогноз для нового объекта (нового магазина, нового пациента), по которому есть всего 10 точек данных?</a:t>
-            </a:r>
+            <a:pPr marL="0" indent="0">
+              <a:buNone/>
+            </a:pPr>
+            <a:r>
+              <a:rPr lang="ru-RU" sz="2400" dirty="0"/>
+              <a:t>Как делать прогноз для нового объекта (нового магазина, нового пациента), по которому есть всего 10 точек данных? (напр. Запуск нового продукта на рынок)</a:t>
+            </a:r>
+            <a:endParaRPr lang="en-US" sz="2400" dirty="0"/>
+          </a:p>
+          <a:p>
+            <a:r>
+              <a:rPr lang="ru-RU" sz="2400" dirty="0"/>
+              <a:t>Наивные методы (чем меньше параметров в модели- тем меньше данных нужно)</a:t>
+            </a:r>
+            <a:endParaRPr lang="en-US" sz="2400" dirty="0"/>
+          </a:p>
+          <a:p>
+            <a:r>
+              <a:rPr lang="ru-RU" sz="2400" dirty="0" err="1"/>
+              <a:t>Zer</a:t>
+            </a:r>
+            <a:r>
+              <a:rPr lang="en-US" sz="2400" dirty="0"/>
+              <a:t>o-Shot forecasting (foundation models)</a:t>
+            </a:r>
+            <a:endParaRPr lang="ru-RU" sz="2400" dirty="0"/>
+          </a:p>
+          <a:p>
+            <a:r>
+              <a:rPr lang="ru-RU" sz="2400" dirty="0"/>
+              <a:t>Использование экспертных суждений</a:t>
+            </a:r>
+          </a:p>
+          <a:p>
+            <a:r>
+              <a:rPr lang="ru-RU" sz="2400" dirty="0"/>
+              <a:t>Синтез данных для первоначальной модели</a:t>
+            </a:r>
+            <a:r>
+              <a:rPr lang="en-US" sz="2400" dirty="0"/>
+              <a:t> ()</a:t>
+            </a:r>
+          </a:p>
+          <a:p>
+            <a:pPr lvl="1"/>
+            <a:r>
+              <a:rPr lang="ru-RU" sz="2000" dirty="0"/>
+              <a:t>Базисные модели как правило сами обучаются с использованием синтетических данных</a:t>
+            </a:r>
+          </a:p>
+          <a:p>
+            <a:r>
+              <a:rPr lang="ru-RU" sz="2400" dirty="0"/>
+              <a:t>Использование байесовских подходов, в т.ч. Если есть длинный ряд экзогенных факторов</a:t>
+            </a:r>
+          </a:p>
+        </p:txBody>
+      </p:sp>
+      <p:sp>
+        <p:nvSpPr>
+          <p:cNvPr id="5" name="TextBox 4">
+            <a:extLst>
+              <a:ext uri="{FF2B5EF4-FFF2-40B4-BE49-F238E27FC236}">
+                <a16:creationId xmlns:a16="http://schemas.microsoft.com/office/drawing/2014/main" id="{D483DF27-4574-F014-29FE-18AC4EC6A18B}"/>
+              </a:ext>
+            </a:extLst>
+          </p:cNvPr>
+          <p:cNvSpPr txBox="1"/>
+          <p:nvPr/>
+        </p:nvSpPr>
+        <p:spPr>
+          <a:xfrm>
+            <a:off x="151482" y="6488668"/>
+            <a:ext cx="6097836" cy="261610"/>
+          </a:xfrm>
+          <a:prstGeom prst="rect">
+            <a:avLst/>
+          </a:prstGeom>
+          <a:noFill/>
+        </p:spPr>
+        <p:txBody>
+          <a:bodyPr wrap="square">
+            <a:spAutoFit/>
+          </a:bodyPr>
+          <a:lstStyle/>
+          <a:p>
+            <a:r>
+              <a:rPr lang="ru-RU" sz="1100" dirty="0" err="1"/>
+              <a:t>https</a:t>
+            </a:r>
+            <a:r>
+              <a:rPr lang="ru-RU" sz="800" dirty="0"/>
+              <a:t>://</a:t>
+            </a:r>
+            <a:r>
+              <a:rPr lang="ru-RU" sz="1100" dirty="0" err="1"/>
+              <a:t>arxiv.org</a:t>
+            </a:r>
+            <a:r>
+              <a:rPr lang="ru-RU" sz="1100" dirty="0"/>
+              <a:t>/</a:t>
+            </a:r>
+            <a:r>
+              <a:rPr lang="ru-RU" sz="1100" dirty="0" err="1"/>
+              <a:t>pdf</a:t>
+            </a:r>
+            <a:r>
+              <a:rPr lang="ru-RU" sz="1100" dirty="0"/>
+              <a:t>/2503.11411</a:t>
+            </a:r>
+          </a:p>
+        </p:txBody>
+      </p:sp>
+      <p:sp>
+        <p:nvSpPr>
+          <p:cNvPr id="7" name="TextBox 6">
+            <a:extLst>
+              <a:ext uri="{FF2B5EF4-FFF2-40B4-BE49-F238E27FC236}">
+                <a16:creationId xmlns:a16="http://schemas.microsoft.com/office/drawing/2014/main" id="{622021AD-3509-6791-B7D6-E5EA22FBE5FF}"/>
+              </a:ext>
+            </a:extLst>
+          </p:cNvPr>
+          <p:cNvSpPr txBox="1"/>
+          <p:nvPr/>
+        </p:nvSpPr>
+        <p:spPr>
+          <a:xfrm>
+            <a:off x="3522644" y="6462445"/>
+            <a:ext cx="6097836" cy="307777"/>
+          </a:xfrm>
+          <a:prstGeom prst="rect">
+            <a:avLst/>
+          </a:prstGeom>
+          <a:noFill/>
+        </p:spPr>
+        <p:txBody>
+          <a:bodyPr wrap="square">
+            <a:spAutoFit/>
+          </a:bodyPr>
+          <a:lstStyle/>
+          <a:p>
+            <a:r>
+              <a:rPr lang="ru-RU" sz="1400" dirty="0" err="1"/>
+              <a:t>https</a:t>
+            </a:r>
+            <a:r>
+              <a:rPr lang="ru-RU" sz="1400" dirty="0"/>
+              <a:t>://</a:t>
+            </a:r>
+            <a:r>
+              <a:rPr lang="ru-RU" sz="1400" dirty="0" err="1"/>
+              <a:t>juanitorduz.github.io</a:t>
+            </a:r>
+            <a:r>
+              <a:rPr lang="ru-RU" sz="1400" dirty="0"/>
+              <a:t>/</a:t>
+            </a:r>
+            <a:r>
+              <a:rPr lang="ru-RU" sz="1400" dirty="0" err="1"/>
+              <a:t>short_time_series_pymc</a:t>
+            </a:r>
+            <a:r>
+              <a:rPr lang="ru-RU" sz="1400" dirty="0"/>
+              <a:t>/</a:t>
+            </a:r>
+          </a:p>
+        </p:txBody>
+      </p:sp>
+      <p:sp>
+        <p:nvSpPr>
+          <p:cNvPr id="10" name="TextBox 9">
+            <a:extLst>
+              <a:ext uri="{FF2B5EF4-FFF2-40B4-BE49-F238E27FC236}">
+                <a16:creationId xmlns:a16="http://schemas.microsoft.com/office/drawing/2014/main" id="{205312A2-BC60-C6FC-DD98-2A4056643CF0}"/>
+              </a:ext>
+            </a:extLst>
+          </p:cNvPr>
+          <p:cNvSpPr txBox="1"/>
+          <p:nvPr/>
+        </p:nvSpPr>
+        <p:spPr>
+          <a:xfrm>
+            <a:off x="3522644" y="6088211"/>
+            <a:ext cx="6097836" cy="430887"/>
+          </a:xfrm>
+          <a:prstGeom prst="rect">
+            <a:avLst/>
+          </a:prstGeom>
+          <a:noFill/>
+        </p:spPr>
+        <p:txBody>
+          <a:bodyPr wrap="square">
+            <a:spAutoFit/>
+          </a:bodyPr>
+          <a:lstStyle/>
+          <a:p>
+            <a:r>
+              <a:rPr lang="ru-RU" sz="1100" dirty="0" err="1"/>
+              <a:t>https</a:t>
+            </a:r>
+            <a:r>
+              <a:rPr lang="ru-RU" sz="1100" dirty="0"/>
+              <a:t>://</a:t>
+            </a:r>
+            <a:r>
+              <a:rPr lang="ru-RU" sz="1100" dirty="0" err="1"/>
+              <a:t>www.pymc.io</a:t>
+            </a:r>
+            <a:r>
+              <a:rPr lang="ru-RU" sz="1100" dirty="0"/>
+              <a:t>/</a:t>
+            </a:r>
+            <a:r>
+              <a:rPr lang="ru-RU" sz="1100" dirty="0" err="1"/>
+              <a:t>projects</a:t>
+            </a:r>
+            <a:r>
+              <a:rPr lang="ru-RU" sz="1100" dirty="0"/>
+              <a:t>/</a:t>
+            </a:r>
+            <a:r>
+              <a:rPr lang="ru-RU" sz="1100" dirty="0" err="1"/>
+              <a:t>examples</a:t>
+            </a:r>
+            <a:r>
+              <a:rPr lang="ru-RU" sz="1100" dirty="0"/>
+              <a:t>/</a:t>
+            </a:r>
+            <a:r>
+              <a:rPr lang="ru-RU" sz="1100" dirty="0" err="1"/>
+              <a:t>en</a:t>
+            </a:r>
+            <a:r>
+              <a:rPr lang="ru-RU" sz="1100" dirty="0"/>
+              <a:t>/</a:t>
+            </a:r>
+            <a:r>
+              <a:rPr lang="ru-RU" sz="1100" dirty="0" err="1"/>
+              <a:t>latest</a:t>
+            </a:r>
+            <a:r>
+              <a:rPr lang="ru-RU" sz="1100" dirty="0"/>
+              <a:t>/</a:t>
+            </a:r>
+            <a:r>
+              <a:rPr lang="ru-RU" sz="1100" dirty="0" err="1"/>
+              <a:t>time_series</a:t>
+            </a:r>
+            <a:r>
+              <a:rPr lang="ru-RU" sz="1100" dirty="0"/>
+              <a:t>/</a:t>
+            </a:r>
+            <a:r>
+              <a:rPr lang="ru-RU" sz="1100" dirty="0" err="1"/>
+              <a:t>Air_passengers-Prophet_with_Bayesian_workflow.html</a:t>
+            </a:r>
+            <a:endParaRPr lang="ru-RU" sz="1100" dirty="0"/>
           </a:p>
         </p:txBody>
       </p:sp>
@@ -4715,13 +5115,6 @@
   <p:clrMapOvr>
     <a:masterClrMapping/>
   </p:clrMapOvr>
-  <p:timing>
-    <p:tnLst>
-      <p:par>
-        <p:cTn id="1" dur="indefinite" restart="never" nodeType="tmRoot"/>
-      </p:par>
-    </p:tnLst>
-  </p:timing>
 </p:sld>
 </file>
 
@@ -4752,12 +5145,31 @@
             <p:ph type="title"/>
           </p:nvPr>
         </p:nvSpPr>
-        <p:spPr/>
+        <p:spPr>
+          <a:xfrm>
+            <a:off x="374573" y="365126"/>
+            <a:ext cx="10979227" cy="582326"/>
+          </a:xfrm>
+        </p:spPr>
         <p:txBody>
-          <a:bodyPr/>
+          <a:bodyPr>
+            <a:normAutofit fontScale="90000"/>
+          </a:bodyPr>
           <a:lstStyle/>
           <a:p>
-            <a:endParaRPr lang="ru-RU"/>
+            <a:r>
+              <a:rPr lang="ru-RU" sz="3100" dirty="0"/>
+              <a:t>Проблема </a:t>
+            </a:r>
+            <a:r>
+              <a:rPr lang="en-US" sz="3100" dirty="0"/>
+              <a:t>EDA</a:t>
+            </a:r>
+            <a:r>
+              <a:rPr lang="ru-RU" sz="3100" dirty="0"/>
+              <a:t> – как отбирать признаки, снимать общие зависимости</a:t>
+            </a:r>
+            <a:endParaRPr lang="ru-RU" dirty="0"/>
           </a:p>
         </p:txBody>
       </p:sp>
@@ -4773,27 +5185,161 @@
         </p:nvSpPr>
         <p:spPr>
           <a:xfrm>
-            <a:off x="838200" y="1825625"/>
-            <a:ext cx="10737028" cy="4351338"/>
+            <a:off x="209321" y="947452"/>
+            <a:ext cx="11365908" cy="5229511"/>
           </a:xfrm>
         </p:spPr>
         <p:txBody>
-          <a:bodyPr/>
+          <a:bodyPr>
+            <a:normAutofit/>
+          </a:bodyPr>
           <a:lstStyle/>
           <a:p>
-            <a:r>
-              <a:rPr lang="ru-RU" dirty="0" smtClean="0"/>
-              <a:t>Проблема </a:t>
-            </a:r>
-            <a:r>
-              <a:rPr lang="en-US" dirty="0" smtClean="0"/>
-              <a:t>EDA</a:t>
-            </a:r>
-            <a:r>
-              <a:rPr lang="ru-RU" dirty="0" smtClean="0"/>
-              <a:t> – как отбирать признаки, снимать общие зависимости</a:t>
-            </a:r>
-            <a:endParaRPr lang="ru-RU" dirty="0"/>
+            <a:pPr marL="0" indent="0">
+              <a:buNone/>
+            </a:pPr>
+            <a:r>
+              <a:rPr lang="ru-RU" sz="2000" dirty="0"/>
+              <a:t>Пусть есть очень многомерный временной ряд - например набор показаний 1000 датчиков. не ясно на сколько синхронно собираются данные, не ясно где пропуски или выбросы, например кто то дергал провод. как провести </a:t>
+            </a:r>
+            <a:r>
+              <a:rPr lang="en" sz="2000" dirty="0"/>
+              <a:t>EDA </a:t>
+            </a:r>
+            <a:r>
+              <a:rPr lang="ru-RU" sz="2000" dirty="0"/>
+              <a:t>такого набора. Если есть целевая переменная - например энергопотребление для датчиков системы отопления, то как отобрать нужные для нее ВР. Как проверить связи в этом всем?</a:t>
+            </a:r>
+          </a:p>
+          <a:p>
+            <a:pPr marL="0" indent="0">
+              <a:buNone/>
+            </a:pPr>
+            <a:r>
+              <a:rPr lang="ru-RU" sz="2000" dirty="0"/>
+              <a:t>1. Используйте физическое описание системы: связи между ВР, физически осмысленные диапазоны значений, периоды динамики системы (</a:t>
+            </a:r>
+            <a:r>
+              <a:rPr lang="ru-RU" sz="2000" dirty="0" err="1"/>
+              <a:t>ресемплинг</a:t>
+            </a:r>
+            <a:r>
+              <a:rPr lang="ru-RU" sz="2000" dirty="0"/>
+              <a:t> с нужным шагом)</a:t>
+            </a:r>
+          </a:p>
+          <a:p>
+            <a:pPr marL="0" indent="0">
+              <a:buNone/>
+            </a:pPr>
+            <a:r>
+              <a:rPr lang="ru-RU" sz="2000" dirty="0"/>
+              <a:t>2. Интерполяция и </a:t>
+            </a:r>
+            <a:r>
+              <a:rPr lang="ru-RU" sz="2000" dirty="0" err="1"/>
+              <a:t>ресемплинг</a:t>
+            </a:r>
+            <a:r>
+              <a:rPr lang="ru-RU" sz="2000" dirty="0"/>
+              <a:t> ВР, поиск аномалий и выбросов, </a:t>
+            </a:r>
+            <a:r>
+              <a:rPr lang="ru-RU" sz="2000" dirty="0" err="1"/>
+              <a:t>импутация</a:t>
+            </a:r>
+            <a:r>
+              <a:rPr lang="ru-RU" sz="2000" dirty="0"/>
+              <a:t> через интерполяцию, связи между ВР и простые модели (локальные </a:t>
+            </a:r>
+            <a:r>
+              <a:rPr lang="en-US" sz="2000" dirty="0"/>
+              <a:t>AR, ETS, </a:t>
+            </a:r>
+            <a:r>
+              <a:rPr lang="ru-RU" sz="2000" dirty="0"/>
+              <a:t>фильтрация</a:t>
+            </a:r>
+            <a:r>
+              <a:rPr lang="en-US" sz="2000" dirty="0"/>
+              <a:t>)</a:t>
+            </a:r>
+          </a:p>
+          <a:p>
+            <a:pPr marL="0" indent="0">
+              <a:buNone/>
+            </a:pPr>
+            <a:r>
+              <a:rPr lang="en-US" sz="2000" dirty="0"/>
+              <a:t>3. </a:t>
+            </a:r>
+            <a:r>
+              <a:rPr lang="en-US" sz="2000" dirty="0" err="1"/>
+              <a:t>А</a:t>
+            </a:r>
+            <a:r>
+              <a:rPr lang="ru-RU" sz="2000" dirty="0" err="1"/>
+              <a:t>нализ</a:t>
+            </a:r>
+            <a:r>
+              <a:rPr lang="ru-RU" sz="2000" dirty="0"/>
+              <a:t> связей между ВР и кластеризация ВР по группам</a:t>
+            </a:r>
+          </a:p>
+        </p:txBody>
+      </p:sp>
+      <p:sp>
+        <p:nvSpPr>
+          <p:cNvPr id="5" name="TextBox 4">
+            <a:extLst>
+              <a:ext uri="{FF2B5EF4-FFF2-40B4-BE49-F238E27FC236}">
+                <a16:creationId xmlns:a16="http://schemas.microsoft.com/office/drawing/2014/main" id="{10C4F738-89DA-F350-9B76-6DC6EACDA088}"/>
+              </a:ext>
+            </a:extLst>
+          </p:cNvPr>
+          <p:cNvSpPr txBox="1"/>
+          <p:nvPr/>
+        </p:nvSpPr>
+        <p:spPr>
+          <a:xfrm>
+            <a:off x="209321" y="6488668"/>
+            <a:ext cx="6097836" cy="369332"/>
+          </a:xfrm>
+          <a:prstGeom prst="rect">
+            <a:avLst/>
+          </a:prstGeom>
+          <a:noFill/>
+        </p:spPr>
+        <p:txBody>
+          <a:bodyPr wrap="square">
+            <a:spAutoFit/>
+          </a:bodyPr>
+          <a:lstStyle/>
+          <a:p>
+            <a:r>
+              <a:rPr lang="ru-RU" dirty="0" err="1"/>
+              <a:t>https</a:t>
+            </a:r>
+            <a:r>
+              <a:rPr lang="ru-RU" dirty="0"/>
+              <a:t>://</a:t>
+            </a:r>
+            <a:r>
+              <a:rPr lang="ru-RU" dirty="0" err="1"/>
+              <a:t>arxiv.org</a:t>
+            </a:r>
+            <a:r>
+              <a:rPr lang="ru-RU" dirty="0"/>
+              <a:t>/</a:t>
+            </a:r>
+            <a:r>
+              <a:rPr lang="ru-RU" dirty="0" err="1"/>
+              <a:t>html</a:t>
+            </a:r>
+            <a:r>
+              <a:rPr lang="ru-RU" dirty="0"/>
+              <a:t>/2403.00869v1</a:t>
+            </a:r>
           </a:p>
         </p:txBody>
       </p:sp>
@@ -4807,13 +5353,6 @@
   <p:clrMapOvr>
     <a:masterClrMapping/>
   </p:clrMapOvr>
-  <p:timing>
-    <p:tnLst>
-      <p:par>
-        <p:cTn id="1" dur="indefinite" restart="never" nodeType="tmRoot"/>
-      </p:par>
-    </p:tnLst>
-  </p:timing>
 </p:sld>
 </file>
 
@@ -4844,38 +5383,3305 @@
             <p:ph type="title"/>
           </p:nvPr>
         </p:nvSpPr>
-        <p:spPr/>
+        <p:spPr>
+          <a:xfrm>
+            <a:off x="275422" y="136525"/>
+            <a:ext cx="11611776" cy="727075"/>
+          </a:xfrm>
+        </p:spPr>
         <p:txBody>
-          <a:bodyPr/>
+          <a:bodyPr>
+            <a:normAutofit/>
+          </a:bodyPr>
           <a:lstStyle/>
           <a:p>
-            <a:endParaRPr lang="ru-RU"/>
+            <a:r>
+              <a:rPr lang="ru-RU" sz="3600" dirty="0"/>
+              <a:t>Проблема больших данных –с 100-нями ВР</a:t>
+            </a:r>
           </a:p>
         </p:txBody>
       </p:sp>
-      <p:sp>
-        <p:nvSpPr>
-          <p:cNvPr id="3" name="Объект 2"/>
-          <p:cNvSpPr>
-            <a:spLocks noGrp="1"/>
-          </p:cNvSpPr>
+      <p:graphicFrame>
+        <p:nvGraphicFramePr>
+          <p:cNvPr id="5" name="Объект 4">
+            <a:extLst>
+              <a:ext uri="{FF2B5EF4-FFF2-40B4-BE49-F238E27FC236}">
+                <a16:creationId xmlns:a16="http://schemas.microsoft.com/office/drawing/2014/main" id="{A4697383-BD24-534F-1C03-3C8FE822B8AE}"/>
+              </a:ext>
+            </a:extLst>
+          </p:cNvPr>
+          <p:cNvGraphicFramePr>
+            <a:graphicFrameLocks noGrp="1"/>
+          </p:cNvGraphicFramePr>
           <p:nvPr>
             <p:ph idx="1"/>
+            <p:extLst>
+              <p:ext uri="{D42A27DB-BD31-4B8C-83A1-F6EECF244321}">
+                <p14:modId xmlns:p14="http://schemas.microsoft.com/office/powerpoint/2010/main" val="2935473711"/>
+              </p:ext>
+            </p:extLst>
           </p:nvPr>
-        </p:nvSpPr>
-        <p:spPr/>
-        <p:txBody>
-          <a:bodyPr/>
-          <a:lstStyle/>
-          <a:p>
-            <a:r>
-              <a:rPr lang="ru-RU" dirty="0" smtClean="0"/>
-              <a:t>Проблема больших данных – как работать с 100-нями наборов данных</a:t>
-            </a:r>
-            <a:endParaRPr lang="ru-RU" dirty="0"/>
-          </a:p>
-        </p:txBody>
-      </p:sp>
+        </p:nvGraphicFramePr>
+        <p:xfrm>
+          <a:off x="275422" y="963614"/>
+          <a:ext cx="11611777" cy="10731964"/>
+        </p:xfrm>
+        <a:graphic>
+          <a:graphicData uri="http://schemas.openxmlformats.org/drawingml/2006/table">
+            <a:tbl>
+              <a:tblPr/>
+              <a:tblGrid>
+                <a:gridCol w="1800478">
+                  <a:extLst>
+                    <a:ext uri="{9D8B030D-6E8A-4147-A177-3AD203B41FA5}">
+                      <a16:colId xmlns:a16="http://schemas.microsoft.com/office/drawing/2014/main" val="1751435229"/>
+                    </a:ext>
+                  </a:extLst>
+                </a:gridCol>
+                <a:gridCol w="4279397">
+                  <a:extLst>
+                    <a:ext uri="{9D8B030D-6E8A-4147-A177-3AD203B41FA5}">
+                      <a16:colId xmlns:a16="http://schemas.microsoft.com/office/drawing/2014/main" val="4134708588"/>
+                    </a:ext>
+                  </a:extLst>
+                </a:gridCol>
+                <a:gridCol w="3244338">
+                  <a:extLst>
+                    <a:ext uri="{9D8B030D-6E8A-4147-A177-3AD203B41FA5}">
+                      <a16:colId xmlns:a16="http://schemas.microsoft.com/office/drawing/2014/main" val="1212520601"/>
+                    </a:ext>
+                  </a:extLst>
+                </a:gridCol>
+                <a:gridCol w="2287564">
+                  <a:extLst>
+                    <a:ext uri="{9D8B030D-6E8A-4147-A177-3AD203B41FA5}">
+                      <a16:colId xmlns:a16="http://schemas.microsoft.com/office/drawing/2014/main" val="1746203298"/>
+                    </a:ext>
+                  </a:extLst>
+                </a:gridCol>
+              </a:tblGrid>
+              <a:tr h="254848">
+                <a:tc>
+                  <a:txBody>
+                    <a:bodyPr/>
+                    <a:lstStyle/>
+                    <a:p>
+                      <a:pPr>
+                        <a:buNone/>
+                      </a:pPr>
+                      <a:r>
+                        <a:rPr lang="ru-RU" sz="2000" b="1" dirty="0">
+                          <a:solidFill>
+                            <a:srgbClr val="000000"/>
+                          </a:solidFill>
+                          <a:effectLst/>
+                          <a:latin typeface="Helvetica Neue" panose="02000503000000020004" pitchFamily="2" charset="0"/>
+                        </a:rPr>
+                        <a:t>Модель</a:t>
+                      </a:r>
+                      <a:endParaRPr lang="ru-RU" sz="2000" dirty="0">
+                        <a:effectLst/>
+                      </a:endParaRPr>
+                    </a:p>
+                  </a:txBody>
+                  <a:tcPr marL="16762" marR="16762" marT="16762" marB="16762">
+                    <a:lnL w="9525" cap="flat" cmpd="sng" algn="ctr">
+                      <a:solidFill>
+                        <a:srgbClr val="000000"/>
+                      </a:solidFill>
+                      <a:prstDash val="solid"/>
+                      <a:round/>
+                      <a:headEnd type="none" w="med" len="med"/>
+                      <a:tailEnd type="none" w="med" len="med"/>
+                    </a:lnL>
+                    <a:lnR w="9525" cap="flat" cmpd="sng" algn="ctr">
+                      <a:solidFill>
+                        <a:srgbClr val="000000"/>
+                      </a:solidFill>
+                      <a:prstDash val="solid"/>
+                      <a:round/>
+                      <a:headEnd type="none" w="med" len="med"/>
+                      <a:tailEnd type="none" w="med" len="med"/>
+                    </a:lnR>
+                    <a:lnT w="9525" cap="flat" cmpd="sng" algn="ctr">
+                      <a:solidFill>
+                        <a:srgbClr val="000000"/>
+                      </a:solidFill>
+                      <a:prstDash val="solid"/>
+                      <a:round/>
+                      <a:headEnd type="none" w="med" len="med"/>
+                      <a:tailEnd type="none" w="med" len="med"/>
+                    </a:lnT>
+                    <a:lnB w="9525" cap="flat" cmpd="sng" algn="ctr">
+                      <a:solidFill>
+                        <a:srgbClr val="000000"/>
+                      </a:solidFill>
+                      <a:prstDash val="solid"/>
+                      <a:round/>
+                      <a:headEnd type="none" w="med" len="med"/>
+                      <a:tailEnd type="none" w="med" len="med"/>
+                    </a:lnB>
+                    <a:solidFill>
+                      <a:srgbClr val="B0B3B2"/>
+                    </a:solidFill>
+                  </a:tcPr>
+                </a:tc>
+                <a:tc>
+                  <a:txBody>
+                    <a:bodyPr/>
+                    <a:lstStyle/>
+                    <a:p>
+                      <a:pPr>
+                        <a:buNone/>
+                      </a:pPr>
+                      <a:r>
+                        <a:rPr lang="ru-RU" sz="2000" b="1" dirty="0">
+                          <a:solidFill>
+                            <a:srgbClr val="000000"/>
+                          </a:solidFill>
+                          <a:effectLst/>
+                          <a:latin typeface="Helvetica Neue" panose="02000503000000020004" pitchFamily="2" charset="0"/>
+                        </a:rPr>
+                        <a:t>Плюсы</a:t>
+                      </a:r>
+                      <a:endParaRPr lang="ru-RU" sz="2000" dirty="0">
+                        <a:effectLst/>
+                      </a:endParaRPr>
+                    </a:p>
+                  </a:txBody>
+                  <a:tcPr marL="16762" marR="16762" marT="16762" marB="16762">
+                    <a:lnL w="9525" cap="flat" cmpd="sng" algn="ctr">
+                      <a:solidFill>
+                        <a:srgbClr val="000000"/>
+                      </a:solidFill>
+                      <a:prstDash val="solid"/>
+                      <a:round/>
+                      <a:headEnd type="none" w="med" len="med"/>
+                      <a:tailEnd type="none" w="med" len="med"/>
+                    </a:lnL>
+                    <a:lnR w="9525" cap="flat" cmpd="sng" algn="ctr">
+                      <a:solidFill>
+                        <a:srgbClr val="000000"/>
+                      </a:solidFill>
+                      <a:prstDash val="solid"/>
+                      <a:round/>
+                      <a:headEnd type="none" w="med" len="med"/>
+                      <a:tailEnd type="none" w="med" len="med"/>
+                    </a:lnR>
+                    <a:lnT w="9525" cap="flat" cmpd="sng" algn="ctr">
+                      <a:solidFill>
+                        <a:srgbClr val="000000"/>
+                      </a:solidFill>
+                      <a:prstDash val="solid"/>
+                      <a:round/>
+                      <a:headEnd type="none" w="med" len="med"/>
+                      <a:tailEnd type="none" w="med" len="med"/>
+                    </a:lnT>
+                    <a:lnB w="9525" cap="flat" cmpd="sng" algn="ctr">
+                      <a:solidFill>
+                        <a:srgbClr val="000000"/>
+                      </a:solidFill>
+                      <a:prstDash val="solid"/>
+                      <a:round/>
+                      <a:headEnd type="none" w="med" len="med"/>
+                      <a:tailEnd type="none" w="med" len="med"/>
+                    </a:lnB>
+                    <a:solidFill>
+                      <a:srgbClr val="B0B3B2"/>
+                    </a:solidFill>
+                  </a:tcPr>
+                </a:tc>
+                <a:tc>
+                  <a:txBody>
+                    <a:bodyPr/>
+                    <a:lstStyle/>
+                    <a:p>
+                      <a:pPr>
+                        <a:buNone/>
+                      </a:pPr>
+                      <a:r>
+                        <a:rPr lang="ru-RU" sz="2000" b="1">
+                          <a:solidFill>
+                            <a:srgbClr val="000000"/>
+                          </a:solidFill>
+                          <a:effectLst/>
+                          <a:latin typeface="Helvetica Neue" panose="02000503000000020004" pitchFamily="2" charset="0"/>
+                        </a:rPr>
+                        <a:t>Минусы</a:t>
+                      </a:r>
+                      <a:endParaRPr lang="ru-RU" sz="2000">
+                        <a:effectLst/>
+                      </a:endParaRPr>
+                    </a:p>
+                  </a:txBody>
+                  <a:tcPr marL="16762" marR="16762" marT="16762" marB="16762">
+                    <a:lnL w="9525" cap="flat" cmpd="sng" algn="ctr">
+                      <a:solidFill>
+                        <a:srgbClr val="000000"/>
+                      </a:solidFill>
+                      <a:prstDash val="solid"/>
+                      <a:round/>
+                      <a:headEnd type="none" w="med" len="med"/>
+                      <a:tailEnd type="none" w="med" len="med"/>
+                    </a:lnL>
+                    <a:lnR w="9525" cap="flat" cmpd="sng" algn="ctr">
+                      <a:solidFill>
+                        <a:srgbClr val="000000"/>
+                      </a:solidFill>
+                      <a:prstDash val="solid"/>
+                      <a:round/>
+                      <a:headEnd type="none" w="med" len="med"/>
+                      <a:tailEnd type="none" w="med" len="med"/>
+                    </a:lnR>
+                    <a:lnT w="9525" cap="flat" cmpd="sng" algn="ctr">
+                      <a:solidFill>
+                        <a:srgbClr val="000000"/>
+                      </a:solidFill>
+                      <a:prstDash val="solid"/>
+                      <a:round/>
+                      <a:headEnd type="none" w="med" len="med"/>
+                      <a:tailEnd type="none" w="med" len="med"/>
+                    </a:lnT>
+                    <a:lnB w="9525" cap="flat" cmpd="sng" algn="ctr">
+                      <a:solidFill>
+                        <a:srgbClr val="000000"/>
+                      </a:solidFill>
+                      <a:prstDash val="solid"/>
+                      <a:round/>
+                      <a:headEnd type="none" w="med" len="med"/>
+                      <a:tailEnd type="none" w="med" len="med"/>
+                    </a:lnB>
+                    <a:solidFill>
+                      <a:srgbClr val="B0B3B2"/>
+                    </a:solidFill>
+                  </a:tcPr>
+                </a:tc>
+                <a:tc>
+                  <a:txBody>
+                    <a:bodyPr/>
+                    <a:lstStyle/>
+                    <a:p>
+                      <a:pPr>
+                        <a:buNone/>
+                      </a:pPr>
+                      <a:r>
+                        <a:rPr lang="ru-RU" sz="2000" b="1" dirty="0">
+                          <a:solidFill>
+                            <a:srgbClr val="000000"/>
+                          </a:solidFill>
+                          <a:effectLst/>
+                          <a:latin typeface="Helvetica Neue" panose="02000503000000020004" pitchFamily="2" charset="0"/>
+                        </a:rPr>
+                        <a:t>дообучения?</a:t>
+                      </a:r>
+                      <a:endParaRPr lang="ru-RU" sz="2000" dirty="0">
+                        <a:effectLst/>
+                      </a:endParaRPr>
+                    </a:p>
+                  </a:txBody>
+                  <a:tcPr marL="16762" marR="16762" marT="16762" marB="16762">
+                    <a:lnL w="9525" cap="flat" cmpd="sng" algn="ctr">
+                      <a:solidFill>
+                        <a:srgbClr val="000000"/>
+                      </a:solidFill>
+                      <a:prstDash val="solid"/>
+                      <a:round/>
+                      <a:headEnd type="none" w="med" len="med"/>
+                      <a:tailEnd type="none" w="med" len="med"/>
+                    </a:lnL>
+                    <a:lnR w="9525" cap="flat" cmpd="sng" algn="ctr">
+                      <a:solidFill>
+                        <a:srgbClr val="000000"/>
+                      </a:solidFill>
+                      <a:prstDash val="solid"/>
+                      <a:round/>
+                      <a:headEnd type="none" w="med" len="med"/>
+                      <a:tailEnd type="none" w="med" len="med"/>
+                    </a:lnR>
+                    <a:lnT w="9525" cap="flat" cmpd="sng" algn="ctr">
+                      <a:solidFill>
+                        <a:srgbClr val="000000"/>
+                      </a:solidFill>
+                      <a:prstDash val="solid"/>
+                      <a:round/>
+                      <a:headEnd type="none" w="med" len="med"/>
+                      <a:tailEnd type="none" w="med" len="med"/>
+                    </a:lnT>
+                    <a:lnB w="9525" cap="flat" cmpd="sng" algn="ctr">
+                      <a:solidFill>
+                        <a:srgbClr val="000000"/>
+                      </a:solidFill>
+                      <a:prstDash val="solid"/>
+                      <a:round/>
+                      <a:headEnd type="none" w="med" len="med"/>
+                      <a:tailEnd type="none" w="med" len="med"/>
+                    </a:lnB>
+                    <a:solidFill>
+                      <a:srgbClr val="B0B3B2"/>
+                    </a:solidFill>
+                  </a:tcPr>
+                </a:tc>
+                <a:extLst>
+                  <a:ext uri="{0D108BD9-81ED-4DB2-BD59-A6C34878D82A}">
+                    <a16:rowId xmlns:a16="http://schemas.microsoft.com/office/drawing/2014/main" val="2199764080"/>
+                  </a:ext>
+                </a:extLst>
+              </a:tr>
+              <a:tr h="454734">
+                <a:tc>
+                  <a:txBody>
+                    <a:bodyPr/>
+                    <a:lstStyle/>
+                    <a:p>
+                      <a:pPr>
+                        <a:buNone/>
+                      </a:pPr>
+                      <a:r>
+                        <a:rPr lang="en" sz="2000" b="1" dirty="0">
+                          <a:solidFill>
+                            <a:srgbClr val="000000"/>
+                          </a:solidFill>
+                          <a:effectLst/>
+                          <a:latin typeface="Helvetica Neue" panose="02000503000000020004" pitchFamily="2" charset="0"/>
+                        </a:rPr>
+                        <a:t>ARIMA / SARIMA</a:t>
+                      </a:r>
+                      <a:endParaRPr lang="en" sz="2000" dirty="0">
+                        <a:effectLst/>
+                      </a:endParaRPr>
+                    </a:p>
+                  </a:txBody>
+                  <a:tcPr marL="16762" marR="16762" marT="16762" marB="16762">
+                    <a:lnL w="9525" cap="flat" cmpd="sng" algn="ctr">
+                      <a:solidFill>
+                        <a:srgbClr val="000000"/>
+                      </a:solidFill>
+                      <a:prstDash val="solid"/>
+                      <a:round/>
+                      <a:headEnd type="none" w="med" len="med"/>
+                      <a:tailEnd type="none" w="med" len="med"/>
+                    </a:lnL>
+                    <a:lnR w="9525" cap="flat" cmpd="sng" algn="ctr">
+                      <a:solidFill>
+                        <a:srgbClr val="000000"/>
+                      </a:solidFill>
+                      <a:prstDash val="solid"/>
+                      <a:round/>
+                      <a:headEnd type="none" w="med" len="med"/>
+                      <a:tailEnd type="none" w="med" len="med"/>
+                    </a:lnR>
+                    <a:lnT w="9525" cap="flat" cmpd="sng" algn="ctr">
+                      <a:solidFill>
+                        <a:srgbClr val="000000"/>
+                      </a:solidFill>
+                      <a:prstDash val="solid"/>
+                      <a:round/>
+                      <a:headEnd type="none" w="med" len="med"/>
+                      <a:tailEnd type="none" w="med" len="med"/>
+                    </a:lnT>
+                    <a:lnB w="9525" cap="flat" cmpd="sng" algn="ctr">
+                      <a:solidFill>
+                        <a:srgbClr val="000000"/>
+                      </a:solidFill>
+                      <a:prstDash val="solid"/>
+                      <a:round/>
+                      <a:headEnd type="none" w="med" len="med"/>
+                      <a:tailEnd type="none" w="med" len="med"/>
+                    </a:lnB>
+                    <a:solidFill>
+                      <a:srgbClr val="D4D4D4"/>
+                    </a:solidFill>
+                  </a:tcPr>
+                </a:tc>
+                <a:tc>
+                  <a:txBody>
+                    <a:bodyPr/>
+                    <a:lstStyle/>
+                    <a:p>
+                      <a:pPr>
+                        <a:buNone/>
+                      </a:pPr>
+                      <a:r>
+                        <a:rPr lang="ru-RU" sz="2000" dirty="0">
+                          <a:solidFill>
+                            <a:srgbClr val="000000"/>
+                          </a:solidFill>
+                          <a:effectLst/>
+                          <a:latin typeface="Helvetica Neue" panose="02000503000000020004" pitchFamily="2" charset="0"/>
+                        </a:rPr>
+                        <a:t>Интерпретируемость, контролируемое качество для каждого ВР</a:t>
+                      </a:r>
+                      <a:endParaRPr lang="ru-RU" sz="2000" dirty="0">
+                        <a:effectLst/>
+                      </a:endParaRPr>
+                    </a:p>
+                  </a:txBody>
+                  <a:tcPr marL="16762" marR="16762" marT="16762" marB="16762">
+                    <a:lnL w="9525" cap="flat" cmpd="sng" algn="ctr">
+                      <a:solidFill>
+                        <a:srgbClr val="000000"/>
+                      </a:solidFill>
+                      <a:prstDash val="solid"/>
+                      <a:round/>
+                      <a:headEnd type="none" w="med" len="med"/>
+                      <a:tailEnd type="none" w="med" len="med"/>
+                    </a:lnL>
+                    <a:lnR w="9525" cap="flat" cmpd="sng" algn="ctr">
+                      <a:solidFill>
+                        <a:srgbClr val="000000"/>
+                      </a:solidFill>
+                      <a:prstDash val="solid"/>
+                      <a:round/>
+                      <a:headEnd type="none" w="med" len="med"/>
+                      <a:tailEnd type="none" w="med" len="med"/>
+                    </a:lnR>
+                    <a:lnT w="9525" cap="flat" cmpd="sng" algn="ctr">
+                      <a:solidFill>
+                        <a:srgbClr val="000000"/>
+                      </a:solidFill>
+                      <a:prstDash val="solid"/>
+                      <a:round/>
+                      <a:headEnd type="none" w="med" len="med"/>
+                      <a:tailEnd type="none" w="med" len="med"/>
+                    </a:lnT>
+                    <a:lnB w="9525" cap="flat" cmpd="sng" algn="ctr">
+                      <a:solidFill>
+                        <a:srgbClr val="000000"/>
+                      </a:solidFill>
+                      <a:prstDash val="solid"/>
+                      <a:round/>
+                      <a:headEnd type="none" w="med" len="med"/>
+                      <a:tailEnd type="none" w="med" len="med"/>
+                    </a:lnB>
+                    <a:noFill/>
+                  </a:tcPr>
+                </a:tc>
+                <a:tc>
+                  <a:txBody>
+                    <a:bodyPr/>
+                    <a:lstStyle/>
+                    <a:p>
+                      <a:pPr>
+                        <a:buNone/>
+                      </a:pPr>
+                      <a:r>
+                        <a:rPr lang="ru-RU" sz="2000" dirty="0">
+                          <a:solidFill>
+                            <a:srgbClr val="000000"/>
+                          </a:solidFill>
+                          <a:effectLst/>
+                          <a:latin typeface="Helvetica Neue" panose="02000503000000020004" pitchFamily="2" charset="0"/>
+                        </a:rPr>
+                        <a:t>Масштабирование сложно, не учитывает </a:t>
+                      </a:r>
+                      <a:r>
+                        <a:rPr lang="ru-RU" sz="2000" dirty="0" err="1">
+                          <a:solidFill>
+                            <a:srgbClr val="000000"/>
+                          </a:solidFill>
+                          <a:effectLst/>
+                          <a:latin typeface="Helvetica Neue" panose="02000503000000020004" pitchFamily="2" charset="0"/>
+                        </a:rPr>
+                        <a:t>межрядовые</a:t>
+                      </a:r>
+                      <a:r>
+                        <a:rPr lang="ru-RU" sz="2000" dirty="0">
+                          <a:solidFill>
+                            <a:srgbClr val="000000"/>
+                          </a:solidFill>
+                          <a:effectLst/>
+                          <a:latin typeface="Helvetica Neue" panose="02000503000000020004" pitchFamily="2" charset="0"/>
+                        </a:rPr>
+                        <a:t> связи</a:t>
+                      </a:r>
+                      <a:endParaRPr lang="ru-RU" sz="2000" dirty="0">
+                        <a:effectLst/>
+                      </a:endParaRPr>
+                    </a:p>
+                  </a:txBody>
+                  <a:tcPr marL="16762" marR="16762" marT="16762" marB="16762">
+                    <a:lnL w="9525" cap="flat" cmpd="sng" algn="ctr">
+                      <a:solidFill>
+                        <a:srgbClr val="000000"/>
+                      </a:solidFill>
+                      <a:prstDash val="solid"/>
+                      <a:round/>
+                      <a:headEnd type="none" w="med" len="med"/>
+                      <a:tailEnd type="none" w="med" len="med"/>
+                    </a:lnL>
+                    <a:lnR w="9525" cap="flat" cmpd="sng" algn="ctr">
+                      <a:solidFill>
+                        <a:srgbClr val="000000"/>
+                      </a:solidFill>
+                      <a:prstDash val="solid"/>
+                      <a:round/>
+                      <a:headEnd type="none" w="med" len="med"/>
+                      <a:tailEnd type="none" w="med" len="med"/>
+                    </a:lnR>
+                    <a:lnT w="9525" cap="flat" cmpd="sng" algn="ctr">
+                      <a:solidFill>
+                        <a:srgbClr val="000000"/>
+                      </a:solidFill>
+                      <a:prstDash val="solid"/>
+                      <a:round/>
+                      <a:headEnd type="none" w="med" len="med"/>
+                      <a:tailEnd type="none" w="med" len="med"/>
+                    </a:lnT>
+                    <a:lnB w="9525" cap="flat" cmpd="sng" algn="ctr">
+                      <a:solidFill>
+                        <a:srgbClr val="000000"/>
+                      </a:solidFill>
+                      <a:prstDash val="solid"/>
+                      <a:round/>
+                      <a:headEnd type="none" w="med" len="med"/>
+                      <a:tailEnd type="none" w="med" len="med"/>
+                    </a:lnB>
+                    <a:noFill/>
+                  </a:tcPr>
+                </a:tc>
+                <a:tc>
+                  <a:txBody>
+                    <a:bodyPr/>
+                    <a:lstStyle/>
+                    <a:p>
+                      <a:pPr>
+                        <a:buNone/>
+                      </a:pPr>
+                      <a:r>
+                        <a:rPr lang="ru-RU" sz="2000" dirty="0">
+                          <a:solidFill>
+                            <a:srgbClr val="000000"/>
+                          </a:solidFill>
+                          <a:effectLst/>
+                          <a:latin typeface="Helvetica Neue" panose="02000503000000020004" pitchFamily="2" charset="0"/>
+                        </a:rPr>
+                        <a:t>Только переобучение</a:t>
+                      </a:r>
+                      <a:endParaRPr lang="ru-RU" sz="2000" dirty="0">
+                        <a:effectLst/>
+                      </a:endParaRPr>
+                    </a:p>
+                  </a:txBody>
+                  <a:tcPr marL="16762" marR="16762" marT="16762" marB="16762">
+                    <a:lnL w="9525" cap="flat" cmpd="sng" algn="ctr">
+                      <a:solidFill>
+                        <a:srgbClr val="000000"/>
+                      </a:solidFill>
+                      <a:prstDash val="solid"/>
+                      <a:round/>
+                      <a:headEnd type="none" w="med" len="med"/>
+                      <a:tailEnd type="none" w="med" len="med"/>
+                    </a:lnL>
+                    <a:lnR w="9525" cap="flat" cmpd="sng" algn="ctr">
+                      <a:solidFill>
+                        <a:srgbClr val="000000"/>
+                      </a:solidFill>
+                      <a:prstDash val="solid"/>
+                      <a:round/>
+                      <a:headEnd type="none" w="med" len="med"/>
+                      <a:tailEnd type="none" w="med" len="med"/>
+                    </a:lnR>
+                    <a:lnT w="9525" cap="flat" cmpd="sng" algn="ctr">
+                      <a:solidFill>
+                        <a:srgbClr val="000000"/>
+                      </a:solidFill>
+                      <a:prstDash val="solid"/>
+                      <a:round/>
+                      <a:headEnd type="none" w="med" len="med"/>
+                      <a:tailEnd type="none" w="med" len="med"/>
+                    </a:lnT>
+                    <a:lnB w="9525" cap="flat" cmpd="sng" algn="ctr">
+                      <a:solidFill>
+                        <a:srgbClr val="000000"/>
+                      </a:solidFill>
+                      <a:prstDash val="solid"/>
+                      <a:round/>
+                      <a:headEnd type="none" w="med" len="med"/>
+                      <a:tailEnd type="none" w="med" len="med"/>
+                    </a:lnB>
+                    <a:noFill/>
+                  </a:tcPr>
+                </a:tc>
+                <a:extLst>
+                  <a:ext uri="{0D108BD9-81ED-4DB2-BD59-A6C34878D82A}">
+                    <a16:rowId xmlns:a16="http://schemas.microsoft.com/office/drawing/2014/main" val="1005562427"/>
+                  </a:ext>
+                </a:extLst>
+              </a:tr>
+              <a:tr h="454734">
+                <a:tc>
+                  <a:txBody>
+                    <a:bodyPr/>
+                    <a:lstStyle/>
+                    <a:p>
+                      <a:pPr>
+                        <a:buNone/>
+                      </a:pPr>
+                      <a:r>
+                        <a:rPr lang="en" sz="2000" b="1" dirty="0">
+                          <a:solidFill>
+                            <a:srgbClr val="000000"/>
+                          </a:solidFill>
+                          <a:effectLst/>
+                          <a:latin typeface="Helvetica Neue" panose="02000503000000020004" pitchFamily="2" charset="0"/>
+                        </a:rPr>
+                        <a:t>Prophet (</a:t>
+                      </a:r>
+                      <a:r>
+                        <a:rPr lang="ru-RU" sz="2000" b="1" dirty="0">
+                          <a:solidFill>
+                            <a:srgbClr val="000000"/>
+                          </a:solidFill>
+                          <a:effectLst/>
+                          <a:latin typeface="Helvetica Neue" panose="02000503000000020004" pitchFamily="2" charset="0"/>
+                        </a:rPr>
+                        <a:t>включая </a:t>
+                      </a:r>
+                      <a:r>
+                        <a:rPr lang="en" sz="2000" b="1" dirty="0">
+                          <a:solidFill>
+                            <a:srgbClr val="000000"/>
+                          </a:solidFill>
+                          <a:effectLst/>
+                          <a:latin typeface="Helvetica Neue" panose="02000503000000020004" pitchFamily="2" charset="0"/>
+                        </a:rPr>
+                        <a:t>Neural Prophet)</a:t>
+                      </a:r>
+                      <a:endParaRPr lang="en" sz="2000" dirty="0">
+                        <a:effectLst/>
+                      </a:endParaRPr>
+                    </a:p>
+                  </a:txBody>
+                  <a:tcPr marL="16762" marR="16762" marT="16762" marB="16762">
+                    <a:lnL w="9525" cap="flat" cmpd="sng" algn="ctr">
+                      <a:solidFill>
+                        <a:srgbClr val="000000"/>
+                      </a:solidFill>
+                      <a:prstDash val="solid"/>
+                      <a:round/>
+                      <a:headEnd type="none" w="med" len="med"/>
+                      <a:tailEnd type="none" w="med" len="med"/>
+                    </a:lnL>
+                    <a:lnR w="9525" cap="flat" cmpd="sng" algn="ctr">
+                      <a:solidFill>
+                        <a:srgbClr val="000000"/>
+                      </a:solidFill>
+                      <a:prstDash val="solid"/>
+                      <a:round/>
+                      <a:headEnd type="none" w="med" len="med"/>
+                      <a:tailEnd type="none" w="med" len="med"/>
+                    </a:lnR>
+                    <a:lnT w="9525" cap="flat" cmpd="sng" algn="ctr">
+                      <a:solidFill>
+                        <a:srgbClr val="000000"/>
+                      </a:solidFill>
+                      <a:prstDash val="solid"/>
+                      <a:round/>
+                      <a:headEnd type="none" w="med" len="med"/>
+                      <a:tailEnd type="none" w="med" len="med"/>
+                    </a:lnT>
+                    <a:lnB w="9525" cap="flat" cmpd="sng" algn="ctr">
+                      <a:solidFill>
+                        <a:srgbClr val="000000"/>
+                      </a:solidFill>
+                      <a:prstDash val="solid"/>
+                      <a:round/>
+                      <a:headEnd type="none" w="med" len="med"/>
+                      <a:tailEnd type="none" w="med" len="med"/>
+                    </a:lnB>
+                    <a:solidFill>
+                      <a:srgbClr val="D4D4D4"/>
+                    </a:solidFill>
+                  </a:tcPr>
+                </a:tc>
+                <a:tc>
+                  <a:txBody>
+                    <a:bodyPr/>
+                    <a:lstStyle/>
+                    <a:p>
+                      <a:pPr>
+                        <a:buNone/>
+                      </a:pPr>
+                      <a:r>
+                        <a:rPr lang="ru-RU" sz="2000">
+                          <a:solidFill>
+                            <a:srgbClr val="000000"/>
+                          </a:solidFill>
+                          <a:effectLst/>
+                          <a:latin typeface="Helvetica Neue" panose="02000503000000020004" pitchFamily="2" charset="0"/>
+                        </a:rPr>
+                        <a:t>Хорошо с сезонностью, трендами, праздниками; устойчива к пропускам</a:t>
+                      </a:r>
+                      <a:endParaRPr lang="ru-RU" sz="2000">
+                        <a:effectLst/>
+                      </a:endParaRPr>
+                    </a:p>
+                  </a:txBody>
+                  <a:tcPr marL="16762" marR="16762" marT="16762" marB="16762">
+                    <a:lnL w="9525" cap="flat" cmpd="sng" algn="ctr">
+                      <a:solidFill>
+                        <a:srgbClr val="000000"/>
+                      </a:solidFill>
+                      <a:prstDash val="solid"/>
+                      <a:round/>
+                      <a:headEnd type="none" w="med" len="med"/>
+                      <a:tailEnd type="none" w="med" len="med"/>
+                    </a:lnL>
+                    <a:lnR w="9525" cap="flat" cmpd="sng" algn="ctr">
+                      <a:solidFill>
+                        <a:srgbClr val="000000"/>
+                      </a:solidFill>
+                      <a:prstDash val="solid"/>
+                      <a:round/>
+                      <a:headEnd type="none" w="med" len="med"/>
+                      <a:tailEnd type="none" w="med" len="med"/>
+                    </a:lnR>
+                    <a:lnT w="9525" cap="flat" cmpd="sng" algn="ctr">
+                      <a:solidFill>
+                        <a:srgbClr val="000000"/>
+                      </a:solidFill>
+                      <a:prstDash val="solid"/>
+                      <a:round/>
+                      <a:headEnd type="none" w="med" len="med"/>
+                      <a:tailEnd type="none" w="med" len="med"/>
+                    </a:lnT>
+                    <a:lnB w="9525" cap="flat" cmpd="sng" algn="ctr">
+                      <a:solidFill>
+                        <a:srgbClr val="000000"/>
+                      </a:solidFill>
+                      <a:prstDash val="solid"/>
+                      <a:round/>
+                      <a:headEnd type="none" w="med" len="med"/>
+                      <a:tailEnd type="none" w="med" len="med"/>
+                    </a:lnB>
+                    <a:noFill/>
+                  </a:tcPr>
+                </a:tc>
+                <a:tc>
+                  <a:txBody>
+                    <a:bodyPr/>
+                    <a:lstStyle/>
+                    <a:p>
+                      <a:pPr>
+                        <a:buNone/>
+                      </a:pPr>
+                      <a:r>
+                        <a:rPr lang="ru-RU" sz="2000">
+                          <a:solidFill>
+                            <a:srgbClr val="000000"/>
+                          </a:solidFill>
+                          <a:effectLst/>
+                          <a:latin typeface="Helvetica Neue" panose="02000503000000020004" pitchFamily="2" charset="0"/>
+                        </a:rPr>
+                        <a:t>Сложно масштабировать на 100+ рядов, медленно обучается</a:t>
+                      </a:r>
+                      <a:endParaRPr lang="ru-RU" sz="2000">
+                        <a:effectLst/>
+                      </a:endParaRPr>
+                    </a:p>
+                  </a:txBody>
+                  <a:tcPr marL="16762" marR="16762" marT="16762" marB="16762">
+                    <a:lnL w="9525" cap="flat" cmpd="sng" algn="ctr">
+                      <a:solidFill>
+                        <a:srgbClr val="000000"/>
+                      </a:solidFill>
+                      <a:prstDash val="solid"/>
+                      <a:round/>
+                      <a:headEnd type="none" w="med" len="med"/>
+                      <a:tailEnd type="none" w="med" len="med"/>
+                    </a:lnL>
+                    <a:lnR w="9525" cap="flat" cmpd="sng" algn="ctr">
+                      <a:solidFill>
+                        <a:srgbClr val="000000"/>
+                      </a:solidFill>
+                      <a:prstDash val="solid"/>
+                      <a:round/>
+                      <a:headEnd type="none" w="med" len="med"/>
+                      <a:tailEnd type="none" w="med" len="med"/>
+                    </a:lnR>
+                    <a:lnT w="9525" cap="flat" cmpd="sng" algn="ctr">
+                      <a:solidFill>
+                        <a:srgbClr val="000000"/>
+                      </a:solidFill>
+                      <a:prstDash val="solid"/>
+                      <a:round/>
+                      <a:headEnd type="none" w="med" len="med"/>
+                      <a:tailEnd type="none" w="med" len="med"/>
+                    </a:lnT>
+                    <a:lnB w="9525" cap="flat" cmpd="sng" algn="ctr">
+                      <a:solidFill>
+                        <a:srgbClr val="000000"/>
+                      </a:solidFill>
+                      <a:prstDash val="solid"/>
+                      <a:round/>
+                      <a:headEnd type="none" w="med" len="med"/>
+                      <a:tailEnd type="none" w="med" len="med"/>
+                    </a:lnB>
+                    <a:noFill/>
+                  </a:tcPr>
+                </a:tc>
+                <a:tc>
+                  <a:txBody>
+                    <a:bodyPr/>
+                    <a:lstStyle/>
+                    <a:p>
+                      <a:pPr>
+                        <a:buNone/>
+                      </a:pPr>
+                      <a:r>
+                        <a:rPr lang="ru-RU" sz="2000">
+                          <a:solidFill>
+                            <a:srgbClr val="000000"/>
+                          </a:solidFill>
+                          <a:effectLst/>
+                          <a:latin typeface="Apple Color Emoji" pitchFamily="2" charset="0"/>
+                        </a:rPr>
+                        <a:t>⚠️</a:t>
+                      </a:r>
+                      <a:r>
+                        <a:rPr lang="ru-RU" sz="2000">
+                          <a:solidFill>
+                            <a:srgbClr val="000000"/>
+                          </a:solidFill>
+                          <a:effectLst/>
+                          <a:latin typeface="Helvetica Neue" panose="02000503000000020004" pitchFamily="2" charset="0"/>
+                        </a:rPr>
+                        <a:t> Только переобучение</a:t>
+                      </a:r>
+                      <a:endParaRPr lang="ru-RU" sz="2000">
+                        <a:effectLst/>
+                      </a:endParaRPr>
+                    </a:p>
+                  </a:txBody>
+                  <a:tcPr marL="16762" marR="16762" marT="16762" marB="16762">
+                    <a:lnL w="9525" cap="flat" cmpd="sng" algn="ctr">
+                      <a:solidFill>
+                        <a:srgbClr val="000000"/>
+                      </a:solidFill>
+                      <a:prstDash val="solid"/>
+                      <a:round/>
+                      <a:headEnd type="none" w="med" len="med"/>
+                      <a:tailEnd type="none" w="med" len="med"/>
+                    </a:lnL>
+                    <a:lnR w="9525" cap="flat" cmpd="sng" algn="ctr">
+                      <a:solidFill>
+                        <a:srgbClr val="000000"/>
+                      </a:solidFill>
+                      <a:prstDash val="solid"/>
+                      <a:round/>
+                      <a:headEnd type="none" w="med" len="med"/>
+                      <a:tailEnd type="none" w="med" len="med"/>
+                    </a:lnR>
+                    <a:lnT w="9525" cap="flat" cmpd="sng" algn="ctr">
+                      <a:solidFill>
+                        <a:srgbClr val="000000"/>
+                      </a:solidFill>
+                      <a:prstDash val="solid"/>
+                      <a:round/>
+                      <a:headEnd type="none" w="med" len="med"/>
+                      <a:tailEnd type="none" w="med" len="med"/>
+                    </a:lnT>
+                    <a:lnB w="9525" cap="flat" cmpd="sng" algn="ctr">
+                      <a:solidFill>
+                        <a:srgbClr val="000000"/>
+                      </a:solidFill>
+                      <a:prstDash val="solid"/>
+                      <a:round/>
+                      <a:headEnd type="none" w="med" len="med"/>
+                      <a:tailEnd type="none" w="med" len="med"/>
+                    </a:lnB>
+                    <a:noFill/>
+                  </a:tcPr>
+                </a:tc>
+                <a:extLst>
+                  <a:ext uri="{0D108BD9-81ED-4DB2-BD59-A6C34878D82A}">
+                    <a16:rowId xmlns:a16="http://schemas.microsoft.com/office/drawing/2014/main" val="3053820422"/>
+                  </a:ext>
+                </a:extLst>
+              </a:tr>
+              <a:tr h="454734">
+                <a:tc>
+                  <a:txBody>
+                    <a:bodyPr/>
+                    <a:lstStyle/>
+                    <a:p>
+                      <a:pPr>
+                        <a:buNone/>
+                      </a:pPr>
+                      <a:r>
+                        <a:rPr lang="en" sz="2000" b="1">
+                          <a:solidFill>
+                            <a:srgbClr val="000000"/>
+                          </a:solidFill>
+                          <a:effectLst/>
+                          <a:latin typeface="Helvetica Neue" panose="02000503000000020004" pitchFamily="2" charset="0"/>
+                        </a:rPr>
+                        <a:t>Exponential Smoothing (ETS)</a:t>
+                      </a:r>
+                      <a:endParaRPr lang="en" sz="2000">
+                        <a:effectLst/>
+                      </a:endParaRPr>
+                    </a:p>
+                  </a:txBody>
+                  <a:tcPr marL="16762" marR="16762" marT="16762" marB="16762">
+                    <a:lnL w="9525" cap="flat" cmpd="sng" algn="ctr">
+                      <a:solidFill>
+                        <a:srgbClr val="000000"/>
+                      </a:solidFill>
+                      <a:prstDash val="solid"/>
+                      <a:round/>
+                      <a:headEnd type="none" w="med" len="med"/>
+                      <a:tailEnd type="none" w="med" len="med"/>
+                    </a:lnL>
+                    <a:lnR w="9525" cap="flat" cmpd="sng" algn="ctr">
+                      <a:solidFill>
+                        <a:srgbClr val="000000"/>
+                      </a:solidFill>
+                      <a:prstDash val="solid"/>
+                      <a:round/>
+                      <a:headEnd type="none" w="med" len="med"/>
+                      <a:tailEnd type="none" w="med" len="med"/>
+                    </a:lnR>
+                    <a:lnT w="9525" cap="flat" cmpd="sng" algn="ctr">
+                      <a:solidFill>
+                        <a:srgbClr val="000000"/>
+                      </a:solidFill>
+                      <a:prstDash val="solid"/>
+                      <a:round/>
+                      <a:headEnd type="none" w="med" len="med"/>
+                      <a:tailEnd type="none" w="med" len="med"/>
+                    </a:lnT>
+                    <a:lnB w="9525" cap="flat" cmpd="sng" algn="ctr">
+                      <a:solidFill>
+                        <a:srgbClr val="000000"/>
+                      </a:solidFill>
+                      <a:prstDash val="solid"/>
+                      <a:round/>
+                      <a:headEnd type="none" w="med" len="med"/>
+                      <a:tailEnd type="none" w="med" len="med"/>
+                    </a:lnB>
+                    <a:solidFill>
+                      <a:srgbClr val="D4D4D4"/>
+                    </a:solidFill>
+                  </a:tcPr>
+                </a:tc>
+                <a:tc>
+                  <a:txBody>
+                    <a:bodyPr/>
+                    <a:lstStyle/>
+                    <a:p>
+                      <a:pPr>
+                        <a:buNone/>
+                      </a:pPr>
+                      <a:r>
+                        <a:rPr lang="ru-RU" sz="2000">
+                          <a:solidFill>
+                            <a:srgbClr val="000000"/>
+                          </a:solidFill>
+                          <a:effectLst/>
+                          <a:latin typeface="Helvetica Neue" panose="02000503000000020004" pitchFamily="2" charset="0"/>
+                        </a:rPr>
+                        <a:t>Проста, интерпретируема, хороша для трендов/сезонности</a:t>
+                      </a:r>
+                      <a:endParaRPr lang="ru-RU" sz="2000">
+                        <a:effectLst/>
+                      </a:endParaRPr>
+                    </a:p>
+                  </a:txBody>
+                  <a:tcPr marL="16762" marR="16762" marT="16762" marB="16762">
+                    <a:lnL w="9525" cap="flat" cmpd="sng" algn="ctr">
+                      <a:solidFill>
+                        <a:srgbClr val="000000"/>
+                      </a:solidFill>
+                      <a:prstDash val="solid"/>
+                      <a:round/>
+                      <a:headEnd type="none" w="med" len="med"/>
+                      <a:tailEnd type="none" w="med" len="med"/>
+                    </a:lnL>
+                    <a:lnR w="9525" cap="flat" cmpd="sng" algn="ctr">
+                      <a:solidFill>
+                        <a:srgbClr val="000000"/>
+                      </a:solidFill>
+                      <a:prstDash val="solid"/>
+                      <a:round/>
+                      <a:headEnd type="none" w="med" len="med"/>
+                      <a:tailEnd type="none" w="med" len="med"/>
+                    </a:lnR>
+                    <a:lnT w="9525" cap="flat" cmpd="sng" algn="ctr">
+                      <a:solidFill>
+                        <a:srgbClr val="000000"/>
+                      </a:solidFill>
+                      <a:prstDash val="solid"/>
+                      <a:round/>
+                      <a:headEnd type="none" w="med" len="med"/>
+                      <a:tailEnd type="none" w="med" len="med"/>
+                    </a:lnT>
+                    <a:lnB w="9525" cap="flat" cmpd="sng" algn="ctr">
+                      <a:solidFill>
+                        <a:srgbClr val="000000"/>
+                      </a:solidFill>
+                      <a:prstDash val="solid"/>
+                      <a:round/>
+                      <a:headEnd type="none" w="med" len="med"/>
+                      <a:tailEnd type="none" w="med" len="med"/>
+                    </a:lnB>
+                    <a:noFill/>
+                  </a:tcPr>
+                </a:tc>
+                <a:tc>
+                  <a:txBody>
+                    <a:bodyPr/>
+                    <a:lstStyle/>
+                    <a:p>
+                      <a:pPr>
+                        <a:buNone/>
+                      </a:pPr>
+                      <a:r>
+                        <a:rPr lang="ru-RU" sz="2000">
+                          <a:solidFill>
+                            <a:srgbClr val="000000"/>
+                          </a:solidFill>
+                          <a:effectLst/>
+                          <a:latin typeface="Helvetica Neue" panose="02000503000000020004" pitchFamily="2" charset="0"/>
+                        </a:rPr>
+                        <a:t>Только для одного ряда, не учитывает внешние факторы</a:t>
+                      </a:r>
+                      <a:endParaRPr lang="ru-RU" sz="2000">
+                        <a:effectLst/>
+                      </a:endParaRPr>
+                    </a:p>
+                  </a:txBody>
+                  <a:tcPr marL="16762" marR="16762" marT="16762" marB="16762">
+                    <a:lnL w="9525" cap="flat" cmpd="sng" algn="ctr">
+                      <a:solidFill>
+                        <a:srgbClr val="000000"/>
+                      </a:solidFill>
+                      <a:prstDash val="solid"/>
+                      <a:round/>
+                      <a:headEnd type="none" w="med" len="med"/>
+                      <a:tailEnd type="none" w="med" len="med"/>
+                    </a:lnL>
+                    <a:lnR w="9525" cap="flat" cmpd="sng" algn="ctr">
+                      <a:solidFill>
+                        <a:srgbClr val="000000"/>
+                      </a:solidFill>
+                      <a:prstDash val="solid"/>
+                      <a:round/>
+                      <a:headEnd type="none" w="med" len="med"/>
+                      <a:tailEnd type="none" w="med" len="med"/>
+                    </a:lnR>
+                    <a:lnT w="9525" cap="flat" cmpd="sng" algn="ctr">
+                      <a:solidFill>
+                        <a:srgbClr val="000000"/>
+                      </a:solidFill>
+                      <a:prstDash val="solid"/>
+                      <a:round/>
+                      <a:headEnd type="none" w="med" len="med"/>
+                      <a:tailEnd type="none" w="med" len="med"/>
+                    </a:lnT>
+                    <a:lnB w="9525" cap="flat" cmpd="sng" algn="ctr">
+                      <a:solidFill>
+                        <a:srgbClr val="000000"/>
+                      </a:solidFill>
+                      <a:prstDash val="solid"/>
+                      <a:round/>
+                      <a:headEnd type="none" w="med" len="med"/>
+                      <a:tailEnd type="none" w="med" len="med"/>
+                    </a:lnB>
+                    <a:noFill/>
+                  </a:tcPr>
+                </a:tc>
+                <a:tc>
+                  <a:txBody>
+                    <a:bodyPr/>
+                    <a:lstStyle/>
+                    <a:p>
+                      <a:pPr>
+                        <a:buNone/>
+                      </a:pPr>
+                      <a:r>
+                        <a:rPr lang="ru-RU" sz="2000">
+                          <a:solidFill>
+                            <a:srgbClr val="000000"/>
+                          </a:solidFill>
+                          <a:effectLst/>
+                          <a:latin typeface="Apple Color Emoji" pitchFamily="2" charset="0"/>
+                        </a:rPr>
+                        <a:t>⚠️</a:t>
+                      </a:r>
+                      <a:r>
+                        <a:rPr lang="ru-RU" sz="2000">
+                          <a:solidFill>
+                            <a:srgbClr val="000000"/>
+                          </a:solidFill>
+                          <a:effectLst/>
+                          <a:latin typeface="Helvetica Neue" panose="02000503000000020004" pitchFamily="2" charset="0"/>
+                        </a:rPr>
+                        <a:t> Только переобучение</a:t>
+                      </a:r>
+                      <a:endParaRPr lang="ru-RU" sz="2000">
+                        <a:effectLst/>
+                      </a:endParaRPr>
+                    </a:p>
+                  </a:txBody>
+                  <a:tcPr marL="16762" marR="16762" marT="16762" marB="16762">
+                    <a:lnL w="9525" cap="flat" cmpd="sng" algn="ctr">
+                      <a:solidFill>
+                        <a:srgbClr val="000000"/>
+                      </a:solidFill>
+                      <a:prstDash val="solid"/>
+                      <a:round/>
+                      <a:headEnd type="none" w="med" len="med"/>
+                      <a:tailEnd type="none" w="med" len="med"/>
+                    </a:lnL>
+                    <a:lnR w="9525" cap="flat" cmpd="sng" algn="ctr">
+                      <a:solidFill>
+                        <a:srgbClr val="000000"/>
+                      </a:solidFill>
+                      <a:prstDash val="solid"/>
+                      <a:round/>
+                      <a:headEnd type="none" w="med" len="med"/>
+                      <a:tailEnd type="none" w="med" len="med"/>
+                    </a:lnR>
+                    <a:lnT w="9525" cap="flat" cmpd="sng" algn="ctr">
+                      <a:solidFill>
+                        <a:srgbClr val="000000"/>
+                      </a:solidFill>
+                      <a:prstDash val="solid"/>
+                      <a:round/>
+                      <a:headEnd type="none" w="med" len="med"/>
+                      <a:tailEnd type="none" w="med" len="med"/>
+                    </a:lnT>
+                    <a:lnB w="9525" cap="flat" cmpd="sng" algn="ctr">
+                      <a:solidFill>
+                        <a:srgbClr val="000000"/>
+                      </a:solidFill>
+                      <a:prstDash val="solid"/>
+                      <a:round/>
+                      <a:headEnd type="none" w="med" len="med"/>
+                      <a:tailEnd type="none" w="med" len="med"/>
+                    </a:lnB>
+                    <a:noFill/>
+                  </a:tcPr>
+                </a:tc>
+                <a:extLst>
+                  <a:ext uri="{0D108BD9-81ED-4DB2-BD59-A6C34878D82A}">
+                    <a16:rowId xmlns:a16="http://schemas.microsoft.com/office/drawing/2014/main" val="914476391"/>
+                  </a:ext>
+                </a:extLst>
+              </a:tr>
+              <a:tr h="454734">
+                <a:tc>
+                  <a:txBody>
+                    <a:bodyPr/>
+                    <a:lstStyle/>
+                    <a:p>
+                      <a:pPr>
+                        <a:buNone/>
+                      </a:pPr>
+                      <a:r>
+                        <a:rPr lang="en" sz="2000" b="1">
+                          <a:solidFill>
+                            <a:srgbClr val="000000"/>
+                          </a:solidFill>
+                          <a:effectLst/>
+                          <a:latin typeface="Helvetica Neue" panose="02000503000000020004" pitchFamily="2" charset="0"/>
+                        </a:rPr>
+                        <a:t>Linear Regression / Ridge / Lasso</a:t>
+                      </a:r>
+                      <a:endParaRPr lang="en" sz="2000">
+                        <a:effectLst/>
+                      </a:endParaRPr>
+                    </a:p>
+                  </a:txBody>
+                  <a:tcPr marL="16762" marR="16762" marT="16762" marB="16762">
+                    <a:lnL w="9525" cap="flat" cmpd="sng" algn="ctr">
+                      <a:solidFill>
+                        <a:srgbClr val="000000"/>
+                      </a:solidFill>
+                      <a:prstDash val="solid"/>
+                      <a:round/>
+                      <a:headEnd type="none" w="med" len="med"/>
+                      <a:tailEnd type="none" w="med" len="med"/>
+                    </a:lnL>
+                    <a:lnR w="9525" cap="flat" cmpd="sng" algn="ctr">
+                      <a:solidFill>
+                        <a:srgbClr val="000000"/>
+                      </a:solidFill>
+                      <a:prstDash val="solid"/>
+                      <a:round/>
+                      <a:headEnd type="none" w="med" len="med"/>
+                      <a:tailEnd type="none" w="med" len="med"/>
+                    </a:lnR>
+                    <a:lnT w="9525" cap="flat" cmpd="sng" algn="ctr">
+                      <a:solidFill>
+                        <a:srgbClr val="000000"/>
+                      </a:solidFill>
+                      <a:prstDash val="solid"/>
+                      <a:round/>
+                      <a:headEnd type="none" w="med" len="med"/>
+                      <a:tailEnd type="none" w="med" len="med"/>
+                    </a:lnT>
+                    <a:lnB w="9525" cap="flat" cmpd="sng" algn="ctr">
+                      <a:solidFill>
+                        <a:srgbClr val="000000"/>
+                      </a:solidFill>
+                      <a:prstDash val="solid"/>
+                      <a:round/>
+                      <a:headEnd type="none" w="med" len="med"/>
+                      <a:tailEnd type="none" w="med" len="med"/>
+                    </a:lnB>
+                    <a:solidFill>
+                      <a:srgbClr val="D4D4D4"/>
+                    </a:solidFill>
+                  </a:tcPr>
+                </a:tc>
+                <a:tc>
+                  <a:txBody>
+                    <a:bodyPr/>
+                    <a:lstStyle/>
+                    <a:p>
+                      <a:pPr>
+                        <a:buNone/>
+                      </a:pPr>
+                      <a:r>
+                        <a:rPr lang="ru-RU" sz="2000" dirty="0">
+                          <a:solidFill>
+                            <a:srgbClr val="000000"/>
+                          </a:solidFill>
+                          <a:effectLst/>
+                          <a:latin typeface="Helvetica Neue" panose="02000503000000020004" pitchFamily="2" charset="0"/>
+                        </a:rPr>
+                        <a:t>Быстро, интерпретируемо, легко </a:t>
+                      </a:r>
+                      <a:r>
+                        <a:rPr lang="ru-RU" sz="2000" dirty="0" err="1">
+                          <a:solidFill>
+                            <a:srgbClr val="000000"/>
+                          </a:solidFill>
+                          <a:effectLst/>
+                          <a:latin typeface="Helvetica Neue" panose="02000503000000020004" pitchFamily="2" charset="0"/>
+                        </a:rPr>
+                        <a:t>дообучать</a:t>
+                      </a:r>
+                      <a:r>
+                        <a:rPr lang="ru-RU" sz="2000" dirty="0">
+                          <a:solidFill>
+                            <a:srgbClr val="000000"/>
+                          </a:solidFill>
+                          <a:effectLst/>
+                          <a:latin typeface="Helvetica Neue" panose="02000503000000020004" pitchFamily="2" charset="0"/>
+                        </a:rPr>
+                        <a:t> (</a:t>
+                      </a:r>
+                      <a:r>
+                        <a:rPr lang="en" sz="2000" dirty="0">
+                          <a:solidFill>
+                            <a:srgbClr val="000000"/>
+                          </a:solidFill>
+                          <a:effectLst/>
+                          <a:latin typeface="Helvetica Neue" panose="02000503000000020004" pitchFamily="2" charset="0"/>
+                        </a:rPr>
+                        <a:t>SGD)</a:t>
+                      </a:r>
+                      <a:endParaRPr lang="en" sz="2000" dirty="0">
+                        <a:effectLst/>
+                      </a:endParaRPr>
+                    </a:p>
+                  </a:txBody>
+                  <a:tcPr marL="16762" marR="16762" marT="16762" marB="16762">
+                    <a:lnL w="9525" cap="flat" cmpd="sng" algn="ctr">
+                      <a:solidFill>
+                        <a:srgbClr val="000000"/>
+                      </a:solidFill>
+                      <a:prstDash val="solid"/>
+                      <a:round/>
+                      <a:headEnd type="none" w="med" len="med"/>
+                      <a:tailEnd type="none" w="med" len="med"/>
+                    </a:lnL>
+                    <a:lnR w="9525" cap="flat" cmpd="sng" algn="ctr">
+                      <a:solidFill>
+                        <a:srgbClr val="000000"/>
+                      </a:solidFill>
+                      <a:prstDash val="solid"/>
+                      <a:round/>
+                      <a:headEnd type="none" w="med" len="med"/>
+                      <a:tailEnd type="none" w="med" len="med"/>
+                    </a:lnR>
+                    <a:lnT w="9525" cap="flat" cmpd="sng" algn="ctr">
+                      <a:solidFill>
+                        <a:srgbClr val="000000"/>
+                      </a:solidFill>
+                      <a:prstDash val="solid"/>
+                      <a:round/>
+                      <a:headEnd type="none" w="med" len="med"/>
+                      <a:tailEnd type="none" w="med" len="med"/>
+                    </a:lnT>
+                    <a:lnB w="9525" cap="flat" cmpd="sng" algn="ctr">
+                      <a:solidFill>
+                        <a:srgbClr val="000000"/>
+                      </a:solidFill>
+                      <a:prstDash val="solid"/>
+                      <a:round/>
+                      <a:headEnd type="none" w="med" len="med"/>
+                      <a:tailEnd type="none" w="med" len="med"/>
+                    </a:lnB>
+                    <a:noFill/>
+                  </a:tcPr>
+                </a:tc>
+                <a:tc>
+                  <a:txBody>
+                    <a:bodyPr/>
+                    <a:lstStyle/>
+                    <a:p>
+                      <a:pPr>
+                        <a:buNone/>
+                      </a:pPr>
+                      <a:r>
+                        <a:rPr lang="ru-RU" sz="2000">
+                          <a:solidFill>
+                            <a:srgbClr val="000000"/>
+                          </a:solidFill>
+                          <a:effectLst/>
+                          <a:latin typeface="Helvetica Neue" panose="02000503000000020004" pitchFamily="2" charset="0"/>
+                        </a:rPr>
+                        <a:t>Требует ручной инженерии признаков (лаги, скользящие окна)</a:t>
+                      </a:r>
+                      <a:endParaRPr lang="ru-RU" sz="2000">
+                        <a:effectLst/>
+                      </a:endParaRPr>
+                    </a:p>
+                  </a:txBody>
+                  <a:tcPr marL="16762" marR="16762" marT="16762" marB="16762">
+                    <a:lnL w="9525" cap="flat" cmpd="sng" algn="ctr">
+                      <a:solidFill>
+                        <a:srgbClr val="000000"/>
+                      </a:solidFill>
+                      <a:prstDash val="solid"/>
+                      <a:round/>
+                      <a:headEnd type="none" w="med" len="med"/>
+                      <a:tailEnd type="none" w="med" len="med"/>
+                    </a:lnL>
+                    <a:lnR w="9525" cap="flat" cmpd="sng" algn="ctr">
+                      <a:solidFill>
+                        <a:srgbClr val="000000"/>
+                      </a:solidFill>
+                      <a:prstDash val="solid"/>
+                      <a:round/>
+                      <a:headEnd type="none" w="med" len="med"/>
+                      <a:tailEnd type="none" w="med" len="med"/>
+                    </a:lnR>
+                    <a:lnT w="9525" cap="flat" cmpd="sng" algn="ctr">
+                      <a:solidFill>
+                        <a:srgbClr val="000000"/>
+                      </a:solidFill>
+                      <a:prstDash val="solid"/>
+                      <a:round/>
+                      <a:headEnd type="none" w="med" len="med"/>
+                      <a:tailEnd type="none" w="med" len="med"/>
+                    </a:lnT>
+                    <a:lnB w="9525" cap="flat" cmpd="sng" algn="ctr">
+                      <a:solidFill>
+                        <a:srgbClr val="000000"/>
+                      </a:solidFill>
+                      <a:prstDash val="solid"/>
+                      <a:round/>
+                      <a:headEnd type="none" w="med" len="med"/>
+                      <a:tailEnd type="none" w="med" len="med"/>
+                    </a:lnB>
+                    <a:noFill/>
+                  </a:tcPr>
+                </a:tc>
+                <a:tc>
+                  <a:txBody>
+                    <a:bodyPr/>
+                    <a:lstStyle/>
+                    <a:p>
+                      <a:pPr>
+                        <a:buNone/>
+                      </a:pPr>
+                      <a:r>
+                        <a:rPr lang="ru-RU" sz="2000">
+                          <a:solidFill>
+                            <a:srgbClr val="000000"/>
+                          </a:solidFill>
+                          <a:effectLst/>
+                          <a:latin typeface="Apple Color Emoji" pitchFamily="2" charset="0"/>
+                        </a:rPr>
+                        <a:t>✅</a:t>
+                      </a:r>
+                      <a:r>
+                        <a:rPr lang="ru-RU" sz="2000">
+                          <a:solidFill>
+                            <a:srgbClr val="000000"/>
+                          </a:solidFill>
+                          <a:effectLst/>
+                          <a:latin typeface="Helvetica Neue" panose="02000503000000020004" pitchFamily="2" charset="0"/>
+                        </a:rPr>
+                        <a:t> Да (</a:t>
+                      </a:r>
+                      <a:r>
+                        <a:rPr lang="en" sz="2000">
+                          <a:solidFill>
+                            <a:srgbClr val="000000"/>
+                          </a:solidFill>
+                          <a:effectLst/>
+                          <a:latin typeface="Helvetica Neue" panose="02000503000000020004" pitchFamily="2" charset="0"/>
+                        </a:rPr>
+                        <a:t>SGD, partial_fit)</a:t>
+                      </a:r>
+                      <a:endParaRPr lang="en" sz="2000">
+                        <a:effectLst/>
+                      </a:endParaRPr>
+                    </a:p>
+                  </a:txBody>
+                  <a:tcPr marL="16762" marR="16762" marT="16762" marB="16762">
+                    <a:lnL w="9525" cap="flat" cmpd="sng" algn="ctr">
+                      <a:solidFill>
+                        <a:srgbClr val="000000"/>
+                      </a:solidFill>
+                      <a:prstDash val="solid"/>
+                      <a:round/>
+                      <a:headEnd type="none" w="med" len="med"/>
+                      <a:tailEnd type="none" w="med" len="med"/>
+                    </a:lnL>
+                    <a:lnR w="9525" cap="flat" cmpd="sng" algn="ctr">
+                      <a:solidFill>
+                        <a:srgbClr val="000000"/>
+                      </a:solidFill>
+                      <a:prstDash val="solid"/>
+                      <a:round/>
+                      <a:headEnd type="none" w="med" len="med"/>
+                      <a:tailEnd type="none" w="med" len="med"/>
+                    </a:lnR>
+                    <a:lnT w="9525" cap="flat" cmpd="sng" algn="ctr">
+                      <a:solidFill>
+                        <a:srgbClr val="000000"/>
+                      </a:solidFill>
+                      <a:prstDash val="solid"/>
+                      <a:round/>
+                      <a:headEnd type="none" w="med" len="med"/>
+                      <a:tailEnd type="none" w="med" len="med"/>
+                    </a:lnT>
+                    <a:lnB w="9525" cap="flat" cmpd="sng" algn="ctr">
+                      <a:solidFill>
+                        <a:srgbClr val="000000"/>
+                      </a:solidFill>
+                      <a:prstDash val="solid"/>
+                      <a:round/>
+                      <a:headEnd type="none" w="med" len="med"/>
+                      <a:tailEnd type="none" w="med" len="med"/>
+                    </a:lnB>
+                    <a:noFill/>
+                  </a:tcPr>
+                </a:tc>
+                <a:extLst>
+                  <a:ext uri="{0D108BD9-81ED-4DB2-BD59-A6C34878D82A}">
+                    <a16:rowId xmlns:a16="http://schemas.microsoft.com/office/drawing/2014/main" val="4081547339"/>
+                  </a:ext>
+                </a:extLst>
+              </a:tr>
+              <a:tr h="454734">
+                <a:tc>
+                  <a:txBody>
+                    <a:bodyPr/>
+                    <a:lstStyle/>
+                    <a:p>
+                      <a:pPr>
+                        <a:buNone/>
+                      </a:pPr>
+                      <a:r>
+                        <a:rPr lang="en" sz="2000" b="1">
+                          <a:solidFill>
+                            <a:srgbClr val="000000"/>
+                          </a:solidFill>
+                          <a:effectLst/>
+                          <a:latin typeface="Helvetica Neue" panose="02000503000000020004" pitchFamily="2" charset="0"/>
+                        </a:rPr>
+                        <a:t>XGBoost / LightGBM / CatBoost</a:t>
+                      </a:r>
+                      <a:endParaRPr lang="en" sz="2000">
+                        <a:effectLst/>
+                      </a:endParaRPr>
+                    </a:p>
+                  </a:txBody>
+                  <a:tcPr marL="16762" marR="16762" marT="16762" marB="16762">
+                    <a:lnL w="9525" cap="flat" cmpd="sng" algn="ctr">
+                      <a:solidFill>
+                        <a:srgbClr val="000000"/>
+                      </a:solidFill>
+                      <a:prstDash val="solid"/>
+                      <a:round/>
+                      <a:headEnd type="none" w="med" len="med"/>
+                      <a:tailEnd type="none" w="med" len="med"/>
+                    </a:lnL>
+                    <a:lnR w="9525" cap="flat" cmpd="sng" algn="ctr">
+                      <a:solidFill>
+                        <a:srgbClr val="000000"/>
+                      </a:solidFill>
+                      <a:prstDash val="solid"/>
+                      <a:round/>
+                      <a:headEnd type="none" w="med" len="med"/>
+                      <a:tailEnd type="none" w="med" len="med"/>
+                    </a:lnR>
+                    <a:lnT w="9525" cap="flat" cmpd="sng" algn="ctr">
+                      <a:solidFill>
+                        <a:srgbClr val="000000"/>
+                      </a:solidFill>
+                      <a:prstDash val="solid"/>
+                      <a:round/>
+                      <a:headEnd type="none" w="med" len="med"/>
+                      <a:tailEnd type="none" w="med" len="med"/>
+                    </a:lnT>
+                    <a:lnB w="9525" cap="flat" cmpd="sng" algn="ctr">
+                      <a:solidFill>
+                        <a:srgbClr val="000000"/>
+                      </a:solidFill>
+                      <a:prstDash val="solid"/>
+                      <a:round/>
+                      <a:headEnd type="none" w="med" len="med"/>
+                      <a:tailEnd type="none" w="med" len="med"/>
+                    </a:lnB>
+                    <a:solidFill>
+                      <a:srgbClr val="D4D4D4"/>
+                    </a:solidFill>
+                  </a:tcPr>
+                </a:tc>
+                <a:tc>
+                  <a:txBody>
+                    <a:bodyPr/>
+                    <a:lstStyle/>
+                    <a:p>
+                      <a:pPr>
+                        <a:buNone/>
+                      </a:pPr>
+                      <a:r>
+                        <a:rPr lang="ru-RU" sz="2000">
+                          <a:solidFill>
+                            <a:srgbClr val="000000"/>
+                          </a:solidFill>
+                          <a:effectLst/>
+                          <a:latin typeface="Helvetica Neue" panose="02000503000000020004" pitchFamily="2" charset="0"/>
+                        </a:rPr>
+                        <a:t>Высокая точность, работает с пропусками, нелинейности, 100+ признаков</a:t>
+                      </a:r>
+                      <a:endParaRPr lang="ru-RU" sz="2000">
+                        <a:effectLst/>
+                      </a:endParaRPr>
+                    </a:p>
+                  </a:txBody>
+                  <a:tcPr marL="16762" marR="16762" marT="16762" marB="16762">
+                    <a:lnL w="9525" cap="flat" cmpd="sng" algn="ctr">
+                      <a:solidFill>
+                        <a:srgbClr val="000000"/>
+                      </a:solidFill>
+                      <a:prstDash val="solid"/>
+                      <a:round/>
+                      <a:headEnd type="none" w="med" len="med"/>
+                      <a:tailEnd type="none" w="med" len="med"/>
+                    </a:lnL>
+                    <a:lnR w="9525" cap="flat" cmpd="sng" algn="ctr">
+                      <a:solidFill>
+                        <a:srgbClr val="000000"/>
+                      </a:solidFill>
+                      <a:prstDash val="solid"/>
+                      <a:round/>
+                      <a:headEnd type="none" w="med" len="med"/>
+                      <a:tailEnd type="none" w="med" len="med"/>
+                    </a:lnR>
+                    <a:lnT w="9525" cap="flat" cmpd="sng" algn="ctr">
+                      <a:solidFill>
+                        <a:srgbClr val="000000"/>
+                      </a:solidFill>
+                      <a:prstDash val="solid"/>
+                      <a:round/>
+                      <a:headEnd type="none" w="med" len="med"/>
+                      <a:tailEnd type="none" w="med" len="med"/>
+                    </a:lnT>
+                    <a:lnB w="9525" cap="flat" cmpd="sng" algn="ctr">
+                      <a:solidFill>
+                        <a:srgbClr val="000000"/>
+                      </a:solidFill>
+                      <a:prstDash val="solid"/>
+                      <a:round/>
+                      <a:headEnd type="none" w="med" len="med"/>
+                      <a:tailEnd type="none" w="med" len="med"/>
+                    </a:lnB>
+                    <a:noFill/>
+                  </a:tcPr>
+                </a:tc>
+                <a:tc>
+                  <a:txBody>
+                    <a:bodyPr/>
+                    <a:lstStyle/>
+                    <a:p>
+                      <a:pPr>
+                        <a:buNone/>
+                      </a:pPr>
+                      <a:r>
+                        <a:rPr lang="ru-RU" sz="2000">
+                          <a:solidFill>
+                            <a:srgbClr val="000000"/>
+                          </a:solidFill>
+                          <a:effectLst/>
+                          <a:latin typeface="Helvetica Neue" panose="02000503000000020004" pitchFamily="2" charset="0"/>
+                        </a:rPr>
+                        <a:t>Не "нативно" временная модель; дообучение = переобучение</a:t>
+                      </a:r>
+                      <a:endParaRPr lang="ru-RU" sz="2000">
+                        <a:effectLst/>
+                      </a:endParaRPr>
+                    </a:p>
+                  </a:txBody>
+                  <a:tcPr marL="16762" marR="16762" marT="16762" marB="16762">
+                    <a:lnL w="9525" cap="flat" cmpd="sng" algn="ctr">
+                      <a:solidFill>
+                        <a:srgbClr val="000000"/>
+                      </a:solidFill>
+                      <a:prstDash val="solid"/>
+                      <a:round/>
+                      <a:headEnd type="none" w="med" len="med"/>
+                      <a:tailEnd type="none" w="med" len="med"/>
+                    </a:lnL>
+                    <a:lnR w="9525" cap="flat" cmpd="sng" algn="ctr">
+                      <a:solidFill>
+                        <a:srgbClr val="000000"/>
+                      </a:solidFill>
+                      <a:prstDash val="solid"/>
+                      <a:round/>
+                      <a:headEnd type="none" w="med" len="med"/>
+                      <a:tailEnd type="none" w="med" len="med"/>
+                    </a:lnR>
+                    <a:lnT w="9525" cap="flat" cmpd="sng" algn="ctr">
+                      <a:solidFill>
+                        <a:srgbClr val="000000"/>
+                      </a:solidFill>
+                      <a:prstDash val="solid"/>
+                      <a:round/>
+                      <a:headEnd type="none" w="med" len="med"/>
+                      <a:tailEnd type="none" w="med" len="med"/>
+                    </a:lnT>
+                    <a:lnB w="9525" cap="flat" cmpd="sng" algn="ctr">
+                      <a:solidFill>
+                        <a:srgbClr val="000000"/>
+                      </a:solidFill>
+                      <a:prstDash val="solid"/>
+                      <a:round/>
+                      <a:headEnd type="none" w="med" len="med"/>
+                      <a:tailEnd type="none" w="med" len="med"/>
+                    </a:lnB>
+                    <a:noFill/>
+                  </a:tcPr>
+                </a:tc>
+                <a:tc>
+                  <a:txBody>
+                    <a:bodyPr/>
+                    <a:lstStyle/>
+                    <a:p>
+                      <a:pPr>
+                        <a:buNone/>
+                      </a:pPr>
+                      <a:r>
+                        <a:rPr lang="ru-RU" sz="2000">
+                          <a:solidFill>
+                            <a:srgbClr val="000000"/>
+                          </a:solidFill>
+                          <a:effectLst/>
+                          <a:latin typeface="Apple Color Emoji" pitchFamily="2" charset="0"/>
+                        </a:rPr>
+                        <a:t>⚠️</a:t>
+                      </a:r>
+                      <a:r>
+                        <a:rPr lang="ru-RU" sz="2000">
+                          <a:solidFill>
+                            <a:srgbClr val="000000"/>
+                          </a:solidFill>
+                          <a:effectLst/>
+                          <a:latin typeface="Helvetica Neue" panose="02000503000000020004" pitchFamily="2" charset="0"/>
+                        </a:rPr>
+                        <a:t> Частичное (</a:t>
+                      </a:r>
+                      <a:r>
+                        <a:rPr lang="en" sz="2000">
+                          <a:solidFill>
+                            <a:srgbClr val="000000"/>
+                          </a:solidFill>
+                          <a:effectLst/>
+                          <a:latin typeface="Helvetica Neue" panose="02000503000000020004" pitchFamily="2" charset="0"/>
+                        </a:rPr>
+                        <a:t>LightGBM: init_model)</a:t>
+                      </a:r>
+                      <a:endParaRPr lang="en" sz="2000">
+                        <a:effectLst/>
+                      </a:endParaRPr>
+                    </a:p>
+                  </a:txBody>
+                  <a:tcPr marL="16762" marR="16762" marT="16762" marB="16762">
+                    <a:lnL w="9525" cap="flat" cmpd="sng" algn="ctr">
+                      <a:solidFill>
+                        <a:srgbClr val="000000"/>
+                      </a:solidFill>
+                      <a:prstDash val="solid"/>
+                      <a:round/>
+                      <a:headEnd type="none" w="med" len="med"/>
+                      <a:tailEnd type="none" w="med" len="med"/>
+                    </a:lnL>
+                    <a:lnR w="9525" cap="flat" cmpd="sng" algn="ctr">
+                      <a:solidFill>
+                        <a:srgbClr val="000000"/>
+                      </a:solidFill>
+                      <a:prstDash val="solid"/>
+                      <a:round/>
+                      <a:headEnd type="none" w="med" len="med"/>
+                      <a:tailEnd type="none" w="med" len="med"/>
+                    </a:lnR>
+                    <a:lnT w="9525" cap="flat" cmpd="sng" algn="ctr">
+                      <a:solidFill>
+                        <a:srgbClr val="000000"/>
+                      </a:solidFill>
+                      <a:prstDash val="solid"/>
+                      <a:round/>
+                      <a:headEnd type="none" w="med" len="med"/>
+                      <a:tailEnd type="none" w="med" len="med"/>
+                    </a:lnT>
+                    <a:lnB w="9525" cap="flat" cmpd="sng" algn="ctr">
+                      <a:solidFill>
+                        <a:srgbClr val="000000"/>
+                      </a:solidFill>
+                      <a:prstDash val="solid"/>
+                      <a:round/>
+                      <a:headEnd type="none" w="med" len="med"/>
+                      <a:tailEnd type="none" w="med" len="med"/>
+                    </a:lnB>
+                    <a:noFill/>
+                  </a:tcPr>
+                </a:tc>
+                <a:extLst>
+                  <a:ext uri="{0D108BD9-81ED-4DB2-BD59-A6C34878D82A}">
+                    <a16:rowId xmlns:a16="http://schemas.microsoft.com/office/drawing/2014/main" val="1186933435"/>
+                  </a:ext>
+                </a:extLst>
+              </a:tr>
+              <a:tr h="454734">
+                <a:tc>
+                  <a:txBody>
+                    <a:bodyPr/>
+                    <a:lstStyle/>
+                    <a:p>
+                      <a:pPr>
+                        <a:buNone/>
+                      </a:pPr>
+                      <a:r>
+                        <a:rPr lang="en" sz="2000" b="1">
+                          <a:solidFill>
+                            <a:srgbClr val="000000"/>
+                          </a:solidFill>
+                          <a:effectLst/>
+                          <a:latin typeface="Helvetica Neue" panose="02000503000000020004" pitchFamily="2" charset="0"/>
+                        </a:rPr>
+                        <a:t>LSTM / GRU (RNN)</a:t>
+                      </a:r>
+                      <a:endParaRPr lang="en" sz="2000">
+                        <a:effectLst/>
+                      </a:endParaRPr>
+                    </a:p>
+                  </a:txBody>
+                  <a:tcPr marL="16762" marR="16762" marT="16762" marB="16762">
+                    <a:lnL w="9525" cap="flat" cmpd="sng" algn="ctr">
+                      <a:solidFill>
+                        <a:srgbClr val="000000"/>
+                      </a:solidFill>
+                      <a:prstDash val="solid"/>
+                      <a:round/>
+                      <a:headEnd type="none" w="med" len="med"/>
+                      <a:tailEnd type="none" w="med" len="med"/>
+                    </a:lnL>
+                    <a:lnR w="9525" cap="flat" cmpd="sng" algn="ctr">
+                      <a:solidFill>
+                        <a:srgbClr val="000000"/>
+                      </a:solidFill>
+                      <a:prstDash val="solid"/>
+                      <a:round/>
+                      <a:headEnd type="none" w="med" len="med"/>
+                      <a:tailEnd type="none" w="med" len="med"/>
+                    </a:lnR>
+                    <a:lnT w="9525" cap="flat" cmpd="sng" algn="ctr">
+                      <a:solidFill>
+                        <a:srgbClr val="000000"/>
+                      </a:solidFill>
+                      <a:prstDash val="solid"/>
+                      <a:round/>
+                      <a:headEnd type="none" w="med" len="med"/>
+                      <a:tailEnd type="none" w="med" len="med"/>
+                    </a:lnT>
+                    <a:lnB w="9525" cap="flat" cmpd="sng" algn="ctr">
+                      <a:solidFill>
+                        <a:srgbClr val="000000"/>
+                      </a:solidFill>
+                      <a:prstDash val="solid"/>
+                      <a:round/>
+                      <a:headEnd type="none" w="med" len="med"/>
+                      <a:tailEnd type="none" w="med" len="med"/>
+                    </a:lnB>
+                    <a:solidFill>
+                      <a:srgbClr val="D4D4D4"/>
+                    </a:solidFill>
+                  </a:tcPr>
+                </a:tc>
+                <a:tc>
+                  <a:txBody>
+                    <a:bodyPr/>
+                    <a:lstStyle/>
+                    <a:p>
+                      <a:pPr>
+                        <a:buNone/>
+                      </a:pPr>
+                      <a:r>
+                        <a:rPr lang="ru-RU" sz="2000" dirty="0">
+                          <a:solidFill>
+                            <a:srgbClr val="000000"/>
+                          </a:solidFill>
+                          <a:effectLst/>
+                          <a:latin typeface="Helvetica Neue" panose="02000503000000020004" pitchFamily="2" charset="0"/>
+                        </a:rPr>
+                        <a:t>Улавливает долгосрочные зависимости, работает с последовательностями</a:t>
+                      </a:r>
+                      <a:endParaRPr lang="ru-RU" sz="2000" dirty="0">
+                        <a:effectLst/>
+                      </a:endParaRPr>
+                    </a:p>
+                  </a:txBody>
+                  <a:tcPr marL="16762" marR="16762" marT="16762" marB="16762">
+                    <a:lnL w="9525" cap="flat" cmpd="sng" algn="ctr">
+                      <a:solidFill>
+                        <a:srgbClr val="000000"/>
+                      </a:solidFill>
+                      <a:prstDash val="solid"/>
+                      <a:round/>
+                      <a:headEnd type="none" w="med" len="med"/>
+                      <a:tailEnd type="none" w="med" len="med"/>
+                    </a:lnL>
+                    <a:lnR w="9525" cap="flat" cmpd="sng" algn="ctr">
+                      <a:solidFill>
+                        <a:srgbClr val="000000"/>
+                      </a:solidFill>
+                      <a:prstDash val="solid"/>
+                      <a:round/>
+                      <a:headEnd type="none" w="med" len="med"/>
+                      <a:tailEnd type="none" w="med" len="med"/>
+                    </a:lnR>
+                    <a:lnT w="9525" cap="flat" cmpd="sng" algn="ctr">
+                      <a:solidFill>
+                        <a:srgbClr val="000000"/>
+                      </a:solidFill>
+                      <a:prstDash val="solid"/>
+                      <a:round/>
+                      <a:headEnd type="none" w="med" len="med"/>
+                      <a:tailEnd type="none" w="med" len="med"/>
+                    </a:lnT>
+                    <a:lnB w="9525" cap="flat" cmpd="sng" algn="ctr">
+                      <a:solidFill>
+                        <a:srgbClr val="000000"/>
+                      </a:solidFill>
+                      <a:prstDash val="solid"/>
+                      <a:round/>
+                      <a:headEnd type="none" w="med" len="med"/>
+                      <a:tailEnd type="none" w="med" len="med"/>
+                    </a:lnB>
+                    <a:noFill/>
+                  </a:tcPr>
+                </a:tc>
+                <a:tc>
+                  <a:txBody>
+                    <a:bodyPr/>
+                    <a:lstStyle/>
+                    <a:p>
+                      <a:pPr>
+                        <a:buNone/>
+                      </a:pPr>
+                      <a:r>
+                        <a:rPr lang="ru-RU" sz="2000">
+                          <a:solidFill>
+                            <a:srgbClr val="000000"/>
+                          </a:solidFill>
+                          <a:effectLst/>
+                          <a:latin typeface="Helvetica Neue" panose="02000503000000020004" pitchFamily="2" charset="0"/>
+                        </a:rPr>
+                        <a:t>Сложно настраивать, требует </a:t>
+                      </a:r>
+                      <a:r>
+                        <a:rPr lang="en" sz="2000">
+                          <a:solidFill>
+                            <a:srgbClr val="000000"/>
+                          </a:solidFill>
+                          <a:effectLst/>
+                          <a:latin typeface="Helvetica Neue" panose="02000503000000020004" pitchFamily="2" charset="0"/>
+                        </a:rPr>
+                        <a:t>GPU, </a:t>
+                      </a:r>
+                      <a:r>
+                        <a:rPr lang="ru-RU" sz="2000">
+                          <a:solidFill>
+                            <a:srgbClr val="000000"/>
+                          </a:solidFill>
+                          <a:effectLst/>
+                          <a:latin typeface="Helvetica Neue" panose="02000503000000020004" pitchFamily="2" charset="0"/>
+                        </a:rPr>
+                        <a:t>риск переобучения</a:t>
+                      </a:r>
+                      <a:endParaRPr lang="ru-RU" sz="2000">
+                        <a:effectLst/>
+                      </a:endParaRPr>
+                    </a:p>
+                  </a:txBody>
+                  <a:tcPr marL="16762" marR="16762" marT="16762" marB="16762">
+                    <a:lnL w="9525" cap="flat" cmpd="sng" algn="ctr">
+                      <a:solidFill>
+                        <a:srgbClr val="000000"/>
+                      </a:solidFill>
+                      <a:prstDash val="solid"/>
+                      <a:round/>
+                      <a:headEnd type="none" w="med" len="med"/>
+                      <a:tailEnd type="none" w="med" len="med"/>
+                    </a:lnL>
+                    <a:lnR w="9525" cap="flat" cmpd="sng" algn="ctr">
+                      <a:solidFill>
+                        <a:srgbClr val="000000"/>
+                      </a:solidFill>
+                      <a:prstDash val="solid"/>
+                      <a:round/>
+                      <a:headEnd type="none" w="med" len="med"/>
+                      <a:tailEnd type="none" w="med" len="med"/>
+                    </a:lnR>
+                    <a:lnT w="9525" cap="flat" cmpd="sng" algn="ctr">
+                      <a:solidFill>
+                        <a:srgbClr val="000000"/>
+                      </a:solidFill>
+                      <a:prstDash val="solid"/>
+                      <a:round/>
+                      <a:headEnd type="none" w="med" len="med"/>
+                      <a:tailEnd type="none" w="med" len="med"/>
+                    </a:lnT>
+                    <a:lnB w="9525" cap="flat" cmpd="sng" algn="ctr">
+                      <a:solidFill>
+                        <a:srgbClr val="000000"/>
+                      </a:solidFill>
+                      <a:prstDash val="solid"/>
+                      <a:round/>
+                      <a:headEnd type="none" w="med" len="med"/>
+                      <a:tailEnd type="none" w="med" len="med"/>
+                    </a:lnB>
+                    <a:noFill/>
+                  </a:tcPr>
+                </a:tc>
+                <a:tc>
+                  <a:txBody>
+                    <a:bodyPr/>
+                    <a:lstStyle/>
+                    <a:p>
+                      <a:pPr>
+                        <a:buNone/>
+                      </a:pPr>
+                      <a:r>
+                        <a:rPr lang="ru-RU" sz="2000">
+                          <a:solidFill>
+                            <a:srgbClr val="000000"/>
+                          </a:solidFill>
+                          <a:effectLst/>
+                          <a:latin typeface="Apple Color Emoji" pitchFamily="2" charset="0"/>
+                        </a:rPr>
+                        <a:t>⚠️</a:t>
+                      </a:r>
+                      <a:r>
+                        <a:rPr lang="ru-RU" sz="2000">
+                          <a:solidFill>
+                            <a:srgbClr val="000000"/>
+                          </a:solidFill>
+                          <a:effectLst/>
+                          <a:latin typeface="Helvetica Neue" panose="02000503000000020004" pitchFamily="2" charset="0"/>
+                        </a:rPr>
+                        <a:t> Да, но с осторожностью (</a:t>
+                      </a:r>
+                      <a:r>
+                        <a:rPr lang="en" sz="2000">
+                          <a:solidFill>
+                            <a:srgbClr val="000000"/>
+                          </a:solidFill>
+                          <a:effectLst/>
+                          <a:latin typeface="Helvetica Neue" panose="02000503000000020004" pitchFamily="2" charset="0"/>
+                        </a:rPr>
+                        <a:t>drift, catastrophic forgetting)</a:t>
+                      </a:r>
+                      <a:endParaRPr lang="en" sz="2000">
+                        <a:effectLst/>
+                      </a:endParaRPr>
+                    </a:p>
+                  </a:txBody>
+                  <a:tcPr marL="16762" marR="16762" marT="16762" marB="16762">
+                    <a:lnL w="9525" cap="flat" cmpd="sng" algn="ctr">
+                      <a:solidFill>
+                        <a:srgbClr val="000000"/>
+                      </a:solidFill>
+                      <a:prstDash val="solid"/>
+                      <a:round/>
+                      <a:headEnd type="none" w="med" len="med"/>
+                      <a:tailEnd type="none" w="med" len="med"/>
+                    </a:lnL>
+                    <a:lnR w="9525" cap="flat" cmpd="sng" algn="ctr">
+                      <a:solidFill>
+                        <a:srgbClr val="000000"/>
+                      </a:solidFill>
+                      <a:prstDash val="solid"/>
+                      <a:round/>
+                      <a:headEnd type="none" w="med" len="med"/>
+                      <a:tailEnd type="none" w="med" len="med"/>
+                    </a:lnR>
+                    <a:lnT w="9525" cap="flat" cmpd="sng" algn="ctr">
+                      <a:solidFill>
+                        <a:srgbClr val="000000"/>
+                      </a:solidFill>
+                      <a:prstDash val="solid"/>
+                      <a:round/>
+                      <a:headEnd type="none" w="med" len="med"/>
+                      <a:tailEnd type="none" w="med" len="med"/>
+                    </a:lnT>
+                    <a:lnB w="9525" cap="flat" cmpd="sng" algn="ctr">
+                      <a:solidFill>
+                        <a:srgbClr val="000000"/>
+                      </a:solidFill>
+                      <a:prstDash val="solid"/>
+                      <a:round/>
+                      <a:headEnd type="none" w="med" len="med"/>
+                      <a:tailEnd type="none" w="med" len="med"/>
+                    </a:lnB>
+                    <a:noFill/>
+                  </a:tcPr>
+                </a:tc>
+                <a:extLst>
+                  <a:ext uri="{0D108BD9-81ED-4DB2-BD59-A6C34878D82A}">
+                    <a16:rowId xmlns:a16="http://schemas.microsoft.com/office/drawing/2014/main" val="3778553983"/>
+                  </a:ext>
+                </a:extLst>
+              </a:tr>
+              <a:tr h="454734">
+                <a:tc>
+                  <a:txBody>
+                    <a:bodyPr/>
+                    <a:lstStyle/>
+                    <a:p>
+                      <a:pPr>
+                        <a:buNone/>
+                      </a:pPr>
+                      <a:r>
+                        <a:rPr lang="en" sz="2000" b="1">
+                          <a:solidFill>
+                            <a:srgbClr val="000000"/>
+                          </a:solidFill>
+                          <a:effectLst/>
+                          <a:latin typeface="Helvetica Neue" panose="02000503000000020004" pitchFamily="2" charset="0"/>
+                        </a:rPr>
+                        <a:t>N-BEATS</a:t>
+                      </a:r>
+                      <a:endParaRPr lang="en" sz="2000">
+                        <a:effectLst/>
+                      </a:endParaRPr>
+                    </a:p>
+                  </a:txBody>
+                  <a:tcPr marL="16762" marR="16762" marT="16762" marB="16762">
+                    <a:lnL w="9525" cap="flat" cmpd="sng" algn="ctr">
+                      <a:solidFill>
+                        <a:srgbClr val="000000"/>
+                      </a:solidFill>
+                      <a:prstDash val="solid"/>
+                      <a:round/>
+                      <a:headEnd type="none" w="med" len="med"/>
+                      <a:tailEnd type="none" w="med" len="med"/>
+                    </a:lnL>
+                    <a:lnR w="9525" cap="flat" cmpd="sng" algn="ctr">
+                      <a:solidFill>
+                        <a:srgbClr val="000000"/>
+                      </a:solidFill>
+                      <a:prstDash val="solid"/>
+                      <a:round/>
+                      <a:headEnd type="none" w="med" len="med"/>
+                      <a:tailEnd type="none" w="med" len="med"/>
+                    </a:lnR>
+                    <a:lnT w="9525" cap="flat" cmpd="sng" algn="ctr">
+                      <a:solidFill>
+                        <a:srgbClr val="000000"/>
+                      </a:solidFill>
+                      <a:prstDash val="solid"/>
+                      <a:round/>
+                      <a:headEnd type="none" w="med" len="med"/>
+                      <a:tailEnd type="none" w="med" len="med"/>
+                    </a:lnT>
+                    <a:lnB w="9525" cap="flat" cmpd="sng" algn="ctr">
+                      <a:solidFill>
+                        <a:srgbClr val="000000"/>
+                      </a:solidFill>
+                      <a:prstDash val="solid"/>
+                      <a:round/>
+                      <a:headEnd type="none" w="med" len="med"/>
+                      <a:tailEnd type="none" w="med" len="med"/>
+                    </a:lnB>
+                    <a:solidFill>
+                      <a:srgbClr val="D4D4D4"/>
+                    </a:solidFill>
+                  </a:tcPr>
+                </a:tc>
+                <a:tc>
+                  <a:txBody>
+                    <a:bodyPr/>
+                    <a:lstStyle/>
+                    <a:p>
+                      <a:pPr>
+                        <a:buNone/>
+                      </a:pPr>
+                      <a:r>
+                        <a:rPr lang="en" sz="2000">
+                          <a:solidFill>
+                            <a:srgbClr val="000000"/>
+                          </a:solidFill>
+                          <a:effectLst/>
+                          <a:latin typeface="Helvetica Neue" panose="02000503000000020004" pitchFamily="2" charset="0"/>
+                        </a:rPr>
+                        <a:t>State-of-the-art, </a:t>
+                      </a:r>
+                      <a:r>
+                        <a:rPr lang="ru-RU" sz="2000">
+                          <a:solidFill>
+                            <a:srgbClr val="000000"/>
+                          </a:solidFill>
+                          <a:effectLst/>
+                          <a:latin typeface="Helvetica Neue" panose="02000503000000020004" pitchFamily="2" charset="0"/>
+                        </a:rPr>
+                        <a:t>интерпретируемые компоненты (тренд, сезонность)</a:t>
+                      </a:r>
+                      <a:endParaRPr lang="ru-RU" sz="2000">
+                        <a:effectLst/>
+                      </a:endParaRPr>
+                    </a:p>
+                  </a:txBody>
+                  <a:tcPr marL="16762" marR="16762" marT="16762" marB="16762">
+                    <a:lnL w="9525" cap="flat" cmpd="sng" algn="ctr">
+                      <a:solidFill>
+                        <a:srgbClr val="000000"/>
+                      </a:solidFill>
+                      <a:prstDash val="solid"/>
+                      <a:round/>
+                      <a:headEnd type="none" w="med" len="med"/>
+                      <a:tailEnd type="none" w="med" len="med"/>
+                    </a:lnL>
+                    <a:lnR w="9525" cap="flat" cmpd="sng" algn="ctr">
+                      <a:solidFill>
+                        <a:srgbClr val="000000"/>
+                      </a:solidFill>
+                      <a:prstDash val="solid"/>
+                      <a:round/>
+                      <a:headEnd type="none" w="med" len="med"/>
+                      <a:tailEnd type="none" w="med" len="med"/>
+                    </a:lnR>
+                    <a:lnT w="9525" cap="flat" cmpd="sng" algn="ctr">
+                      <a:solidFill>
+                        <a:srgbClr val="000000"/>
+                      </a:solidFill>
+                      <a:prstDash val="solid"/>
+                      <a:round/>
+                      <a:headEnd type="none" w="med" len="med"/>
+                      <a:tailEnd type="none" w="med" len="med"/>
+                    </a:lnT>
+                    <a:lnB w="9525" cap="flat" cmpd="sng" algn="ctr">
+                      <a:solidFill>
+                        <a:srgbClr val="000000"/>
+                      </a:solidFill>
+                      <a:prstDash val="solid"/>
+                      <a:round/>
+                      <a:headEnd type="none" w="med" len="med"/>
+                      <a:tailEnd type="none" w="med" len="med"/>
+                    </a:lnB>
+                    <a:noFill/>
+                  </a:tcPr>
+                </a:tc>
+                <a:tc>
+                  <a:txBody>
+                    <a:bodyPr/>
+                    <a:lstStyle/>
+                    <a:p>
+                      <a:pPr>
+                        <a:buNone/>
+                      </a:pPr>
+                      <a:r>
+                        <a:rPr lang="ru-RU" sz="2000" dirty="0">
+                          <a:solidFill>
+                            <a:srgbClr val="000000"/>
+                          </a:solidFill>
+                          <a:effectLst/>
+                          <a:latin typeface="Helvetica Neue" panose="02000503000000020004" pitchFamily="2" charset="0"/>
+                        </a:rPr>
+                        <a:t>Требует больших данных, сложно настраивать</a:t>
+                      </a:r>
+                      <a:endParaRPr lang="ru-RU" sz="2000" dirty="0">
+                        <a:effectLst/>
+                      </a:endParaRPr>
+                    </a:p>
+                  </a:txBody>
+                  <a:tcPr marL="16762" marR="16762" marT="16762" marB="16762">
+                    <a:lnL w="9525" cap="flat" cmpd="sng" algn="ctr">
+                      <a:solidFill>
+                        <a:srgbClr val="000000"/>
+                      </a:solidFill>
+                      <a:prstDash val="solid"/>
+                      <a:round/>
+                      <a:headEnd type="none" w="med" len="med"/>
+                      <a:tailEnd type="none" w="med" len="med"/>
+                    </a:lnL>
+                    <a:lnR w="9525" cap="flat" cmpd="sng" algn="ctr">
+                      <a:solidFill>
+                        <a:srgbClr val="000000"/>
+                      </a:solidFill>
+                      <a:prstDash val="solid"/>
+                      <a:round/>
+                      <a:headEnd type="none" w="med" len="med"/>
+                      <a:tailEnd type="none" w="med" len="med"/>
+                    </a:lnR>
+                    <a:lnT w="9525" cap="flat" cmpd="sng" algn="ctr">
+                      <a:solidFill>
+                        <a:srgbClr val="000000"/>
+                      </a:solidFill>
+                      <a:prstDash val="solid"/>
+                      <a:round/>
+                      <a:headEnd type="none" w="med" len="med"/>
+                      <a:tailEnd type="none" w="med" len="med"/>
+                    </a:lnT>
+                    <a:lnB w="9525" cap="flat" cmpd="sng" algn="ctr">
+                      <a:solidFill>
+                        <a:srgbClr val="000000"/>
+                      </a:solidFill>
+                      <a:prstDash val="solid"/>
+                      <a:round/>
+                      <a:headEnd type="none" w="med" len="med"/>
+                      <a:tailEnd type="none" w="med" len="med"/>
+                    </a:lnB>
+                    <a:noFill/>
+                  </a:tcPr>
+                </a:tc>
+                <a:tc>
+                  <a:txBody>
+                    <a:bodyPr/>
+                    <a:lstStyle/>
+                    <a:p>
+                      <a:pPr>
+                        <a:buNone/>
+                      </a:pPr>
+                      <a:r>
+                        <a:rPr lang="ru-RU" sz="2000">
+                          <a:solidFill>
+                            <a:srgbClr val="000000"/>
+                          </a:solidFill>
+                          <a:effectLst/>
+                          <a:latin typeface="Apple Color Emoji" pitchFamily="2" charset="0"/>
+                        </a:rPr>
+                        <a:t>✅</a:t>
+                      </a:r>
+                      <a:r>
+                        <a:rPr lang="ru-RU" sz="2000">
+                          <a:solidFill>
+                            <a:srgbClr val="000000"/>
+                          </a:solidFill>
+                          <a:effectLst/>
+                          <a:latin typeface="Helvetica Neue" panose="02000503000000020004" pitchFamily="2" charset="0"/>
+                        </a:rPr>
+                        <a:t> Да (если реализовать)</a:t>
+                      </a:r>
+                      <a:endParaRPr lang="ru-RU" sz="2000">
+                        <a:effectLst/>
+                      </a:endParaRPr>
+                    </a:p>
+                  </a:txBody>
+                  <a:tcPr marL="16762" marR="16762" marT="16762" marB="16762">
+                    <a:lnL w="9525" cap="flat" cmpd="sng" algn="ctr">
+                      <a:solidFill>
+                        <a:srgbClr val="000000"/>
+                      </a:solidFill>
+                      <a:prstDash val="solid"/>
+                      <a:round/>
+                      <a:headEnd type="none" w="med" len="med"/>
+                      <a:tailEnd type="none" w="med" len="med"/>
+                    </a:lnL>
+                    <a:lnR w="9525" cap="flat" cmpd="sng" algn="ctr">
+                      <a:solidFill>
+                        <a:srgbClr val="000000"/>
+                      </a:solidFill>
+                      <a:prstDash val="solid"/>
+                      <a:round/>
+                      <a:headEnd type="none" w="med" len="med"/>
+                      <a:tailEnd type="none" w="med" len="med"/>
+                    </a:lnR>
+                    <a:lnT w="9525" cap="flat" cmpd="sng" algn="ctr">
+                      <a:solidFill>
+                        <a:srgbClr val="000000"/>
+                      </a:solidFill>
+                      <a:prstDash val="solid"/>
+                      <a:round/>
+                      <a:headEnd type="none" w="med" len="med"/>
+                      <a:tailEnd type="none" w="med" len="med"/>
+                    </a:lnT>
+                    <a:lnB w="9525" cap="flat" cmpd="sng" algn="ctr">
+                      <a:solidFill>
+                        <a:srgbClr val="000000"/>
+                      </a:solidFill>
+                      <a:prstDash val="solid"/>
+                      <a:round/>
+                      <a:headEnd type="none" w="med" len="med"/>
+                      <a:tailEnd type="none" w="med" len="med"/>
+                    </a:lnB>
+                    <a:noFill/>
+                  </a:tcPr>
+                </a:tc>
+                <a:extLst>
+                  <a:ext uri="{0D108BD9-81ED-4DB2-BD59-A6C34878D82A}">
+                    <a16:rowId xmlns:a16="http://schemas.microsoft.com/office/drawing/2014/main" val="3412257738"/>
+                  </a:ext>
+                </a:extLst>
+              </a:tr>
+              <a:tr h="454734">
+                <a:tc>
+                  <a:txBody>
+                    <a:bodyPr/>
+                    <a:lstStyle/>
+                    <a:p>
+                      <a:pPr>
+                        <a:buNone/>
+                      </a:pPr>
+                      <a:r>
+                        <a:rPr lang="en" sz="2000" b="1">
+                          <a:solidFill>
+                            <a:srgbClr val="000000"/>
+                          </a:solidFill>
+                          <a:effectLst/>
+                          <a:latin typeface="Helvetica Neue" panose="02000503000000020004" pitchFamily="2" charset="0"/>
+                        </a:rPr>
+                        <a:t>TFT (Temporal Fusion Transformer)</a:t>
+                      </a:r>
+                      <a:endParaRPr lang="en" sz="2000">
+                        <a:effectLst/>
+                      </a:endParaRPr>
+                    </a:p>
+                  </a:txBody>
+                  <a:tcPr marL="16762" marR="16762" marT="16762" marB="16762">
+                    <a:lnL w="9525" cap="flat" cmpd="sng" algn="ctr">
+                      <a:solidFill>
+                        <a:srgbClr val="000000"/>
+                      </a:solidFill>
+                      <a:prstDash val="solid"/>
+                      <a:round/>
+                      <a:headEnd type="none" w="med" len="med"/>
+                      <a:tailEnd type="none" w="med" len="med"/>
+                    </a:lnL>
+                    <a:lnR w="9525" cap="flat" cmpd="sng" algn="ctr">
+                      <a:solidFill>
+                        <a:srgbClr val="000000"/>
+                      </a:solidFill>
+                      <a:prstDash val="solid"/>
+                      <a:round/>
+                      <a:headEnd type="none" w="med" len="med"/>
+                      <a:tailEnd type="none" w="med" len="med"/>
+                    </a:lnR>
+                    <a:lnT w="9525" cap="flat" cmpd="sng" algn="ctr">
+                      <a:solidFill>
+                        <a:srgbClr val="000000"/>
+                      </a:solidFill>
+                      <a:prstDash val="solid"/>
+                      <a:round/>
+                      <a:headEnd type="none" w="med" len="med"/>
+                      <a:tailEnd type="none" w="med" len="med"/>
+                    </a:lnT>
+                    <a:lnB w="9525" cap="flat" cmpd="sng" algn="ctr">
+                      <a:solidFill>
+                        <a:srgbClr val="000000"/>
+                      </a:solidFill>
+                      <a:prstDash val="solid"/>
+                      <a:round/>
+                      <a:headEnd type="none" w="med" len="med"/>
+                      <a:tailEnd type="none" w="med" len="med"/>
+                    </a:lnB>
+                    <a:solidFill>
+                      <a:srgbClr val="D4D4D4"/>
+                    </a:solidFill>
+                  </a:tcPr>
+                </a:tc>
+                <a:tc>
+                  <a:txBody>
+                    <a:bodyPr/>
+                    <a:lstStyle/>
+                    <a:p>
+                      <a:pPr>
+                        <a:buNone/>
+                      </a:pPr>
+                      <a:r>
+                        <a:rPr lang="ru-RU" sz="2000">
+                          <a:solidFill>
+                            <a:srgbClr val="000000"/>
+                          </a:solidFill>
+                          <a:effectLst/>
+                          <a:latin typeface="Helvetica Neue" panose="02000503000000020004" pitchFamily="2" charset="0"/>
+                        </a:rPr>
+                        <a:t>Отлично работает с статическими и динамическими признаками, интерпретация через внимательность</a:t>
+                      </a:r>
+                      <a:endParaRPr lang="ru-RU" sz="2000">
+                        <a:effectLst/>
+                      </a:endParaRPr>
+                    </a:p>
+                  </a:txBody>
+                  <a:tcPr marL="16762" marR="16762" marT="16762" marB="16762">
+                    <a:lnL w="9525" cap="flat" cmpd="sng" algn="ctr">
+                      <a:solidFill>
+                        <a:srgbClr val="000000"/>
+                      </a:solidFill>
+                      <a:prstDash val="solid"/>
+                      <a:round/>
+                      <a:headEnd type="none" w="med" len="med"/>
+                      <a:tailEnd type="none" w="med" len="med"/>
+                    </a:lnL>
+                    <a:lnR w="9525" cap="flat" cmpd="sng" algn="ctr">
+                      <a:solidFill>
+                        <a:srgbClr val="000000"/>
+                      </a:solidFill>
+                      <a:prstDash val="solid"/>
+                      <a:round/>
+                      <a:headEnd type="none" w="med" len="med"/>
+                      <a:tailEnd type="none" w="med" len="med"/>
+                    </a:lnR>
+                    <a:lnT w="9525" cap="flat" cmpd="sng" algn="ctr">
+                      <a:solidFill>
+                        <a:srgbClr val="000000"/>
+                      </a:solidFill>
+                      <a:prstDash val="solid"/>
+                      <a:round/>
+                      <a:headEnd type="none" w="med" len="med"/>
+                      <a:tailEnd type="none" w="med" len="med"/>
+                    </a:lnT>
+                    <a:lnB w="9525" cap="flat" cmpd="sng" algn="ctr">
+                      <a:solidFill>
+                        <a:srgbClr val="000000"/>
+                      </a:solidFill>
+                      <a:prstDash val="solid"/>
+                      <a:round/>
+                      <a:headEnd type="none" w="med" len="med"/>
+                      <a:tailEnd type="none" w="med" len="med"/>
+                    </a:lnB>
+                    <a:noFill/>
+                  </a:tcPr>
+                </a:tc>
+                <a:tc>
+                  <a:txBody>
+                    <a:bodyPr/>
+                    <a:lstStyle/>
+                    <a:p>
+                      <a:pPr>
+                        <a:buNone/>
+                      </a:pPr>
+                      <a:r>
+                        <a:rPr lang="ru-RU" sz="2000" dirty="0">
+                          <a:solidFill>
+                            <a:srgbClr val="000000"/>
+                          </a:solidFill>
+                          <a:effectLst/>
+                          <a:latin typeface="Helvetica Neue" panose="02000503000000020004" pitchFamily="2" charset="0"/>
+                        </a:rPr>
+                        <a:t>Очень сложна в настройке, требует большого объёма данных</a:t>
+                      </a:r>
+                      <a:endParaRPr lang="ru-RU" sz="2000" dirty="0">
+                        <a:effectLst/>
+                      </a:endParaRPr>
+                    </a:p>
+                  </a:txBody>
+                  <a:tcPr marL="16762" marR="16762" marT="16762" marB="16762">
+                    <a:lnL w="9525" cap="flat" cmpd="sng" algn="ctr">
+                      <a:solidFill>
+                        <a:srgbClr val="000000"/>
+                      </a:solidFill>
+                      <a:prstDash val="solid"/>
+                      <a:round/>
+                      <a:headEnd type="none" w="med" len="med"/>
+                      <a:tailEnd type="none" w="med" len="med"/>
+                    </a:lnL>
+                    <a:lnR w="9525" cap="flat" cmpd="sng" algn="ctr">
+                      <a:solidFill>
+                        <a:srgbClr val="000000"/>
+                      </a:solidFill>
+                      <a:prstDash val="solid"/>
+                      <a:round/>
+                      <a:headEnd type="none" w="med" len="med"/>
+                      <a:tailEnd type="none" w="med" len="med"/>
+                    </a:lnR>
+                    <a:lnT w="9525" cap="flat" cmpd="sng" algn="ctr">
+                      <a:solidFill>
+                        <a:srgbClr val="000000"/>
+                      </a:solidFill>
+                      <a:prstDash val="solid"/>
+                      <a:round/>
+                      <a:headEnd type="none" w="med" len="med"/>
+                      <a:tailEnd type="none" w="med" len="med"/>
+                    </a:lnT>
+                    <a:lnB w="9525" cap="flat" cmpd="sng" algn="ctr">
+                      <a:solidFill>
+                        <a:srgbClr val="000000"/>
+                      </a:solidFill>
+                      <a:prstDash val="solid"/>
+                      <a:round/>
+                      <a:headEnd type="none" w="med" len="med"/>
+                      <a:tailEnd type="none" w="med" len="med"/>
+                    </a:lnB>
+                    <a:noFill/>
+                  </a:tcPr>
+                </a:tc>
+                <a:tc>
+                  <a:txBody>
+                    <a:bodyPr/>
+                    <a:lstStyle/>
+                    <a:p>
+                      <a:pPr>
+                        <a:buNone/>
+                      </a:pPr>
+                      <a:r>
+                        <a:rPr lang="ru-RU" sz="2000">
+                          <a:solidFill>
+                            <a:srgbClr val="000000"/>
+                          </a:solidFill>
+                          <a:effectLst/>
+                          <a:latin typeface="Apple Color Emoji" pitchFamily="2" charset="0"/>
+                        </a:rPr>
+                        <a:t>✅</a:t>
+                      </a:r>
+                      <a:r>
+                        <a:rPr lang="ru-RU" sz="2000">
+                          <a:solidFill>
+                            <a:srgbClr val="000000"/>
+                          </a:solidFill>
+                          <a:effectLst/>
+                          <a:latin typeface="Helvetica Neue" panose="02000503000000020004" pitchFamily="2" charset="0"/>
+                        </a:rPr>
+                        <a:t> Да (с полным циклом)</a:t>
+                      </a:r>
+                      <a:endParaRPr lang="ru-RU" sz="2000">
+                        <a:effectLst/>
+                      </a:endParaRPr>
+                    </a:p>
+                  </a:txBody>
+                  <a:tcPr marL="16762" marR="16762" marT="16762" marB="16762">
+                    <a:lnL w="9525" cap="flat" cmpd="sng" algn="ctr">
+                      <a:solidFill>
+                        <a:srgbClr val="000000"/>
+                      </a:solidFill>
+                      <a:prstDash val="solid"/>
+                      <a:round/>
+                      <a:headEnd type="none" w="med" len="med"/>
+                      <a:tailEnd type="none" w="med" len="med"/>
+                    </a:lnL>
+                    <a:lnR w="9525" cap="flat" cmpd="sng" algn="ctr">
+                      <a:solidFill>
+                        <a:srgbClr val="000000"/>
+                      </a:solidFill>
+                      <a:prstDash val="solid"/>
+                      <a:round/>
+                      <a:headEnd type="none" w="med" len="med"/>
+                      <a:tailEnd type="none" w="med" len="med"/>
+                    </a:lnR>
+                    <a:lnT w="9525" cap="flat" cmpd="sng" algn="ctr">
+                      <a:solidFill>
+                        <a:srgbClr val="000000"/>
+                      </a:solidFill>
+                      <a:prstDash val="solid"/>
+                      <a:round/>
+                      <a:headEnd type="none" w="med" len="med"/>
+                      <a:tailEnd type="none" w="med" len="med"/>
+                    </a:lnT>
+                    <a:lnB w="9525" cap="flat" cmpd="sng" algn="ctr">
+                      <a:solidFill>
+                        <a:srgbClr val="000000"/>
+                      </a:solidFill>
+                      <a:prstDash val="solid"/>
+                      <a:round/>
+                      <a:headEnd type="none" w="med" len="med"/>
+                      <a:tailEnd type="none" w="med" len="med"/>
+                    </a:lnB>
+                    <a:noFill/>
+                  </a:tcPr>
+                </a:tc>
+                <a:extLst>
+                  <a:ext uri="{0D108BD9-81ED-4DB2-BD59-A6C34878D82A}">
+                    <a16:rowId xmlns:a16="http://schemas.microsoft.com/office/drawing/2014/main" val="3544113033"/>
+                  </a:ext>
+                </a:extLst>
+              </a:tr>
+              <a:tr h="454734">
+                <a:tc>
+                  <a:txBody>
+                    <a:bodyPr/>
+                    <a:lstStyle/>
+                    <a:p>
+                      <a:pPr>
+                        <a:buNone/>
+                      </a:pPr>
+                      <a:r>
+                        <a:rPr lang="en" sz="2000" b="1">
+                          <a:solidFill>
+                            <a:srgbClr val="000000"/>
+                          </a:solidFill>
+                          <a:effectLst/>
+                          <a:latin typeface="Helvetica Neue" panose="02000503000000020004" pitchFamily="2" charset="0"/>
+                        </a:rPr>
+                        <a:t>PatchTST</a:t>
+                      </a:r>
+                      <a:endParaRPr lang="en" sz="2000">
+                        <a:effectLst/>
+                      </a:endParaRPr>
+                    </a:p>
+                  </a:txBody>
+                  <a:tcPr marL="16762" marR="16762" marT="16762" marB="16762">
+                    <a:lnL w="9525" cap="flat" cmpd="sng" algn="ctr">
+                      <a:solidFill>
+                        <a:srgbClr val="000000"/>
+                      </a:solidFill>
+                      <a:prstDash val="solid"/>
+                      <a:round/>
+                      <a:headEnd type="none" w="med" len="med"/>
+                      <a:tailEnd type="none" w="med" len="med"/>
+                    </a:lnL>
+                    <a:lnR w="9525" cap="flat" cmpd="sng" algn="ctr">
+                      <a:solidFill>
+                        <a:srgbClr val="000000"/>
+                      </a:solidFill>
+                      <a:prstDash val="solid"/>
+                      <a:round/>
+                      <a:headEnd type="none" w="med" len="med"/>
+                      <a:tailEnd type="none" w="med" len="med"/>
+                    </a:lnR>
+                    <a:lnT w="9525" cap="flat" cmpd="sng" algn="ctr">
+                      <a:solidFill>
+                        <a:srgbClr val="000000"/>
+                      </a:solidFill>
+                      <a:prstDash val="solid"/>
+                      <a:round/>
+                      <a:headEnd type="none" w="med" len="med"/>
+                      <a:tailEnd type="none" w="med" len="med"/>
+                    </a:lnT>
+                    <a:lnB w="9525" cap="flat" cmpd="sng" algn="ctr">
+                      <a:solidFill>
+                        <a:srgbClr val="000000"/>
+                      </a:solidFill>
+                      <a:prstDash val="solid"/>
+                      <a:round/>
+                      <a:headEnd type="none" w="med" len="med"/>
+                      <a:tailEnd type="none" w="med" len="med"/>
+                    </a:lnB>
+                    <a:solidFill>
+                      <a:srgbClr val="D4D4D4"/>
+                    </a:solidFill>
+                  </a:tcPr>
+                </a:tc>
+                <a:tc>
+                  <a:txBody>
+                    <a:bodyPr/>
+                    <a:lstStyle/>
+                    <a:p>
+                      <a:pPr>
+                        <a:buNone/>
+                      </a:pPr>
+                      <a:r>
+                        <a:rPr lang="ru-RU" sz="2000">
+                          <a:solidFill>
+                            <a:srgbClr val="000000"/>
+                          </a:solidFill>
+                          <a:effectLst/>
+                          <a:latin typeface="Helvetica Neue" panose="02000503000000020004" pitchFamily="2" charset="0"/>
+                        </a:rPr>
+                        <a:t>Простая, эффективная, устойчивая к шуму, масштабируется на 100+ рядов</a:t>
+                      </a:r>
+                      <a:endParaRPr lang="ru-RU" sz="2000">
+                        <a:effectLst/>
+                      </a:endParaRPr>
+                    </a:p>
+                  </a:txBody>
+                  <a:tcPr marL="16762" marR="16762" marT="16762" marB="16762">
+                    <a:lnL w="9525" cap="flat" cmpd="sng" algn="ctr">
+                      <a:solidFill>
+                        <a:srgbClr val="000000"/>
+                      </a:solidFill>
+                      <a:prstDash val="solid"/>
+                      <a:round/>
+                      <a:headEnd type="none" w="med" len="med"/>
+                      <a:tailEnd type="none" w="med" len="med"/>
+                    </a:lnL>
+                    <a:lnR w="9525" cap="flat" cmpd="sng" algn="ctr">
+                      <a:solidFill>
+                        <a:srgbClr val="000000"/>
+                      </a:solidFill>
+                      <a:prstDash val="solid"/>
+                      <a:round/>
+                      <a:headEnd type="none" w="med" len="med"/>
+                      <a:tailEnd type="none" w="med" len="med"/>
+                    </a:lnR>
+                    <a:lnT w="9525" cap="flat" cmpd="sng" algn="ctr">
+                      <a:solidFill>
+                        <a:srgbClr val="000000"/>
+                      </a:solidFill>
+                      <a:prstDash val="solid"/>
+                      <a:round/>
+                      <a:headEnd type="none" w="med" len="med"/>
+                      <a:tailEnd type="none" w="med" len="med"/>
+                    </a:lnT>
+                    <a:lnB w="9525" cap="flat" cmpd="sng" algn="ctr">
+                      <a:solidFill>
+                        <a:srgbClr val="000000"/>
+                      </a:solidFill>
+                      <a:prstDash val="solid"/>
+                      <a:round/>
+                      <a:headEnd type="none" w="med" len="med"/>
+                      <a:tailEnd type="none" w="med" len="med"/>
+                    </a:lnB>
+                    <a:noFill/>
+                  </a:tcPr>
+                </a:tc>
+                <a:tc>
+                  <a:txBody>
+                    <a:bodyPr/>
+                    <a:lstStyle/>
+                    <a:p>
+                      <a:pPr>
+                        <a:buNone/>
+                      </a:pPr>
+                      <a:r>
+                        <a:rPr lang="ru-RU" sz="2000" dirty="0">
+                          <a:solidFill>
+                            <a:srgbClr val="000000"/>
+                          </a:solidFill>
+                          <a:effectLst/>
+                          <a:latin typeface="Helvetica Neue" panose="02000503000000020004" pitchFamily="2" charset="0"/>
+                        </a:rPr>
+                        <a:t>Новая, требует </a:t>
+                      </a:r>
+                      <a:r>
+                        <a:rPr lang="en" sz="2000" dirty="0">
+                          <a:solidFill>
+                            <a:srgbClr val="000000"/>
+                          </a:solidFill>
+                          <a:effectLst/>
+                          <a:latin typeface="Helvetica Neue" panose="02000503000000020004" pitchFamily="2" charset="0"/>
+                        </a:rPr>
+                        <a:t>GPU </a:t>
+                      </a:r>
+                      <a:r>
+                        <a:rPr lang="ru-RU" sz="2000" dirty="0">
+                          <a:solidFill>
+                            <a:srgbClr val="000000"/>
+                          </a:solidFill>
+                          <a:effectLst/>
+                          <a:latin typeface="Helvetica Neue" panose="02000503000000020004" pitchFamily="2" charset="0"/>
+                        </a:rPr>
+                        <a:t>для больших данных</a:t>
+                      </a:r>
+                      <a:endParaRPr lang="ru-RU" sz="2000" dirty="0">
+                        <a:effectLst/>
+                      </a:endParaRPr>
+                    </a:p>
+                  </a:txBody>
+                  <a:tcPr marL="16762" marR="16762" marT="16762" marB="16762">
+                    <a:lnL w="9525" cap="flat" cmpd="sng" algn="ctr">
+                      <a:solidFill>
+                        <a:srgbClr val="000000"/>
+                      </a:solidFill>
+                      <a:prstDash val="solid"/>
+                      <a:round/>
+                      <a:headEnd type="none" w="med" len="med"/>
+                      <a:tailEnd type="none" w="med" len="med"/>
+                    </a:lnL>
+                    <a:lnR w="9525" cap="flat" cmpd="sng" algn="ctr">
+                      <a:solidFill>
+                        <a:srgbClr val="000000"/>
+                      </a:solidFill>
+                      <a:prstDash val="solid"/>
+                      <a:round/>
+                      <a:headEnd type="none" w="med" len="med"/>
+                      <a:tailEnd type="none" w="med" len="med"/>
+                    </a:lnR>
+                    <a:lnT w="9525" cap="flat" cmpd="sng" algn="ctr">
+                      <a:solidFill>
+                        <a:srgbClr val="000000"/>
+                      </a:solidFill>
+                      <a:prstDash val="solid"/>
+                      <a:round/>
+                      <a:headEnd type="none" w="med" len="med"/>
+                      <a:tailEnd type="none" w="med" len="med"/>
+                    </a:lnT>
+                    <a:lnB w="9525" cap="flat" cmpd="sng" algn="ctr">
+                      <a:solidFill>
+                        <a:srgbClr val="000000"/>
+                      </a:solidFill>
+                      <a:prstDash val="solid"/>
+                      <a:round/>
+                      <a:headEnd type="none" w="med" len="med"/>
+                      <a:tailEnd type="none" w="med" len="med"/>
+                    </a:lnB>
+                    <a:noFill/>
+                  </a:tcPr>
+                </a:tc>
+                <a:tc>
+                  <a:txBody>
+                    <a:bodyPr/>
+                    <a:lstStyle/>
+                    <a:p>
+                      <a:pPr>
+                        <a:buNone/>
+                      </a:pPr>
+                      <a:r>
+                        <a:rPr lang="ru-RU" sz="2000" dirty="0">
+                          <a:solidFill>
+                            <a:srgbClr val="000000"/>
+                          </a:solidFill>
+                          <a:effectLst/>
+                          <a:latin typeface="Apple Color Emoji" pitchFamily="2" charset="0"/>
+                        </a:rPr>
+                        <a:t>✅</a:t>
+                      </a:r>
+                      <a:r>
+                        <a:rPr lang="ru-RU" sz="2000" dirty="0">
+                          <a:solidFill>
+                            <a:srgbClr val="000000"/>
+                          </a:solidFill>
+                          <a:effectLst/>
+                          <a:latin typeface="Helvetica Neue" panose="02000503000000020004" pitchFamily="2" charset="0"/>
+                        </a:rPr>
+                        <a:t> Да (</a:t>
+                      </a:r>
+                      <a:r>
+                        <a:rPr lang="en" sz="2000" dirty="0">
+                          <a:solidFill>
+                            <a:srgbClr val="000000"/>
+                          </a:solidFill>
+                          <a:effectLst/>
+                          <a:latin typeface="Helvetica Neue" panose="02000503000000020004" pitchFamily="2" charset="0"/>
+                        </a:rPr>
+                        <a:t>fine-tuning)</a:t>
+                      </a:r>
+                      <a:endParaRPr lang="en" sz="2000" dirty="0">
+                        <a:effectLst/>
+                      </a:endParaRPr>
+                    </a:p>
+                  </a:txBody>
+                  <a:tcPr marL="16762" marR="16762" marT="16762" marB="16762">
+                    <a:lnL w="9525" cap="flat" cmpd="sng" algn="ctr">
+                      <a:solidFill>
+                        <a:srgbClr val="000000"/>
+                      </a:solidFill>
+                      <a:prstDash val="solid"/>
+                      <a:round/>
+                      <a:headEnd type="none" w="med" len="med"/>
+                      <a:tailEnd type="none" w="med" len="med"/>
+                    </a:lnL>
+                    <a:lnR w="9525" cap="flat" cmpd="sng" algn="ctr">
+                      <a:solidFill>
+                        <a:srgbClr val="000000"/>
+                      </a:solidFill>
+                      <a:prstDash val="solid"/>
+                      <a:round/>
+                      <a:headEnd type="none" w="med" len="med"/>
+                      <a:tailEnd type="none" w="med" len="med"/>
+                    </a:lnR>
+                    <a:lnT w="9525" cap="flat" cmpd="sng" algn="ctr">
+                      <a:solidFill>
+                        <a:srgbClr val="000000"/>
+                      </a:solidFill>
+                      <a:prstDash val="solid"/>
+                      <a:round/>
+                      <a:headEnd type="none" w="med" len="med"/>
+                      <a:tailEnd type="none" w="med" len="med"/>
+                    </a:lnT>
+                    <a:lnB w="9525" cap="flat" cmpd="sng" algn="ctr">
+                      <a:solidFill>
+                        <a:srgbClr val="000000"/>
+                      </a:solidFill>
+                      <a:prstDash val="solid"/>
+                      <a:round/>
+                      <a:headEnd type="none" w="med" len="med"/>
+                      <a:tailEnd type="none" w="med" len="med"/>
+                    </a:lnB>
+                    <a:noFill/>
+                  </a:tcPr>
+                </a:tc>
+                <a:extLst>
+                  <a:ext uri="{0D108BD9-81ED-4DB2-BD59-A6C34878D82A}">
+                    <a16:rowId xmlns:a16="http://schemas.microsoft.com/office/drawing/2014/main" val="1074972704"/>
+                  </a:ext>
+                </a:extLst>
+              </a:tr>
+              <a:tr h="454734">
+                <a:tc>
+                  <a:txBody>
+                    <a:bodyPr/>
+                    <a:lstStyle/>
+                    <a:p>
+                      <a:pPr>
+                        <a:buNone/>
+                      </a:pPr>
+                      <a:r>
+                        <a:rPr lang="en" sz="2000" b="1">
+                          <a:solidFill>
+                            <a:srgbClr val="000000"/>
+                          </a:solidFill>
+                          <a:effectLst/>
+                          <a:latin typeface="Helvetica Neue" panose="02000503000000020004" pitchFamily="2" charset="0"/>
+                        </a:rPr>
+                        <a:t>TimeGPT / Informer / Autoformer / Chronos</a:t>
+                      </a:r>
+                      <a:endParaRPr lang="en" sz="2000">
+                        <a:effectLst/>
+                      </a:endParaRPr>
+                    </a:p>
+                  </a:txBody>
+                  <a:tcPr marL="16762" marR="16762" marT="16762" marB="16762">
+                    <a:lnL w="9525" cap="flat" cmpd="sng" algn="ctr">
+                      <a:solidFill>
+                        <a:srgbClr val="000000"/>
+                      </a:solidFill>
+                      <a:prstDash val="solid"/>
+                      <a:round/>
+                      <a:headEnd type="none" w="med" len="med"/>
+                      <a:tailEnd type="none" w="med" len="med"/>
+                    </a:lnL>
+                    <a:lnR w="9525" cap="flat" cmpd="sng" algn="ctr">
+                      <a:solidFill>
+                        <a:srgbClr val="000000"/>
+                      </a:solidFill>
+                      <a:prstDash val="solid"/>
+                      <a:round/>
+                      <a:headEnd type="none" w="med" len="med"/>
+                      <a:tailEnd type="none" w="med" len="med"/>
+                    </a:lnR>
+                    <a:lnT w="9525" cap="flat" cmpd="sng" algn="ctr">
+                      <a:solidFill>
+                        <a:srgbClr val="000000"/>
+                      </a:solidFill>
+                      <a:prstDash val="solid"/>
+                      <a:round/>
+                      <a:headEnd type="none" w="med" len="med"/>
+                      <a:tailEnd type="none" w="med" len="med"/>
+                    </a:lnT>
+                    <a:lnB w="9525" cap="flat" cmpd="sng" algn="ctr">
+                      <a:solidFill>
+                        <a:srgbClr val="000000"/>
+                      </a:solidFill>
+                      <a:prstDash val="solid"/>
+                      <a:round/>
+                      <a:headEnd type="none" w="med" len="med"/>
+                      <a:tailEnd type="none" w="med" len="med"/>
+                    </a:lnB>
+                    <a:solidFill>
+                      <a:srgbClr val="D4D4D4"/>
+                    </a:solidFill>
+                  </a:tcPr>
+                </a:tc>
+                <a:tc>
+                  <a:txBody>
+                    <a:bodyPr/>
+                    <a:lstStyle/>
+                    <a:p>
+                      <a:pPr>
+                        <a:buNone/>
+                      </a:pPr>
+                      <a:r>
+                        <a:rPr lang="ru-RU" sz="2000" dirty="0" err="1">
+                          <a:solidFill>
+                            <a:srgbClr val="000000"/>
+                          </a:solidFill>
+                          <a:effectLst/>
+                          <a:latin typeface="Helvetica Neue" panose="02000503000000020004" pitchFamily="2" charset="0"/>
+                        </a:rPr>
+                        <a:t>Предобучена</a:t>
+                      </a:r>
+                      <a:r>
+                        <a:rPr lang="ru-RU" sz="2000" dirty="0">
+                          <a:solidFill>
+                            <a:srgbClr val="000000"/>
+                          </a:solidFill>
+                          <a:effectLst/>
+                          <a:latin typeface="Helvetica Neue" panose="02000503000000020004" pitchFamily="2" charset="0"/>
+                        </a:rPr>
+                        <a:t> на миллионах временных рядов, </a:t>
+                      </a:r>
+                      <a:r>
+                        <a:rPr lang="en" sz="2000" dirty="0">
+                          <a:solidFill>
+                            <a:srgbClr val="000000"/>
+                          </a:solidFill>
+                          <a:effectLst/>
+                          <a:latin typeface="Helvetica Neue" panose="02000503000000020004" pitchFamily="2" charset="0"/>
+                        </a:rPr>
+                        <a:t>zero-shot </a:t>
+                      </a:r>
+                      <a:r>
+                        <a:rPr lang="ru-RU" sz="2000" dirty="0">
+                          <a:solidFill>
+                            <a:srgbClr val="000000"/>
+                          </a:solidFill>
+                          <a:effectLst/>
+                          <a:latin typeface="Helvetica Neue" panose="02000503000000020004" pitchFamily="2" charset="0"/>
+                        </a:rPr>
+                        <a:t>прогнозирование, масштабируема</a:t>
+                      </a:r>
+                      <a:endParaRPr lang="ru-RU" sz="2000" dirty="0">
+                        <a:effectLst/>
+                      </a:endParaRPr>
+                    </a:p>
+                  </a:txBody>
+                  <a:tcPr marL="16762" marR="16762" marT="16762" marB="16762">
+                    <a:lnL w="9525" cap="flat" cmpd="sng" algn="ctr">
+                      <a:solidFill>
+                        <a:srgbClr val="000000"/>
+                      </a:solidFill>
+                      <a:prstDash val="solid"/>
+                      <a:round/>
+                      <a:headEnd type="none" w="med" len="med"/>
+                      <a:tailEnd type="none" w="med" len="med"/>
+                    </a:lnL>
+                    <a:lnR w="9525" cap="flat" cmpd="sng" algn="ctr">
+                      <a:solidFill>
+                        <a:srgbClr val="000000"/>
+                      </a:solidFill>
+                      <a:prstDash val="solid"/>
+                      <a:round/>
+                      <a:headEnd type="none" w="med" len="med"/>
+                      <a:tailEnd type="none" w="med" len="med"/>
+                    </a:lnR>
+                    <a:lnT w="9525" cap="flat" cmpd="sng" algn="ctr">
+                      <a:solidFill>
+                        <a:srgbClr val="000000"/>
+                      </a:solidFill>
+                      <a:prstDash val="solid"/>
+                      <a:round/>
+                      <a:headEnd type="none" w="med" len="med"/>
+                      <a:tailEnd type="none" w="med" len="med"/>
+                    </a:lnT>
+                    <a:lnB w="9525" cap="flat" cmpd="sng" algn="ctr">
+                      <a:solidFill>
+                        <a:srgbClr val="000000"/>
+                      </a:solidFill>
+                      <a:prstDash val="solid"/>
+                      <a:round/>
+                      <a:headEnd type="none" w="med" len="med"/>
+                      <a:tailEnd type="none" w="med" len="med"/>
+                    </a:lnB>
+                    <a:noFill/>
+                  </a:tcPr>
+                </a:tc>
+                <a:tc>
+                  <a:txBody>
+                    <a:bodyPr/>
+                    <a:lstStyle/>
+                    <a:p>
+                      <a:pPr>
+                        <a:buNone/>
+                      </a:pPr>
+                      <a:r>
+                        <a:rPr lang="ru-RU" sz="2000">
+                          <a:solidFill>
+                            <a:srgbClr val="000000"/>
+                          </a:solidFill>
+                          <a:effectLst/>
+                          <a:latin typeface="Helvetica Neue" panose="02000503000000020004" pitchFamily="2" charset="0"/>
+                        </a:rPr>
+                        <a:t>Ограниченный доступ (</a:t>
+                      </a:r>
+                      <a:r>
+                        <a:rPr lang="en" sz="2000">
+                          <a:solidFill>
+                            <a:srgbClr val="000000"/>
+                          </a:solidFill>
+                          <a:effectLst/>
+                          <a:latin typeface="Helvetica Neue" panose="02000503000000020004" pitchFamily="2" charset="0"/>
+                        </a:rPr>
+                        <a:t>TimeGPT — API), </a:t>
+                      </a:r>
+                      <a:r>
+                        <a:rPr lang="ru-RU" sz="2000">
+                          <a:solidFill>
+                            <a:srgbClr val="000000"/>
+                          </a:solidFill>
+                          <a:effectLst/>
+                          <a:latin typeface="Helvetica Neue" panose="02000503000000020004" pitchFamily="2" charset="0"/>
+                        </a:rPr>
+                        <a:t>высокая стоимость, "чёрный ящик"</a:t>
+                      </a:r>
+                      <a:endParaRPr lang="ru-RU" sz="2000">
+                        <a:effectLst/>
+                      </a:endParaRPr>
+                    </a:p>
+                  </a:txBody>
+                  <a:tcPr marL="16762" marR="16762" marT="16762" marB="16762">
+                    <a:lnL w="9525" cap="flat" cmpd="sng" algn="ctr">
+                      <a:solidFill>
+                        <a:srgbClr val="000000"/>
+                      </a:solidFill>
+                      <a:prstDash val="solid"/>
+                      <a:round/>
+                      <a:headEnd type="none" w="med" len="med"/>
+                      <a:tailEnd type="none" w="med" len="med"/>
+                    </a:lnL>
+                    <a:lnR w="9525" cap="flat" cmpd="sng" algn="ctr">
+                      <a:solidFill>
+                        <a:srgbClr val="000000"/>
+                      </a:solidFill>
+                      <a:prstDash val="solid"/>
+                      <a:round/>
+                      <a:headEnd type="none" w="med" len="med"/>
+                      <a:tailEnd type="none" w="med" len="med"/>
+                    </a:lnR>
+                    <a:lnT w="9525" cap="flat" cmpd="sng" algn="ctr">
+                      <a:solidFill>
+                        <a:srgbClr val="000000"/>
+                      </a:solidFill>
+                      <a:prstDash val="solid"/>
+                      <a:round/>
+                      <a:headEnd type="none" w="med" len="med"/>
+                      <a:tailEnd type="none" w="med" len="med"/>
+                    </a:lnT>
+                    <a:lnB w="9525" cap="flat" cmpd="sng" algn="ctr">
+                      <a:solidFill>
+                        <a:srgbClr val="000000"/>
+                      </a:solidFill>
+                      <a:prstDash val="solid"/>
+                      <a:round/>
+                      <a:headEnd type="none" w="med" len="med"/>
+                      <a:tailEnd type="none" w="med" len="med"/>
+                    </a:lnB>
+                    <a:noFill/>
+                  </a:tcPr>
+                </a:tc>
+                <a:tc>
+                  <a:txBody>
+                    <a:bodyPr/>
+                    <a:lstStyle/>
+                    <a:p>
+                      <a:pPr>
+                        <a:buNone/>
+                      </a:pPr>
+                      <a:r>
+                        <a:rPr lang="ru-RU" sz="2000" dirty="0">
+                          <a:solidFill>
+                            <a:srgbClr val="000000"/>
+                          </a:solidFill>
+                          <a:effectLst/>
+                          <a:latin typeface="Apple Color Emoji" pitchFamily="2" charset="0"/>
+                        </a:rPr>
+                        <a:t>⚠️</a:t>
+                      </a:r>
+                      <a:r>
+                        <a:rPr lang="ru-RU" sz="2000" dirty="0">
+                          <a:solidFill>
+                            <a:srgbClr val="000000"/>
+                          </a:solidFill>
+                          <a:effectLst/>
+                          <a:latin typeface="Helvetica Neue" panose="02000503000000020004" pitchFamily="2" charset="0"/>
+                        </a:rPr>
+                        <a:t> Нет (только </a:t>
+                      </a:r>
+                      <a:r>
+                        <a:rPr lang="en" sz="2000" dirty="0">
+                          <a:solidFill>
+                            <a:srgbClr val="000000"/>
+                          </a:solidFill>
+                          <a:effectLst/>
+                          <a:latin typeface="Helvetica Neue" panose="02000503000000020004" pitchFamily="2" charset="0"/>
+                        </a:rPr>
+                        <a:t>inference </a:t>
+                      </a:r>
+                      <a:r>
+                        <a:rPr lang="ru-RU" sz="2000" dirty="0">
+                          <a:solidFill>
+                            <a:srgbClr val="000000"/>
+                          </a:solidFill>
+                          <a:effectLst/>
+                          <a:latin typeface="Helvetica Neue" panose="02000503000000020004" pitchFamily="2" charset="0"/>
+                        </a:rPr>
+                        <a:t>или </a:t>
+                      </a:r>
+                      <a:r>
+                        <a:rPr lang="en" sz="2000" dirty="0">
+                          <a:solidFill>
+                            <a:srgbClr val="000000"/>
+                          </a:solidFill>
+                          <a:effectLst/>
+                          <a:latin typeface="Helvetica Neue" panose="02000503000000020004" pitchFamily="2" charset="0"/>
+                        </a:rPr>
+                        <a:t>fine-tuning, </a:t>
+                      </a:r>
+                      <a:r>
+                        <a:rPr lang="ru-RU" sz="2000" dirty="0">
+                          <a:solidFill>
+                            <a:srgbClr val="000000"/>
+                          </a:solidFill>
+                          <a:effectLst/>
+                          <a:latin typeface="Helvetica Neue" panose="02000503000000020004" pitchFamily="2" charset="0"/>
+                        </a:rPr>
+                        <a:t>если доступно)</a:t>
+                      </a:r>
+                      <a:endParaRPr lang="ru-RU" sz="2000" dirty="0">
+                        <a:effectLst/>
+                      </a:endParaRPr>
+                    </a:p>
+                  </a:txBody>
+                  <a:tcPr marL="16762" marR="16762" marT="16762" marB="16762">
+                    <a:lnL w="9525" cap="flat" cmpd="sng" algn="ctr">
+                      <a:solidFill>
+                        <a:srgbClr val="000000"/>
+                      </a:solidFill>
+                      <a:prstDash val="solid"/>
+                      <a:round/>
+                      <a:headEnd type="none" w="med" len="med"/>
+                      <a:tailEnd type="none" w="med" len="med"/>
+                    </a:lnL>
+                    <a:lnR w="9525" cap="flat" cmpd="sng" algn="ctr">
+                      <a:solidFill>
+                        <a:srgbClr val="000000"/>
+                      </a:solidFill>
+                      <a:prstDash val="solid"/>
+                      <a:round/>
+                      <a:headEnd type="none" w="med" len="med"/>
+                      <a:tailEnd type="none" w="med" len="med"/>
+                    </a:lnR>
+                    <a:lnT w="9525" cap="flat" cmpd="sng" algn="ctr">
+                      <a:solidFill>
+                        <a:srgbClr val="000000"/>
+                      </a:solidFill>
+                      <a:prstDash val="solid"/>
+                      <a:round/>
+                      <a:headEnd type="none" w="med" len="med"/>
+                      <a:tailEnd type="none" w="med" len="med"/>
+                    </a:lnT>
+                    <a:lnB w="9525" cap="flat" cmpd="sng" algn="ctr">
+                      <a:solidFill>
+                        <a:srgbClr val="000000"/>
+                      </a:solidFill>
+                      <a:prstDash val="solid"/>
+                      <a:round/>
+                      <a:headEnd type="none" w="med" len="med"/>
+                      <a:tailEnd type="none" w="med" len="med"/>
+                    </a:lnB>
+                    <a:noFill/>
+                  </a:tcPr>
+                </a:tc>
+                <a:extLst>
+                  <a:ext uri="{0D108BD9-81ED-4DB2-BD59-A6C34878D82A}">
+                    <a16:rowId xmlns:a16="http://schemas.microsoft.com/office/drawing/2014/main" val="1102229436"/>
+                  </a:ext>
+                </a:extLst>
+              </a:tr>
+            </a:tbl>
+          </a:graphicData>
+        </a:graphic>
+      </p:graphicFrame>
     </p:spTree>
     <p:extLst>
       <p:ext uri="{BB962C8B-B14F-4D97-AF65-F5344CB8AC3E}">
@@ -4886,13 +8692,6 @@
   <p:clrMapOvr>
     <a:masterClrMapping/>
   </p:clrMapOvr>
-  <p:timing>
-    <p:tnLst>
-      <p:par>
-        <p:cTn id="1" dur="indefinite" restart="never" nodeType="tmRoot"/>
-      </p:par>
-    </p:tnLst>
-  </p:timing>
 </p:sld>
 </file>
 
@@ -4948,14 +8747,13 @@
           <a:lstStyle/>
           <a:p>
             <a:r>
-              <a:rPr lang="ru-RU" dirty="0" err="1" smtClean="0"/>
+              <a:rPr lang="ru-RU" dirty="0" err="1"/>
               <a:t>АвтоМЛ</a:t>
             </a:r>
             <a:r>
-              <a:rPr lang="ru-RU" dirty="0" smtClean="0"/>
+              <a:rPr lang="ru-RU" dirty="0"/>
               <a:t> – как автоматизировать мониторинг</a:t>
             </a:r>
-            <a:endParaRPr lang="ru-RU" dirty="0"/>
           </a:p>
         </p:txBody>
       </p:sp>
@@ -4969,13 +8767,6 @@
   <p:clrMapOvr>
     <a:masterClrMapping/>
   </p:clrMapOvr>
-  <p:timing>
-    <p:tnLst>
-      <p:par>
-        <p:cTn id="1" dur="indefinite" restart="never" nodeType="tmRoot"/>
-      </p:par>
-    </p:tnLst>
-  </p:timing>
 </p:sld>
 </file>
 
@@ -5036,18 +8827,17 @@
           <a:lstStyle/>
           <a:p>
             <a:r>
-              <a:rPr lang="ru-RU" dirty="0" smtClean="0"/>
+              <a:rPr lang="ru-RU" dirty="0"/>
               <a:t>Настройка </a:t>
             </a:r>
             <a:r>
-              <a:rPr lang="ru-RU" dirty="0" err="1" smtClean="0"/>
+              <a:rPr lang="ru-RU" dirty="0" err="1"/>
               <a:t>пайплайна</a:t>
             </a:r>
             <a:r>
-              <a:rPr lang="ru-RU" dirty="0" smtClean="0"/>
+              <a:rPr lang="ru-RU" dirty="0"/>
               <a:t> предсказания ВР</a:t>
             </a:r>
-            <a:endParaRPr lang="ru-RU" dirty="0"/>
           </a:p>
         </p:txBody>
       </p:sp>
@@ -5061,13 +8851,6 @@
   <p:clrMapOvr>
     <a:masterClrMapping/>
   </p:clrMapOvr>
-  <p:timing>
-    <p:tnLst>
-      <p:par>
-        <p:cTn id="1" dur="indefinite" restart="never" nodeType="tmRoot"/>
-      </p:par>
-    </p:tnLst>
-  </p:timing>
 </p:sld>
 </file>
 
@@ -5123,10 +8906,9 @@
           <a:lstStyle/>
           <a:p>
             <a:r>
-              <a:rPr lang="ru-RU" dirty="0" smtClean="0"/>
+              <a:rPr lang="ru-RU" dirty="0"/>
               <a:t>Сложные данные: пространственно-временны ряды (поля)</a:t>
             </a:r>
-            <a:endParaRPr lang="ru-RU" dirty="0"/>
           </a:p>
         </p:txBody>
       </p:sp>
@@ -5140,13 +8922,6 @@
   <p:clrMapOvr>
     <a:masterClrMapping/>
   </p:clrMapOvr>
-  <p:timing>
-    <p:tnLst>
-      <p:par>
-        <p:cTn id="1" dur="indefinite" restart="never" nodeType="tmRoot"/>
-      </p:par>
-    </p:tnLst>
-  </p:timing>
 </p:sld>
 </file>
 
@@ -5191,16 +8966,12 @@
           <a:p>
             <a:pPr algn="ctr"/>
             <a:r>
-              <a:rPr lang="ru-RU" dirty="0" smtClean="0">
+              <a:rPr lang="ru-RU" dirty="0">
                 <a:latin typeface="Arial" panose="020B0604020202020204" pitchFamily="34" charset="0"/>
                 <a:cs typeface="Arial" panose="020B0604020202020204" pitchFamily="34" charset="0"/>
               </a:rPr>
               <a:t>Вопросы мониторинга моделей</a:t>
             </a:r>
-            <a:endParaRPr lang="ru-RU" dirty="0">
-              <a:latin typeface="Arial" panose="020B0604020202020204" pitchFamily="34" charset="0"/>
-              <a:cs typeface="Arial" panose="020B0604020202020204" pitchFamily="34" charset="0"/>
-            </a:endParaRPr>
           </a:p>
         </p:txBody>
       </p:sp>
@@ -5260,7 +9031,7 @@
                     <a:p>
                       <a:pPr algn="ctr" fontAlgn="b"/>
                       <a:r>
-                        <a:rPr lang="ru-RU" sz="2000" u="none" strike="noStrike" dirty="0" smtClean="0">
+                        <a:rPr lang="ru-RU" sz="2000" u="none" strike="noStrike" dirty="0">
                           <a:effectLst/>
                           <a:latin typeface="Arial" panose="020B0604020202020204" pitchFamily="34" charset="0"/>
                           <a:cs typeface="Arial" panose="020B0604020202020204" pitchFamily="34" charset="0"/>
@@ -5312,7 +9083,7 @@
                     <a:p>
                       <a:pPr algn="ctr" fontAlgn="b"/>
                       <a:r>
-                        <a:rPr lang="ru-RU" sz="2000" u="none" strike="noStrike" dirty="0" smtClean="0">
+                        <a:rPr lang="ru-RU" sz="2000" u="none" strike="noStrike" dirty="0">
                           <a:effectLst/>
                           <a:latin typeface="Arial" panose="020B0604020202020204" pitchFamily="34" charset="0"/>
                           <a:cs typeface="Arial" panose="020B0604020202020204" pitchFamily="34" charset="0"/>
@@ -5320,7 +9091,7 @@
                         <a:t>Методы</a:t>
                       </a:r>
                       <a:r>
-                        <a:rPr lang="ru-RU" sz="2000" u="none" strike="noStrike" baseline="0" dirty="0" smtClean="0">
+                        <a:rPr lang="ru-RU" sz="2000" u="none" strike="noStrike" baseline="0" dirty="0">
                           <a:effectLst/>
                           <a:latin typeface="Arial" panose="020B0604020202020204" pitchFamily="34" charset="0"/>
                           <a:cs typeface="Arial" panose="020B0604020202020204" pitchFamily="34" charset="0"/>
@@ -5421,7 +9192,7 @@
                     <a:p>
                       <a:pPr algn="ctr" fontAlgn="b"/>
                       <a:r>
-                        <a:rPr lang="en-US" sz="2000" u="none" strike="noStrike" dirty="0" smtClean="0">
+                        <a:rPr lang="en-US" sz="2000" u="none" strike="noStrike" dirty="0">
                           <a:effectLst/>
                           <a:latin typeface="Arial" panose="020B0604020202020204" pitchFamily="34" charset="0"/>
                           <a:cs typeface="Arial" panose="020B0604020202020204" pitchFamily="34" charset="0"/>
@@ -5429,7 +9200,7 @@
                         <a:t>SHAP</a:t>
                       </a:r>
                       <a:r>
-                        <a:rPr lang="ru-RU" sz="2000" u="none" strike="noStrike" dirty="0" smtClean="0">
+                        <a:rPr lang="ru-RU" sz="2000" u="none" strike="noStrike" dirty="0">
                           <a:effectLst/>
                           <a:latin typeface="Arial" panose="020B0604020202020204" pitchFamily="34" charset="0"/>
                           <a:cs typeface="Arial" panose="020B0604020202020204" pitchFamily="34" charset="0"/>
@@ -5437,7 +9208,7 @@
                         <a:t>,</a:t>
                       </a:r>
                       <a:r>
-                        <a:rPr lang="ru-RU" sz="2000" u="none" strike="noStrike" baseline="0" dirty="0" smtClean="0">
+                        <a:rPr lang="ru-RU" sz="2000" u="none" strike="noStrike" baseline="0" dirty="0">
                           <a:effectLst/>
                           <a:latin typeface="Arial" panose="020B0604020202020204" pitchFamily="34" charset="0"/>
                           <a:cs typeface="Arial" panose="020B0604020202020204" pitchFamily="34" charset="0"/>
@@ -5445,7 +9216,7 @@
                         <a:t> </a:t>
                       </a:r>
                       <a:r>
-                        <a:rPr lang="en-US" sz="2000" u="none" strike="noStrike" baseline="0" dirty="0" smtClean="0">
+                        <a:rPr lang="en-US" sz="2000" u="none" strike="noStrike" baseline="0" dirty="0">
                           <a:effectLst/>
                           <a:latin typeface="Arial" panose="020B0604020202020204" pitchFamily="34" charset="0"/>
                           <a:cs typeface="Arial" panose="020B0604020202020204" pitchFamily="34" charset="0"/>
@@ -5453,7 +9224,7 @@
                         <a:t>LIME, </a:t>
                       </a:r>
                       <a:r>
-                        <a:rPr lang="en-US" sz="2000" u="none" strike="noStrike" baseline="0" dirty="0" err="1" smtClean="0">
+                        <a:rPr lang="en-US" sz="2000" u="none" strike="noStrike" baseline="0" dirty="0" err="1">
                           <a:effectLst/>
                           <a:latin typeface="Arial" panose="020B0604020202020204" pitchFamily="34" charset="0"/>
                           <a:cs typeface="Arial" panose="020B0604020202020204" pitchFamily="34" charset="0"/>
@@ -5461,7 +9232,7 @@
                         <a:t>att.weights</a:t>
                       </a:r>
                       <a:r>
-                        <a:rPr lang="ru-RU" sz="2000" u="none" strike="noStrike" baseline="0" dirty="0" smtClean="0">
+                        <a:rPr lang="ru-RU" sz="2000" u="none" strike="noStrike" baseline="0" dirty="0">
                           <a:effectLst/>
                           <a:latin typeface="Arial" panose="020B0604020202020204" pitchFamily="34" charset="0"/>
                           <a:cs typeface="Arial" panose="020B0604020202020204" pitchFamily="34" charset="0"/>
@@ -5551,50 +9322,42 @@
                           <a:latin typeface="Arial" panose="020B0604020202020204" pitchFamily="34" charset="0"/>
                           <a:cs typeface="Arial" panose="020B0604020202020204" pitchFamily="34" charset="0"/>
                         </a:rPr>
-                        <a:t>Включить в метрики: </a:t>
-                      </a:r>
-                      <a:r>
-                        <a:rPr lang="ru-RU" sz="2000" u="none" strike="noStrike" dirty="0" smtClean="0">
+                        <a:t>Включить в метрики: асимметричные </a:t>
+                      </a:r>
+                      <a:r>
+                        <a:rPr lang="ru-RU" sz="2000" u="none" strike="noStrike" dirty="0" err="1">
                           <a:effectLst/>
                           <a:latin typeface="Arial" panose="020B0604020202020204" pitchFamily="34" charset="0"/>
                           <a:cs typeface="Arial" panose="020B0604020202020204" pitchFamily="34" charset="0"/>
                         </a:rPr>
-                        <a:t>асимметричные </a:t>
-                      </a:r>
-                      <a:r>
-                        <a:rPr lang="ru-RU" sz="2000" u="none" strike="noStrike" dirty="0" err="1">
+                        <a:t>лоссы</a:t>
+                      </a:r>
+                      <a:r>
+                        <a:rPr lang="ru-RU" sz="2000" u="none" strike="noStrike" dirty="0">
                           <a:effectLst/>
                           <a:latin typeface="Arial" panose="020B0604020202020204" pitchFamily="34" charset="0"/>
                           <a:cs typeface="Arial" panose="020B0604020202020204" pitchFamily="34" charset="0"/>
                         </a:rPr>
-                        <a:t>лоссы</a:t>
-                      </a:r>
-                      <a:r>
-                        <a:rPr lang="ru-RU" sz="2000" u="none" strike="noStrike" dirty="0">
+                        <a:t> </a:t>
+                      </a:r>
+                      <a:r>
+                        <a:rPr lang="en-US" sz="2000" u="none" strike="noStrike" dirty="0">
                           <a:effectLst/>
                           <a:latin typeface="Arial" panose="020B0604020202020204" pitchFamily="34" charset="0"/>
                           <a:cs typeface="Arial" panose="020B0604020202020204" pitchFamily="34" charset="0"/>
                         </a:rPr>
-                        <a:t> </a:t>
-                      </a:r>
-                      <a:r>
-                        <a:rPr lang="en-US" sz="2000" u="none" strike="noStrike" dirty="0" smtClean="0">
+                        <a:t> pinball loss,</a:t>
+                      </a:r>
+                      <a:r>
+                        <a:rPr lang="ru-RU" sz="2000" u="none" strike="noStrike" baseline="0" dirty="0">
                           <a:effectLst/>
                           <a:latin typeface="Arial" panose="020B0604020202020204" pitchFamily="34" charset="0"/>
                           <a:cs typeface="Arial" panose="020B0604020202020204" pitchFamily="34" charset="0"/>
                         </a:rPr>
-                        <a:t> pinball loss,</a:t>
-                      </a:r>
-                      <a:r>
-                        <a:rPr lang="ru-RU" sz="2000" u="none" strike="noStrike" baseline="0" dirty="0" smtClean="0">
-                          <a:effectLst/>
-                          <a:latin typeface="Arial" panose="020B0604020202020204" pitchFamily="34" charset="0"/>
-                          <a:cs typeface="Arial" panose="020B0604020202020204" pitchFamily="34" charset="0"/>
-                        </a:rPr>
                         <a:t> и </a:t>
                       </a:r>
                       <a:r>
-                        <a:rPr lang="ru-RU" sz="2000" u="none" strike="noStrike" baseline="0" dirty="0" err="1" smtClean="0">
+                        <a:rPr lang="ru-RU" sz="2000" u="none" strike="noStrike" baseline="0" dirty="0" err="1">
                           <a:effectLst/>
                           <a:latin typeface="Arial" panose="020B0604020202020204" pitchFamily="34" charset="0"/>
                           <a:cs typeface="Arial" panose="020B0604020202020204" pitchFamily="34" charset="0"/>
@@ -5719,7 +9482,7 @@
                         <a:t>Добавить: </a:t>
                       </a:r>
                       <a:r>
-                        <a:rPr lang="en-US" sz="2000" u="none" strike="noStrike" dirty="0" smtClean="0">
+                        <a:rPr lang="en-US" sz="2000" u="none" strike="noStrike" dirty="0">
                           <a:effectLst/>
                           <a:latin typeface="Arial" panose="020B0604020202020204" pitchFamily="34" charset="0"/>
                           <a:cs typeface="Arial" panose="020B0604020202020204" pitchFamily="34" charset="0"/>
@@ -5727,7 +9490,7 @@
                         <a:t>A/B-</a:t>
                       </a:r>
                       <a:r>
-                        <a:rPr lang="ru-RU" sz="2000" u="none" strike="noStrike" dirty="0" smtClean="0">
+                        <a:rPr lang="ru-RU" sz="2000" u="none" strike="noStrike" dirty="0">
                           <a:effectLst/>
                           <a:latin typeface="Arial" panose="020B0604020202020204" pitchFamily="34" charset="0"/>
                           <a:cs typeface="Arial" panose="020B0604020202020204" pitchFamily="34" charset="0"/>
@@ -5735,7 +9498,7 @@
                         <a:t>тесты, скрытые тесты и </a:t>
                       </a:r>
                       <a:r>
-                        <a:rPr lang="ru-RU" sz="2000" u="none" strike="noStrike" dirty="0" err="1" smtClean="0">
+                        <a:rPr lang="ru-RU" sz="2000" u="none" strike="noStrike" dirty="0" err="1">
                           <a:effectLst/>
                           <a:latin typeface="Arial" panose="020B0604020202020204" pitchFamily="34" charset="0"/>
                           <a:cs typeface="Arial" panose="020B0604020202020204" pitchFamily="34" charset="0"/>
@@ -5820,7 +9583,7 @@
                     <a:p>
                       <a:pPr algn="ctr" fontAlgn="b"/>
                       <a:r>
-                        <a:rPr lang="ru-RU" sz="2000" u="none" strike="noStrike" dirty="0" smtClean="0">
+                        <a:rPr lang="ru-RU" sz="2000" u="none" strike="noStrike" dirty="0">
                           <a:effectLst/>
                           <a:latin typeface="Arial" panose="020B0604020202020204" pitchFamily="34" charset="0"/>
                           <a:cs typeface="Arial" panose="020B0604020202020204" pitchFamily="34" charset="0"/>
@@ -5828,7 +9591,7 @@
                         <a:t>Методы интерполяции,</a:t>
                       </a:r>
                       <a:r>
-                        <a:rPr lang="ru-RU" sz="2000" u="none" strike="noStrike" baseline="0" dirty="0" smtClean="0">
+                        <a:rPr lang="ru-RU" sz="2000" u="none" strike="noStrike" baseline="0" dirty="0">
                           <a:effectLst/>
                           <a:latin typeface="Arial" panose="020B0604020202020204" pitchFamily="34" charset="0"/>
                           <a:cs typeface="Arial" panose="020B0604020202020204" pitchFamily="34" charset="0"/>
@@ -5913,20 +9676,12 @@
                     <a:p>
                       <a:pPr algn="ctr" fontAlgn="b"/>
                       <a:r>
-                        <a:rPr lang="en-US" sz="2000" u="none" strike="noStrike" dirty="0" smtClean="0">
+                        <a:rPr lang="en-US" sz="2000" u="none" strike="noStrike" dirty="0">
                           <a:effectLst/>
                           <a:latin typeface="Arial" panose="020B0604020202020204" pitchFamily="34" charset="0"/>
                           <a:cs typeface="Arial" panose="020B0604020202020204" pitchFamily="34" charset="0"/>
                         </a:rPr>
-                        <a:t>collaboration </a:t>
-                      </a:r>
-                      <a:r>
-                        <a:rPr lang="en-US" sz="2000" u="none" strike="noStrike" dirty="0">
-                          <a:effectLst/>
-                          <a:latin typeface="Arial" panose="020B0604020202020204" pitchFamily="34" charset="0"/>
-                          <a:cs typeface="Arial" panose="020B0604020202020204" pitchFamily="34" charset="0"/>
-                        </a:rPr>
-                        <a:t>between data scientists and domain experts</a:t>
+                        <a:t>collaboration between data scientists and domain experts</a:t>
                       </a:r>
                       <a:endParaRPr lang="en-US" sz="2000" b="0" i="0" u="none" strike="noStrike" dirty="0">
                         <a:solidFill>
@@ -5991,13 +9746,6 @@
   <p:clrMapOvr>
     <a:masterClrMapping/>
   </p:clrMapOvr>
-  <p:timing>
-    <p:tnLst>
-      <p:par>
-        <p:cTn id="1" dur="indefinite" restart="never" nodeType="tmRoot"/>
-      </p:par>
-    </p:tnLst>
-  </p:timing>
 </p:sld>
 </file>
 
@@ -6053,10 +9801,9 @@
           <a:lstStyle/>
           <a:p>
             <a:r>
-              <a:rPr lang="ru-RU" dirty="0" smtClean="0"/>
+              <a:rPr lang="ru-RU" dirty="0"/>
               <a:t>Иерархические, групповые и другие типы ВР</a:t>
             </a:r>
-            <a:endParaRPr lang="ru-RU" dirty="0"/>
           </a:p>
         </p:txBody>
       </p:sp>
@@ -6070,13 +9817,6 @@
   <p:clrMapOvr>
     <a:masterClrMapping/>
   </p:clrMapOvr>
-  <p:timing>
-    <p:tnLst>
-      <p:par>
-        <p:cTn id="1" dur="indefinite" restart="never" nodeType="tmRoot"/>
-      </p:par>
-    </p:tnLst>
-  </p:timing>
 </p:sld>
 </file>
 

--- a/2025/LEC/08 работа с индустриальными ВР.pptx
+++ b/2025/LEC/08 работа с индустриальными ВР.pptx
@@ -5418,42 +5418,42 @@
             <p:ph idx="1"/>
             <p:extLst>
               <p:ext uri="{D42A27DB-BD31-4B8C-83A1-F6EECF244321}">
-                <p14:modId xmlns:p14="http://schemas.microsoft.com/office/powerpoint/2010/main" val="2935473711"/>
+                <p14:modId xmlns:p14="http://schemas.microsoft.com/office/powerpoint/2010/main" val="1498142590"/>
               </p:ext>
             </p:extLst>
           </p:nvPr>
         </p:nvGraphicFramePr>
         <p:xfrm>
           <a:off x="275422" y="963614"/>
-          <a:ext cx="11611777" cy="10731964"/>
+          <a:ext cx="11611777" cy="11341564"/>
         </p:xfrm>
         <a:graphic>
           <a:graphicData uri="http://schemas.openxmlformats.org/drawingml/2006/table">
             <a:tbl>
               <a:tblPr/>
               <a:tblGrid>
-                <a:gridCol w="1800478">
+                <a:gridCol w="1515278">
                   <a:extLst>
                     <a:ext uri="{9D8B030D-6E8A-4147-A177-3AD203B41FA5}">
                       <a16:colId xmlns:a16="http://schemas.microsoft.com/office/drawing/2014/main" val="1751435229"/>
                     </a:ext>
                   </a:extLst>
                 </a:gridCol>
-                <a:gridCol w="4279397">
+                <a:gridCol w="4927600">
                   <a:extLst>
                     <a:ext uri="{9D8B030D-6E8A-4147-A177-3AD203B41FA5}">
                       <a16:colId xmlns:a16="http://schemas.microsoft.com/office/drawing/2014/main" val="4134708588"/>
                     </a:ext>
                   </a:extLst>
                 </a:gridCol>
-                <a:gridCol w="3244338">
+                <a:gridCol w="3149600">
                   <a:extLst>
                     <a:ext uri="{9D8B030D-6E8A-4147-A177-3AD203B41FA5}">
                       <a16:colId xmlns:a16="http://schemas.microsoft.com/office/drawing/2014/main" val="1212520601"/>
                     </a:ext>
                   </a:extLst>
                 </a:gridCol>
-                <a:gridCol w="2287564">
+                <a:gridCol w="2019299">
                   <a:extLst>
                     <a:ext uri="{9D8B030D-6E8A-4147-A177-3AD203B41FA5}">
                       <a16:colId xmlns:a16="http://schemas.microsoft.com/office/drawing/2014/main" val="1746203298"/>
@@ -5476,12 +5476,15 @@
                             <a:srgbClr val="000000"/>
                           </a:solidFill>
                           <a:effectLst/>
-                          <a:latin typeface="Helvetica Neue" panose="02000503000000020004" pitchFamily="2" charset="0"/>
+                          <a:latin typeface="Arial" panose="020B0604020202020204" pitchFamily="34" charset="0"/>
+                          <a:cs typeface="Arial" panose="020B0604020202020204" pitchFamily="34" charset="0"/>
                         </a:rPr>
                         <a:t>Модель</a:t>
                       </a:r>
                       <a:endParaRPr lang="ru-RU" sz="2000" dirty="0">
                         <a:effectLst/>
+                        <a:latin typeface="Arial" panose="020B0604020202020204" pitchFamily="34" charset="0"/>
+                        <a:cs typeface="Arial" panose="020B0604020202020204" pitchFamily="34" charset="0"/>
                       </a:endParaRPr>
                     </a:p>
                   </a:txBody>
@@ -5541,12 +5544,15 @@
                             <a:srgbClr val="000000"/>
                           </a:solidFill>
                           <a:effectLst/>
-                          <a:latin typeface="Helvetica Neue" panose="02000503000000020004" pitchFamily="2" charset="0"/>
+                          <a:latin typeface="Arial" panose="020B0604020202020204" pitchFamily="34" charset="0"/>
+                          <a:cs typeface="Arial" panose="020B0604020202020204" pitchFamily="34" charset="0"/>
                         </a:rPr>
                         <a:t>Плюсы</a:t>
                       </a:r>
                       <a:endParaRPr lang="ru-RU" sz="2000" dirty="0">
                         <a:effectLst/>
+                        <a:latin typeface="Arial" panose="020B0604020202020204" pitchFamily="34" charset="0"/>
+                        <a:cs typeface="Arial" panose="020B0604020202020204" pitchFamily="34" charset="0"/>
                       </a:endParaRPr>
                     </a:p>
                   </a:txBody>
@@ -5606,12 +5612,15 @@
                             <a:srgbClr val="000000"/>
                           </a:solidFill>
                           <a:effectLst/>
-                          <a:latin typeface="Helvetica Neue" panose="02000503000000020004" pitchFamily="2" charset="0"/>
+                          <a:latin typeface="Arial" panose="020B0604020202020204" pitchFamily="34" charset="0"/>
+                          <a:cs typeface="Arial" panose="020B0604020202020204" pitchFamily="34" charset="0"/>
                         </a:rPr>
                         <a:t>Минусы</a:t>
                       </a:r>
                       <a:endParaRPr lang="ru-RU" sz="2000">
                         <a:effectLst/>
+                        <a:latin typeface="Arial" panose="020B0604020202020204" pitchFamily="34" charset="0"/>
+                        <a:cs typeface="Arial" panose="020B0604020202020204" pitchFamily="34" charset="0"/>
                       </a:endParaRPr>
                     </a:p>
                   </a:txBody>
@@ -5671,12 +5680,15 @@
                             <a:srgbClr val="000000"/>
                           </a:solidFill>
                           <a:effectLst/>
-                          <a:latin typeface="Helvetica Neue" panose="02000503000000020004" pitchFamily="2" charset="0"/>
+                          <a:latin typeface="Arial" panose="020B0604020202020204" pitchFamily="34" charset="0"/>
+                          <a:cs typeface="Arial" panose="020B0604020202020204" pitchFamily="34" charset="0"/>
                         </a:rPr>
                         <a:t>дообучения?</a:t>
                       </a:r>
                       <a:endParaRPr lang="ru-RU" sz="2000" dirty="0">
                         <a:effectLst/>
+                        <a:latin typeface="Arial" panose="020B0604020202020204" pitchFamily="34" charset="0"/>
+                        <a:cs typeface="Arial" panose="020B0604020202020204" pitchFamily="34" charset="0"/>
                       </a:endParaRPr>
                     </a:p>
                   </a:txBody>
@@ -5743,12 +5755,15 @@
                             <a:srgbClr val="000000"/>
                           </a:solidFill>
                           <a:effectLst/>
-                          <a:latin typeface="Helvetica Neue" panose="02000503000000020004" pitchFamily="2" charset="0"/>
+                          <a:latin typeface="Arial" panose="020B0604020202020204" pitchFamily="34" charset="0"/>
+                          <a:cs typeface="Arial" panose="020B0604020202020204" pitchFamily="34" charset="0"/>
                         </a:rPr>
                         <a:t>ARIMA / SARIMA</a:t>
                       </a:r>
                       <a:endParaRPr lang="en" sz="2000" dirty="0">
                         <a:effectLst/>
+                        <a:latin typeface="Arial" panose="020B0604020202020204" pitchFamily="34" charset="0"/>
+                        <a:cs typeface="Arial" panose="020B0604020202020204" pitchFamily="34" charset="0"/>
                       </a:endParaRPr>
                     </a:p>
                   </a:txBody>
@@ -5808,12 +5823,15 @@
                             <a:srgbClr val="000000"/>
                           </a:solidFill>
                           <a:effectLst/>
-                          <a:latin typeface="Helvetica Neue" panose="02000503000000020004" pitchFamily="2" charset="0"/>
+                          <a:latin typeface="Arial" panose="020B0604020202020204" pitchFamily="34" charset="0"/>
+                          <a:cs typeface="Arial" panose="020B0604020202020204" pitchFamily="34" charset="0"/>
                         </a:rPr>
                         <a:t>Интерпретируемость, контролируемое качество для каждого ВР</a:t>
                       </a:r>
                       <a:endParaRPr lang="ru-RU" sz="2000" dirty="0">
                         <a:effectLst/>
+                        <a:latin typeface="Arial" panose="020B0604020202020204" pitchFamily="34" charset="0"/>
+                        <a:cs typeface="Arial" panose="020B0604020202020204" pitchFamily="34" charset="0"/>
                       </a:endParaRPr>
                     </a:p>
                   </a:txBody>
@@ -5871,7 +5889,8 @@
                             <a:srgbClr val="000000"/>
                           </a:solidFill>
                           <a:effectLst/>
-                          <a:latin typeface="Helvetica Neue" panose="02000503000000020004" pitchFamily="2" charset="0"/>
+                          <a:latin typeface="Arial" panose="020B0604020202020204" pitchFamily="34" charset="0"/>
+                          <a:cs typeface="Arial" panose="020B0604020202020204" pitchFamily="34" charset="0"/>
                         </a:rPr>
                         <a:t>Масштабирование сложно, не учитывает </a:t>
                       </a:r>
@@ -5881,7 +5900,8 @@
                             <a:srgbClr val="000000"/>
                           </a:solidFill>
                           <a:effectLst/>
-                          <a:latin typeface="Helvetica Neue" panose="02000503000000020004" pitchFamily="2" charset="0"/>
+                          <a:latin typeface="Arial" panose="020B0604020202020204" pitchFamily="34" charset="0"/>
+                          <a:cs typeface="Arial" panose="020B0604020202020204" pitchFamily="34" charset="0"/>
                         </a:rPr>
                         <a:t>межрядовые</a:t>
                       </a:r>
@@ -5891,12 +5911,15 @@
                             <a:srgbClr val="000000"/>
                           </a:solidFill>
                           <a:effectLst/>
-                          <a:latin typeface="Helvetica Neue" panose="02000503000000020004" pitchFamily="2" charset="0"/>
+                          <a:latin typeface="Arial" panose="020B0604020202020204" pitchFamily="34" charset="0"/>
+                          <a:cs typeface="Arial" panose="020B0604020202020204" pitchFamily="34" charset="0"/>
                         </a:rPr>
                         <a:t> связи</a:t>
                       </a:r>
                       <a:endParaRPr lang="ru-RU" sz="2000" dirty="0">
                         <a:effectLst/>
+                        <a:latin typeface="Arial" panose="020B0604020202020204" pitchFamily="34" charset="0"/>
+                        <a:cs typeface="Arial" panose="020B0604020202020204" pitchFamily="34" charset="0"/>
                       </a:endParaRPr>
                     </a:p>
                   </a:txBody>
@@ -5954,12 +5977,15 @@
                             <a:srgbClr val="000000"/>
                           </a:solidFill>
                           <a:effectLst/>
-                          <a:latin typeface="Helvetica Neue" panose="02000503000000020004" pitchFamily="2" charset="0"/>
+                          <a:latin typeface="Arial" panose="020B0604020202020204" pitchFamily="34" charset="0"/>
+                          <a:cs typeface="Arial" panose="020B0604020202020204" pitchFamily="34" charset="0"/>
                         </a:rPr>
                         <a:t>Только переобучение</a:t>
                       </a:r>
                       <a:endParaRPr lang="ru-RU" sz="2000" dirty="0">
                         <a:effectLst/>
+                        <a:latin typeface="Arial" panose="020B0604020202020204" pitchFamily="34" charset="0"/>
+                        <a:cs typeface="Arial" panose="020B0604020202020204" pitchFamily="34" charset="0"/>
                       </a:endParaRPr>
                     </a:p>
                   </a:txBody>
@@ -6024,7 +6050,8 @@
                             <a:srgbClr val="000000"/>
                           </a:solidFill>
                           <a:effectLst/>
-                          <a:latin typeface="Helvetica Neue" panose="02000503000000020004" pitchFamily="2" charset="0"/>
+                          <a:latin typeface="Arial" panose="020B0604020202020204" pitchFamily="34" charset="0"/>
+                          <a:cs typeface="Arial" panose="020B0604020202020204" pitchFamily="34" charset="0"/>
                         </a:rPr>
                         <a:t>Prophet (</a:t>
                       </a:r>
@@ -6034,7 +6061,8 @@
                             <a:srgbClr val="000000"/>
                           </a:solidFill>
                           <a:effectLst/>
-                          <a:latin typeface="Helvetica Neue" panose="02000503000000020004" pitchFamily="2" charset="0"/>
+                          <a:latin typeface="Arial" panose="020B0604020202020204" pitchFamily="34" charset="0"/>
+                          <a:cs typeface="Arial" panose="020B0604020202020204" pitchFamily="34" charset="0"/>
                         </a:rPr>
                         <a:t>включая </a:t>
                       </a:r>
@@ -6044,12 +6072,15 @@
                             <a:srgbClr val="000000"/>
                           </a:solidFill>
                           <a:effectLst/>
-                          <a:latin typeface="Helvetica Neue" panose="02000503000000020004" pitchFamily="2" charset="0"/>
+                          <a:latin typeface="Arial" panose="020B0604020202020204" pitchFamily="34" charset="0"/>
+                          <a:cs typeface="Arial" panose="020B0604020202020204" pitchFamily="34" charset="0"/>
                         </a:rPr>
                         <a:t>Neural Prophet)</a:t>
                       </a:r>
                       <a:endParaRPr lang="en" sz="2000" dirty="0">
                         <a:effectLst/>
+                        <a:latin typeface="Arial" panose="020B0604020202020204" pitchFamily="34" charset="0"/>
+                        <a:cs typeface="Arial" panose="020B0604020202020204" pitchFamily="34" charset="0"/>
                       </a:endParaRPr>
                     </a:p>
                   </a:txBody>
@@ -6104,17 +6135,20 @@
                         <a:buNone/>
                       </a:pPr>
                       <a:r>
-                        <a:rPr lang="ru-RU" sz="2000">
+                        <a:rPr lang="ru-RU" sz="2000" dirty="0">
                           <a:solidFill>
                             <a:srgbClr val="000000"/>
                           </a:solidFill>
                           <a:effectLst/>
-                          <a:latin typeface="Helvetica Neue" panose="02000503000000020004" pitchFamily="2" charset="0"/>
+                          <a:latin typeface="Arial" panose="020B0604020202020204" pitchFamily="34" charset="0"/>
+                          <a:cs typeface="Arial" panose="020B0604020202020204" pitchFamily="34" charset="0"/>
                         </a:rPr>
                         <a:t>Хорошо с сезонностью, трендами, праздниками; устойчива к пропускам</a:t>
                       </a:r>
-                      <a:endParaRPr lang="ru-RU" sz="2000">
+                      <a:endParaRPr lang="ru-RU" sz="2000" dirty="0">
                         <a:effectLst/>
+                        <a:latin typeface="Arial" panose="020B0604020202020204" pitchFamily="34" charset="0"/>
+                        <a:cs typeface="Arial" panose="020B0604020202020204" pitchFamily="34" charset="0"/>
                       </a:endParaRPr>
                     </a:p>
                   </a:txBody>
@@ -6172,12 +6206,15 @@
                             <a:srgbClr val="000000"/>
                           </a:solidFill>
                           <a:effectLst/>
-                          <a:latin typeface="Helvetica Neue" panose="02000503000000020004" pitchFamily="2" charset="0"/>
+                          <a:latin typeface="Arial" panose="020B0604020202020204" pitchFamily="34" charset="0"/>
+                          <a:cs typeface="Arial" panose="020B0604020202020204" pitchFamily="34" charset="0"/>
                         </a:rPr>
                         <a:t>Сложно масштабировать на 100+ рядов, медленно обучается</a:t>
                       </a:r>
                       <a:endParaRPr lang="ru-RU" sz="2000">
                         <a:effectLst/>
+                        <a:latin typeface="Arial" panose="020B0604020202020204" pitchFamily="34" charset="0"/>
+                        <a:cs typeface="Arial" panose="020B0604020202020204" pitchFamily="34" charset="0"/>
                       </a:endParaRPr>
                     </a:p>
                   </a:txBody>
@@ -6235,22 +6272,15 @@
                             <a:srgbClr val="000000"/>
                           </a:solidFill>
                           <a:effectLst/>
-                          <a:latin typeface="Apple Color Emoji" pitchFamily="2" charset="0"/>
-                        </a:rPr>
-                        <a:t>⚠️</a:t>
-                      </a:r>
-                      <a:r>
-                        <a:rPr lang="ru-RU" sz="2000">
-                          <a:solidFill>
-                            <a:srgbClr val="000000"/>
-                          </a:solidFill>
-                          <a:effectLst/>
-                          <a:latin typeface="Helvetica Neue" panose="02000503000000020004" pitchFamily="2" charset="0"/>
-                        </a:rPr>
-                        <a:t> Только переобучение</a:t>
+                          <a:latin typeface="Arial" panose="020B0604020202020204" pitchFamily="34" charset="0"/>
+                          <a:cs typeface="Arial" panose="020B0604020202020204" pitchFamily="34" charset="0"/>
+                        </a:rPr>
+                        <a:t>⚠️ Только переобучение</a:t>
                       </a:r>
                       <a:endParaRPr lang="ru-RU" sz="2000">
                         <a:effectLst/>
+                        <a:latin typeface="Arial" panose="020B0604020202020204" pitchFamily="34" charset="0"/>
+                        <a:cs typeface="Arial" panose="020B0604020202020204" pitchFamily="34" charset="0"/>
                       </a:endParaRPr>
                     </a:p>
                   </a:txBody>
@@ -6315,12 +6345,15 @@
                             <a:srgbClr val="000000"/>
                           </a:solidFill>
                           <a:effectLst/>
-                          <a:latin typeface="Helvetica Neue" panose="02000503000000020004" pitchFamily="2" charset="0"/>
+                          <a:latin typeface="Arial" panose="020B0604020202020204" pitchFamily="34" charset="0"/>
+                          <a:cs typeface="Arial" panose="020B0604020202020204" pitchFamily="34" charset="0"/>
                         </a:rPr>
                         <a:t>Exponential Smoothing (ETS)</a:t>
                       </a:r>
                       <a:endParaRPr lang="en" sz="2000">
                         <a:effectLst/>
+                        <a:latin typeface="Arial" panose="020B0604020202020204" pitchFamily="34" charset="0"/>
+                        <a:cs typeface="Arial" panose="020B0604020202020204" pitchFamily="34" charset="0"/>
                       </a:endParaRPr>
                     </a:p>
                   </a:txBody>
@@ -6375,17 +6408,20 @@
                         <a:buNone/>
                       </a:pPr>
                       <a:r>
-                        <a:rPr lang="ru-RU" sz="2000">
+                        <a:rPr lang="ru-RU" sz="2000" dirty="0">
                           <a:solidFill>
                             <a:srgbClr val="000000"/>
                           </a:solidFill>
                           <a:effectLst/>
-                          <a:latin typeface="Helvetica Neue" panose="02000503000000020004" pitchFamily="2" charset="0"/>
+                          <a:latin typeface="Arial" panose="020B0604020202020204" pitchFamily="34" charset="0"/>
+                          <a:cs typeface="Arial" panose="020B0604020202020204" pitchFamily="34" charset="0"/>
                         </a:rPr>
                         <a:t>Проста, интерпретируема, хороша для трендов/сезонности</a:t>
                       </a:r>
-                      <a:endParaRPr lang="ru-RU" sz="2000">
+                      <a:endParaRPr lang="ru-RU" sz="2000" dirty="0">
                         <a:effectLst/>
+                        <a:latin typeface="Arial" panose="020B0604020202020204" pitchFamily="34" charset="0"/>
+                        <a:cs typeface="Arial" panose="020B0604020202020204" pitchFamily="34" charset="0"/>
                       </a:endParaRPr>
                     </a:p>
                   </a:txBody>
@@ -6443,12 +6479,15 @@
                             <a:srgbClr val="000000"/>
                           </a:solidFill>
                           <a:effectLst/>
-                          <a:latin typeface="Helvetica Neue" panose="02000503000000020004" pitchFamily="2" charset="0"/>
+                          <a:latin typeface="Arial" panose="020B0604020202020204" pitchFamily="34" charset="0"/>
+                          <a:cs typeface="Arial" panose="020B0604020202020204" pitchFamily="34" charset="0"/>
                         </a:rPr>
                         <a:t>Только для одного ряда, не учитывает внешние факторы</a:t>
                       </a:r>
                       <a:endParaRPr lang="ru-RU" sz="2000">
                         <a:effectLst/>
+                        <a:latin typeface="Arial" panose="020B0604020202020204" pitchFamily="34" charset="0"/>
+                        <a:cs typeface="Arial" panose="020B0604020202020204" pitchFamily="34" charset="0"/>
                       </a:endParaRPr>
                     </a:p>
                   </a:txBody>
@@ -6506,22 +6545,15 @@
                             <a:srgbClr val="000000"/>
                           </a:solidFill>
                           <a:effectLst/>
-                          <a:latin typeface="Apple Color Emoji" pitchFamily="2" charset="0"/>
-                        </a:rPr>
-                        <a:t>⚠️</a:t>
-                      </a:r>
-                      <a:r>
-                        <a:rPr lang="ru-RU" sz="2000">
-                          <a:solidFill>
-                            <a:srgbClr val="000000"/>
-                          </a:solidFill>
-                          <a:effectLst/>
-                          <a:latin typeface="Helvetica Neue" panose="02000503000000020004" pitchFamily="2" charset="0"/>
-                        </a:rPr>
-                        <a:t> Только переобучение</a:t>
+                          <a:latin typeface="Arial" panose="020B0604020202020204" pitchFamily="34" charset="0"/>
+                          <a:cs typeface="Arial" panose="020B0604020202020204" pitchFamily="34" charset="0"/>
+                        </a:rPr>
+                        <a:t>⚠️ Только переобучение</a:t>
                       </a:r>
                       <a:endParaRPr lang="ru-RU" sz="2000">
                         <a:effectLst/>
+                        <a:latin typeface="Arial" panose="020B0604020202020204" pitchFamily="34" charset="0"/>
+                        <a:cs typeface="Arial" panose="020B0604020202020204" pitchFamily="34" charset="0"/>
                       </a:endParaRPr>
                     </a:p>
                   </a:txBody>
@@ -6586,12 +6618,15 @@
                             <a:srgbClr val="000000"/>
                           </a:solidFill>
                           <a:effectLst/>
-                          <a:latin typeface="Helvetica Neue" panose="02000503000000020004" pitchFamily="2" charset="0"/>
+                          <a:latin typeface="Arial" panose="020B0604020202020204" pitchFamily="34" charset="0"/>
+                          <a:cs typeface="Arial" panose="020B0604020202020204" pitchFamily="34" charset="0"/>
                         </a:rPr>
                         <a:t>Linear Regression / Ridge / Lasso</a:t>
                       </a:r>
                       <a:endParaRPr lang="en" sz="2000">
                         <a:effectLst/>
+                        <a:latin typeface="Arial" panose="020B0604020202020204" pitchFamily="34" charset="0"/>
+                        <a:cs typeface="Arial" panose="020B0604020202020204" pitchFamily="34" charset="0"/>
                       </a:endParaRPr>
                     </a:p>
                   </a:txBody>
@@ -6651,7 +6686,8 @@
                             <a:srgbClr val="000000"/>
                           </a:solidFill>
                           <a:effectLst/>
-                          <a:latin typeface="Helvetica Neue" panose="02000503000000020004" pitchFamily="2" charset="0"/>
+                          <a:latin typeface="Arial" panose="020B0604020202020204" pitchFamily="34" charset="0"/>
+                          <a:cs typeface="Arial" panose="020B0604020202020204" pitchFamily="34" charset="0"/>
                         </a:rPr>
                         <a:t>Быстро, интерпретируемо, легко </a:t>
                       </a:r>
@@ -6661,7 +6697,8 @@
                             <a:srgbClr val="000000"/>
                           </a:solidFill>
                           <a:effectLst/>
-                          <a:latin typeface="Helvetica Neue" panose="02000503000000020004" pitchFamily="2" charset="0"/>
+                          <a:latin typeface="Arial" panose="020B0604020202020204" pitchFamily="34" charset="0"/>
+                          <a:cs typeface="Arial" panose="020B0604020202020204" pitchFamily="34" charset="0"/>
                         </a:rPr>
                         <a:t>дообучать</a:t>
                       </a:r>
@@ -6671,7 +6708,8 @@
                             <a:srgbClr val="000000"/>
                           </a:solidFill>
                           <a:effectLst/>
-                          <a:latin typeface="Helvetica Neue" panose="02000503000000020004" pitchFamily="2" charset="0"/>
+                          <a:latin typeface="Arial" panose="020B0604020202020204" pitchFamily="34" charset="0"/>
+                          <a:cs typeface="Arial" panose="020B0604020202020204" pitchFamily="34" charset="0"/>
                         </a:rPr>
                         <a:t> (</a:t>
                       </a:r>
@@ -6681,12 +6719,15 @@
                             <a:srgbClr val="000000"/>
                           </a:solidFill>
                           <a:effectLst/>
-                          <a:latin typeface="Helvetica Neue" panose="02000503000000020004" pitchFamily="2" charset="0"/>
+                          <a:latin typeface="Arial" panose="020B0604020202020204" pitchFamily="34" charset="0"/>
+                          <a:cs typeface="Arial" panose="020B0604020202020204" pitchFamily="34" charset="0"/>
                         </a:rPr>
                         <a:t>SGD)</a:t>
                       </a:r>
                       <a:endParaRPr lang="en" sz="2000" dirty="0">
                         <a:effectLst/>
+                        <a:latin typeface="Arial" panose="020B0604020202020204" pitchFamily="34" charset="0"/>
+                        <a:cs typeface="Arial" panose="020B0604020202020204" pitchFamily="34" charset="0"/>
                       </a:endParaRPr>
                     </a:p>
                   </a:txBody>
@@ -6744,12 +6785,15 @@
                             <a:srgbClr val="000000"/>
                           </a:solidFill>
                           <a:effectLst/>
-                          <a:latin typeface="Helvetica Neue" panose="02000503000000020004" pitchFamily="2" charset="0"/>
+                          <a:latin typeface="Arial" panose="020B0604020202020204" pitchFamily="34" charset="0"/>
+                          <a:cs typeface="Arial" panose="020B0604020202020204" pitchFamily="34" charset="0"/>
                         </a:rPr>
                         <a:t>Требует ручной инженерии признаков (лаги, скользящие окна)</a:t>
                       </a:r>
                       <a:endParaRPr lang="ru-RU" sz="2000">
                         <a:effectLst/>
+                        <a:latin typeface="Arial" panose="020B0604020202020204" pitchFamily="34" charset="0"/>
+                        <a:cs typeface="Arial" panose="020B0604020202020204" pitchFamily="34" charset="0"/>
                       </a:endParaRPr>
                     </a:p>
                   </a:txBody>
@@ -6807,19 +6851,10 @@
                             <a:srgbClr val="000000"/>
                           </a:solidFill>
                           <a:effectLst/>
-                          <a:latin typeface="Apple Color Emoji" pitchFamily="2" charset="0"/>
-                        </a:rPr>
-                        <a:t>✅</a:t>
-                      </a:r>
-                      <a:r>
-                        <a:rPr lang="ru-RU" sz="2000">
-                          <a:solidFill>
-                            <a:srgbClr val="000000"/>
-                          </a:solidFill>
-                          <a:effectLst/>
-                          <a:latin typeface="Helvetica Neue" panose="02000503000000020004" pitchFamily="2" charset="0"/>
-                        </a:rPr>
-                        <a:t> Да (</a:t>
+                          <a:latin typeface="Arial" panose="020B0604020202020204" pitchFamily="34" charset="0"/>
+                          <a:cs typeface="Arial" panose="020B0604020202020204" pitchFamily="34" charset="0"/>
+                        </a:rPr>
+                        <a:t>✅ Да (</a:t>
                       </a:r>
                       <a:r>
                         <a:rPr lang="en" sz="2000">
@@ -6827,12 +6862,15 @@
                             <a:srgbClr val="000000"/>
                           </a:solidFill>
                           <a:effectLst/>
-                          <a:latin typeface="Helvetica Neue" panose="02000503000000020004" pitchFamily="2" charset="0"/>
+                          <a:latin typeface="Arial" panose="020B0604020202020204" pitchFamily="34" charset="0"/>
+                          <a:cs typeface="Arial" panose="020B0604020202020204" pitchFamily="34" charset="0"/>
                         </a:rPr>
                         <a:t>SGD, partial_fit)</a:t>
                       </a:r>
                       <a:endParaRPr lang="en" sz="2000">
                         <a:effectLst/>
+                        <a:latin typeface="Arial" panose="020B0604020202020204" pitchFamily="34" charset="0"/>
+                        <a:cs typeface="Arial" panose="020B0604020202020204" pitchFamily="34" charset="0"/>
                       </a:endParaRPr>
                     </a:p>
                   </a:txBody>
@@ -6897,12 +6935,15 @@
                             <a:srgbClr val="000000"/>
                           </a:solidFill>
                           <a:effectLst/>
-                          <a:latin typeface="Helvetica Neue" panose="02000503000000020004" pitchFamily="2" charset="0"/>
+                          <a:latin typeface="Arial" panose="020B0604020202020204" pitchFamily="34" charset="0"/>
+                          <a:cs typeface="Arial" panose="020B0604020202020204" pitchFamily="34" charset="0"/>
                         </a:rPr>
                         <a:t>XGBoost / LightGBM / CatBoost</a:t>
                       </a:r>
                       <a:endParaRPr lang="en" sz="2000">
                         <a:effectLst/>
+                        <a:latin typeface="Arial" panose="020B0604020202020204" pitchFamily="34" charset="0"/>
+                        <a:cs typeface="Arial" panose="020B0604020202020204" pitchFamily="34" charset="0"/>
                       </a:endParaRPr>
                     </a:p>
                   </a:txBody>
@@ -6962,12 +7003,15 @@
                             <a:srgbClr val="000000"/>
                           </a:solidFill>
                           <a:effectLst/>
-                          <a:latin typeface="Helvetica Neue" panose="02000503000000020004" pitchFamily="2" charset="0"/>
+                          <a:latin typeface="Arial" panose="020B0604020202020204" pitchFamily="34" charset="0"/>
+                          <a:cs typeface="Arial" panose="020B0604020202020204" pitchFamily="34" charset="0"/>
                         </a:rPr>
                         <a:t>Высокая точность, работает с пропусками, нелинейности, 100+ признаков</a:t>
                       </a:r>
                       <a:endParaRPr lang="ru-RU" sz="2000">
                         <a:effectLst/>
+                        <a:latin typeface="Arial" panose="020B0604020202020204" pitchFamily="34" charset="0"/>
+                        <a:cs typeface="Arial" panose="020B0604020202020204" pitchFamily="34" charset="0"/>
                       </a:endParaRPr>
                     </a:p>
                   </a:txBody>
@@ -7020,17 +7064,42 @@
                         <a:buNone/>
                       </a:pPr>
                       <a:r>
-                        <a:rPr lang="ru-RU" sz="2000">
+                        <a:rPr lang="ru-RU" sz="2000" dirty="0">
                           <a:solidFill>
                             <a:srgbClr val="000000"/>
                           </a:solidFill>
                           <a:effectLst/>
-                          <a:latin typeface="Helvetica Neue" panose="02000503000000020004" pitchFamily="2" charset="0"/>
-                        </a:rPr>
-                        <a:t>Не "нативно" временная модель; дообучение = переобучение</a:t>
-                      </a:r>
-                      <a:endParaRPr lang="ru-RU" sz="2000">
+                          <a:latin typeface="Arial" panose="020B0604020202020204" pitchFamily="34" charset="0"/>
+                          <a:cs typeface="Arial" panose="020B0604020202020204" pitchFamily="34" charset="0"/>
+                        </a:rPr>
+                        <a:t>Не "</a:t>
+                      </a:r>
+                      <a:r>
+                        <a:rPr lang="ru-RU" sz="2000" dirty="0" err="1">
+                          <a:solidFill>
+                            <a:srgbClr val="000000"/>
+                          </a:solidFill>
+                          <a:effectLst/>
+                          <a:latin typeface="Arial" panose="020B0604020202020204" pitchFamily="34" charset="0"/>
+                          <a:cs typeface="Arial" panose="020B0604020202020204" pitchFamily="34" charset="0"/>
+                        </a:rPr>
+                        <a:t>нативно</a:t>
+                      </a:r>
+                      <a:r>
+                        <a:rPr lang="ru-RU" sz="2000" dirty="0">
+                          <a:solidFill>
+                            <a:srgbClr val="000000"/>
+                          </a:solidFill>
+                          <a:effectLst/>
+                          <a:latin typeface="Arial" panose="020B0604020202020204" pitchFamily="34" charset="0"/>
+                          <a:cs typeface="Arial" panose="020B0604020202020204" pitchFamily="34" charset="0"/>
+                        </a:rPr>
+                        <a:t>" временная модель; дообучение = переобучение</a:t>
+                      </a:r>
+                      <a:endParaRPr lang="ru-RU" sz="2000" dirty="0">
                         <a:effectLst/>
+                        <a:latin typeface="Arial" panose="020B0604020202020204" pitchFamily="34" charset="0"/>
+                        <a:cs typeface="Arial" panose="020B0604020202020204" pitchFamily="34" charset="0"/>
                       </a:endParaRPr>
                     </a:p>
                   </a:txBody>
@@ -7088,19 +7157,10 @@
                             <a:srgbClr val="000000"/>
                           </a:solidFill>
                           <a:effectLst/>
-                          <a:latin typeface="Apple Color Emoji" pitchFamily="2" charset="0"/>
-                        </a:rPr>
-                        <a:t>⚠️</a:t>
-                      </a:r>
-                      <a:r>
-                        <a:rPr lang="ru-RU" sz="2000">
-                          <a:solidFill>
-                            <a:srgbClr val="000000"/>
-                          </a:solidFill>
-                          <a:effectLst/>
-                          <a:latin typeface="Helvetica Neue" panose="02000503000000020004" pitchFamily="2" charset="0"/>
-                        </a:rPr>
-                        <a:t> Частичное (</a:t>
+                          <a:latin typeface="Arial" panose="020B0604020202020204" pitchFamily="34" charset="0"/>
+                          <a:cs typeface="Arial" panose="020B0604020202020204" pitchFamily="34" charset="0"/>
+                        </a:rPr>
+                        <a:t>⚠️ Частичное (</a:t>
                       </a:r>
                       <a:r>
                         <a:rPr lang="en" sz="2000">
@@ -7108,12 +7168,15 @@
                             <a:srgbClr val="000000"/>
                           </a:solidFill>
                           <a:effectLst/>
-                          <a:latin typeface="Helvetica Neue" panose="02000503000000020004" pitchFamily="2" charset="0"/>
+                          <a:latin typeface="Arial" panose="020B0604020202020204" pitchFamily="34" charset="0"/>
+                          <a:cs typeface="Arial" panose="020B0604020202020204" pitchFamily="34" charset="0"/>
                         </a:rPr>
                         <a:t>LightGBM: init_model)</a:t>
                       </a:r>
                       <a:endParaRPr lang="en" sz="2000">
                         <a:effectLst/>
+                        <a:latin typeface="Arial" panose="020B0604020202020204" pitchFamily="34" charset="0"/>
+                        <a:cs typeface="Arial" panose="020B0604020202020204" pitchFamily="34" charset="0"/>
                       </a:endParaRPr>
                     </a:p>
                   </a:txBody>
@@ -7178,12 +7241,15 @@
                             <a:srgbClr val="000000"/>
                           </a:solidFill>
                           <a:effectLst/>
-                          <a:latin typeface="Helvetica Neue" panose="02000503000000020004" pitchFamily="2" charset="0"/>
+                          <a:latin typeface="Arial" panose="020B0604020202020204" pitchFamily="34" charset="0"/>
+                          <a:cs typeface="Arial" panose="020B0604020202020204" pitchFamily="34" charset="0"/>
                         </a:rPr>
                         <a:t>LSTM / GRU (RNN)</a:t>
                       </a:r>
                       <a:endParaRPr lang="en" sz="2000">
                         <a:effectLst/>
+                        <a:latin typeface="Arial" panose="020B0604020202020204" pitchFamily="34" charset="0"/>
+                        <a:cs typeface="Arial" panose="020B0604020202020204" pitchFamily="34" charset="0"/>
                       </a:endParaRPr>
                     </a:p>
                   </a:txBody>
@@ -7243,12 +7309,15 @@
                             <a:srgbClr val="000000"/>
                           </a:solidFill>
                           <a:effectLst/>
-                          <a:latin typeface="Helvetica Neue" panose="02000503000000020004" pitchFamily="2" charset="0"/>
+                          <a:latin typeface="Arial" panose="020B0604020202020204" pitchFamily="34" charset="0"/>
+                          <a:cs typeface="Arial" panose="020B0604020202020204" pitchFamily="34" charset="0"/>
                         </a:rPr>
                         <a:t>Улавливает долгосрочные зависимости, работает с последовательностями</a:t>
                       </a:r>
                       <a:endParaRPr lang="ru-RU" sz="2000" dirty="0">
                         <a:effectLst/>
+                        <a:latin typeface="Arial" panose="020B0604020202020204" pitchFamily="34" charset="0"/>
+                        <a:cs typeface="Arial" panose="020B0604020202020204" pitchFamily="34" charset="0"/>
                       </a:endParaRPr>
                     </a:p>
                   </a:txBody>
@@ -7306,7 +7375,8 @@
                             <a:srgbClr val="000000"/>
                           </a:solidFill>
                           <a:effectLst/>
-                          <a:latin typeface="Helvetica Neue" panose="02000503000000020004" pitchFamily="2" charset="0"/>
+                          <a:latin typeface="Arial" panose="020B0604020202020204" pitchFamily="34" charset="0"/>
+                          <a:cs typeface="Arial" panose="020B0604020202020204" pitchFamily="34" charset="0"/>
                         </a:rPr>
                         <a:t>Сложно настраивать, требует </a:t>
                       </a:r>
@@ -7316,7 +7386,8 @@
                             <a:srgbClr val="000000"/>
                           </a:solidFill>
                           <a:effectLst/>
-                          <a:latin typeface="Helvetica Neue" panose="02000503000000020004" pitchFamily="2" charset="0"/>
+                          <a:latin typeface="Arial" panose="020B0604020202020204" pitchFamily="34" charset="0"/>
+                          <a:cs typeface="Arial" panose="020B0604020202020204" pitchFamily="34" charset="0"/>
                         </a:rPr>
                         <a:t>GPU, </a:t>
                       </a:r>
@@ -7326,12 +7397,15 @@
                             <a:srgbClr val="000000"/>
                           </a:solidFill>
                           <a:effectLst/>
-                          <a:latin typeface="Helvetica Neue" panose="02000503000000020004" pitchFamily="2" charset="0"/>
+                          <a:latin typeface="Arial" panose="020B0604020202020204" pitchFamily="34" charset="0"/>
+                          <a:cs typeface="Arial" panose="020B0604020202020204" pitchFamily="34" charset="0"/>
                         </a:rPr>
                         <a:t>риск переобучения</a:t>
                       </a:r>
                       <a:endParaRPr lang="ru-RU" sz="2000">
                         <a:effectLst/>
+                        <a:latin typeface="Arial" panose="020B0604020202020204" pitchFamily="34" charset="0"/>
+                        <a:cs typeface="Arial" panose="020B0604020202020204" pitchFamily="34" charset="0"/>
                       </a:endParaRPr>
                     </a:p>
                   </a:txBody>
@@ -7389,19 +7463,10 @@
                             <a:srgbClr val="000000"/>
                           </a:solidFill>
                           <a:effectLst/>
-                          <a:latin typeface="Apple Color Emoji" pitchFamily="2" charset="0"/>
-                        </a:rPr>
-                        <a:t>⚠️</a:t>
-                      </a:r>
-                      <a:r>
-                        <a:rPr lang="ru-RU" sz="2000">
-                          <a:solidFill>
-                            <a:srgbClr val="000000"/>
-                          </a:solidFill>
-                          <a:effectLst/>
-                          <a:latin typeface="Helvetica Neue" panose="02000503000000020004" pitchFamily="2" charset="0"/>
-                        </a:rPr>
-                        <a:t> Да, но с осторожностью (</a:t>
+                          <a:latin typeface="Arial" panose="020B0604020202020204" pitchFamily="34" charset="0"/>
+                          <a:cs typeface="Arial" panose="020B0604020202020204" pitchFamily="34" charset="0"/>
+                        </a:rPr>
+                        <a:t>⚠️ Да, но с осторожностью (</a:t>
                       </a:r>
                       <a:r>
                         <a:rPr lang="en" sz="2000">
@@ -7409,12 +7474,15 @@
                             <a:srgbClr val="000000"/>
                           </a:solidFill>
                           <a:effectLst/>
-                          <a:latin typeface="Helvetica Neue" panose="02000503000000020004" pitchFamily="2" charset="0"/>
+                          <a:latin typeface="Arial" panose="020B0604020202020204" pitchFamily="34" charset="0"/>
+                          <a:cs typeface="Arial" panose="020B0604020202020204" pitchFamily="34" charset="0"/>
                         </a:rPr>
                         <a:t>drift, catastrophic forgetting)</a:t>
                       </a:r>
                       <a:endParaRPr lang="en" sz="2000">
                         <a:effectLst/>
+                        <a:latin typeface="Arial" panose="020B0604020202020204" pitchFamily="34" charset="0"/>
+                        <a:cs typeface="Arial" panose="020B0604020202020204" pitchFamily="34" charset="0"/>
                       </a:endParaRPr>
                     </a:p>
                   </a:txBody>
@@ -7479,12 +7547,15 @@
                             <a:srgbClr val="000000"/>
                           </a:solidFill>
                           <a:effectLst/>
-                          <a:latin typeface="Helvetica Neue" panose="02000503000000020004" pitchFamily="2" charset="0"/>
+                          <a:latin typeface="Arial" panose="020B0604020202020204" pitchFamily="34" charset="0"/>
+                          <a:cs typeface="Arial" panose="020B0604020202020204" pitchFamily="34" charset="0"/>
                         </a:rPr>
                         <a:t>N-BEATS</a:t>
                       </a:r>
                       <a:endParaRPr lang="en" sz="2000">
                         <a:effectLst/>
+                        <a:latin typeface="Arial" panose="020B0604020202020204" pitchFamily="34" charset="0"/>
+                        <a:cs typeface="Arial" panose="020B0604020202020204" pitchFamily="34" charset="0"/>
                       </a:endParaRPr>
                     </a:p>
                   </a:txBody>
@@ -7544,7 +7615,8 @@
                             <a:srgbClr val="000000"/>
                           </a:solidFill>
                           <a:effectLst/>
-                          <a:latin typeface="Helvetica Neue" panose="02000503000000020004" pitchFamily="2" charset="0"/>
+                          <a:latin typeface="Arial" panose="020B0604020202020204" pitchFamily="34" charset="0"/>
+                          <a:cs typeface="Arial" panose="020B0604020202020204" pitchFamily="34" charset="0"/>
                         </a:rPr>
                         <a:t>State-of-the-art, </a:t>
                       </a:r>
@@ -7554,12 +7626,15 @@
                             <a:srgbClr val="000000"/>
                           </a:solidFill>
                           <a:effectLst/>
-                          <a:latin typeface="Helvetica Neue" panose="02000503000000020004" pitchFamily="2" charset="0"/>
+                          <a:latin typeface="Arial" panose="020B0604020202020204" pitchFamily="34" charset="0"/>
+                          <a:cs typeface="Arial" panose="020B0604020202020204" pitchFamily="34" charset="0"/>
                         </a:rPr>
                         <a:t>интерпретируемые компоненты (тренд, сезонность)</a:t>
                       </a:r>
                       <a:endParaRPr lang="ru-RU" sz="2000">
                         <a:effectLst/>
+                        <a:latin typeface="Arial" panose="020B0604020202020204" pitchFamily="34" charset="0"/>
+                        <a:cs typeface="Arial" panose="020B0604020202020204" pitchFamily="34" charset="0"/>
                       </a:endParaRPr>
                     </a:p>
                   </a:txBody>
@@ -7617,12 +7692,15 @@
                             <a:srgbClr val="000000"/>
                           </a:solidFill>
                           <a:effectLst/>
-                          <a:latin typeface="Helvetica Neue" panose="02000503000000020004" pitchFamily="2" charset="0"/>
+                          <a:latin typeface="Arial" panose="020B0604020202020204" pitchFamily="34" charset="0"/>
+                          <a:cs typeface="Arial" panose="020B0604020202020204" pitchFamily="34" charset="0"/>
                         </a:rPr>
                         <a:t>Требует больших данных, сложно настраивать</a:t>
                       </a:r>
                       <a:endParaRPr lang="ru-RU" sz="2000" dirty="0">
                         <a:effectLst/>
+                        <a:latin typeface="Arial" panose="020B0604020202020204" pitchFamily="34" charset="0"/>
+                        <a:cs typeface="Arial" panose="020B0604020202020204" pitchFamily="34" charset="0"/>
                       </a:endParaRPr>
                     </a:p>
                   </a:txBody>
@@ -7680,22 +7758,15 @@
                             <a:srgbClr val="000000"/>
                           </a:solidFill>
                           <a:effectLst/>
-                          <a:latin typeface="Apple Color Emoji" pitchFamily="2" charset="0"/>
-                        </a:rPr>
-                        <a:t>✅</a:t>
-                      </a:r>
-                      <a:r>
-                        <a:rPr lang="ru-RU" sz="2000">
-                          <a:solidFill>
-                            <a:srgbClr val="000000"/>
-                          </a:solidFill>
-                          <a:effectLst/>
-                          <a:latin typeface="Helvetica Neue" panose="02000503000000020004" pitchFamily="2" charset="0"/>
-                        </a:rPr>
-                        <a:t> Да (если реализовать)</a:t>
+                          <a:latin typeface="Arial" panose="020B0604020202020204" pitchFamily="34" charset="0"/>
+                          <a:cs typeface="Arial" panose="020B0604020202020204" pitchFamily="34" charset="0"/>
+                        </a:rPr>
+                        <a:t>✅ Да (если реализовать)</a:t>
                       </a:r>
                       <a:endParaRPr lang="ru-RU" sz="2000">
                         <a:effectLst/>
+                        <a:latin typeface="Arial" panose="020B0604020202020204" pitchFamily="34" charset="0"/>
+                        <a:cs typeface="Arial" panose="020B0604020202020204" pitchFamily="34" charset="0"/>
                       </a:endParaRPr>
                     </a:p>
                   </a:txBody>
@@ -7760,12 +7831,15 @@
                             <a:srgbClr val="000000"/>
                           </a:solidFill>
                           <a:effectLst/>
-                          <a:latin typeface="Helvetica Neue" panose="02000503000000020004" pitchFamily="2" charset="0"/>
+                          <a:latin typeface="Arial" panose="020B0604020202020204" pitchFamily="34" charset="0"/>
+                          <a:cs typeface="Arial" panose="020B0604020202020204" pitchFamily="34" charset="0"/>
                         </a:rPr>
                         <a:t>TFT (Temporal Fusion Transformer)</a:t>
                       </a:r>
                       <a:endParaRPr lang="en" sz="2000">
                         <a:effectLst/>
+                        <a:latin typeface="Arial" panose="020B0604020202020204" pitchFamily="34" charset="0"/>
+                        <a:cs typeface="Arial" panose="020B0604020202020204" pitchFamily="34" charset="0"/>
                       </a:endParaRPr>
                     </a:p>
                   </a:txBody>
@@ -7825,12 +7899,15 @@
                             <a:srgbClr val="000000"/>
                           </a:solidFill>
                           <a:effectLst/>
-                          <a:latin typeface="Helvetica Neue" panose="02000503000000020004" pitchFamily="2" charset="0"/>
+                          <a:latin typeface="Arial" panose="020B0604020202020204" pitchFamily="34" charset="0"/>
+                          <a:cs typeface="Arial" panose="020B0604020202020204" pitchFamily="34" charset="0"/>
                         </a:rPr>
                         <a:t>Отлично работает с статическими и динамическими признаками, интерпретация через внимательность</a:t>
                       </a:r>
                       <a:endParaRPr lang="ru-RU" sz="2000">
                         <a:effectLst/>
+                        <a:latin typeface="Arial" panose="020B0604020202020204" pitchFamily="34" charset="0"/>
+                        <a:cs typeface="Arial" panose="020B0604020202020204" pitchFamily="34" charset="0"/>
                       </a:endParaRPr>
                     </a:p>
                   </a:txBody>
@@ -7888,12 +7965,15 @@
                             <a:srgbClr val="000000"/>
                           </a:solidFill>
                           <a:effectLst/>
-                          <a:latin typeface="Helvetica Neue" panose="02000503000000020004" pitchFamily="2" charset="0"/>
+                          <a:latin typeface="Arial" panose="020B0604020202020204" pitchFamily="34" charset="0"/>
+                          <a:cs typeface="Arial" panose="020B0604020202020204" pitchFamily="34" charset="0"/>
                         </a:rPr>
                         <a:t>Очень сложна в настройке, требует большого объёма данных</a:t>
                       </a:r>
                       <a:endParaRPr lang="ru-RU" sz="2000" dirty="0">
                         <a:effectLst/>
+                        <a:latin typeface="Arial" panose="020B0604020202020204" pitchFamily="34" charset="0"/>
+                        <a:cs typeface="Arial" panose="020B0604020202020204" pitchFamily="34" charset="0"/>
                       </a:endParaRPr>
                     </a:p>
                   </a:txBody>
@@ -7951,22 +8031,15 @@
                             <a:srgbClr val="000000"/>
                           </a:solidFill>
                           <a:effectLst/>
-                          <a:latin typeface="Apple Color Emoji" pitchFamily="2" charset="0"/>
-                        </a:rPr>
-                        <a:t>✅</a:t>
-                      </a:r>
-                      <a:r>
-                        <a:rPr lang="ru-RU" sz="2000">
-                          <a:solidFill>
-                            <a:srgbClr val="000000"/>
-                          </a:solidFill>
-                          <a:effectLst/>
-                          <a:latin typeface="Helvetica Neue" panose="02000503000000020004" pitchFamily="2" charset="0"/>
-                        </a:rPr>
-                        <a:t> Да (с полным циклом)</a:t>
+                          <a:latin typeface="Arial" panose="020B0604020202020204" pitchFamily="34" charset="0"/>
+                          <a:cs typeface="Arial" panose="020B0604020202020204" pitchFamily="34" charset="0"/>
+                        </a:rPr>
+                        <a:t>✅ Да (с полным циклом)</a:t>
                       </a:r>
                       <a:endParaRPr lang="ru-RU" sz="2000">
                         <a:effectLst/>
+                        <a:latin typeface="Arial" panose="020B0604020202020204" pitchFamily="34" charset="0"/>
+                        <a:cs typeface="Arial" panose="020B0604020202020204" pitchFamily="34" charset="0"/>
                       </a:endParaRPr>
                     </a:p>
                   </a:txBody>
@@ -8031,12 +8104,15 @@
                             <a:srgbClr val="000000"/>
                           </a:solidFill>
                           <a:effectLst/>
-                          <a:latin typeface="Helvetica Neue" panose="02000503000000020004" pitchFamily="2" charset="0"/>
+                          <a:latin typeface="Arial" panose="020B0604020202020204" pitchFamily="34" charset="0"/>
+                          <a:cs typeface="Arial" panose="020B0604020202020204" pitchFamily="34" charset="0"/>
                         </a:rPr>
                         <a:t>PatchTST</a:t>
                       </a:r>
                       <a:endParaRPr lang="en" sz="2000">
                         <a:effectLst/>
+                        <a:latin typeface="Arial" panose="020B0604020202020204" pitchFamily="34" charset="0"/>
+                        <a:cs typeface="Arial" panose="020B0604020202020204" pitchFamily="34" charset="0"/>
                       </a:endParaRPr>
                     </a:p>
                   </a:txBody>
@@ -8096,12 +8172,15 @@
                             <a:srgbClr val="000000"/>
                           </a:solidFill>
                           <a:effectLst/>
-                          <a:latin typeface="Helvetica Neue" panose="02000503000000020004" pitchFamily="2" charset="0"/>
+                          <a:latin typeface="Arial" panose="020B0604020202020204" pitchFamily="34" charset="0"/>
+                          <a:cs typeface="Arial" panose="020B0604020202020204" pitchFamily="34" charset="0"/>
                         </a:rPr>
                         <a:t>Простая, эффективная, устойчивая к шуму, масштабируется на 100+ рядов</a:t>
                       </a:r>
                       <a:endParaRPr lang="ru-RU" sz="2000">
                         <a:effectLst/>
+                        <a:latin typeface="Arial" panose="020B0604020202020204" pitchFamily="34" charset="0"/>
+                        <a:cs typeface="Arial" panose="020B0604020202020204" pitchFamily="34" charset="0"/>
                       </a:endParaRPr>
                     </a:p>
                   </a:txBody>
@@ -8159,7 +8238,8 @@
                             <a:srgbClr val="000000"/>
                           </a:solidFill>
                           <a:effectLst/>
-                          <a:latin typeface="Helvetica Neue" panose="02000503000000020004" pitchFamily="2" charset="0"/>
+                          <a:latin typeface="Arial" panose="020B0604020202020204" pitchFamily="34" charset="0"/>
+                          <a:cs typeface="Arial" panose="020B0604020202020204" pitchFamily="34" charset="0"/>
                         </a:rPr>
                         <a:t>Новая, требует </a:t>
                       </a:r>
@@ -8169,7 +8249,8 @@
                             <a:srgbClr val="000000"/>
                           </a:solidFill>
                           <a:effectLst/>
-                          <a:latin typeface="Helvetica Neue" panose="02000503000000020004" pitchFamily="2" charset="0"/>
+                          <a:latin typeface="Arial" panose="020B0604020202020204" pitchFamily="34" charset="0"/>
+                          <a:cs typeface="Arial" panose="020B0604020202020204" pitchFamily="34" charset="0"/>
                         </a:rPr>
                         <a:t>GPU </a:t>
                       </a:r>
@@ -8179,12 +8260,15 @@
                             <a:srgbClr val="000000"/>
                           </a:solidFill>
                           <a:effectLst/>
-                          <a:latin typeface="Helvetica Neue" panose="02000503000000020004" pitchFamily="2" charset="0"/>
+                          <a:latin typeface="Arial" panose="020B0604020202020204" pitchFamily="34" charset="0"/>
+                          <a:cs typeface="Arial" panose="020B0604020202020204" pitchFamily="34" charset="0"/>
                         </a:rPr>
                         <a:t>для больших данных</a:t>
                       </a:r>
                       <a:endParaRPr lang="ru-RU" sz="2000" dirty="0">
                         <a:effectLst/>
+                        <a:latin typeface="Arial" panose="020B0604020202020204" pitchFamily="34" charset="0"/>
+                        <a:cs typeface="Arial" panose="020B0604020202020204" pitchFamily="34" charset="0"/>
                       </a:endParaRPr>
                     </a:p>
                   </a:txBody>
@@ -8242,19 +8326,10 @@
                             <a:srgbClr val="000000"/>
                           </a:solidFill>
                           <a:effectLst/>
-                          <a:latin typeface="Apple Color Emoji" pitchFamily="2" charset="0"/>
-                        </a:rPr>
-                        <a:t>✅</a:t>
-                      </a:r>
-                      <a:r>
-                        <a:rPr lang="ru-RU" sz="2000" dirty="0">
-                          <a:solidFill>
-                            <a:srgbClr val="000000"/>
-                          </a:solidFill>
-                          <a:effectLst/>
-                          <a:latin typeface="Helvetica Neue" panose="02000503000000020004" pitchFamily="2" charset="0"/>
-                        </a:rPr>
-                        <a:t> Да (</a:t>
+                          <a:latin typeface="Arial" panose="020B0604020202020204" pitchFamily="34" charset="0"/>
+                          <a:cs typeface="Arial" panose="020B0604020202020204" pitchFamily="34" charset="0"/>
+                        </a:rPr>
+                        <a:t>✅ Да (</a:t>
                       </a:r>
                       <a:r>
                         <a:rPr lang="en" sz="2000" dirty="0">
@@ -8262,12 +8337,15 @@
                             <a:srgbClr val="000000"/>
                           </a:solidFill>
                           <a:effectLst/>
-                          <a:latin typeface="Helvetica Neue" panose="02000503000000020004" pitchFamily="2" charset="0"/>
+                          <a:latin typeface="Arial" panose="020B0604020202020204" pitchFamily="34" charset="0"/>
+                          <a:cs typeface="Arial" panose="020B0604020202020204" pitchFamily="34" charset="0"/>
                         </a:rPr>
                         <a:t>fine-tuning)</a:t>
                       </a:r>
                       <a:endParaRPr lang="en" sz="2000" dirty="0">
                         <a:effectLst/>
+                        <a:latin typeface="Arial" panose="020B0604020202020204" pitchFamily="34" charset="0"/>
+                        <a:cs typeface="Arial" panose="020B0604020202020204" pitchFamily="34" charset="0"/>
                       </a:endParaRPr>
                     </a:p>
                   </a:txBody>
@@ -8332,12 +8410,15 @@
                             <a:srgbClr val="000000"/>
                           </a:solidFill>
                           <a:effectLst/>
-                          <a:latin typeface="Helvetica Neue" panose="02000503000000020004" pitchFamily="2" charset="0"/>
+                          <a:latin typeface="Arial" panose="020B0604020202020204" pitchFamily="34" charset="0"/>
+                          <a:cs typeface="Arial" panose="020B0604020202020204" pitchFamily="34" charset="0"/>
                         </a:rPr>
                         <a:t>TimeGPT / Informer / Autoformer / Chronos</a:t>
                       </a:r>
                       <a:endParaRPr lang="en" sz="2000">
                         <a:effectLst/>
+                        <a:latin typeface="Arial" panose="020B0604020202020204" pitchFamily="34" charset="0"/>
+                        <a:cs typeface="Arial" panose="020B0604020202020204" pitchFamily="34" charset="0"/>
                       </a:endParaRPr>
                     </a:p>
                   </a:txBody>
@@ -8397,7 +8478,8 @@
                             <a:srgbClr val="000000"/>
                           </a:solidFill>
                           <a:effectLst/>
-                          <a:latin typeface="Helvetica Neue" panose="02000503000000020004" pitchFamily="2" charset="0"/>
+                          <a:latin typeface="Arial" panose="020B0604020202020204" pitchFamily="34" charset="0"/>
+                          <a:cs typeface="Arial" panose="020B0604020202020204" pitchFamily="34" charset="0"/>
                         </a:rPr>
                         <a:t>Предобучена</a:t>
                       </a:r>
@@ -8407,7 +8489,8 @@
                             <a:srgbClr val="000000"/>
                           </a:solidFill>
                           <a:effectLst/>
-                          <a:latin typeface="Helvetica Neue" panose="02000503000000020004" pitchFamily="2" charset="0"/>
+                          <a:latin typeface="Arial" panose="020B0604020202020204" pitchFamily="34" charset="0"/>
+                          <a:cs typeface="Arial" panose="020B0604020202020204" pitchFamily="34" charset="0"/>
                         </a:rPr>
                         <a:t> на миллионах временных рядов, </a:t>
                       </a:r>
@@ -8417,7 +8500,8 @@
                             <a:srgbClr val="000000"/>
                           </a:solidFill>
                           <a:effectLst/>
-                          <a:latin typeface="Helvetica Neue" panose="02000503000000020004" pitchFamily="2" charset="0"/>
+                          <a:latin typeface="Arial" panose="020B0604020202020204" pitchFamily="34" charset="0"/>
+                          <a:cs typeface="Arial" panose="020B0604020202020204" pitchFamily="34" charset="0"/>
                         </a:rPr>
                         <a:t>zero-shot </a:t>
                       </a:r>
@@ -8427,12 +8511,15 @@
                             <a:srgbClr val="000000"/>
                           </a:solidFill>
                           <a:effectLst/>
-                          <a:latin typeface="Helvetica Neue" panose="02000503000000020004" pitchFamily="2" charset="0"/>
+                          <a:latin typeface="Arial" panose="020B0604020202020204" pitchFamily="34" charset="0"/>
+                          <a:cs typeface="Arial" panose="020B0604020202020204" pitchFamily="34" charset="0"/>
                         </a:rPr>
                         <a:t>прогнозирование, масштабируема</a:t>
                       </a:r>
                       <a:endParaRPr lang="ru-RU" sz="2000" dirty="0">
                         <a:effectLst/>
+                        <a:latin typeface="Arial" panose="020B0604020202020204" pitchFamily="34" charset="0"/>
+                        <a:cs typeface="Arial" panose="020B0604020202020204" pitchFamily="34" charset="0"/>
                       </a:endParaRPr>
                     </a:p>
                   </a:txBody>
@@ -8490,7 +8577,8 @@
                             <a:srgbClr val="000000"/>
                           </a:solidFill>
                           <a:effectLst/>
-                          <a:latin typeface="Helvetica Neue" panose="02000503000000020004" pitchFamily="2" charset="0"/>
+                          <a:latin typeface="Arial" panose="020B0604020202020204" pitchFamily="34" charset="0"/>
+                          <a:cs typeface="Arial" panose="020B0604020202020204" pitchFamily="34" charset="0"/>
                         </a:rPr>
                         <a:t>Ограниченный доступ (</a:t>
                       </a:r>
@@ -8500,7 +8588,8 @@
                             <a:srgbClr val="000000"/>
                           </a:solidFill>
                           <a:effectLst/>
-                          <a:latin typeface="Helvetica Neue" panose="02000503000000020004" pitchFamily="2" charset="0"/>
+                          <a:latin typeface="Arial" panose="020B0604020202020204" pitchFamily="34" charset="0"/>
+                          <a:cs typeface="Arial" panose="020B0604020202020204" pitchFamily="34" charset="0"/>
                         </a:rPr>
                         <a:t>TimeGPT — API), </a:t>
                       </a:r>
@@ -8510,12 +8599,15 @@
                             <a:srgbClr val="000000"/>
                           </a:solidFill>
                           <a:effectLst/>
-                          <a:latin typeface="Helvetica Neue" panose="02000503000000020004" pitchFamily="2" charset="0"/>
+                          <a:latin typeface="Arial" panose="020B0604020202020204" pitchFamily="34" charset="0"/>
+                          <a:cs typeface="Arial" panose="020B0604020202020204" pitchFamily="34" charset="0"/>
                         </a:rPr>
                         <a:t>высокая стоимость, "чёрный ящик"</a:t>
                       </a:r>
                       <a:endParaRPr lang="ru-RU" sz="2000">
                         <a:effectLst/>
+                        <a:latin typeface="Arial" panose="020B0604020202020204" pitchFamily="34" charset="0"/>
+                        <a:cs typeface="Arial" panose="020B0604020202020204" pitchFamily="34" charset="0"/>
                       </a:endParaRPr>
                     </a:p>
                   </a:txBody>
@@ -8573,9 +8665,21 @@
                             <a:srgbClr val="000000"/>
                           </a:solidFill>
                           <a:effectLst/>
-                          <a:latin typeface="Apple Color Emoji" pitchFamily="2" charset="0"/>
-                        </a:rPr>
-                        <a:t>⚠️</a:t>
+                          <a:latin typeface="Arial" panose="020B0604020202020204" pitchFamily="34" charset="0"/>
+                          <a:cs typeface="Arial" panose="020B0604020202020204" pitchFamily="34" charset="0"/>
+                        </a:rPr>
+                        <a:t>⚠️ Нет (только </a:t>
+                      </a:r>
+                      <a:r>
+                        <a:rPr lang="en" sz="2000" dirty="0">
+                          <a:solidFill>
+                            <a:srgbClr val="000000"/>
+                          </a:solidFill>
+                          <a:effectLst/>
+                          <a:latin typeface="Arial" panose="020B0604020202020204" pitchFamily="34" charset="0"/>
+                          <a:cs typeface="Arial" panose="020B0604020202020204" pitchFamily="34" charset="0"/>
+                        </a:rPr>
+                        <a:t>inference </a:t>
                       </a:r>
                       <a:r>
                         <a:rPr lang="ru-RU" sz="2000" dirty="0">
@@ -8583,9 +8687,10 @@
                             <a:srgbClr val="000000"/>
                           </a:solidFill>
                           <a:effectLst/>
-                          <a:latin typeface="Helvetica Neue" panose="02000503000000020004" pitchFamily="2" charset="0"/>
-                        </a:rPr>
-                        <a:t> Нет (только </a:t>
+                          <a:latin typeface="Arial" panose="020B0604020202020204" pitchFamily="34" charset="0"/>
+                          <a:cs typeface="Arial" panose="020B0604020202020204" pitchFamily="34" charset="0"/>
+                        </a:rPr>
+                        <a:t>или </a:t>
                       </a:r>
                       <a:r>
                         <a:rPr lang="en" sz="2000" dirty="0">
@@ -8593,9 +8698,10 @@
                             <a:srgbClr val="000000"/>
                           </a:solidFill>
                           <a:effectLst/>
-                          <a:latin typeface="Helvetica Neue" panose="02000503000000020004" pitchFamily="2" charset="0"/>
-                        </a:rPr>
-                        <a:t>inference </a:t>
+                          <a:latin typeface="Arial" panose="020B0604020202020204" pitchFamily="34" charset="0"/>
+                          <a:cs typeface="Arial" panose="020B0604020202020204" pitchFamily="34" charset="0"/>
+                        </a:rPr>
+                        <a:t>fine-tuning, </a:t>
                       </a:r>
                       <a:r>
                         <a:rPr lang="ru-RU" sz="2000" dirty="0">
@@ -8603,32 +8709,15 @@
                             <a:srgbClr val="000000"/>
                           </a:solidFill>
                           <a:effectLst/>
-                          <a:latin typeface="Helvetica Neue" panose="02000503000000020004" pitchFamily="2" charset="0"/>
-                        </a:rPr>
-                        <a:t>или </a:t>
-                      </a:r>
-                      <a:r>
-                        <a:rPr lang="en" sz="2000" dirty="0">
-                          <a:solidFill>
-                            <a:srgbClr val="000000"/>
-                          </a:solidFill>
-                          <a:effectLst/>
-                          <a:latin typeface="Helvetica Neue" panose="02000503000000020004" pitchFamily="2" charset="0"/>
-                        </a:rPr>
-                        <a:t>fine-tuning, </a:t>
-                      </a:r>
-                      <a:r>
-                        <a:rPr lang="ru-RU" sz="2000" dirty="0">
-                          <a:solidFill>
-                            <a:srgbClr val="000000"/>
-                          </a:solidFill>
-                          <a:effectLst/>
-                          <a:latin typeface="Helvetica Neue" panose="02000503000000020004" pitchFamily="2" charset="0"/>
+                          <a:latin typeface="Arial" panose="020B0604020202020204" pitchFamily="34" charset="0"/>
+                          <a:cs typeface="Arial" panose="020B0604020202020204" pitchFamily="34" charset="0"/>
                         </a:rPr>
                         <a:t>если доступно)</a:t>
                       </a:r>
                       <a:endParaRPr lang="ru-RU" sz="2000" dirty="0">
                         <a:effectLst/>
+                        <a:latin typeface="Arial" panose="020B0604020202020204" pitchFamily="34" charset="0"/>
+                        <a:cs typeface="Arial" panose="020B0604020202020204" pitchFamily="34" charset="0"/>
                       </a:endParaRPr>
                     </a:p>
                   </a:txBody>
